--- a/presentation/Trentingrana_Captioning_EN.pptx
+++ b/presentation/Trentingrana_Captioning_EN.pptx
@@ -8,38 +8,38 @@
     <p:notesMasterId r:id="rId34"/>
   </p:notesMasterIdLst>
   <p:sldIdLst>
-    <p:sldId id="256" r:id="rId2"/>
-    <p:sldId id="257" r:id="rId3"/>
-    <p:sldId id="258" r:id="rId4"/>
-    <p:sldId id="259" r:id="rId5"/>
+    <p:sldId id="317" r:id="rId2"/>
+    <p:sldId id="318" r:id="rId3"/>
+    <p:sldId id="319" r:id="rId4"/>
+    <p:sldId id="290" r:id="rId5"/>
     <p:sldId id="260" r:id="rId6"/>
-    <p:sldId id="261" r:id="rId7"/>
-    <p:sldId id="262" r:id="rId8"/>
-    <p:sldId id="263" r:id="rId9"/>
-    <p:sldId id="264" r:id="rId10"/>
-    <p:sldId id="265" r:id="rId11"/>
-    <p:sldId id="266" r:id="rId12"/>
-    <p:sldId id="267" r:id="rId13"/>
-    <p:sldId id="268" r:id="rId14"/>
-    <p:sldId id="269" r:id="rId15"/>
-    <p:sldId id="270" r:id="rId16"/>
-    <p:sldId id="271" r:id="rId17"/>
-    <p:sldId id="272" r:id="rId18"/>
-    <p:sldId id="273" r:id="rId19"/>
-    <p:sldId id="274" r:id="rId20"/>
-    <p:sldId id="275" r:id="rId21"/>
-    <p:sldId id="276" r:id="rId22"/>
-    <p:sldId id="277" r:id="rId23"/>
-    <p:sldId id="278" r:id="rId24"/>
-    <p:sldId id="279" r:id="rId25"/>
-    <p:sldId id="280" r:id="rId26"/>
-    <p:sldId id="281" r:id="rId27"/>
-    <p:sldId id="282" r:id="rId28"/>
-    <p:sldId id="283" r:id="rId29"/>
-    <p:sldId id="284" r:id="rId30"/>
-    <p:sldId id="285" r:id="rId31"/>
-    <p:sldId id="286" r:id="rId32"/>
-    <p:sldId id="287" r:id="rId33"/>
+    <p:sldId id="320" r:id="rId7"/>
+    <p:sldId id="321" r:id="rId8"/>
+    <p:sldId id="322" r:id="rId9"/>
+    <p:sldId id="323" r:id="rId10"/>
+    <p:sldId id="324" r:id="rId11"/>
+    <p:sldId id="325" r:id="rId12"/>
+    <p:sldId id="326" r:id="rId13"/>
+    <p:sldId id="298" r:id="rId14"/>
+    <p:sldId id="327" r:id="rId15"/>
+    <p:sldId id="328" r:id="rId16"/>
+    <p:sldId id="329" r:id="rId17"/>
+    <p:sldId id="330" r:id="rId18"/>
+    <p:sldId id="331" r:id="rId19"/>
+    <p:sldId id="332" r:id="rId20"/>
+    <p:sldId id="333" r:id="rId21"/>
+    <p:sldId id="334" r:id="rId22"/>
+    <p:sldId id="335" r:id="rId23"/>
+    <p:sldId id="336" r:id="rId24"/>
+    <p:sldId id="337" r:id="rId25"/>
+    <p:sldId id="309" r:id="rId26"/>
+    <p:sldId id="338" r:id="rId27"/>
+    <p:sldId id="339" r:id="rId28"/>
+    <p:sldId id="340" r:id="rId29"/>
+    <p:sldId id="341" r:id="rId30"/>
+    <p:sldId id="342" r:id="rId31"/>
+    <p:sldId id="343" r:id="rId32"/>
+    <p:sldId id="344" r:id="rId33"/>
   </p:sldIdLst>
   <p:sldSz cx="12192000" cy="6858000"/>
   <p:notesSz cx="6858000" cy="9144000"/>
@@ -1918,61 +1918,77 @@
           <a:lstStyle/>
           <a:p>
             <a:r>
+              <a:rPr dirty="0"/>
               <a:t>Good morning everyone, and welcome. Today I'm presenting our project on the sensory captioning of</a:t>
             </a:r>
           </a:p>
           <a:p>
             <a:r>
-              <a:t>Trentingrana cheese, developed within the AI4FQC initiative — Artificial Intelligence for Food</a:t>
-            </a:r>
-          </a:p>
-          <a:p>
-            <a:r>
-              <a:t>Quality Control, Project 07.</a:t>
-            </a:r>
-          </a:p>
-          <a:p>
-            <a:r>
+              <a:rPr dirty="0" err="1"/>
+              <a:t>Trentingrana</a:t>
+            </a:r>
+            <a:r>
+              <a:rPr dirty="0"/>
+              <a:t> cheese, developed within the AI4FQC initiative (Artificial Intelligence for Food</a:t>
+            </a:r>
+          </a:p>
+          <a:p>
+            <a:r>
+              <a:rPr dirty="0"/>
+              <a:t>Quality Control), Project 07.</a:t>
+            </a:r>
+          </a:p>
+          <a:p>
+            <a:r>
+              <a:rPr dirty="0"/>
               <a:t>The starting idea is simple to state but surprisingly rich to deliver: automatically generate</a:t>
             </a:r>
           </a:p>
           <a:p>
             <a:r>
+              <a:rPr dirty="0"/>
               <a:t>sensory descriptions, in Italian, from images of grana cheese cross-sections. In other words,</a:t>
             </a:r>
           </a:p>
           <a:p>
             <a:r>
+              <a:rPr dirty="0"/>
               <a:t>teach a model to "tell the story" of a cheese by looking at a slice of it.</a:t>
             </a:r>
           </a:p>
           <a:p>
             <a:r>
-              <a:t>The work has two pillars: building the dataset — the most original and demanding part, to which</a:t>
-            </a:r>
-          </a:p>
-          <a:p>
-            <a:r>
-              <a:t>I'll devote roughly 70% of the time — and comparing three conceptually different encoder-decoder</a:t>
-            </a:r>
-          </a:p>
-          <a:p>
-            <a:r>
+              <a:rPr dirty="0"/>
+              <a:t>The work has two pillars: building the dataset, the most original and demanding part, to which</a:t>
+            </a:r>
+          </a:p>
+          <a:p>
+            <a:r>
+              <a:rPr dirty="0"/>
+              <a:t>I'll devote roughly 70% of the time, and comparing three conceptually different encoder-decoder</a:t>
+            </a:r>
+          </a:p>
+          <a:p>
+            <a:r>
+              <a:rPr dirty="0"/>
               <a:t>architectures. We'll look at concrete numbers: 38 thousand image-caption pairs, three models,</a:t>
             </a:r>
           </a:p>
           <a:p>
             <a:r>
+              <a:rPr dirty="0"/>
               <a:t>seven sensory attributes, and above all a clear scientific result about what truly drives a model</a:t>
             </a:r>
           </a:p>
           <a:p>
             <a:r>
+              <a:rPr dirty="0"/>
               <a:t>to actually use the image.</a:t>
             </a:r>
           </a:p>
           <a:p>
             <a:r>
+              <a:rPr dirty="0"/>
               <a:t>Let's start with the context.</a:t>
             </a:r>
           </a:p>
@@ -2158,66 +2174,151 @@
           <a:lstStyle/>
           <a:p>
             <a:r>
+              <a:rPr dirty="0"/>
               <a:t>Stages 2 and 3 build a controlled vocabulary for each of the seven attributes: the most frequent</a:t>
             </a:r>
           </a:p>
           <a:p>
             <a:r>
-              <a:t>lemmas and bigrams, with a tailor-made Italian lemmatisation.</a:t>
-            </a:r>
-          </a:p>
-          <a:p>
-            <a:r>
+              <a:rPr dirty="0"/>
+              <a:t>lemmas and bigrams, with a tailor-made Italian </a:t>
+            </a:r>
+            <a:r>
+              <a:rPr dirty="0" err="1"/>
+              <a:t>lemmatisation</a:t>
+            </a:r>
+            <a:r>
+              <a:rPr dirty="0"/>
+              <a:t>.</a:t>
+            </a:r>
+          </a:p>
+          <a:p>
+            <a:r>
+              <a:rPr dirty="0"/>
               <a:t>Why not use a standard NLP library? Because on the sensory lexicon they err systematically: they</a:t>
             </a:r>
           </a:p>
           <a:p>
             <a:r>
-              <a:t>turn "panna" (cream) into "panno" (cloth), "latte" (milk) into "latto". And above all they include</a:t>
-            </a:r>
-          </a:p>
-          <a:p>
-            <a:r>
-              <a:t>among the stopwords words that here are informative: "molto", "poco", "leggermente" — very, little,</a:t>
-            </a:r>
-          </a:p>
-          <a:p>
-            <a:r>
-              <a:t>slightly — are sensory intensifiers, not noise. So we wrote a deterministic lemmatiser, with maps</a:t>
-            </a:r>
-          </a:p>
-          <a:p>
-            <a:r>
+              <a:rPr dirty="0"/>
+              <a:t>turn "panna" (cream) into "</a:t>
+            </a:r>
+            <a:r>
+              <a:rPr dirty="0" err="1"/>
+              <a:t>panno</a:t>
+            </a:r>
+            <a:r>
+              <a:rPr dirty="0"/>
+              <a:t>" (cloth), "latte" (milk) into "</a:t>
+            </a:r>
+            <a:r>
+              <a:rPr dirty="0" err="1"/>
+              <a:t>latto</a:t>
+            </a:r>
+            <a:r>
+              <a:rPr dirty="0"/>
+              <a:t>". And above all they include</a:t>
+            </a:r>
+          </a:p>
+          <a:p>
+            <a:r>
+              <a:rPr dirty="0"/>
+              <a:t>among the </a:t>
+            </a:r>
+            <a:r>
+              <a:rPr dirty="0" err="1"/>
+              <a:t>stopwords</a:t>
+            </a:r>
+            <a:r>
+              <a:rPr dirty="0"/>
+              <a:t> words that here are informative: "molto", "poco", "</a:t>
+            </a:r>
+            <a:r>
+              <a:rPr dirty="0" err="1"/>
+              <a:t>leggermente</a:t>
+            </a:r>
+            <a:r>
+              <a:rPr dirty="0"/>
+              <a:t>" — very, little,</a:t>
+            </a:r>
+          </a:p>
+          <a:p>
+            <a:r>
+              <a:rPr lang="it-IT" dirty="0"/>
+              <a:t>S</a:t>
+            </a:r>
+            <a:r>
+              <a:rPr dirty="0"/>
+              <a:t>lightly</a:t>
+            </a:r>
+            <a:r>
+              <a:rPr lang="it-IT" dirty="0"/>
+              <a:t>, </a:t>
+            </a:r>
+            <a:r>
+              <a:rPr dirty="0"/>
+              <a:t>are sensory intensifiers, not noise. So we wrote a deterministic </a:t>
+            </a:r>
+            <a:r>
+              <a:rPr dirty="0" err="1"/>
+              <a:t>lemmatiser</a:t>
+            </a:r>
+            <a:r>
+              <a:rPr dirty="0"/>
+              <a:t>, with maps</a:t>
+            </a:r>
+          </a:p>
+          <a:p>
+            <a:r>
+              <a:rPr dirty="0"/>
               <a:t>of abbreviations and typos and a singular-plural merge that fires only when both forms are attested</a:t>
             </a:r>
           </a:p>
           <a:p>
             <a:r>
+              <a:rPr dirty="0"/>
               <a:t>in the corpus.</a:t>
             </a:r>
           </a:p>
           <a:p>
             <a:r>
+              <a:rPr dirty="0"/>
               <a:t>In the chart you see the vocabulary breadth per attribute: paste structure is the richest, with</a:t>
             </a:r>
           </a:p>
           <a:p>
             <a:r>
+              <a:rPr dirty="0"/>
               <a:t>nearly 800 lemmas and over 40 thousand tokens; rind thickness is the poorest, consistent with its</a:t>
             </a:r>
           </a:p>
           <a:p>
             <a:r>
+              <a:rPr dirty="0"/>
               <a:t>lower descriptive variety. The vocabulary serves two purposes: as a basis for the audit, and as a</a:t>
             </a:r>
-          </a:p>
-          <a:p>
-            <a:r>
-              <a:t>stylistic anchor in the LLM prompt — not as a closed dictionary, since the model already speaks</a:t>
-            </a:r>
-          </a:p>
-          <a:p>
-            <a:r>
+            <a:r>
+              <a:rPr lang="it-IT" dirty="0"/>
+              <a:t> </a:t>
+            </a:r>
+            <a:r>
+              <a:rPr dirty="0"/>
+              <a:t>stylistic anchor in the LLM prompt</a:t>
+            </a:r>
+            <a:r>
+              <a:rPr lang="it-IT" dirty="0"/>
+              <a:t>,</a:t>
+            </a:r>
+            <a:r>
+              <a:rPr dirty="0"/>
+              <a:t> not as a closed dictionary, since the model already speaks</a:t>
+            </a:r>
+            <a:r>
+              <a:rPr lang="it-IT" dirty="0"/>
+              <a:t> </a:t>
+            </a:r>
+            <a:r>
+              <a:rPr dirty="0"/>
               <a:t>Italian.</a:t>
             </a:r>
           </a:p>
@@ -2308,7 +2409,7 @@
           </a:p>
           <a:p>
             <a:r>
-              <a:t>everything to millimetres — with a heuristic reading values below 5 as centimetres — and assigns a</a:t>
+              <a:t>everything to millimetres, with a heuristic reading values below 5 as centimetres, and assigns a</a:t>
             </a:r>
           </a:p>
           <a:p>
@@ -2703,7 +2804,7 @@
           </a:p>
           <a:p>
             <a:r>
-              <a:t>The total LLM cost of the entire project — pilot plus batch — was 5 dollars and 60 cents. It is</a:t>
+              <a:t>The total LLM cost of the entire project, pilot plus batch, was 5 dollars and 60 cents. It is</a:t>
             </a:r>
           </a:p>
           <a:p>
@@ -2903,7 +3004,7 @@
           </a:p>
           <a:p>
             <a:r>
-              <a:t>NON_DESCRITTO — i.e. "there's no description here" — actually contained at least one lemma from the</a:t>
+              <a:t>NON_DESCRITTO, i.e. "there's no description here", actually contained at least one lemma from the</a:t>
             </a:r>
           </a:p>
           <a:p>
@@ -3253,12 +3354,12 @@
           </a:p>
           <a:p>
             <a:r>
-              <a:t>of expertise, but it has three limits: it is slow, it is subjective — two panelists describe the</a:t>
-            </a:r>
-          </a:p>
-          <a:p>
-            <a:r>
-              <a:t>same wheel with different words — and it is hard to scale when there are thousands of wheels.</a:t>
+              <a:t>of expertise, but it has three limits: it is slow, it is subjective, two panelists describe the</a:t>
+            </a:r>
+          </a:p>
+          <a:p>
+            <a:r>
+              <a:t>same wheel with different words, and it is hard to scale when there are thousands of wheels.</a:t>
             </a:r>
           </a:p>
           <a:p>
@@ -3283,7 +3384,7 @@
           </a:p>
           <a:p>
             <a:r>
-              <a:t>we'll see, some attributes — the visible ones — lend themselves far better than others, and this</a:t>
+              <a:t>we'll see, some attributes, the visible ones, lend themselves far better than others, and this</a:t>
             </a:r>
           </a:p>
           <a:p>
@@ -3418,7 +3519,7 @@
           </a:p>
           <a:p>
             <a:r>
-              <a:t>is also the main limitation — and the main pointer to future work.</a:t>
+              <a:t>is also the main limitation, and the main pointer to future work.</a:t>
             </a:r>
           </a:p>
         </p:txBody>
@@ -3528,7 +3629,7 @@
           </a:p>
           <a:p>
             <a:r>
-              <a:t>The training curves are healthy across all three models — no overfitting, no NaN, no collapse — so</a:t>
+              <a:t>The training curves are healthy across all three models, no overfitting, no NaN, no collapse, so</a:t>
             </a:r>
           </a:p>
           <a:p>
@@ -3623,7 +3724,7 @@
           </a:p>
           <a:p>
             <a:r>
-              <a:t>dimension. The chart shows BLEU-4 per attribute, compared with the most_frequent baseline — the one</a:t>
+              <a:t>dimension. The chart shows BLEU-4 per attribute, compared with the most_frequent baseline, the one</a:t>
             </a:r>
           </a:p>
           <a:p>
@@ -3643,7 +3744,7 @@
           </a:p>
           <a:p>
             <a:r>
-              <a:t>colour. On the other three — aroma, taste and rind thickness — they tie or lose.</a:t>
+              <a:t>colour. On the other three, aroma, taste and rind thickness, they tie or lose.</a:t>
             </a:r>
           </a:p>
           <a:p>
@@ -3663,7 +3764,7 @@
           </a:p>
           <a:p>
             <a:r>
-              <a:t>model — and we'll prove it shortly with the shuffle test, which on thickness confirms m3 and m6 do</a:t>
+              <a:t>model, and we'll prove it shortly with the shuffle test, which on thickness confirms m3 and m6 do</a:t>
             </a:r>
           </a:p>
           <a:p>
@@ -3758,12 +3859,12 @@
           </a:p>
           <a:p>
             <a:r>
-              <a:t>The chart compares the three models on five metrics. Two observations. First, m6 — the ViT with</a:t>
-            </a:r>
-          </a:p>
-          <a:p>
-            <a:r>
-              <a:t>GePpeTto — wins narrowly almost everywhere: it's first on BLEU-1, BLEU-4 and ROUGE-L, and</a:t>
+              <a:t>The chart compares the three models on five metrics. Two observations. First, m6, the ViT with</a:t>
+            </a:r>
+          </a:p>
+          <a:p>
+            <a:r>
+              <a:t>GePpeTto, wins narrowly almost everywhere: it's first on BLEU-1, BLEU-4 and ROUGE-L, and</a:t>
             </a:r>
           </a:p>
           <a:p>
@@ -3873,7 +3974,7 @@
           </a:p>
           <a:p>
             <a:r>
-              <a:t>You'll have noticed that the per-attribute numbers — BLEU-4 from 0.33 to 0.47 — are much higher than</a:t>
+              <a:t>You'll have noticed that the per-attribute numbers, BLEU-4 from 0.33 to 0.47, are much higher than</a:t>
             </a:r>
           </a:p>
           <a:p>
@@ -3918,7 +4019,7 @@
           </a:p>
           <a:p>
             <a:r>
-              <a:t>numbers as if on the same scale would be a mistake — and it's the kind of subtlety that separates an</a:t>
+              <a:t>numbers as if on the same scale would be a mistake, and it's the kind of subtlety that separates an</a:t>
             </a:r>
           </a:p>
           <a:p>
@@ -4148,12 +4249,12 @@
           </a:p>
           <a:p>
             <a:r>
-              <a:t>Comparing m3 with m6, which isolates the decoder: they produce different outputs — they never give</a:t>
-            </a:r>
-          </a:p>
-          <a:p>
-            <a:r>
-              <a:t>the same caption for the same image — yet they have exactly the same image-conditioning profile. The</a:t>
+              <a:t>Comparing m3 with m6, which isolates the decoder: they produce different outputs, they never give</a:t>
+            </a:r>
+          </a:p>
+          <a:p>
+            <a:r>
+              <a:t>the same caption for the same image, yet they have exactly the same image-conditioning profile. The</a:t>
             </a:r>
           </a:p>
           <a:p>
@@ -4268,12 +4369,12 @@
           </a:p>
           <a:p>
             <a:r>
-              <a:t>The text metrics compare the prediction with the textual reference: besides BLEU, METEOR — which is</a:t>
-            </a:r>
-          </a:p>
-          <a:p>
-            <a:r>
-              <a:t>more lenient because it aligns with stemming and synonyms — ROUGE-L, which rewards word order, and</a:t>
+              <a:t>The text metrics compare the prediction with the textual reference: besides BLEU, METEOR, which is</a:t>
+            </a:r>
+          </a:p>
+          <a:p>
+            <a:r>
+              <a:t>more lenient because it aligns with stemming and synonyms, ROUGE-L, which rewards word order, and</a:t>
             </a:r>
           </a:p>
           <a:p>
@@ -4393,7 +4494,7 @@
           </a:p>
           <a:p>
             <a:r>
-              <a:t>0.37, then the trained models rising clearly — m1 at 0.59, m3 at 0.65, m6 at 0.70. CIDEr orders the</a:t>
+              <a:t>0.37, then the trained models rising clearly: m1 at 0.59, m3 at 0.65, m6 at 0.70. CIDEr orders the</a:t>
             </a:r>
           </a:p>
           <a:p>
@@ -4523,7 +4624,7 @@
           </a:p>
           <a:p>
             <a:r>
-              <a:t>most_frequent — the one that always fires the same sentence ignoring the image. The gap is below</a:t>
+              <a:t>most_frequent, the one that always fires the same sentence ignoring the image. The gap is below</a:t>
             </a:r>
           </a:p>
           <a:p>
@@ -4548,7 +4649,7 @@
           </a:p>
           <a:p>
             <a:r>
-              <a:t>colour and structure — the visual attributes — get higher scores, while aroma, taste and smell stay</a:t>
+              <a:t>colour and structure, the visual attributes, get higher scores, while aroma, taste and smell stay</a:t>
             </a:r>
           </a:p>
           <a:p>
@@ -4633,56 +4734,83 @@
           <a:lstStyle/>
           <a:p>
             <a:r>
-              <a:t>These are the seven sensory dimensions the panel rates for each wheel: paste colour, texture,</a:t>
-            </a:r>
-          </a:p>
-          <a:p>
-            <a:r>
+              <a:rPr dirty="0"/>
+              <a:t>These are the seven sensory dimensions the panel rates for each wheel: paste </a:t>
+            </a:r>
+            <a:r>
+              <a:rPr dirty="0" err="1"/>
+              <a:t>colour</a:t>
+            </a:r>
+            <a:r>
+              <a:rPr dirty="0"/>
+              <a:t>, texture,</a:t>
+            </a:r>
+          </a:p>
+          <a:p>
+            <a:r>
+              <a:rPr dirty="0"/>
               <a:t>paste structure, rind thickness, smell, aroma and taste.</a:t>
             </a:r>
           </a:p>
           <a:p>
             <a:r>
+              <a:rPr dirty="0"/>
               <a:t>Please keep in mind a distinction that will become central in the second part. Three attributes —</a:t>
             </a:r>
           </a:p>
           <a:p>
             <a:r>
-              <a:t>paste colour, texture and paste structure — are intrinsically visual: they can be read from the</a:t>
-            </a:r>
-          </a:p>
-          <a:p>
-            <a:r>
-              <a:t>image. Three — smell, aroma and taste — belong to olfaction and gustation: no photograph can</a:t>
-            </a:r>
-          </a:p>
-          <a:p>
-            <a:r>
+              <a:rPr dirty="0"/>
+              <a:t>paste </a:t>
+            </a:r>
+            <a:r>
+              <a:rPr dirty="0" err="1"/>
+              <a:t>colour</a:t>
+            </a:r>
+            <a:r>
+              <a:rPr dirty="0"/>
+              <a:t>, texture and paste structure, are intrinsically visual: they can be read from the</a:t>
+            </a:r>
+          </a:p>
+          <a:p>
+            <a:r>
+              <a:rPr dirty="0"/>
+              <a:t>image. Three, smell, aroma and taste, belong to olfaction and gustation: no photograph can</a:t>
+            </a:r>
+          </a:p>
+          <a:p>
+            <a:r>
+              <a:rPr dirty="0"/>
               <a:t>reveal a taste. And then there is an instructive case, rind thickness: it is physically visible,</a:t>
             </a:r>
           </a:p>
           <a:p>
             <a:r>
+              <a:rPr dirty="0"/>
               <a:t>yet the rind occupies a small portion of the slice, and we'll see that the model struggles to</a:t>
             </a:r>
           </a:p>
           <a:p>
             <a:r>
+              <a:rPr dirty="0"/>
               <a:t>"weight" it.</a:t>
             </a:r>
           </a:p>
           <a:p>
             <a:r>
+              <a:rPr dirty="0"/>
               <a:t>This taxonomy is not decorative: when we measure whether the model truly uses the image, we'll</a:t>
             </a:r>
           </a:p>
           <a:p>
             <a:r>
+              <a:rPr dirty="0"/>
               <a:t>find it succeeds exactly on the visible attributes and fails on the olfactory and gustatory ones.</a:t>
             </a:r>
           </a:p>
           <a:p>
             <a:r>
+              <a:rPr dirty="0"/>
               <a:t>It is a sanity check that validates the whole approach.</a:t>
             </a:r>
           </a:p>
@@ -4758,7 +4886,7 @@
           </a:p>
           <a:p>
             <a:r>
-              <a:t>Look at the same pair of models — the constant baseline most_frequent against m6 — seen by two</a:t>
+              <a:t>Look at the same pair of models, the constant baseline most_frequent against m6, seen by two</a:t>
             </a:r>
           </a:p>
           <a:p>
@@ -4788,7 +4916,7 @@
           </a:p>
           <a:p>
             <a:r>
-              <a:t>trained model — an absurd conclusion. This is exactly why we built a battery of metrics and read</a:t>
+              <a:t>trained model: an absurd conclusion. This is exactly why we built a battery of metrics and read</a:t>
             </a:r>
           </a:p>
           <a:p>
@@ -4918,7 +5046,7 @@
           </a:p>
           <a:p>
             <a:r>
-              <a:t>cheese has a...", is always correct and alone worth about half the BLEU-4 — which is why the numbers</a:t>
+              <a:t>cheese has a...", is always correct and alone worth about half the BLEU-4, which is why the numbers</a:t>
             </a:r>
           </a:p>
           <a:p>
@@ -4928,7 +5056,7 @@
           </a:p>
           <a:p>
             <a:r>
-              <a:t>and most telling: the descriptor is often plausible but refers to another cheese — exactly what we</a:t>
+              <a:t>and most telling: the descriptor is often plausible but refers to another cheese, exactly what we</a:t>
             </a:r>
           </a:p>
           <a:p>
@@ -5028,7 +5156,7 @@
           </a:p>
           <a:p>
             <a:r>
-              <a:t>two independent tools — the shuffle test and CLIPScore — converge on the same conclusion.</a:t>
+              <a:t>two independent tools, the shuffle test and CLIPScore, converge on the same conclusion.</a:t>
             </a:r>
           </a:p>
           <a:p>
@@ -5073,7 +5201,7 @@
           </a:p>
           <a:p>
             <a:r>
-              <a:t>the sensory vocabulary and a partial map from image to descriptor — a result consistent with the</a:t>
+              <a:t>the sensory vocabulary and a partial map from image to descriptor, a result consistent with the</a:t>
             </a:r>
           </a:p>
           <a:p>
@@ -5158,61 +5286,113 @@
           <a:lstStyle/>
           <a:p>
             <a:r>
+              <a:rPr dirty="0"/>
               <a:t>The AI4FQC brief explicitly asks for two deliverables.</a:t>
             </a:r>
           </a:p>
           <a:p>
             <a:r>
-              <a:t>The first step is text pre-processing: take the tasters' descriptions — often telegraphic,</a:t>
-            </a:r>
-          </a:p>
-          <a:p>
-            <a:r>
-              <a:t>sometimes in dialect, occasionally inconsistent — and turn them into clean, normalised captions in</a:t>
-            </a:r>
-          </a:p>
-          <a:p>
-            <a:r>
+              <a:rPr dirty="0"/>
+              <a:t>The first step is text pre-processing: take the tasters' descriptions</a:t>
+            </a:r>
+            <a:r>
+              <a:rPr lang="it-IT" dirty="0"/>
+              <a:t>,</a:t>
+            </a:r>
+            <a:r>
+              <a:rPr dirty="0"/>
+              <a:t> often telegraphic,</a:t>
+            </a:r>
+          </a:p>
+          <a:p>
+            <a:r>
+              <a:rPr dirty="0"/>
+              <a:t>sometimes in dialect, occasionally inconsistent </a:t>
+            </a:r>
+            <a:r>
+              <a:rPr lang="it-IT" dirty="0"/>
+              <a:t>,</a:t>
+            </a:r>
+            <a:r>
+              <a:rPr dirty="0"/>
+              <a:t> and turn them into clean, </a:t>
+            </a:r>
+            <a:r>
+              <a:rPr dirty="0" err="1"/>
+              <a:t>normalised</a:t>
+            </a:r>
+            <a:r>
+              <a:rPr dirty="0"/>
+              <a:t> captions in</a:t>
+            </a:r>
+          </a:p>
+          <a:p>
+            <a:r>
+              <a:rPr dirty="0"/>
               <a:t>the form of Italian sentences. A specific, recurring requirement is to replace quantitative</a:t>
             </a:r>
           </a:p>
           <a:p>
             <a:r>
-              <a:t>measures, the rind's millimetres and centimetres, with qualitative descriptions. This step, as you</a:t>
-            </a:r>
-          </a:p>
-          <a:p>
-            <a:r>
+              <a:rPr dirty="0"/>
+              <a:t>measures, the rind's </a:t>
+            </a:r>
+            <a:r>
+              <a:rPr dirty="0" err="1"/>
+              <a:t>millimetres</a:t>
+            </a:r>
+            <a:r>
+              <a:rPr dirty="0"/>
+              <a:t> and </a:t>
+            </a:r>
+            <a:r>
+              <a:rPr dirty="0" err="1"/>
+              <a:t>centimetres</a:t>
+            </a:r>
+            <a:r>
+              <a:rPr dirty="0"/>
+              <a:t>, with qualitative descriptions. This step, as you</a:t>
+            </a:r>
+          </a:p>
+          <a:p>
+            <a:r>
+              <a:rPr dirty="0"/>
               <a:t>see, accounts for about 70% of the work: it is the most original part.</a:t>
             </a:r>
           </a:p>
           <a:p>
             <a:r>
+              <a:rPr dirty="0"/>
               <a:t>The second step is to apply and compare three encoder-decoder methods that are "as conceptually</a:t>
             </a:r>
           </a:p>
           <a:p>
             <a:r>
+              <a:rPr dirty="0"/>
               <a:t>different as possible". Note the emphasis: the brief does not ask for the best model, but for a</a:t>
             </a:r>
           </a:p>
           <a:p>
             <a:r>
+              <a:rPr dirty="0"/>
               <a:t>comparison of approaches. To do this honestly, we paired BLEU with a battery of complementary</a:t>
             </a:r>
           </a:p>
           <a:p>
             <a:r>
+              <a:rPr dirty="0"/>
               <a:t>metrics.</a:t>
             </a:r>
           </a:p>
           <a:p>
             <a:r>
+              <a:rPr dirty="0"/>
               <a:t>Consistently with these weights, I'll devote the first and larger part of the talk to building the</a:t>
             </a:r>
           </a:p>
           <a:p>
             <a:r>
+              <a:rPr dirty="0"/>
               <a:t>dataset, and the second to the models. Let's start with the data.</a:t>
             </a:r>
           </a:p>
@@ -5388,7 +5568,7 @@
           </a:p>
           <a:p>
             <a:r>
-              <a:t>two views — the whole slice and a close-up of the grain; four Excel workbooks, one per year from</a:t>
+              <a:t>two views: the whole slice and a close-up of the grain; four Excel workbooks, one per year from</a:t>
             </a:r>
           </a:p>
           <a:p>
@@ -5403,7 +5583,7 @@
           </a:p>
           <a:p>
             <a:r>
-              <a:t>different languages. The photo filename identifies the single wheel — a precise sample ID — while</a:t>
+              <a:t>different languages. The photo filename identifies the single wheel — a precise sample ID, while</a:t>
             </a:r>
           </a:p>
           <a:p>
@@ -5513,7 +5693,7 @@
           </a:p>
           <a:p>
             <a:r>
-              <a:t>Look at the example. A single comment about smell — the word "Sauerkraut" for dairy TN_306 —</a:t>
+              <a:t>Look at the example. A single comment about smell, the word "Sauerkraut", for dairy TN_306 —</a:t>
             </a:r>
           </a:p>
           <a:p>
@@ -5528,7 +5708,7 @@
           </a:p>
           <a:p>
             <a:r>
-              <a:t>One might object: isn't this artificial duplication? Actually no — for training it's an advantage:</a:t>
+              <a:t>One might object: isn't this artificial duplication? Actually no: for training it's an advantage:</a:t>
             </a:r>
           </a:p>
           <a:p>
@@ -5628,7 +5808,7 @@
           </a:p>
           <a:p>
             <a:r>
-              <a:t>The guiding principle — and this is the most important architectural decision of the first part —</a:t>
+              <a:t>The guiding principle, and this is the most important architectural decision of the first part —</a:t>
             </a:r>
           </a:p>
           <a:p>
@@ -5663,7 +5843,7 @@
           </a:p>
           <a:p>
             <a:r>
-              <a:t>compressed to about 7,700 unique captions — and only this subset reaches the paid model. It is</a:t>
+              <a:t>compressed to about 7,700 unique captions; and only this subset reaches the paid model. It is</a:t>
             </a:r>
           </a:p>
           <a:p>
@@ -5743,51 +5923,69 @@
           <a:lstStyle/>
           <a:p>
             <a:r>
+              <a:rPr dirty="0"/>
               <a:t>This is the same story, seen as a funnel. The axis shows the number of training rows as they move</a:t>
             </a:r>
           </a:p>
           <a:p>
             <a:r>
+              <a:rPr dirty="0"/>
               <a:t>through the pipeline.</a:t>
             </a:r>
           </a:p>
           <a:p>
             <a:r>
-              <a:t>The biggest drop — over 12,600 rows — happens entirely in the deterministic preparation of stage 1.</a:t>
-            </a:r>
-          </a:p>
-          <a:p>
-            <a:r>
+              <a:rPr dirty="0"/>
+              <a:t>The biggest drop, over 12,600 rows, happens entirely in the deterministic preparation of stage 1.</a:t>
+            </a:r>
+          </a:p>
+          <a:p>
+            <a:r>
+              <a:rPr dirty="0"/>
               <a:t>But watch what we discard: the vast majority, nearly 12,500 rows, are empty or null values. Only 86</a:t>
             </a:r>
           </a:p>
           <a:p>
             <a:r>
+              <a:rPr dirty="0"/>
               <a:t>are meta-comments and 68 are near-empty fragments. In other words, we are not discarding sensory</a:t>
             </a:r>
           </a:p>
           <a:p>
             <a:r>
+              <a:rPr dirty="0"/>
               <a:t>content: we are removing certain noise.</a:t>
             </a:r>
           </a:p>
           <a:p>
             <a:r>
+              <a:rPr dirty="0"/>
               <a:t>The retention rate after stage 1 is 75.7%. And here's a deliberate choice I want to stress: at this</a:t>
             </a:r>
           </a:p>
           <a:p>
             <a:r>
-              <a:t>stage, drops must be certain. A sentence like "I don't penalise it, but it smells of barn" contains</a:t>
-            </a:r>
-          </a:p>
-          <a:p>
-            <a:r>
+              <a:rPr dirty="0"/>
+              <a:t>stage, drops must be certain. A sentence like "I don't </a:t>
+            </a:r>
+            <a:r>
+              <a:rPr dirty="0" err="1"/>
+              <a:t>penalise</a:t>
+            </a:r>
+            <a:r>
+              <a:rPr dirty="0"/>
+              <a:t> it, but it smells of barn" contains</a:t>
+            </a:r>
+          </a:p>
+          <a:p>
+            <a:r>
+              <a:rPr dirty="0"/>
               <a:t>a real descriptor and must NOT be discarded by a regex — that kind of ambiguity is better handled</a:t>
             </a:r>
           </a:p>
           <a:p>
             <a:r>
+              <a:rPr dirty="0"/>
               <a:t>by the LLM later. The deterministic blacklist is therefore small and conservative by design.</a:t>
             </a:r>
           </a:p>
@@ -5992,7 +6190,7 @@
           <a:p>
             <a:fld id="{5BCAD085-E8A6-8845-BD4E-CB4CCA059FC4}" type="datetimeFigureOut">
               <a:rPr lang="en-US" smtClean="0"/>
-              <a:t>6/15/2026</a:t>
+              <a:t>6/20/2026</a:t>
             </a:fld>
             <a:endParaRPr lang="en-US"/>
           </a:p>
@@ -6160,7 +6358,7 @@
           <a:p>
             <a:fld id="{5BCAD085-E8A6-8845-BD4E-CB4CCA059FC4}" type="datetimeFigureOut">
               <a:rPr lang="en-US" smtClean="0"/>
-              <a:t>6/15/2026</a:t>
+              <a:t>6/20/2026</a:t>
             </a:fld>
             <a:endParaRPr lang="en-US"/>
           </a:p>
@@ -6338,7 +6536,7 @@
           <a:p>
             <a:fld id="{5BCAD085-E8A6-8845-BD4E-CB4CCA059FC4}" type="datetimeFigureOut">
               <a:rPr lang="en-US" smtClean="0"/>
-              <a:t>6/15/2026</a:t>
+              <a:t>6/20/2026</a:t>
             </a:fld>
             <a:endParaRPr lang="en-US"/>
           </a:p>
@@ -6506,7 +6704,7 @@
           <a:p>
             <a:fld id="{5BCAD085-E8A6-8845-BD4E-CB4CCA059FC4}" type="datetimeFigureOut">
               <a:rPr lang="en-US" smtClean="0"/>
-              <a:t>6/15/2026</a:t>
+              <a:t>6/20/2026</a:t>
             </a:fld>
             <a:endParaRPr lang="en-US"/>
           </a:p>
@@ -6751,7 +6949,7 @@
           <a:p>
             <a:fld id="{5BCAD085-E8A6-8845-BD4E-CB4CCA059FC4}" type="datetimeFigureOut">
               <a:rPr lang="en-US" smtClean="0"/>
-              <a:t>6/15/2026</a:t>
+              <a:t>6/20/2026</a:t>
             </a:fld>
             <a:endParaRPr lang="en-US"/>
           </a:p>
@@ -7036,7 +7234,7 @@
           <a:p>
             <a:fld id="{5BCAD085-E8A6-8845-BD4E-CB4CCA059FC4}" type="datetimeFigureOut">
               <a:rPr lang="en-US" smtClean="0"/>
-              <a:t>6/15/2026</a:t>
+              <a:t>6/20/2026</a:t>
             </a:fld>
             <a:endParaRPr lang="en-US"/>
           </a:p>
@@ -7455,7 +7653,7 @@
           <a:p>
             <a:fld id="{5BCAD085-E8A6-8845-BD4E-CB4CCA059FC4}" type="datetimeFigureOut">
               <a:rPr lang="en-US" smtClean="0"/>
-              <a:t>6/15/2026</a:t>
+              <a:t>6/20/2026</a:t>
             </a:fld>
             <a:endParaRPr lang="en-US"/>
           </a:p>
@@ -7572,7 +7770,7 @@
           <a:p>
             <a:fld id="{5BCAD085-E8A6-8845-BD4E-CB4CCA059FC4}" type="datetimeFigureOut">
               <a:rPr lang="en-US" smtClean="0"/>
-              <a:t>6/15/2026</a:t>
+              <a:t>6/20/2026</a:t>
             </a:fld>
             <a:endParaRPr lang="en-US"/>
           </a:p>
@@ -7667,7 +7865,7 @@
           <a:p>
             <a:fld id="{5BCAD085-E8A6-8845-BD4E-CB4CCA059FC4}" type="datetimeFigureOut">
               <a:rPr lang="en-US" smtClean="0"/>
-              <a:t>6/15/2026</a:t>
+              <a:t>6/20/2026</a:t>
             </a:fld>
             <a:endParaRPr lang="en-US"/>
           </a:p>
@@ -7942,7 +8140,7 @@
           <a:p>
             <a:fld id="{5BCAD085-E8A6-8845-BD4E-CB4CCA059FC4}" type="datetimeFigureOut">
               <a:rPr lang="en-US" smtClean="0"/>
-              <a:t>6/15/2026</a:t>
+              <a:t>6/20/2026</a:t>
             </a:fld>
             <a:endParaRPr lang="en-US"/>
           </a:p>
@@ -8194,7 +8392,7 @@
           <a:p>
             <a:fld id="{5BCAD085-E8A6-8845-BD4E-CB4CCA059FC4}" type="datetimeFigureOut">
               <a:rPr lang="en-US" smtClean="0"/>
-              <a:t>6/15/2026</a:t>
+              <a:t>6/20/2026</a:t>
             </a:fld>
             <a:endParaRPr lang="en-US"/>
           </a:p>
@@ -8405,7 +8603,7 @@
           <a:p>
             <a:fld id="{5BCAD085-E8A6-8845-BD4E-CB4CCA059FC4}" type="datetimeFigureOut">
               <a:rPr lang="en-US" smtClean="0"/>
-              <a:t>6/15/2026</a:t>
+              <a:t>6/20/2026</a:t>
             </a:fld>
             <a:endParaRPr lang="en-US"/>
           </a:p>
@@ -9241,7 +9439,7 @@
           <a:lstStyle/>
           <a:p>
             <a:r>
-              <a:rPr sz="1700" b="0" i="1">
+              <a:rPr sz="1700" b="0" i="1" dirty="0">
                 <a:solidFill>
                   <a:srgbClr val="D9D2C2"/>
                 </a:solidFill>
@@ -9341,6 +9539,11 @@
         </p:txBody>
       </p:sp>
     </p:spTree>
+    <p:extLst>
+      <p:ext uri="{BB962C8B-B14F-4D97-AF65-F5344CB8AC3E}">
+        <p14:creationId xmlns:p14="http://schemas.microsoft.com/office/powerpoint/2010/main" val="3440401369"/>
+      </p:ext>
+    </p:extLst>
   </p:cSld>
   <p:clrMapOvr>
     <a:masterClrMapping/>
@@ -9447,7 +9650,7 @@
                 </a:solidFill>
                 <a:latin typeface="Calibri"/>
               </a:rPr>
-              <a:t>AI4FQC · Project 07 — GRANA Captioning</a:t>
+              <a:t>AI4FQC · Project 07: GRANA Captioning</a:t>
             </a:r>
           </a:p>
         </p:txBody>
@@ -9530,7 +9733,7 @@
         <p:spPr>
           <a:xfrm>
             <a:off x="640080" y="886968"/>
-            <a:ext cx="10881360" cy="914400"/>
+            <a:ext cx="10881360" cy="579646"/>
           </a:xfrm>
           <a:prstGeom prst="rect">
             <a:avLst/>
@@ -9544,7 +9747,7 @@
           <a:lstStyle/>
           <a:p>
             <a:r>
-              <a:rPr sz="3100" b="1" i="0">
+              <a:rPr sz="3600" b="1" i="0" dirty="0">
                 <a:solidFill>
                   <a:srgbClr val="1B334A"/>
                 </a:solidFill>
@@ -9699,7 +9902,7 @@
         <p:spPr>
           <a:xfrm>
             <a:off x="896112" y="2066544"/>
-            <a:ext cx="4928616" cy="3017520"/>
+            <a:ext cx="4928616" cy="1882567"/>
           </a:xfrm>
           <a:prstGeom prst="rect">
             <a:avLst/>
@@ -9713,7 +9916,7 @@
           <a:lstStyle/>
           <a:p>
             <a:r>
-              <a:rPr sz="1550" b="1" i="0">
+              <a:rPr sz="2400" b="1" i="0" dirty="0">
                 <a:solidFill>
                   <a:srgbClr val="1B334A"/>
                 </a:solidFill>
@@ -9729,7 +9932,7 @@
               </a:spcBef>
             </a:pPr>
             <a:r>
-              <a:rPr sz="1000" b="1" i="0">
+              <a:rPr sz="1100" b="1" i="0" dirty="0">
                 <a:solidFill>
                   <a:srgbClr val="2C5F8A"/>
                 </a:solidFill>
@@ -9738,13 +9941,13 @@
               <a:t>● </a:t>
             </a:r>
             <a:r>
-              <a:rPr sz="1300" b="0" i="0">
+              <a:rPr sz="1600" b="0" i="0" dirty="0">
                 <a:solidFill>
                   <a:srgbClr val="2B2A26"/>
                 </a:solidFill>
                 <a:latin typeface="Calibri"/>
               </a:rPr>
-              <a:t>Filter empties/N-A + Unicode normalisation (NFC)</a:t>
+              <a:t>Filter empties/N-A + Unicode normalization (NFC)</a:t>
             </a:r>
           </a:p>
           <a:p>
@@ -9754,7 +9957,7 @@
               </a:spcBef>
             </a:pPr>
             <a:r>
-              <a:rPr sz="1000" b="1" i="0">
+              <a:rPr sz="1100" b="1" i="0" dirty="0">
                 <a:solidFill>
                   <a:srgbClr val="2C5F8A"/>
                 </a:solidFill>
@@ -9763,7 +9966,7 @@
               <a:t>● </a:t>
             </a:r>
             <a:r>
-              <a:rPr sz="1300" b="0" i="0">
+              <a:rPr sz="1600" b="0" i="0" dirty="0">
                 <a:solidFill>
                   <a:srgbClr val="2B2A26"/>
                 </a:solidFill>
@@ -9779,7 +9982,7 @@
               </a:spcBef>
             </a:pPr>
             <a:r>
-              <a:rPr sz="1000" b="1" i="0">
+              <a:rPr sz="1100" b="1" i="0" dirty="0">
                 <a:solidFill>
                   <a:srgbClr val="2C5F8A"/>
                 </a:solidFill>
@@ -9788,7 +9991,7 @@
               <a:t>● </a:t>
             </a:r>
             <a:r>
-              <a:rPr sz="1300" b="0" i="0">
+              <a:rPr sz="1600" b="0" i="0" dirty="0">
                 <a:solidFill>
                   <a:srgbClr val="2B2A26"/>
                 </a:solidFill>
@@ -9804,7 +10007,7 @@
               </a:spcBef>
             </a:pPr>
             <a:r>
-              <a:rPr sz="1000" b="1" i="0">
+              <a:rPr sz="1100" b="1" i="0" dirty="0">
                 <a:solidFill>
                   <a:srgbClr val="2C5F8A"/>
                 </a:solidFill>
@@ -9813,7 +10016,7 @@
               <a:t>● </a:t>
             </a:r>
             <a:r>
-              <a:rPr sz="1300" b="0" i="0">
+              <a:rPr sz="1600" b="0" i="0" dirty="0">
                 <a:solidFill>
                   <a:srgbClr val="2B2A26"/>
                 </a:solidFill>
@@ -9829,7 +10032,7 @@
               </a:spcBef>
             </a:pPr>
             <a:r>
-              <a:rPr sz="1000" b="1" i="0">
+              <a:rPr sz="1100" b="1" i="0" dirty="0">
                 <a:solidFill>
                   <a:srgbClr val="2C5F8A"/>
                 </a:solidFill>
@@ -9838,7 +10041,7 @@
               <a:t>● </a:t>
             </a:r>
             <a:r>
-              <a:rPr sz="1300" b="0" i="0">
+              <a:rPr sz="1600" b="0" i="0" dirty="0">
                 <a:solidFill>
                   <a:srgbClr val="2B2A26"/>
                 </a:solidFill>
@@ -9864,7 +10067,7 @@
             <a:avLst/>
           </a:prstGeom>
           <a:solidFill>
-            <a:srgbClr val="1B334A"/>
+            <a:schemeClr val="tx2"/>
           </a:solidFill>
           <a:ln>
             <a:noFill/>
@@ -9948,7 +10151,7 @@
         <p:spPr>
           <a:xfrm>
             <a:off x="6382512" y="2066544"/>
-            <a:ext cx="5020056" cy="3017520"/>
+            <a:ext cx="5020056" cy="1872307"/>
           </a:xfrm>
           <a:prstGeom prst="rect">
             <a:avLst/>
@@ -9962,7 +10165,7 @@
           <a:lstStyle/>
           <a:p>
             <a:r>
-              <a:rPr sz="1550" b="1" i="0">
+              <a:rPr sz="2400" b="1" i="0" dirty="0">
                 <a:solidFill>
                   <a:srgbClr val="E0A458"/>
                 </a:solidFill>
@@ -9973,19 +10176,24 @@
           </a:p>
           <a:p>
             <a:r>
-              <a:rPr sz="1300" b="0" i="0">
+              <a:rPr sz="1600" b="0" i="0" dirty="0">
                 <a:solidFill>
                   <a:srgbClr val="F7F1E3"/>
                 </a:solidFill>
                 <a:latin typeface="Calibri"/>
               </a:rPr>
-              <a:t>«Drops must be certain». The LLM will handle ambiguity better: a negation with a descriptor — «I don't penalise it, but it smells of barn» — carries real information and is kept.
+              <a:t>«Drops must be certain». The LLM will handle ambiguity better: a negation with a descriptor: «I don't penalize it, but it smells of barn»  carries real information and is kept.
 Result: 39,356 rows (75.7% retention), 12,632 drops, of which 12,478 empty, 86 meta, 68 near-empty.</a:t>
             </a:r>
           </a:p>
         </p:txBody>
       </p:sp>
     </p:spTree>
+    <p:extLst>
+      <p:ext uri="{BB962C8B-B14F-4D97-AF65-F5344CB8AC3E}">
+        <p14:creationId xmlns:p14="http://schemas.microsoft.com/office/powerpoint/2010/main" val="1748979887"/>
+      </p:ext>
+    </p:extLst>
   </p:cSld>
   <p:clrMapOvr>
     <a:masterClrMapping/>
@@ -10092,7 +10300,7 @@
                 </a:solidFill>
                 <a:latin typeface="Calibri"/>
               </a:rPr>
-              <a:t>AI4FQC · Project 07 — GRANA Captioning</a:t>
+              <a:t>AI4FQC · Project 07: GRANA Captioning</a:t>
             </a:r>
           </a:p>
         </p:txBody>
@@ -10175,7 +10383,7 @@
         <p:spPr>
           <a:xfrm>
             <a:off x="640080" y="886968"/>
-            <a:ext cx="10881360" cy="914400"/>
+            <a:ext cx="10881360" cy="579646"/>
           </a:xfrm>
           <a:prstGeom prst="rect">
             <a:avLst/>
@@ -10189,13 +10397,31 @@
           <a:lstStyle/>
           <a:p>
             <a:r>
-              <a:rPr sz="3100" b="1" i="0">
+              <a:rPr sz="3100" b="1" i="0" dirty="0">
                 <a:solidFill>
                   <a:srgbClr val="1B334A"/>
                 </a:solidFill>
                 <a:latin typeface="Georgia"/>
               </a:rPr>
-              <a:t>A controlled vocabulary, tailor-made</a:t>
+              <a:t>A controlled </a:t>
+            </a:r>
+            <a:r>
+              <a:rPr sz="3600" b="1" i="0" dirty="0">
+                <a:solidFill>
+                  <a:srgbClr val="1B334A"/>
+                </a:solidFill>
+                <a:latin typeface="Georgia"/>
+              </a:rPr>
+              <a:t>vocabulary</a:t>
+            </a:r>
+            <a:r>
+              <a:rPr sz="3100" b="1" i="0" dirty="0">
+                <a:solidFill>
+                  <a:srgbClr val="1B334A"/>
+                </a:solidFill>
+                <a:latin typeface="Georgia"/>
+              </a:rPr>
+              <a:t>, tailor-made</a:t>
             </a:r>
           </a:p>
         </p:txBody>
@@ -10368,7 +10594,7 @@
         <p:spPr>
           <a:xfrm>
             <a:off x="8211311" y="2157984"/>
-            <a:ext cx="3191256" cy="3474719"/>
+            <a:ext cx="3191256" cy="2477601"/>
           </a:xfrm>
           <a:prstGeom prst="rect">
             <a:avLst/>
@@ -10382,7 +10608,7 @@
           <a:lstStyle/>
           <a:p>
             <a:r>
-              <a:rPr sz="1500" b="1" i="0">
+              <a:rPr b="1" i="0" dirty="0">
                 <a:solidFill>
                   <a:srgbClr val="1B334A"/>
                 </a:solidFill>
@@ -10398,7 +10624,7 @@
               </a:spcBef>
             </a:pPr>
             <a:r>
-              <a:rPr sz="1000" b="1" i="0">
+              <a:rPr sz="1100" b="1" i="0" dirty="0">
                 <a:solidFill>
                   <a:srgbClr val="2C5F8A"/>
                 </a:solidFill>
@@ -10407,14 +10633,47 @@
               <a:t>● </a:t>
             </a:r>
             <a:r>
-              <a:rPr sz="1200" b="0" i="0">
+              <a:rPr sz="1600" b="0" i="0" dirty="0">
                 <a:solidFill>
                   <a:srgbClr val="2B2A26"/>
                 </a:solidFill>
                 <a:latin typeface="Calibri"/>
               </a:rPr>
-              <a:t>Italian NLP tools err: panna→panno, latte→latto</a:t>
-            </a:r>
+              <a:t>Italian NLP tools err: </a:t>
+            </a:r>
+            <a:r>
+              <a:rPr sz="1600" b="0" i="0" dirty="0" err="1">
+                <a:solidFill>
+                  <a:srgbClr val="2B2A26"/>
+                </a:solidFill>
+                <a:latin typeface="Calibri"/>
+              </a:rPr>
+              <a:t>panna→panno</a:t>
+            </a:r>
+            <a:r>
+              <a:rPr sz="1600" b="0" i="0" dirty="0">
+                <a:solidFill>
+                  <a:srgbClr val="2B2A26"/>
+                </a:solidFill>
+                <a:latin typeface="Calibri"/>
+              </a:rPr>
+              <a:t>, </a:t>
+            </a:r>
+            <a:r>
+              <a:rPr sz="1600" b="0" i="0" dirty="0" err="1">
+                <a:solidFill>
+                  <a:srgbClr val="2B2A26"/>
+                </a:solidFill>
+                <a:latin typeface="Calibri"/>
+              </a:rPr>
+              <a:t>latte→latto</a:t>
+            </a:r>
+            <a:endParaRPr sz="1600" b="0" i="0" dirty="0">
+              <a:solidFill>
+                <a:srgbClr val="2B2A26"/>
+              </a:solidFill>
+              <a:latin typeface="Calibri"/>
+            </a:endParaRPr>
           </a:p>
           <a:p>
             <a:pPr>
@@ -10423,7 +10682,7 @@
               </a:spcBef>
             </a:pPr>
             <a:r>
-              <a:rPr sz="1000" b="1" i="0">
+              <a:rPr sz="1100" b="1" i="0" dirty="0">
                 <a:solidFill>
                   <a:srgbClr val="2C5F8A"/>
                 </a:solidFill>
@@ -10432,13 +10691,49 @@
               <a:t>● </a:t>
             </a:r>
             <a:r>
-              <a:rPr sz="1200" b="0" i="0">
+              <a:rPr sz="1600" b="0" i="0" dirty="0">
                 <a:solidFill>
                   <a:srgbClr val="2B2A26"/>
                 </a:solidFill>
                 <a:latin typeface="Calibri"/>
               </a:rPr>
-              <a:t>Useful stopwords here: «molto», «poco», «leggermente»</a:t>
+              <a:t>Useful </a:t>
+            </a:r>
+            <a:r>
+              <a:rPr sz="1600" b="0" i="0" dirty="0" err="1">
+                <a:solidFill>
+                  <a:srgbClr val="2B2A26"/>
+                </a:solidFill>
+                <a:latin typeface="Calibri"/>
+              </a:rPr>
+              <a:t>stopwords</a:t>
+            </a:r>
+            <a:r>
+              <a:rPr sz="1600" b="0" i="0" dirty="0">
+                <a:solidFill>
+                  <a:srgbClr val="2B2A26"/>
+                </a:solidFill>
+                <a:latin typeface="Calibri"/>
+              </a:rPr>
+              <a:t> here: «molto», «poco», «</a:t>
+            </a:r>
+            <a:r>
+              <a:rPr sz="1600" b="0" i="0" dirty="0" err="1">
+                <a:solidFill>
+                  <a:srgbClr val="2B2A26"/>
+                </a:solidFill>
+                <a:latin typeface="Calibri"/>
+              </a:rPr>
+              <a:t>leggermente</a:t>
+            </a:r>
+            <a:r>
+              <a:rPr sz="1600" b="0" i="0" dirty="0">
+                <a:solidFill>
+                  <a:srgbClr val="2B2A26"/>
+                </a:solidFill>
+                <a:latin typeface="Calibri"/>
+              </a:rPr>
+              <a:t>»</a:t>
             </a:r>
           </a:p>
           <a:p>
@@ -10448,7 +10743,7 @@
               </a:spcBef>
             </a:pPr>
             <a:r>
-              <a:rPr sz="1000" b="1" i="0">
+              <a:rPr sz="1100" b="1" i="0" dirty="0">
                 <a:solidFill>
                   <a:srgbClr val="2C5F8A"/>
                 </a:solidFill>
@@ -10457,13 +10752,49 @@
               <a:t>● </a:t>
             </a:r>
             <a:r>
-              <a:rPr sz="1200" b="0" i="0">
+              <a:rPr sz="1600" b="0" i="0" dirty="0">
                 <a:solidFill>
                   <a:srgbClr val="2B2A26"/>
                 </a:solidFill>
                 <a:latin typeface="Calibri"/>
               </a:rPr>
-              <a:t>Deterministic lemmatiser + sing./plur. merge</a:t>
+              <a:t>Deterministic </a:t>
+            </a:r>
+            <a:r>
+              <a:rPr sz="1600" b="0" i="0" dirty="0" err="1">
+                <a:solidFill>
+                  <a:srgbClr val="2B2A26"/>
+                </a:solidFill>
+                <a:latin typeface="Calibri"/>
+              </a:rPr>
+              <a:t>lemmatiser</a:t>
+            </a:r>
+            <a:r>
+              <a:rPr sz="1600" b="0" i="0" dirty="0">
+                <a:solidFill>
+                  <a:srgbClr val="2B2A26"/>
+                </a:solidFill>
+                <a:latin typeface="Calibri"/>
+              </a:rPr>
+              <a:t> + sing./</a:t>
+            </a:r>
+            <a:r>
+              <a:rPr sz="1600" b="0" i="0" dirty="0" err="1">
+                <a:solidFill>
+                  <a:srgbClr val="2B2A26"/>
+                </a:solidFill>
+                <a:latin typeface="Calibri"/>
+              </a:rPr>
+              <a:t>plur</a:t>
+            </a:r>
+            <a:r>
+              <a:rPr sz="1600" b="0" i="0" dirty="0">
+                <a:solidFill>
+                  <a:srgbClr val="2B2A26"/>
+                </a:solidFill>
+                <a:latin typeface="Calibri"/>
+              </a:rPr>
+              <a:t>. merge</a:t>
             </a:r>
           </a:p>
           <a:p>
@@ -10473,7 +10804,7 @@
               </a:spcBef>
             </a:pPr>
             <a:r>
-              <a:rPr sz="1000" b="1" i="0">
+              <a:rPr sz="1100" b="1" i="0" dirty="0">
                 <a:solidFill>
                   <a:srgbClr val="2C5F8A"/>
                 </a:solidFill>
@@ -10482,7 +10813,7 @@
               <a:t>● </a:t>
             </a:r>
             <a:r>
-              <a:rPr sz="1200" b="1" i="0">
+              <a:rPr sz="1600" b="1" i="0" dirty="0">
                 <a:solidFill>
                   <a:srgbClr val="2B2A26"/>
                 </a:solidFill>
@@ -10491,7 +10822,7 @@
               <a:t>Dual use:</a:t>
             </a:r>
             <a:r>
-              <a:rPr sz="1200" b="0" i="0">
+              <a:rPr sz="1600" b="0" i="0" dirty="0">
                 <a:solidFill>
                   <a:srgbClr val="2B2A26"/>
                 </a:solidFill>
@@ -10503,6 +10834,11 @@
         </p:txBody>
       </p:sp>
     </p:spTree>
+    <p:extLst>
+      <p:ext uri="{BB962C8B-B14F-4D97-AF65-F5344CB8AC3E}">
+        <p14:creationId xmlns:p14="http://schemas.microsoft.com/office/powerpoint/2010/main" val="651749740"/>
+      </p:ext>
+    </p:extLst>
   </p:cSld>
   <p:clrMapOvr>
     <a:masterClrMapping/>
@@ -10609,7 +10945,7 @@
                 </a:solidFill>
                 <a:latin typeface="Calibri"/>
               </a:rPr>
-              <a:t>AI4FQC · Project 07 — GRANA Captioning</a:t>
+              <a:t>AI4FQC · Project 07: GRANA Captioning</a:t>
             </a:r>
           </a:p>
         </p:txBody>
@@ -10692,7 +11028,7 @@
         <p:spPr>
           <a:xfrm>
             <a:off x="640080" y="886968"/>
-            <a:ext cx="10881360" cy="914400"/>
+            <a:ext cx="10881360" cy="579646"/>
           </a:xfrm>
           <a:prstGeom prst="rect">
             <a:avLst/>
@@ -10706,13 +11042,31 @@
           <a:lstStyle/>
           <a:p>
             <a:r>
-              <a:rPr sz="3100" b="1" i="0">
+              <a:rPr sz="3100" b="1" i="0" dirty="0">
                 <a:solidFill>
                   <a:srgbClr val="1B334A"/>
                 </a:solidFill>
                 <a:latin typeface="Georgia"/>
               </a:rPr>
-              <a:t>From numbers to quality: the rind</a:t>
+              <a:t>From numbers to </a:t>
+            </a:r>
+            <a:r>
+              <a:rPr sz="3600" b="1" i="0" dirty="0">
+                <a:solidFill>
+                  <a:srgbClr val="1B334A"/>
+                </a:solidFill>
+                <a:latin typeface="Georgia"/>
+              </a:rPr>
+              <a:t>quality</a:t>
+            </a:r>
+            <a:r>
+              <a:rPr sz="3100" b="1" i="0" dirty="0">
+                <a:solidFill>
+                  <a:srgbClr val="1B334A"/>
+                </a:solidFill>
+                <a:latin typeface="Georgia"/>
+              </a:rPr>
+              <a:t>: the rind</a:t>
             </a:r>
           </a:p>
         </p:txBody>
@@ -10771,7 +11125,7 @@
         <p:spPr>
           <a:xfrm>
             <a:off x="640080" y="1874520"/>
-            <a:ext cx="10881360" cy="457200"/>
+            <a:ext cx="10881360" cy="271869"/>
           </a:xfrm>
           <a:prstGeom prst="rect">
             <a:avLst/>
@@ -10785,13 +11139,22 @@
           <a:lstStyle/>
           <a:p>
             <a:r>
-              <a:rPr sz="1350" b="0" i="0">
+              <a:rPr sz="1600" b="0" i="0" dirty="0">
                 <a:solidFill>
                   <a:srgbClr val="2B2A26"/>
                 </a:solidFill>
                 <a:latin typeface="Calibri"/>
               </a:rPr>
-              <a:t>Hundreds of captions were just measures («10», «1 cm», «8-10 mm»). A deterministic function converts everything to mm and assigns a bucket.</a:t>
+              <a:t>Hundreds</a:t>
+            </a:r>
+            <a:r>
+              <a:rPr sz="1350" b="0" i="0" dirty="0">
+                <a:solidFill>
+                  <a:srgbClr val="2B2A26"/>
+                </a:solidFill>
+                <a:latin typeface="Calibri"/>
+              </a:rPr>
+              <a:t> of captions were just measures («10», «1 cm», «8-10 mm»). A deterministic function converts everything to mm and assigns a bucket.</a:t>
             </a:r>
           </a:p>
         </p:txBody>
@@ -10837,7 +11200,7 @@
                     <a:lstStyle/>
                     <a:p>
                       <a:r>
-                        <a:rPr sz="1300" b="1" i="0">
+                        <a:rPr sz="1600" b="1" i="0">
                           <a:solidFill>
                             <a:srgbClr val="FFFFFF"/>
                           </a:solidFill>
@@ -10859,7 +11222,7 @@
                     <a:lstStyle/>
                     <a:p>
                       <a:r>
-                        <a:rPr sz="1300" b="1" i="0">
+                        <a:rPr sz="1600" b="1" i="0">
                           <a:solidFill>
                             <a:srgbClr val="FFFFFF"/>
                           </a:solidFill>
@@ -10888,7 +11251,7 @@
                     <a:lstStyle/>
                     <a:p>
                       <a:r>
-                        <a:rPr sz="1250" b="0" i="0">
+                        <a:rPr sz="1600" b="0" i="0">
                           <a:solidFill>
                             <a:srgbClr val="2B2A26"/>
                           </a:solidFill>
@@ -10910,7 +11273,7 @@
                     <a:lstStyle/>
                     <a:p>
                       <a:r>
-                        <a:rPr sz="1250" b="1" i="0">
+                        <a:rPr sz="1600" b="1" i="0">
                           <a:solidFill>
                             <a:srgbClr val="2B2A26"/>
                           </a:solidFill>
@@ -10939,7 +11302,7 @@
                     <a:lstStyle/>
                     <a:p>
                       <a:r>
-                        <a:rPr sz="1250" b="0" i="0">
+                        <a:rPr sz="1600" b="0" i="0">
                           <a:solidFill>
                             <a:srgbClr val="2B2A26"/>
                           </a:solidFill>
@@ -10961,7 +11324,7 @@
                     <a:lstStyle/>
                     <a:p>
                       <a:r>
-                        <a:rPr sz="1250" b="1" i="0">
+                        <a:rPr sz="1600" b="1" i="0">
                           <a:solidFill>
                             <a:srgbClr val="2B2A26"/>
                           </a:solidFill>
@@ -10990,7 +11353,7 @@
                     <a:lstStyle/>
                     <a:p>
                       <a:r>
-                        <a:rPr sz="1250" b="0" i="0">
+                        <a:rPr sz="1600" b="0" i="0">
                           <a:solidFill>
                             <a:srgbClr val="2B2A26"/>
                           </a:solidFill>
@@ -11012,7 +11375,7 @@
                     <a:lstStyle/>
                     <a:p>
                       <a:r>
-                        <a:rPr sz="1250" b="1" i="0">
+                        <a:rPr sz="1600" b="1" i="0">
                           <a:solidFill>
                             <a:srgbClr val="2B2A26"/>
                           </a:solidFill>
@@ -11041,7 +11404,7 @@
                     <a:lstStyle/>
                     <a:p>
                       <a:r>
-                        <a:rPr sz="1250" b="0" i="0">
+                        <a:rPr sz="1600" b="0" i="0">
                           <a:solidFill>
                             <a:srgbClr val="2B2A26"/>
                           </a:solidFill>
@@ -11063,7 +11426,7 @@
                     <a:lstStyle/>
                     <a:p>
                       <a:r>
-                        <a:rPr sz="1250" b="1" i="0">
+                        <a:rPr sz="1600" b="1" i="0">
                           <a:solidFill>
                             <a:srgbClr val="2B2A26"/>
                           </a:solidFill>
@@ -11092,7 +11455,7 @@
                     <a:lstStyle/>
                     <a:p>
                       <a:r>
-                        <a:rPr sz="1250" b="0" i="0">
+                        <a:rPr sz="1600" b="0" i="0">
                           <a:solidFill>
                             <a:srgbClr val="2B2A26"/>
                           </a:solidFill>
@@ -11114,7 +11477,7 @@
                     <a:lstStyle/>
                     <a:p>
                       <a:r>
-                        <a:rPr sz="1250" b="1" i="0">
+                        <a:rPr sz="1600" b="1" i="0" dirty="0">
                           <a:solidFill>
                             <a:srgbClr val="2B2A26"/>
                           </a:solidFill>
@@ -11210,6 +11573,11 @@
         </p:spPr>
       </p:pic>
     </p:spTree>
+    <p:extLst>
+      <p:ext uri="{BB962C8B-B14F-4D97-AF65-F5344CB8AC3E}">
+        <p14:creationId xmlns:p14="http://schemas.microsoft.com/office/powerpoint/2010/main" val="834234337"/>
+      </p:ext>
+    </p:extLst>
   </p:cSld>
   <p:clrMapOvr>
     <a:masterClrMapping/>
@@ -11316,7 +11684,7 @@
                 </a:solidFill>
                 <a:latin typeface="Calibri"/>
               </a:rPr>
-              <a:t>AI4FQC · Project 07 — GRANA Captioning</a:t>
+              <a:t>AI4FQC · Project 07: GRANA Captioning</a:t>
             </a:r>
           </a:p>
         </p:txBody>
@@ -11399,7 +11767,7 @@
         <p:spPr>
           <a:xfrm>
             <a:off x="640080" y="886968"/>
-            <a:ext cx="10881360" cy="914400"/>
+            <a:ext cx="10881360" cy="579646"/>
           </a:xfrm>
           <a:prstGeom prst="rect">
             <a:avLst/>
@@ -11413,7 +11781,7 @@
           <a:lstStyle/>
           <a:p>
             <a:r>
-              <a:rPr sz="3100" b="1" i="0">
+              <a:rPr sz="3600" b="1" i="0" dirty="0">
                 <a:solidFill>
                   <a:srgbClr val="1B334A"/>
                 </a:solidFill>
@@ -11592,7 +11960,7 @@
         <p:spPr>
           <a:xfrm>
             <a:off x="8211311" y="2157984"/>
-            <a:ext cx="3191256" cy="3474719"/>
+            <a:ext cx="3191256" cy="2867452"/>
           </a:xfrm>
           <a:prstGeom prst="rect">
             <a:avLst/>
@@ -11606,7 +11974,7 @@
           <a:lstStyle/>
           <a:p>
             <a:r>
-              <a:rPr sz="1500" b="1" i="0">
+              <a:rPr sz="2400" b="1" i="0" dirty="0">
                 <a:solidFill>
                   <a:srgbClr val="1B334A"/>
                 </a:solidFill>
@@ -11622,7 +11990,7 @@
               </a:spcBef>
             </a:pPr>
             <a:r>
-              <a:rPr sz="1000" b="1" i="0">
+              <a:rPr sz="1100" b="1" i="0" dirty="0">
                 <a:solidFill>
                   <a:srgbClr val="5B8C5A"/>
                 </a:solidFill>
@@ -11631,7 +11999,7 @@
               <a:t>● </a:t>
             </a:r>
             <a:r>
-              <a:rPr sz="1200" b="0" i="0">
+              <a:rPr sz="1600" b="0" i="0" dirty="0">
                 <a:solidFill>
                   <a:srgbClr val="2B2A26"/>
                 </a:solidFill>
@@ -11647,7 +12015,7 @@
               </a:spcBef>
             </a:pPr>
             <a:r>
-              <a:rPr sz="1000" b="1" i="0">
+              <a:rPr sz="1100" b="1" i="0" dirty="0">
                 <a:solidFill>
                   <a:srgbClr val="5B8C5A"/>
                 </a:solidFill>
@@ -11656,7 +12024,7 @@
               <a:t>● </a:t>
             </a:r>
             <a:r>
-              <a:rPr sz="1200" b="1" i="0">
+              <a:rPr sz="1600" b="1" i="0" dirty="0">
                 <a:solidFill>
                   <a:srgbClr val="2B2A26"/>
                 </a:solidFill>
@@ -11665,7 +12033,7 @@
               <a:t>39,356</a:t>
             </a:r>
             <a:r>
-              <a:rPr sz="1200" b="0" i="0">
+              <a:rPr sz="1600" b="0" i="0" dirty="0">
                 <a:solidFill>
                   <a:srgbClr val="2B2A26"/>
                 </a:solidFill>
@@ -11681,7 +12049,7 @@
               </a:spcBef>
             </a:pPr>
             <a:r>
-              <a:rPr sz="1000" b="1" i="0">
+              <a:rPr sz="1100" b="1" i="0" dirty="0">
                 <a:solidFill>
                   <a:srgbClr val="5B8C5A"/>
                 </a:solidFill>
@@ -11690,7 +12058,7 @@
               <a:t>● </a:t>
             </a:r>
             <a:r>
-              <a:rPr sz="1200" b="1" i="0">
+              <a:rPr sz="1600" b="1" i="0" dirty="0">
                 <a:solidFill>
                   <a:srgbClr val="2B2A26"/>
                 </a:solidFill>
@@ -11699,7 +12067,7 @@
               <a:t>5.1×</a:t>
             </a:r>
             <a:r>
-              <a:rPr sz="1200" b="0" i="0">
+              <a:rPr sz="1600" b="0" i="0" dirty="0">
                 <a:solidFill>
                   <a:srgbClr val="2B2A26"/>
                 </a:solidFill>
@@ -11715,7 +12083,7 @@
               </a:spcBef>
             </a:pPr>
             <a:r>
-              <a:rPr sz="1000" b="1" i="0">
+              <a:rPr sz="1100" b="1" i="0" dirty="0">
                 <a:solidFill>
                   <a:srgbClr val="5B8C5A"/>
                 </a:solidFill>
@@ -11724,7 +12092,7 @@
               <a:t>● </a:t>
             </a:r>
             <a:r>
-              <a:rPr sz="1200" b="0" i="0">
+              <a:rPr sz="1600" b="0" i="0" dirty="0">
                 <a:solidFill>
                   <a:srgbClr val="2B2A26"/>
                 </a:solidFill>
@@ -11740,7 +12108,7 @@
               </a:spcBef>
             </a:pPr>
             <a:r>
-              <a:rPr sz="1000" b="1" i="0">
+              <a:rPr sz="1100" b="1" i="0" dirty="0">
                 <a:solidFill>
                   <a:srgbClr val="5B8C5A"/>
                 </a:solidFill>
@@ -11749,7 +12117,7 @@
               <a:t>● </a:t>
             </a:r>
             <a:r>
-              <a:rPr sz="1200" b="1" i="0">
+              <a:rPr sz="1600" b="1" i="0" dirty="0">
                 <a:solidFill>
                   <a:srgbClr val="2B2A26"/>
                 </a:solidFill>
@@ -11758,7 +12126,7 @@
               <a:t>→</a:t>
             </a:r>
             <a:r>
-              <a:rPr sz="1200" b="0" i="0">
+              <a:rPr sz="1600" b="0" i="0" dirty="0">
                 <a:solidFill>
                   <a:srgbClr val="2B2A26"/>
                 </a:solidFill>
@@ -11766,10 +12134,21 @@
               </a:rPr>
               <a:t> cuts the LLM cost ~5×</a:t>
             </a:r>
+            <a:endParaRPr sz="1200" b="0" i="0" dirty="0">
+              <a:solidFill>
+                <a:srgbClr val="2B2A26"/>
+              </a:solidFill>
+              <a:latin typeface="Calibri"/>
+            </a:endParaRPr>
           </a:p>
         </p:txBody>
       </p:sp>
     </p:spTree>
+    <p:extLst>
+      <p:ext uri="{BB962C8B-B14F-4D97-AF65-F5344CB8AC3E}">
+        <p14:creationId xmlns:p14="http://schemas.microsoft.com/office/powerpoint/2010/main" val="2281007942"/>
+      </p:ext>
+    </p:extLst>
   </p:cSld>
   <p:clrMapOvr>
     <a:masterClrMapping/>
@@ -11876,7 +12255,7 @@
                 </a:solidFill>
                 <a:latin typeface="Calibri"/>
               </a:rPr>
-              <a:t>AI4FQC · Project 07 — GRANA Captioning</a:t>
+              <a:t>AI4FQC · Project 07: GRANA Captioning</a:t>
             </a:r>
           </a:p>
         </p:txBody>
@@ -11959,7 +12338,7 @@
         <p:spPr>
           <a:xfrm>
             <a:off x="640080" y="886968"/>
-            <a:ext cx="10881360" cy="914400"/>
+            <a:ext cx="10881360" cy="579646"/>
           </a:xfrm>
           <a:prstGeom prst="rect">
             <a:avLst/>
@@ -11973,13 +12352,22 @@
           <a:lstStyle/>
           <a:p>
             <a:r>
-              <a:rPr sz="3100" b="1" i="0">
+              <a:rPr sz="3600" b="1" i="0" dirty="0">
                 <a:solidFill>
                   <a:srgbClr val="1B334A"/>
                 </a:solidFill>
                 <a:latin typeface="Georgia"/>
               </a:rPr>
-              <a:t>LLM rewriting: the genuinely hard work</a:t>
+              <a:t>LLM</a:t>
+            </a:r>
+            <a:r>
+              <a:rPr sz="3100" b="1" i="0" dirty="0">
+                <a:solidFill>
+                  <a:srgbClr val="1B334A"/>
+                </a:solidFill>
+                <a:latin typeface="Georgia"/>
+              </a:rPr>
+              <a:t> rewriting: the genuinely hard work</a:t>
             </a:r>
           </a:p>
         </p:txBody>
@@ -12128,7 +12516,7 @@
         <p:spPr>
           <a:xfrm>
             <a:off x="896112" y="2066544"/>
-            <a:ext cx="3099816" cy="3017520"/>
+            <a:ext cx="3099816" cy="2077492"/>
           </a:xfrm>
           <a:prstGeom prst="rect">
             <a:avLst/>
@@ -12142,7 +12530,7 @@
           <a:lstStyle/>
           <a:p>
             <a:r>
-              <a:rPr sz="1500" b="1" i="0">
+              <a:rPr sz="2400" b="1" i="0" dirty="0">
                 <a:solidFill>
                   <a:srgbClr val="1B334A"/>
                 </a:solidFill>
@@ -12158,7 +12546,7 @@
               </a:spcBef>
             </a:pPr>
             <a:r>
-              <a:rPr sz="1000" b="1" i="0">
+              <a:rPr sz="1600" b="1" i="0" dirty="0">
                 <a:solidFill>
                   <a:srgbClr val="E0A458"/>
                 </a:solidFill>
@@ -12167,7 +12555,7 @@
               <a:t>● </a:t>
             </a:r>
             <a:r>
-              <a:rPr sz="1200" b="0" i="0">
+              <a:rPr sz="1600" b="0" i="0" dirty="0">
                 <a:solidFill>
                   <a:srgbClr val="2B2A26"/>
                 </a:solidFill>
@@ -12183,7 +12571,7 @@
               </a:spcBef>
             </a:pPr>
             <a:r>
-              <a:rPr sz="1000" b="1" i="0">
+              <a:rPr sz="1600" b="1" i="0" dirty="0">
                 <a:solidFill>
                   <a:srgbClr val="E0A458"/>
                 </a:solidFill>
@@ -12192,7 +12580,7 @@
               <a:t>● </a:t>
             </a:r>
             <a:r>
-              <a:rPr sz="1200" b="1" i="0">
+              <a:rPr sz="1600" b="1" i="0" dirty="0">
                 <a:solidFill>
                   <a:srgbClr val="2B2A26"/>
                 </a:solidFill>
@@ -12201,7 +12589,7 @@
               <a:t>11</a:t>
             </a:r>
             <a:r>
-              <a:rPr sz="1200" b="0" i="0">
+              <a:rPr sz="1600" b="0" i="0" dirty="0">
                 <a:solidFill>
                   <a:srgbClr val="2B2A26"/>
                 </a:solidFill>
@@ -12217,7 +12605,7 @@
               </a:spcBef>
             </a:pPr>
             <a:r>
-              <a:rPr sz="1000" b="1" i="0">
+              <a:rPr sz="1600" b="1" i="0" dirty="0">
                 <a:solidFill>
                   <a:srgbClr val="E0A458"/>
                 </a:solidFill>
@@ -12226,7 +12614,7 @@
               <a:t>● </a:t>
             </a:r>
             <a:r>
-              <a:rPr sz="1200" b="1" i="0">
+              <a:rPr sz="1600" b="1" i="0" dirty="0">
                 <a:solidFill>
                   <a:srgbClr val="2B2A26"/>
                 </a:solidFill>
@@ -12235,7 +12623,7 @@
               <a:t>Top-60</a:t>
             </a:r>
             <a:r>
-              <a:rPr sz="1200" b="0" i="0">
+              <a:rPr sz="1600" b="0" i="0" dirty="0">
                 <a:solidFill>
                   <a:srgbClr val="2B2A26"/>
                 </a:solidFill>
@@ -12251,7 +12639,7 @@
               </a:spcBef>
             </a:pPr>
             <a:r>
-              <a:rPr sz="1000" b="1" i="0">
+              <a:rPr sz="1600" b="1" i="0" dirty="0">
                 <a:solidFill>
                   <a:srgbClr val="E0A458"/>
                 </a:solidFill>
@@ -12260,7 +12648,7 @@
               <a:t>● </a:t>
             </a:r>
             <a:r>
-              <a:rPr sz="1200" b="1" i="0">
+              <a:rPr sz="1600" b="1" i="0" dirty="0">
                 <a:solidFill>
                   <a:srgbClr val="2B2A26"/>
                 </a:solidFill>
@@ -12269,7 +12657,7 @@
               <a:t>6</a:t>
             </a:r>
             <a:r>
-              <a:rPr sz="1200" b="0" i="0">
+              <a:rPr sz="1600" b="0" i="0" dirty="0">
                 <a:solidFill>
                   <a:srgbClr val="2B2A26"/>
                 </a:solidFill>
@@ -12379,7 +12767,7 @@
         <p:spPr>
           <a:xfrm>
             <a:off x="4553712" y="2066544"/>
-            <a:ext cx="3099816" cy="3017520"/>
+            <a:ext cx="3099816" cy="2077492"/>
           </a:xfrm>
           <a:prstGeom prst="rect">
             <a:avLst/>
@@ -12393,7 +12781,7 @@
           <a:lstStyle/>
           <a:p>
             <a:r>
-              <a:rPr sz="1500" b="1" i="0">
+              <a:rPr sz="2400" b="1" i="0" dirty="0">
                 <a:solidFill>
                   <a:srgbClr val="1B334A"/>
                 </a:solidFill>
@@ -12409,7 +12797,7 @@
               </a:spcBef>
             </a:pPr>
             <a:r>
-              <a:rPr sz="1000" b="1" i="0">
+              <a:rPr sz="1600" b="1" i="0" dirty="0">
                 <a:solidFill>
                   <a:srgbClr val="2C5F8A"/>
                 </a:solidFill>
@@ -12418,7 +12806,7 @@
               <a:t>● </a:t>
             </a:r>
             <a:r>
-              <a:rPr sz="1200" b="1" i="0">
+              <a:rPr sz="1600" b="1" i="0" dirty="0">
                 <a:solidFill>
                   <a:srgbClr val="2B2A26"/>
                 </a:solidFill>
@@ -12427,7 +12815,7 @@
               <a:t>105</a:t>
             </a:r>
             <a:r>
-              <a:rPr sz="1200" b="0" i="0">
+              <a:rPr sz="1600" b="0" i="0" dirty="0">
                 <a:solidFill>
                   <a:srgbClr val="2B2A26"/>
                 </a:solidFill>
@@ -12443,7 +12831,7 @@
               </a:spcBef>
             </a:pPr>
             <a:r>
-              <a:rPr sz="1000" b="1" i="0">
+              <a:rPr sz="1600" b="1" i="0" dirty="0">
                 <a:solidFill>
                   <a:srgbClr val="2C5F8A"/>
                 </a:solidFill>
@@ -12452,7 +12840,7 @@
               <a:t>● </a:t>
             </a:r>
             <a:r>
-              <a:rPr sz="1200" b="0" i="0">
+              <a:rPr sz="1600" b="0" i="0" dirty="0">
                 <a:solidFill>
                   <a:srgbClr val="2B2A26"/>
                 </a:solidFill>
@@ -12468,7 +12856,7 @@
               </a:spcBef>
             </a:pPr>
             <a:r>
-              <a:rPr sz="1000" b="1" i="0">
+              <a:rPr sz="1600" b="1" i="0" dirty="0">
                 <a:solidFill>
                   <a:srgbClr val="2C5F8A"/>
                 </a:solidFill>
@@ -12477,7 +12865,7 @@
               <a:t>● </a:t>
             </a:r>
             <a:r>
-              <a:rPr sz="1200" b="0" i="0">
+              <a:rPr sz="1600" b="0" i="0" dirty="0">
                 <a:solidFill>
                   <a:srgbClr val="2B2A26"/>
                 </a:solidFill>
@@ -12493,7 +12881,7 @@
               </a:spcBef>
             </a:pPr>
             <a:r>
-              <a:rPr sz="1000" b="1" i="0">
+              <a:rPr sz="1600" b="1" i="0" dirty="0">
                 <a:solidFill>
                   <a:srgbClr val="2C5F8A"/>
                 </a:solidFill>
@@ -12502,7 +12890,7 @@
               <a:t>● </a:t>
             </a:r>
             <a:r>
-              <a:rPr sz="1200" b="1" i="0">
+              <a:rPr sz="1600" b="1" i="0" dirty="0">
                 <a:solidFill>
                   <a:srgbClr val="2B2A26"/>
                 </a:solidFill>
@@ -12511,7 +12899,7 @@
               <a:t>3 workers</a:t>
             </a:r>
             <a:r>
-              <a:rPr sz="1200" b="0" i="0">
+              <a:rPr sz="1600" b="0" i="0" dirty="0">
                 <a:solidFill>
                   <a:srgbClr val="2B2A26"/>
                 </a:solidFill>
@@ -12621,7 +13009,7 @@
         <p:spPr>
           <a:xfrm>
             <a:off x="8211311" y="2066544"/>
-            <a:ext cx="3191256" cy="3017520"/>
+            <a:ext cx="3191256" cy="1985159"/>
           </a:xfrm>
           <a:prstGeom prst="rect">
             <a:avLst/>
@@ -12635,7 +13023,7 @@
           <a:lstStyle/>
           <a:p>
             <a:r>
-              <a:rPr sz="1500" b="1" i="0">
+              <a:rPr sz="2400" b="1" i="0" dirty="0">
                 <a:solidFill>
                   <a:srgbClr val="1B334A"/>
                 </a:solidFill>
@@ -12651,7 +13039,7 @@
               </a:spcBef>
             </a:pPr>
             <a:r>
-              <a:rPr sz="1000" b="1" i="0">
+              <a:rPr b="1" i="0" dirty="0">
                 <a:solidFill>
                   <a:srgbClr val="5B8C5A"/>
                 </a:solidFill>
@@ -12660,7 +13048,7 @@
               <a:t>● </a:t>
             </a:r>
             <a:r>
-              <a:rPr sz="1200" b="1" i="0">
+              <a:rPr b="1" i="0" dirty="0">
                 <a:solidFill>
                   <a:srgbClr val="2B2A26"/>
                 </a:solidFill>
@@ -12669,7 +13057,7 @@
               <a:t>7,689 / 7,689</a:t>
             </a:r>
             <a:r>
-              <a:rPr sz="1200" b="0" i="0">
+              <a:rPr b="0" i="0" dirty="0">
                 <a:solidFill>
                   <a:srgbClr val="2B2A26"/>
                 </a:solidFill>
@@ -12685,7 +13073,7 @@
               </a:spcBef>
             </a:pPr>
             <a:r>
-              <a:rPr sz="1000" b="1" i="0">
+              <a:rPr b="1" i="0" dirty="0">
                 <a:solidFill>
                   <a:srgbClr val="5B8C5A"/>
                 </a:solidFill>
@@ -12694,16 +13082,34 @@
               <a:t>● </a:t>
             </a:r>
             <a:r>
-              <a:rPr sz="1200" b="1" i="0">
+              <a:rPr b="1" i="0" dirty="0">
                 <a:solidFill>
                   <a:srgbClr val="2B2A26"/>
                 </a:solidFill>
                 <a:latin typeface="Calibri"/>
               </a:rPr>
-              <a:t>~25–30</a:t>
-            </a:r>
-            <a:r>
-              <a:rPr sz="1200" b="0" i="0">
+              <a:t>~25</a:t>
+            </a:r>
+            <a:r>
+              <a:rPr lang="it-IT" b="1" i="0" dirty="0">
+                <a:solidFill>
+                  <a:srgbClr val="2B2A26"/>
+                </a:solidFill>
+                <a:latin typeface="Calibri"/>
+              </a:rPr>
+              <a:t>-</a:t>
+            </a:r>
+            <a:r>
+              <a:rPr b="1" i="0" dirty="0">
+                <a:solidFill>
+                  <a:srgbClr val="2B2A26"/>
+                </a:solidFill>
+                <a:latin typeface="Calibri"/>
+              </a:rPr>
+              <a:t>30</a:t>
+            </a:r>
+            <a:r>
+              <a:rPr b="0" i="0" dirty="0">
                 <a:solidFill>
                   <a:srgbClr val="2B2A26"/>
                 </a:solidFill>
@@ -12719,7 +13125,7 @@
               </a:spcBef>
             </a:pPr>
             <a:r>
-              <a:rPr sz="1000" b="1" i="0">
+              <a:rPr b="1" i="0" dirty="0">
                 <a:solidFill>
                   <a:srgbClr val="5B8C5A"/>
                 </a:solidFill>
@@ -12728,7 +13134,7 @@
               <a:t>● </a:t>
             </a:r>
             <a:r>
-              <a:rPr sz="1200" b="1" i="0">
+              <a:rPr b="1" i="0" dirty="0">
                 <a:solidFill>
                   <a:srgbClr val="2B2A26"/>
                 </a:solidFill>
@@ -12737,7 +13143,7 @@
               <a:t>Haiku 4.5</a:t>
             </a:r>
             <a:r>
-              <a:rPr sz="1200" b="0" i="0">
+              <a:rPr b="0" i="0" dirty="0">
                 <a:solidFill>
                   <a:srgbClr val="2B2A26"/>
                 </a:solidFill>
@@ -12753,7 +13159,7 @@
               </a:spcBef>
             </a:pPr>
             <a:r>
-              <a:rPr sz="1000" b="1" i="0">
+              <a:rPr b="1" i="0" dirty="0">
                 <a:solidFill>
                   <a:srgbClr val="5B8C5A"/>
                 </a:solidFill>
@@ -12762,7 +13168,7 @@
               <a:t>● </a:t>
             </a:r>
             <a:r>
-              <a:rPr sz="1200" b="1" i="0">
+              <a:rPr b="1" i="0" dirty="0">
                 <a:solidFill>
                   <a:srgbClr val="2B2A26"/>
                 </a:solidFill>
@@ -12771,7 +13177,7 @@
               <a:t>~$4.50</a:t>
             </a:r>
             <a:r>
-              <a:rPr sz="1200" b="0" i="0">
+              <a:rPr b="0" i="0" dirty="0">
                 <a:solidFill>
                   <a:srgbClr val="2B2A26"/>
                 </a:solidFill>
@@ -12783,6 +13189,11 @@
         </p:txBody>
       </p:sp>
     </p:spTree>
+    <p:extLst>
+      <p:ext uri="{BB962C8B-B14F-4D97-AF65-F5344CB8AC3E}">
+        <p14:creationId xmlns:p14="http://schemas.microsoft.com/office/powerpoint/2010/main" val="2580065283"/>
+      </p:ext>
+    </p:extLst>
   </p:cSld>
   <p:clrMapOvr>
     <a:masterClrMapping/>
@@ -12889,7 +13300,7 @@
                 </a:solidFill>
                 <a:latin typeface="Calibri"/>
               </a:rPr>
-              <a:t>AI4FQC · Project 07 — GRANA Captioning</a:t>
+              <a:t>AI4FQC · Project 07: GRANA Captioning</a:t>
             </a:r>
           </a:p>
         </p:txBody>
@@ -12972,7 +13383,7 @@
         <p:spPr>
           <a:xfrm>
             <a:off x="640080" y="886968"/>
-            <a:ext cx="10881360" cy="914400"/>
+            <a:ext cx="10881360" cy="579646"/>
           </a:xfrm>
           <a:prstGeom prst="rect">
             <a:avLst/>
@@ -12986,13 +13397,31 @@
           <a:lstStyle/>
           <a:p>
             <a:r>
-              <a:rPr sz="3100" b="1" i="0">
+              <a:rPr sz="3100" b="1" i="0" dirty="0">
                 <a:solidFill>
                   <a:srgbClr val="1B334A"/>
                 </a:solidFill>
                 <a:latin typeface="Georgia"/>
               </a:rPr>
-              <a:t>Why Haiku 4.5: same job, a fraction of the cost</a:t>
+              <a:t>Why Haiku 4.5: same job, a </a:t>
+            </a:r>
+            <a:r>
+              <a:rPr sz="3600" b="1" i="0" dirty="0">
+                <a:solidFill>
+                  <a:srgbClr val="1B334A"/>
+                </a:solidFill>
+                <a:latin typeface="Georgia"/>
+              </a:rPr>
+              <a:t>fraction</a:t>
+            </a:r>
+            <a:r>
+              <a:rPr sz="3100" b="1" i="0" dirty="0">
+                <a:solidFill>
+                  <a:srgbClr val="1B334A"/>
+                </a:solidFill>
+                <a:latin typeface="Georgia"/>
+              </a:rPr>
+              <a:t> of the cost</a:t>
             </a:r>
           </a:p>
         </p:txBody>
@@ -13159,7 +13588,7 @@
         <p:spPr>
           <a:xfrm>
             <a:off x="7891272" y="2157984"/>
-            <a:ext cx="3511296" cy="3520440"/>
+            <a:ext cx="3511296" cy="1831271"/>
           </a:xfrm>
           <a:prstGeom prst="rect">
             <a:avLst/>
@@ -13173,7 +13602,7 @@
           <a:lstStyle/>
           <a:p>
             <a:r>
-              <a:rPr sz="1550" b="1" i="0">
+              <a:rPr sz="2400" b="1" i="0" dirty="0">
                 <a:solidFill>
                   <a:srgbClr val="1B334A"/>
                 </a:solidFill>
@@ -13189,7 +13618,7 @@
               </a:spcBef>
             </a:pPr>
             <a:r>
-              <a:rPr sz="1000" b="1" i="0">
+              <a:rPr sz="1600" b="1" i="0" dirty="0">
                 <a:solidFill>
                   <a:srgbClr val="5B8C5A"/>
                 </a:solidFill>
@@ -13198,7 +13627,7 @@
               <a:t>● </a:t>
             </a:r>
             <a:r>
-              <a:rPr sz="1300" b="1" i="0">
+              <a:rPr sz="1600" b="1" i="0" dirty="0">
                 <a:solidFill>
                   <a:srgbClr val="2B2A26"/>
                 </a:solidFill>
@@ -13207,7 +13636,7 @@
               <a:t>2.4×</a:t>
             </a:r>
             <a:r>
-              <a:rPr sz="1300" b="0" i="0">
+              <a:rPr sz="1600" b="0" i="0" dirty="0">
                 <a:solidFill>
                   <a:srgbClr val="2B2A26"/>
                 </a:solidFill>
@@ -13223,7 +13652,7 @@
               </a:spcBef>
             </a:pPr>
             <a:r>
-              <a:rPr sz="1000" b="1" i="0">
+              <a:rPr sz="1600" b="1" i="0" dirty="0">
                 <a:solidFill>
                   <a:srgbClr val="5B8C5A"/>
                 </a:solidFill>
@@ -13232,7 +13661,7 @@
               <a:t>● </a:t>
             </a:r>
             <a:r>
-              <a:rPr sz="1300" b="1" i="0">
+              <a:rPr sz="1600" b="1" i="0" dirty="0">
                 <a:solidFill>
                   <a:srgbClr val="2B2A26"/>
                 </a:solidFill>
@@ -13241,7 +13670,7 @@
               <a:t>12×</a:t>
             </a:r>
             <a:r>
-              <a:rPr sz="1300" b="0" i="0">
+              <a:rPr sz="1600" b="0" i="0" dirty="0">
                 <a:solidFill>
                   <a:srgbClr val="2B2A26"/>
                 </a:solidFill>
@@ -13257,7 +13686,7 @@
               </a:spcBef>
             </a:pPr>
             <a:r>
-              <a:rPr sz="1000" b="1" i="0">
+              <a:rPr sz="1600" b="1" i="0" dirty="0">
                 <a:solidFill>
                   <a:srgbClr val="5B8C5A"/>
                 </a:solidFill>
@@ -13266,7 +13695,7 @@
               <a:t>● </a:t>
             </a:r>
             <a:r>
-              <a:rPr sz="1300" b="0" i="0">
+              <a:rPr sz="1600" b="0" i="0" dirty="0">
                 <a:solidFill>
                   <a:srgbClr val="2B2A26"/>
                 </a:solidFill>
@@ -13282,7 +13711,7 @@
               </a:spcBef>
             </a:pPr>
             <a:r>
-              <a:rPr sz="1000" b="1" i="0">
+              <a:rPr sz="1600" b="1" i="0" dirty="0">
                 <a:solidFill>
                   <a:srgbClr val="5B8C5A"/>
                 </a:solidFill>
@@ -13291,7 +13720,7 @@
               <a:t>● </a:t>
             </a:r>
             <a:r>
-              <a:rPr sz="1300" b="1" i="0">
+              <a:rPr sz="1600" b="1" i="0" dirty="0">
                 <a:solidFill>
                   <a:srgbClr val="2B2A26"/>
                 </a:solidFill>
@@ -13300,7 +13729,7 @@
               <a:t>$5.60</a:t>
             </a:r>
             <a:r>
-              <a:rPr sz="1300" b="0" i="0">
+              <a:rPr sz="1600" b="0" i="0" dirty="0">
                 <a:solidFill>
                   <a:srgbClr val="2B2A26"/>
                 </a:solidFill>
@@ -13312,6 +13741,11 @@
         </p:txBody>
       </p:sp>
     </p:spTree>
+    <p:extLst>
+      <p:ext uri="{BB962C8B-B14F-4D97-AF65-F5344CB8AC3E}">
+        <p14:creationId xmlns:p14="http://schemas.microsoft.com/office/powerpoint/2010/main" val="2525160634"/>
+      </p:ext>
+    </p:extLst>
   </p:cSld>
   <p:clrMapOvr>
     <a:masterClrMapping/>
@@ -13418,7 +13852,7 @@
                 </a:solidFill>
                 <a:latin typeface="Calibri"/>
               </a:rPr>
-              <a:t>AI4FQC · Project 07 — GRANA Captioning</a:t>
+              <a:t>AI4FQC · Project 07: GRANA Captioning</a:t>
             </a:r>
           </a:p>
         </p:txBody>
@@ -13501,7 +13935,7 @@
         <p:spPr>
           <a:xfrm>
             <a:off x="640080" y="886968"/>
-            <a:ext cx="10881360" cy="914400"/>
+            <a:ext cx="10881360" cy="579646"/>
           </a:xfrm>
           <a:prstGeom prst="rect">
             <a:avLst/>
@@ -13515,7 +13949,7 @@
           <a:lstStyle/>
           <a:p>
             <a:r>
-              <a:rPr sz="3100" b="1" i="0">
+              <a:rPr sz="3600" b="1" i="0" dirty="0">
                 <a:solidFill>
                   <a:srgbClr val="1B334A"/>
                 </a:solidFill>
@@ -13612,7 +14046,7 @@
                     <a:lstStyle/>
                     <a:p>
                       <a:r>
-                        <a:rPr sz="1350" b="1" i="0">
+                        <a:rPr sz="1600" b="1" i="0" dirty="0">
                           <a:solidFill>
                             <a:srgbClr val="FFFFFF"/>
                           </a:solidFill>
@@ -13635,7 +14069,7 @@
                     <a:p>
                       <a:pPr algn="ctr"/>
                       <a:r>
-                        <a:rPr sz="1350" b="1" i="0">
+                        <a:rPr sz="1600" b="1" i="0" dirty="0">
                           <a:solidFill>
                             <a:srgbClr val="FFFFFF"/>
                           </a:solidFill>
@@ -13643,6 +14077,12 @@
                         </a:rPr>
                         <a:t>Violations</a:t>
                       </a:r>
+                      <a:endParaRPr sz="1400" b="1" i="0" dirty="0">
+                        <a:solidFill>
+                          <a:srgbClr val="FFFFFF"/>
+                        </a:solidFill>
+                        <a:latin typeface="Calibri"/>
+                      </a:endParaRPr>
                     </a:p>
                   </a:txBody>
                   <a:tcPr marL="127000" anchor="ctr">
@@ -13664,7 +14104,7 @@
                     <a:lstStyle/>
                     <a:p>
                       <a:r>
-                        <a:rPr sz="1300" b="0" i="0">
+                        <a:rPr sz="1400" b="0" i="0">
                           <a:solidFill>
                             <a:srgbClr val="2B2A26"/>
                           </a:solidFill>
@@ -13687,7 +14127,7 @@
                     <a:p>
                       <a:pPr algn="ctr"/>
                       <a:r>
-                        <a:rPr sz="1600" b="1" i="0">
+                        <a:rPr sz="1800" b="1" i="0">
                           <a:solidFill>
                             <a:srgbClr val="C88836"/>
                           </a:solidFill>
@@ -13716,7 +14156,7 @@
                     <a:lstStyle/>
                     <a:p>
                       <a:r>
-                        <a:rPr sz="1300" b="0" i="0">
+                        <a:rPr sz="1400" b="0" i="0">
                           <a:solidFill>
                             <a:srgbClr val="2B2A26"/>
                           </a:solidFill>
@@ -13739,7 +14179,7 @@
                     <a:p>
                       <a:pPr algn="ctr"/>
                       <a:r>
-                        <a:rPr sz="1600" b="1" i="0">
+                        <a:rPr sz="1800" b="1" i="0">
                           <a:solidFill>
                             <a:srgbClr val="5B8C5A"/>
                           </a:solidFill>
@@ -13768,7 +14208,7 @@
                     <a:lstStyle/>
                     <a:p>
                       <a:r>
-                        <a:rPr sz="1300" b="0" i="0">
+                        <a:rPr sz="1400" b="0" i="0">
                           <a:solidFill>
                             <a:srgbClr val="2B2A26"/>
                           </a:solidFill>
@@ -13791,7 +14231,7 @@
                     <a:p>
                       <a:pPr algn="ctr"/>
                       <a:r>
-                        <a:rPr sz="1600" b="1" i="0">
+                        <a:rPr sz="1800" b="1" i="0">
                           <a:solidFill>
                             <a:srgbClr val="5B8C5A"/>
                           </a:solidFill>
@@ -13820,7 +14260,7 @@
                     <a:lstStyle/>
                     <a:p>
                       <a:r>
-                        <a:rPr sz="1300" b="0" i="0">
+                        <a:rPr sz="1400" b="0" i="0">
                           <a:solidFill>
                             <a:srgbClr val="2B2A26"/>
                           </a:solidFill>
@@ -13843,7 +14283,7 @@
                     <a:p>
                       <a:pPr algn="ctr"/>
                       <a:r>
-                        <a:rPr sz="1600" b="1" i="0">
+                        <a:rPr sz="1800" b="1" i="0">
                           <a:solidFill>
                             <a:srgbClr val="5B8C5A"/>
                           </a:solidFill>
@@ -13872,7 +14312,7 @@
                     <a:lstStyle/>
                     <a:p>
                       <a:r>
-                        <a:rPr sz="1300" b="0" i="0">
+                        <a:rPr sz="1400" b="0" i="0">
                           <a:solidFill>
                             <a:srgbClr val="2B2A26"/>
                           </a:solidFill>
@@ -13895,7 +14335,7 @@
                     <a:p>
                       <a:pPr algn="ctr"/>
                       <a:r>
-                        <a:rPr sz="1600" b="1" i="0">
+                        <a:rPr sz="1800" b="1" i="0">
                           <a:solidFill>
                             <a:srgbClr val="5B8C5A"/>
                           </a:solidFill>
@@ -13924,7 +14364,7 @@
                     <a:lstStyle/>
                     <a:p>
                       <a:r>
-                        <a:rPr sz="1300" b="0" i="0">
+                        <a:rPr sz="1400" b="0" i="0">
                           <a:solidFill>
                             <a:srgbClr val="2B2A26"/>
                           </a:solidFill>
@@ -13947,7 +14387,7 @@
                     <a:p>
                       <a:pPr algn="ctr"/>
                       <a:r>
-                        <a:rPr sz="1600" b="1" i="0">
+                        <a:rPr sz="1800" b="1" i="0" dirty="0">
                           <a:solidFill>
                             <a:srgbClr val="5B8C5A"/>
                           </a:solidFill>
@@ -14072,7 +14512,7 @@
         <p:spPr>
           <a:xfrm>
             <a:off x="8211311" y="2112264"/>
-            <a:ext cx="3191256" cy="3337560"/>
+            <a:ext cx="3191256" cy="2687915"/>
           </a:xfrm>
           <a:prstGeom prst="rect">
             <a:avLst/>
@@ -14086,7 +14526,7 @@
           <a:lstStyle/>
           <a:p>
             <a:r>
-              <a:rPr sz="1800" b="1" i="0">
+              <a:rPr sz="2400" b="1" i="0" dirty="0">
                 <a:solidFill>
                   <a:srgbClr val="5B8C5A"/>
                 </a:solidFill>
@@ -14097,7 +14537,7 @@
           </a:p>
           <a:p>
             <a:r>
-              <a:rPr sz="1800" b="1" i="0">
+              <a:rPr sz="2400" b="1" i="0" dirty="0">
                 <a:solidFill>
                   <a:srgbClr val="5B8C5A"/>
                 </a:solidFill>
@@ -14108,20 +14548,40 @@
           </a:p>
           <a:p>
             <a:r>
-              <a:rPr sz="1300" b="0" i="0">
+              <a:rPr sz="1300" b="0" i="0" dirty="0">
                 <a:solidFill>
                   <a:srgbClr val="F7F1E3"/>
                 </a:solidFill>
                 <a:latin typeface="Calibri"/>
               </a:rPr>
               <a:t>
-The quantitative → qualitative conversion succeeded 100%: the main requirement of Step 1 is fully met.
+</a:t>
+            </a:r>
+            <a:r>
+              <a:rPr sz="1600" b="0" i="0" dirty="0">
+                <a:solidFill>
+                  <a:srgbClr val="F7F1E3"/>
+                </a:solidFill>
+                <a:latin typeface="Calibri"/>
+              </a:rPr>
+              <a:t>The quantitative → qualitative conversion succeeded 100%: the main requirement of Step 1 is fully met.
 * the only «violation» is an alternative, still-valid prefix.</a:t>
             </a:r>
+            <a:endParaRPr sz="1300" b="0" i="0" dirty="0">
+              <a:solidFill>
+                <a:srgbClr val="F7F1E3"/>
+              </a:solidFill>
+              <a:latin typeface="Calibri"/>
+            </a:endParaRPr>
           </a:p>
         </p:txBody>
       </p:sp>
     </p:spTree>
+    <p:extLst>
+      <p:ext uri="{BB962C8B-B14F-4D97-AF65-F5344CB8AC3E}">
+        <p14:creationId xmlns:p14="http://schemas.microsoft.com/office/powerpoint/2010/main" val="980919638"/>
+      </p:ext>
+    </p:extLst>
   </p:cSld>
   <p:clrMapOvr>
     <a:masterClrMapping/>
@@ -14228,7 +14688,7 @@
                 </a:solidFill>
                 <a:latin typeface="Calibri"/>
               </a:rPr>
-              <a:t>AI4FQC · Project 07 — GRANA Captioning</a:t>
+              <a:t>AI4FQC · Project 07: GRANA Captioning</a:t>
             </a:r>
           </a:p>
         </p:txBody>
@@ -14311,7 +14771,7 @@
         <p:spPr>
           <a:xfrm>
             <a:off x="640080" y="886968"/>
-            <a:ext cx="10881360" cy="914400"/>
+            <a:ext cx="10881360" cy="579646"/>
           </a:xfrm>
           <a:prstGeom prst="rect">
             <a:avLst/>
@@ -14325,7 +14785,7 @@
           <a:lstStyle/>
           <a:p>
             <a:r>
-              <a:rPr sz="3100" b="1" i="0">
+              <a:rPr sz="3600" b="1" i="0" dirty="0">
                 <a:solidFill>
                   <a:srgbClr val="1B334A"/>
                 </a:solidFill>
@@ -14504,7 +14964,7 @@
         <p:spPr>
           <a:xfrm>
             <a:off x="7891272" y="2157984"/>
-            <a:ext cx="3511296" cy="3474719"/>
+            <a:ext cx="3511296" cy="2313454"/>
           </a:xfrm>
           <a:prstGeom prst="rect">
             <a:avLst/>
@@ -14518,7 +14978,7 @@
           <a:lstStyle/>
           <a:p>
             <a:r>
-              <a:rPr sz="1500" b="1" i="0">
+              <a:rPr sz="2000" b="1" i="0" dirty="0">
                 <a:solidFill>
                   <a:srgbClr val="1B334A"/>
                 </a:solidFill>
@@ -14534,7 +14994,7 @@
               </a:spcBef>
             </a:pPr>
             <a:r>
-              <a:rPr sz="1000" b="1" i="0">
+              <a:rPr sz="1600" b="1" i="0" dirty="0">
                 <a:solidFill>
                   <a:srgbClr val="E0A458"/>
                 </a:solidFill>
@@ -14543,7 +15003,7 @@
               <a:t>● </a:t>
             </a:r>
             <a:r>
-              <a:rPr sz="1200" b="0" i="0">
+              <a:rPr sz="1600" b="0" i="0" dirty="0">
                 <a:solidFill>
                   <a:srgbClr val="2B2A26"/>
                 </a:solidFill>
@@ -14559,7 +15019,7 @@
               </a:spcBef>
             </a:pPr>
             <a:r>
-              <a:rPr sz="1000" b="1" i="0">
+              <a:rPr sz="1600" b="1" i="0" dirty="0">
                 <a:solidFill>
                   <a:srgbClr val="E0A458"/>
                 </a:solidFill>
@@ -14568,7 +15028,7 @@
               <a:t>● </a:t>
             </a:r>
             <a:r>
-              <a:rPr sz="1200" b="1" i="0">
+              <a:rPr sz="1600" b="1" i="0" dirty="0">
                 <a:solidFill>
                   <a:srgbClr val="2B2A26"/>
                 </a:solidFill>
@@ -14577,7 +15037,7 @@
               <a:t>178</a:t>
             </a:r>
             <a:r>
-              <a:rPr sz="1200" b="0" i="0">
+              <a:rPr sz="1600" b="0" i="0" dirty="0">
                 <a:solidFill>
                   <a:srgbClr val="2B2A26"/>
                 </a:solidFill>
@@ -14593,7 +15053,7 @@
               </a:spcBef>
             </a:pPr>
             <a:r>
-              <a:rPr sz="1000" b="1" i="0">
+              <a:rPr sz="1600" b="1" i="0" dirty="0">
                 <a:solidFill>
                   <a:srgbClr val="E0A458"/>
                 </a:solidFill>
@@ -14602,16 +15062,52 @@
               <a:t>● </a:t>
             </a:r>
             <a:r>
-              <a:rPr sz="1200" b="1" i="0">
+              <a:rPr sz="1600" b="1" i="0" dirty="0">
                 <a:solidFill>
                   <a:srgbClr val="2B2A26"/>
                 </a:solidFill>
                 <a:latin typeface="Calibri"/>
               </a:rPr>
-              <a:t>«marcio, putrido,»</a:t>
-            </a:r>
-            <a:r>
-              <a:rPr sz="1200" b="0" i="0">
+              <a:t>«</a:t>
+            </a:r>
+            <a:r>
+              <a:rPr sz="1600" b="1" i="0" dirty="0" err="1">
+                <a:solidFill>
+                  <a:srgbClr val="2B2A26"/>
+                </a:solidFill>
+                <a:latin typeface="Calibri"/>
+              </a:rPr>
+              <a:t>marcio</a:t>
+            </a:r>
+            <a:r>
+              <a:rPr sz="1600" b="1" i="0" dirty="0">
+                <a:solidFill>
+                  <a:srgbClr val="2B2A26"/>
+                </a:solidFill>
+                <a:latin typeface="Calibri"/>
+              </a:rPr>
+              <a:t>, </a:t>
+            </a:r>
+            <a:r>
+              <a:rPr sz="1600" b="1" i="0" dirty="0" err="1">
+                <a:solidFill>
+                  <a:srgbClr val="2B2A26"/>
+                </a:solidFill>
+                <a:latin typeface="Calibri"/>
+              </a:rPr>
+              <a:t>putrido</a:t>
+            </a:r>
+            <a:r>
+              <a:rPr sz="1600" b="1" i="0" dirty="0">
+                <a:solidFill>
+                  <a:srgbClr val="2B2A26"/>
+                </a:solidFill>
+                <a:latin typeface="Calibri"/>
+              </a:rPr>
+              <a:t>,»</a:t>
+            </a:r>
+            <a:r>
+              <a:rPr sz="1600" b="0" i="0" dirty="0">
                 <a:solidFill>
                   <a:srgbClr val="2B2A26"/>
                 </a:solidFill>
@@ -14627,7 +15123,7 @@
               </a:spcBef>
             </a:pPr>
             <a:r>
-              <a:rPr sz="1000" b="1" i="0">
+              <a:rPr sz="1600" b="1" i="0" dirty="0">
                 <a:solidFill>
                   <a:srgbClr val="E0A458"/>
                 </a:solidFill>
@@ -14636,7 +15132,7 @@
               <a:t>● </a:t>
             </a:r>
             <a:r>
-              <a:rPr sz="1200" b="1" i="0">
+              <a:rPr sz="1600" b="1" i="0" dirty="0">
                 <a:solidFill>
                   <a:srgbClr val="2B2A26"/>
                 </a:solidFill>
@@ -14645,7 +15141,7 @@
               <a:t>362 → 184</a:t>
             </a:r>
             <a:r>
-              <a:rPr sz="1200" b="0" i="0">
+              <a:rPr sz="1600" b="0" i="0" dirty="0">
                 <a:solidFill>
                   <a:srgbClr val="2B2A26"/>
                 </a:solidFill>
@@ -14661,7 +15157,7 @@
               </a:spcBef>
             </a:pPr>
             <a:r>
-              <a:rPr sz="1000" b="1" i="0">
+              <a:rPr sz="1600" b="1" i="0" dirty="0">
                 <a:solidFill>
                   <a:srgbClr val="E0A458"/>
                 </a:solidFill>
@@ -14670,7 +15166,7 @@
               <a:t>● </a:t>
             </a:r>
             <a:r>
-              <a:rPr sz="1200" b="1" i="0">
+              <a:rPr sz="1600" b="1" i="0" dirty="0">
                 <a:solidFill>
                   <a:srgbClr val="2B2A26"/>
                 </a:solidFill>
@@ -14679,7 +15175,7 @@
               <a:t>+916</a:t>
             </a:r>
             <a:r>
-              <a:rPr sz="1200" b="0" i="0">
+              <a:rPr sz="1600" b="0" i="0" dirty="0">
                 <a:solidFill>
                   <a:srgbClr val="2B2A26"/>
                 </a:solidFill>
@@ -14691,6 +15187,11 @@
         </p:txBody>
       </p:sp>
     </p:spTree>
+    <p:extLst>
+      <p:ext uri="{BB962C8B-B14F-4D97-AF65-F5344CB8AC3E}">
+        <p14:creationId xmlns:p14="http://schemas.microsoft.com/office/powerpoint/2010/main" val="684870982"/>
+      </p:ext>
+    </p:extLst>
   </p:cSld>
   <p:clrMapOvr>
     <a:masterClrMapping/>
@@ -14797,7 +15298,7 @@
                 </a:solidFill>
                 <a:latin typeface="Calibri"/>
               </a:rPr>
-              <a:t>AI4FQC · Project 07 — GRANA Captioning</a:t>
+              <a:t>AI4FQC · Project 07: GRANA Captioning</a:t>
             </a:r>
           </a:p>
         </p:txBody>
@@ -14880,7 +15381,7 @@
         <p:spPr>
           <a:xfrm>
             <a:off x="640080" y="886968"/>
-            <a:ext cx="10881360" cy="914400"/>
+            <a:ext cx="10881360" cy="579646"/>
           </a:xfrm>
           <a:prstGeom prst="rect">
             <a:avLst/>
@@ -14894,7 +15395,7 @@
           <a:lstStyle/>
           <a:p>
             <a:r>
-              <a:rPr sz="3100" b="1" i="0">
+              <a:rPr sz="3600" b="1" i="0" dirty="0">
                 <a:solidFill>
                   <a:srgbClr val="1B334A"/>
                 </a:solidFill>
@@ -15027,8 +15528,8 @@
         </p:nvSpPr>
         <p:spPr>
           <a:xfrm>
-            <a:off x="640080" y="5303520"/>
-            <a:ext cx="1965960" cy="822960"/>
+            <a:off x="640080" y="5409789"/>
+            <a:ext cx="1965960" cy="610424"/>
           </a:xfrm>
           <a:prstGeom prst="rect">
             <a:avLst/>
@@ -15043,7 +15544,7 @@
           <a:p>
             <a:pPr algn="ctr"/>
             <a:r>
-              <a:rPr sz="1900" b="1" i="0">
+              <a:rPr sz="2400" b="1" i="0" dirty="0">
                 <a:solidFill>
                   <a:srgbClr val="2C5F8A"/>
                 </a:solidFill>
@@ -15055,7 +15556,7 @@
           <a:p>
             <a:pPr algn="ctr"/>
             <a:r>
-              <a:rPr sz="1100" b="0" i="0">
+              <a:rPr sz="1400" b="0" i="0" dirty="0">
                 <a:solidFill>
                   <a:srgbClr val="2B2A26"/>
                 </a:solidFill>
@@ -15119,8 +15620,8 @@
         </p:nvSpPr>
         <p:spPr>
           <a:xfrm>
-            <a:off x="2743200" y="5303520"/>
-            <a:ext cx="1965960" cy="822960"/>
+            <a:off x="2743200" y="5409789"/>
+            <a:ext cx="1965960" cy="610424"/>
           </a:xfrm>
           <a:prstGeom prst="rect">
             <a:avLst/>
@@ -15135,7 +15636,7 @@
           <a:p>
             <a:pPr algn="ctr"/>
             <a:r>
-              <a:rPr sz="1900" b="1" i="0">
+              <a:rPr sz="2400" b="1" i="0">
                 <a:solidFill>
                   <a:srgbClr val="C88836"/>
                 </a:solidFill>
@@ -15147,7 +15648,7 @@
           <a:p>
             <a:pPr algn="ctr"/>
             <a:r>
-              <a:rPr sz="1100" b="0" i="0">
+              <a:rPr sz="1400" b="0" i="0">
                 <a:solidFill>
                   <a:srgbClr val="2B2A26"/>
                 </a:solidFill>
@@ -15211,8 +15712,8 @@
         </p:nvSpPr>
         <p:spPr>
           <a:xfrm>
-            <a:off x="4846320" y="5303520"/>
-            <a:ext cx="1965960" cy="822960"/>
+            <a:off x="4846320" y="5409789"/>
+            <a:ext cx="1965960" cy="610424"/>
           </a:xfrm>
           <a:prstGeom prst="rect">
             <a:avLst/>
@@ -15227,7 +15728,7 @@
           <a:p>
             <a:pPr algn="ctr"/>
             <a:r>
-              <a:rPr sz="1900" b="1" i="0">
+              <a:rPr sz="2400" b="1" i="0" dirty="0">
                 <a:solidFill>
                   <a:srgbClr val="5B8C5A"/>
                 </a:solidFill>
@@ -15239,7 +15740,7 @@
           <a:p>
             <a:pPr algn="ctr"/>
             <a:r>
-              <a:rPr sz="1100" b="0" i="0">
+              <a:rPr sz="1400" b="0" i="0" dirty="0">
                 <a:solidFill>
                   <a:srgbClr val="2B2A26"/>
                 </a:solidFill>
@@ -15349,7 +15850,7 @@
         <p:spPr>
           <a:xfrm>
             <a:off x="7205472" y="2066544"/>
-            <a:ext cx="4197096" cy="3931920"/>
+            <a:ext cx="4197096" cy="2918748"/>
           </a:xfrm>
           <a:prstGeom prst="rect">
             <a:avLst/>
@@ -15363,7 +15864,7 @@
           <a:lstStyle/>
           <a:p>
             <a:r>
-              <a:rPr sz="1500" b="1" i="0">
+              <a:rPr sz="2400" b="1" i="0" dirty="0">
                 <a:solidFill>
                   <a:srgbClr val="1B334A"/>
                 </a:solidFill>
@@ -15379,7 +15880,7 @@
               </a:spcBef>
             </a:pPr>
             <a:r>
-              <a:rPr sz="1000" b="1" i="0">
+              <a:rPr sz="1000" b="1" i="0" dirty="0">
                 <a:solidFill>
                   <a:srgbClr val="2C5F8A"/>
                 </a:solidFill>
@@ -15388,7 +15889,7 @@
               <a:t>● </a:t>
             </a:r>
             <a:r>
-              <a:rPr sz="1150" b="1" i="0">
+              <a:rPr sz="1600" b="1" i="0" dirty="0">
                 <a:solidFill>
                   <a:srgbClr val="2B2A26"/>
                 </a:solidFill>
@@ -15397,7 +15898,7 @@
               <a:t>captions_final.csv</a:t>
             </a:r>
             <a:r>
-              <a:rPr sz="1150" b="0" i="0">
+              <a:rPr sz="1600" b="0" i="0" dirty="0">
                 <a:solidFill>
                   <a:srgbClr val="2B2A26"/>
                 </a:solidFill>
@@ -15413,7 +15914,7 @@
               </a:spcBef>
             </a:pPr>
             <a:r>
-              <a:rPr sz="1000" b="1" i="0">
+              <a:rPr sz="1600" b="1" i="0" dirty="0">
                 <a:solidFill>
                   <a:srgbClr val="2C5F8A"/>
                 </a:solidFill>
@@ -15422,7 +15923,7 @@
               <a:t>● </a:t>
             </a:r>
             <a:r>
-              <a:rPr sz="1150" b="1" i="0">
+              <a:rPr sz="1600" b="1" i="0" dirty="0">
                 <a:solidFill>
                   <a:srgbClr val="2B2A26"/>
                 </a:solidFill>
@@ -15431,7 +15932,7 @@
               <a:t>image_caption_attribute.csv</a:t>
             </a:r>
             <a:r>
-              <a:rPr sz="1150" b="0" i="0">
+              <a:rPr sz="1600" b="0" i="0" dirty="0">
                 <a:solidFill>
                   <a:srgbClr val="2B2A26"/>
                 </a:solidFill>
@@ -15447,7 +15948,7 @@
               </a:spcBef>
             </a:pPr>
             <a:r>
-              <a:rPr sz="1000" b="1" i="0">
+              <a:rPr sz="1600" b="1" i="0" dirty="0">
                 <a:solidFill>
                   <a:srgbClr val="2C5F8A"/>
                 </a:solidFill>
@@ -15456,16 +15957,43 @@
               <a:t>● </a:t>
             </a:r>
             <a:r>
-              <a:rPr sz="1150" b="1" i="0">
+              <a:rPr sz="1600" b="1" i="0" dirty="0" err="1">
                 <a:solidFill>
                   <a:srgbClr val="2B2A26"/>
                 </a:solidFill>
                 <a:latin typeface="Calibri"/>
               </a:rPr>
-              <a:t>by_attribute/&lt;Attr&gt;.csv</a:t>
-            </a:r>
-            <a:r>
-              <a:rPr sz="1150" b="0" i="0">
+              <a:t>by_attribute</a:t>
+            </a:r>
+            <a:r>
+              <a:rPr sz="1600" b="1" i="0" dirty="0">
+                <a:solidFill>
+                  <a:srgbClr val="2B2A26"/>
+                </a:solidFill>
+                <a:latin typeface="Calibri"/>
+              </a:rPr>
+              <a:t>/&lt;</a:t>
+            </a:r>
+            <a:r>
+              <a:rPr sz="1600" b="1" i="0" dirty="0" err="1">
+                <a:solidFill>
+                  <a:srgbClr val="2B2A26"/>
+                </a:solidFill>
+                <a:latin typeface="Calibri"/>
+              </a:rPr>
+              <a:t>Attr</a:t>
+            </a:r>
+            <a:r>
+              <a:rPr sz="1600" b="1" i="0" dirty="0">
+                <a:solidFill>
+                  <a:srgbClr val="2B2A26"/>
+                </a:solidFill>
+                <a:latin typeface="Calibri"/>
+              </a:rPr>
+              <a:t>&gt;.csv</a:t>
+            </a:r>
+            <a:r>
+              <a:rPr sz="1600" b="0" i="0" dirty="0">
                 <a:solidFill>
                   <a:srgbClr val="2B2A26"/>
                 </a:solidFill>
@@ -15481,7 +16009,7 @@
               </a:spcBef>
             </a:pPr>
             <a:r>
-              <a:rPr sz="1000" b="1" i="0">
+              <a:rPr sz="1600" b="1" i="0" dirty="0">
                 <a:solidFill>
                   <a:srgbClr val="2C5F8A"/>
                 </a:solidFill>
@@ -15490,7 +16018,7 @@
               <a:t>● </a:t>
             </a:r>
             <a:r>
-              <a:rPr sz="1150" b="1" i="0">
+              <a:rPr sz="1600" b="1" i="0" dirty="0">
                 <a:solidFill>
                   <a:srgbClr val="2B2A26"/>
                 </a:solidFill>
@@ -15499,7 +16027,7 @@
               <a:t>caption</a:t>
             </a:r>
             <a:r>
-              <a:rPr sz="1150" b="0" i="0">
+              <a:rPr sz="1600" b="0" i="0" dirty="0">
                 <a:solidFill>
                   <a:srgbClr val="2B2A26"/>
                 </a:solidFill>
@@ -15515,7 +16043,7 @@
               </a:spcBef>
             </a:pPr>
             <a:r>
-              <a:rPr sz="1000" b="1" i="0">
+              <a:rPr sz="1600" b="1" i="0" dirty="0">
                 <a:solidFill>
                   <a:srgbClr val="2C5F8A"/>
                 </a:solidFill>
@@ -15524,7 +16052,7 @@
               <a:t>● </a:t>
             </a:r>
             <a:r>
-              <a:rPr sz="1150" b="1" i="0">
+              <a:rPr sz="1600" b="1" i="0" dirty="0" err="1">
                 <a:solidFill>
                   <a:srgbClr val="2B2A26"/>
                 </a:solidFill>
@@ -15533,7 +16061,7 @@
               <a:t>caption_sentence</a:t>
             </a:r>
             <a:r>
-              <a:rPr sz="1150" b="0" i="0">
+              <a:rPr sz="1600" b="0" i="0" dirty="0">
                 <a:solidFill>
                   <a:srgbClr val="2B2A26"/>
                 </a:solidFill>
@@ -15549,7 +16077,7 @@
               </a:spcBef>
             </a:pPr>
             <a:r>
-              <a:rPr sz="1000" b="1" i="0">
+              <a:rPr sz="1600" b="1" i="0" dirty="0">
                 <a:solidFill>
                   <a:srgbClr val="2C5F8A"/>
                 </a:solidFill>
@@ -15558,7 +16086,7 @@
               <a:t>● </a:t>
             </a:r>
             <a:r>
-              <a:rPr sz="1150" b="0" i="0">
+              <a:rPr sz="1600" b="0" i="0" dirty="0">
                 <a:solidFill>
                   <a:srgbClr val="2B2A26"/>
                 </a:solidFill>
@@ -15570,6 +16098,11 @@
         </p:txBody>
       </p:sp>
     </p:spTree>
+    <p:extLst>
+      <p:ext uri="{BB962C8B-B14F-4D97-AF65-F5344CB8AC3E}">
+        <p14:creationId xmlns:p14="http://schemas.microsoft.com/office/powerpoint/2010/main" val="3635043312"/>
+      </p:ext>
+    </p:extLst>
   </p:cSld>
   <p:clrMapOvr>
     <a:masterClrMapping/>
@@ -16174,7 +16707,7 @@
           <a:lstStyle/>
           <a:p>
             <a:r>
-              <a:rPr sz="4200" b="1" i="0">
+              <a:rPr sz="4200" b="1" i="0" dirty="0">
                 <a:solidFill>
                   <a:srgbClr val="F7F1E3"/>
                 </a:solidFill>
@@ -16265,6 +16798,11 @@
         </p:txBody>
       </p:sp>
     </p:spTree>
+    <p:extLst>
+      <p:ext uri="{BB962C8B-B14F-4D97-AF65-F5344CB8AC3E}">
+        <p14:creationId xmlns:p14="http://schemas.microsoft.com/office/powerpoint/2010/main" val="4232887749"/>
+      </p:ext>
+    </p:extLst>
   </p:cSld>
   <p:clrMapOvr>
     <a:masterClrMapping/>
@@ -16371,7 +16909,7 @@
                 </a:solidFill>
                 <a:latin typeface="Calibri"/>
               </a:rPr>
-              <a:t>AI4FQC · Project 07 — GRANA Captioning</a:t>
+              <a:t>AI4FQC · Project 07: GRANA Captioning</a:t>
             </a:r>
           </a:p>
         </p:txBody>
@@ -16454,7 +16992,7 @@
         <p:spPr>
           <a:xfrm>
             <a:off x="640080" y="886968"/>
-            <a:ext cx="10881360" cy="914400"/>
+            <a:ext cx="10881360" cy="579646"/>
           </a:xfrm>
           <a:prstGeom prst="rect">
             <a:avLst/>
@@ -16468,7 +17006,7 @@
           <a:lstStyle/>
           <a:p>
             <a:r>
-              <a:rPr sz="3100" b="1" i="0">
+              <a:rPr sz="3600" b="1" i="0" dirty="0">
                 <a:solidFill>
                   <a:srgbClr val="1B334A"/>
                 </a:solidFill>
@@ -16623,7 +17161,7 @@
         <p:spPr>
           <a:xfrm>
             <a:off x="896112" y="2066544"/>
-            <a:ext cx="5522976" cy="1280160"/>
+            <a:ext cx="5522976" cy="1133644"/>
           </a:xfrm>
           <a:prstGeom prst="rect">
             <a:avLst/>
@@ -16637,7 +17175,7 @@
           <a:lstStyle/>
           <a:p>
             <a:r>
-              <a:rPr sz="1500" b="1" i="0" dirty="0">
+              <a:rPr sz="2400" b="1" i="0" dirty="0">
                 <a:solidFill>
                   <a:srgbClr val="1B334A"/>
                 </a:solidFill>
@@ -16648,7 +17186,7 @@
           </a:p>
           <a:p>
             <a:r>
-              <a:rPr sz="1250" b="0" i="0" dirty="0">
+              <a:rPr sz="1600" b="0" i="0" dirty="0">
                 <a:solidFill>
                   <a:srgbClr val="2B2A26"/>
                 </a:solidFill>
@@ -16758,7 +17296,7 @@
         <p:spPr>
           <a:xfrm>
             <a:off x="896112" y="3758184"/>
-            <a:ext cx="5522976" cy="1508760"/>
+            <a:ext cx="5522976" cy="1287532"/>
           </a:xfrm>
           <a:prstGeom prst="rect">
             <a:avLst/>
@@ -16772,7 +17310,7 @@
           <a:lstStyle/>
           <a:p>
             <a:r>
-              <a:rPr sz="1500" b="1" i="0">
+              <a:rPr sz="2400" b="1" i="0" dirty="0">
                 <a:solidFill>
                   <a:srgbClr val="1B334A"/>
                 </a:solidFill>
@@ -16788,7 +17326,7 @@
               </a:spcBef>
             </a:pPr>
             <a:r>
-              <a:rPr sz="1000" b="1" i="0">
+              <a:rPr sz="1600" b="1" i="0" dirty="0">
                 <a:solidFill>
                   <a:srgbClr val="E0A458"/>
                 </a:solidFill>
@@ -16797,7 +17335,7 @@
               <a:t>● </a:t>
             </a:r>
             <a:r>
-              <a:rPr sz="1250" b="1" i="0">
+              <a:rPr sz="1600" b="1" i="0" dirty="0">
                 <a:solidFill>
                   <a:srgbClr val="2B2A26"/>
                 </a:solidFill>
@@ -16806,7 +17344,7 @@
               <a:t>Input: </a:t>
             </a:r>
             <a:r>
-              <a:rPr sz="1250" b="0" i="0">
+              <a:rPr sz="1600" b="0" i="0" dirty="0">
                 <a:solidFill>
                   <a:srgbClr val="2B2A26"/>
                 </a:solidFill>
@@ -16822,7 +17360,7 @@
               </a:spcBef>
             </a:pPr>
             <a:r>
-              <a:rPr sz="1000" b="1" i="0">
+              <a:rPr sz="1600" b="1" i="0" dirty="0">
                 <a:solidFill>
                   <a:srgbClr val="E0A458"/>
                 </a:solidFill>
@@ -16831,7 +17369,7 @@
               <a:t>● </a:t>
             </a:r>
             <a:r>
-              <a:rPr sz="1250" b="1" i="0">
+              <a:rPr sz="1600" b="1" i="0" dirty="0">
                 <a:solidFill>
                   <a:srgbClr val="2B2A26"/>
                 </a:solidFill>
@@ -16840,7 +17378,7 @@
               <a:t>Output: </a:t>
             </a:r>
             <a:r>
-              <a:rPr sz="1250" b="0" i="0">
+              <a:rPr sz="1600" b="0" i="0" dirty="0">
                 <a:solidFill>
                   <a:srgbClr val="2B2A26"/>
                 </a:solidFill>
@@ -16856,7 +17394,7 @@
               </a:spcBef>
             </a:pPr>
             <a:r>
-              <a:rPr sz="1000" b="1" i="0">
+              <a:rPr sz="1600" b="1" i="0" dirty="0">
                 <a:solidFill>
                   <a:srgbClr val="E0A458"/>
                 </a:solidFill>
@@ -16865,7 +17403,7 @@
               <a:t>● </a:t>
             </a:r>
             <a:r>
-              <a:rPr sz="1250" b="1" i="0">
+              <a:rPr sz="1600" b="1" i="0" dirty="0">
                 <a:solidFill>
                   <a:srgbClr val="2B2A26"/>
                 </a:solidFill>
@@ -16874,7 +17412,7 @@
               <a:t>Value: </a:t>
             </a:r>
             <a:r>
-              <a:rPr sz="1250" b="0" i="0">
+              <a:rPr sz="1600" b="0" i="0" dirty="0">
                 <a:solidFill>
                   <a:srgbClr val="2B2A26"/>
                 </a:solidFill>
@@ -16963,7 +17501,7 @@
         <p:spPr>
           <a:xfrm>
             <a:off x="6903720" y="5120640"/>
-            <a:ext cx="4663440" cy="320040"/>
+            <a:ext cx="4663440" cy="210314"/>
           </a:xfrm>
           <a:prstGeom prst="rect">
             <a:avLst/>
@@ -16978,18 +17516,41 @@
           <a:p>
             <a:pPr algn="ctr"/>
             <a:r>
-              <a:rPr sz="1050" b="0" i="1">
+              <a:rPr sz="1200" b="0" i="1" dirty="0">
                 <a:solidFill>
                   <a:srgbClr val="8A8A84"/>
                 </a:solidFill>
                 <a:latin typeface="Calibri"/>
               </a:rPr>
-              <a:t>Close-up of the grain — IRIS electronic visual analyzer</a:t>
+              <a:t>Close-up of the grain </a:t>
+            </a:r>
+            <a:r>
+              <a:rPr lang="it-IT" sz="1200" b="0" i="1" dirty="0">
+                <a:solidFill>
+                  <a:srgbClr val="8A8A84"/>
+                </a:solidFill>
+                <a:latin typeface="Calibri"/>
+              </a:rPr>
+              <a:t>-</a:t>
+            </a:r>
+            <a:r>
+              <a:rPr sz="1200" b="0" i="1" dirty="0">
+                <a:solidFill>
+                  <a:srgbClr val="8A8A84"/>
+                </a:solidFill>
+                <a:latin typeface="Calibri"/>
+              </a:rPr>
+              <a:t> IRIS electronic visual analyzer</a:t>
             </a:r>
           </a:p>
         </p:txBody>
       </p:sp>
     </p:spTree>
+    <p:extLst>
+      <p:ext uri="{BB962C8B-B14F-4D97-AF65-F5344CB8AC3E}">
+        <p14:creationId xmlns:p14="http://schemas.microsoft.com/office/powerpoint/2010/main" val="2825581581"/>
+      </p:ext>
+    </p:extLst>
   </p:cSld>
   <p:clrMapOvr>
     <a:masterClrMapping/>
@@ -17096,7 +17657,7 @@
                 </a:solidFill>
                 <a:latin typeface="Calibri"/>
               </a:rPr>
-              <a:t>AI4FQC · Project 07 — GRANA Captioning</a:t>
+              <a:t>AI4FQC · Project 07: GRANA Captioning</a:t>
             </a:r>
           </a:p>
         </p:txBody>
@@ -17179,7 +17740,7 @@
         <p:spPr>
           <a:xfrm>
             <a:off x="640080" y="886968"/>
-            <a:ext cx="10881360" cy="914400"/>
+            <a:ext cx="10881360" cy="579646"/>
           </a:xfrm>
           <a:prstGeom prst="rect">
             <a:avLst/>
@@ -17193,7 +17754,7 @@
           <a:lstStyle/>
           <a:p>
             <a:r>
-              <a:rPr sz="3100" b="1" i="0">
+              <a:rPr sz="3600" b="1" i="0" dirty="0">
                 <a:solidFill>
                   <a:srgbClr val="1B334A"/>
                 </a:solidFill>
@@ -17258,7 +17819,7 @@
         <p:spPr>
           <a:xfrm>
             <a:off x="868680" y="2148840"/>
-            <a:ext cx="3291840" cy="457200"/>
+            <a:ext cx="3291840" cy="456535"/>
           </a:xfrm>
           <a:prstGeom prst="rect">
             <a:avLst/>
@@ -17273,7 +17834,7 @@
           <a:p>
             <a:pPr algn="ctr"/>
             <a:r>
-              <a:rPr sz="2200" b="1" i="0">
+              <a:rPr sz="2800" b="1" i="0">
                 <a:solidFill>
                   <a:srgbClr val="E07A5F"/>
                 </a:solidFill>
@@ -17325,7 +17886,7 @@
           <a:lstStyle/>
           <a:p>
             <a:pPr algn="ctr"/>
-            <a:endParaRPr/>
+            <a:endParaRPr sz="2400"/>
           </a:p>
         </p:txBody>
       </p:sp>
@@ -17370,7 +17931,7 @@
           <a:lstStyle/>
           <a:p>
             <a:pPr algn="ctr"/>
-            <a:endParaRPr/>
+            <a:endParaRPr sz="2400"/>
           </a:p>
         </p:txBody>
       </p:sp>
@@ -17382,8 +17943,8 @@
         </p:nvSpPr>
         <p:spPr>
           <a:xfrm>
-            <a:off x="1005840" y="2697480"/>
-            <a:ext cx="3017520" cy="960120"/>
+            <a:off x="1005840" y="2833856"/>
+            <a:ext cx="3017520" cy="687368"/>
           </a:xfrm>
           <a:prstGeom prst="rect">
             <a:avLst/>
@@ -17398,7 +17959,7 @@
           <a:p>
             <a:pPr algn="ctr"/>
             <a:r>
-              <a:rPr sz="1000" b="1" i="0" spc="150">
+              <a:rPr sz="1100" b="1" i="0" spc="150">
                 <a:solidFill>
                   <a:srgbClr val="2C5F8A"/>
                 </a:solidFill>
@@ -17410,7 +17971,7 @@
           <a:p>
             <a:pPr algn="ctr"/>
             <a:r>
-              <a:rPr sz="1300" b="1" i="0">
+              <a:rPr sz="1600" b="1" i="0">
                 <a:solidFill>
                   <a:srgbClr val="1B334A"/>
                 </a:solidFill>
@@ -17422,7 +17983,7 @@
           <a:p>
             <a:pPr algn="ctr"/>
             <a:r>
-              <a:rPr sz="1300" b="1" i="0">
+              <a:rPr sz="1600" b="1" i="0">
                 <a:solidFill>
                   <a:srgbClr val="1B334A"/>
                 </a:solidFill>
@@ -17509,7 +18070,7 @@
           <a:lstStyle/>
           <a:p>
             <a:pPr algn="ctr"/>
-            <a:endParaRPr/>
+            <a:endParaRPr sz="2400"/>
           </a:p>
         </p:txBody>
       </p:sp>
@@ -17554,7 +18115,7 @@
           <a:lstStyle/>
           <a:p>
             <a:pPr algn="ctr"/>
-            <a:endParaRPr/>
+            <a:endParaRPr sz="2400"/>
           </a:p>
         </p:txBody>
       </p:sp>
@@ -17566,8 +18127,8 @@
         </p:nvSpPr>
         <p:spPr>
           <a:xfrm>
-            <a:off x="1005840" y="4114800"/>
-            <a:ext cx="3017520" cy="960120"/>
+            <a:off x="1005840" y="4251176"/>
+            <a:ext cx="3017520" cy="687368"/>
           </a:xfrm>
           <a:prstGeom prst="rect">
             <a:avLst/>
@@ -17582,7 +18143,7 @@
           <a:p>
             <a:pPr algn="ctr"/>
             <a:r>
-              <a:rPr sz="1000" b="1" i="0" spc="150">
+              <a:rPr sz="1100" b="1" i="0" spc="150">
                 <a:solidFill>
                   <a:srgbClr val="C88836"/>
                 </a:solidFill>
@@ -17594,7 +18155,7 @@
           <a:p>
             <a:pPr algn="ctr"/>
             <a:r>
-              <a:rPr sz="1250" b="1" i="0">
+              <a:rPr sz="1600" b="1" i="0">
                 <a:solidFill>
                   <a:srgbClr val="1B334A"/>
                 </a:solidFill>
@@ -17606,7 +18167,7 @@
           <a:p>
             <a:pPr algn="ctr"/>
             <a:r>
-              <a:rPr sz="1250" b="1" i="0">
+              <a:rPr sz="1600" b="1" i="0">
                 <a:solidFill>
                   <a:srgbClr val="1B334A"/>
                 </a:solidFill>
@@ -17626,7 +18187,7 @@
         <p:spPr>
           <a:xfrm>
             <a:off x="4663440" y="2148840"/>
-            <a:ext cx="3291840" cy="457200"/>
+            <a:ext cx="3291840" cy="456535"/>
           </a:xfrm>
           <a:prstGeom prst="rect">
             <a:avLst/>
@@ -17641,7 +18202,7 @@
           <a:p>
             <a:pPr algn="ctr"/>
             <a:r>
-              <a:rPr sz="2200" b="1" i="0">
+              <a:rPr sz="2800" b="1" i="0">
                 <a:solidFill>
                   <a:srgbClr val="3D7068"/>
                 </a:solidFill>
@@ -17693,7 +18254,7 @@
           <a:lstStyle/>
           <a:p>
             <a:pPr algn="ctr"/>
-            <a:endParaRPr/>
+            <a:endParaRPr sz="2400"/>
           </a:p>
         </p:txBody>
       </p:sp>
@@ -17738,7 +18299,7 @@
           <a:lstStyle/>
           <a:p>
             <a:pPr algn="ctr"/>
-            <a:endParaRPr/>
+            <a:endParaRPr sz="2400"/>
           </a:p>
         </p:txBody>
       </p:sp>
@@ -17750,8 +18311,8 @@
         </p:nvSpPr>
         <p:spPr>
           <a:xfrm>
-            <a:off x="4800600" y="2697480"/>
-            <a:ext cx="3017520" cy="960120"/>
+            <a:off x="4800600" y="2833856"/>
+            <a:ext cx="3017520" cy="687368"/>
           </a:xfrm>
           <a:prstGeom prst="rect">
             <a:avLst/>
@@ -17766,7 +18327,7 @@
           <a:p>
             <a:pPr algn="ctr"/>
             <a:r>
-              <a:rPr sz="1000" b="1" i="0" spc="150">
+              <a:rPr sz="1100" b="1" i="0" spc="150">
                 <a:solidFill>
                   <a:srgbClr val="2C5F8A"/>
                 </a:solidFill>
@@ -17778,7 +18339,7 @@
           <a:p>
             <a:pPr algn="ctr"/>
             <a:r>
-              <a:rPr sz="1300" b="1" i="0">
+              <a:rPr sz="1600" b="1" i="0">
                 <a:solidFill>
                   <a:srgbClr val="1B334A"/>
                 </a:solidFill>
@@ -17790,7 +18351,7 @@
           <a:p>
             <a:pPr algn="ctr"/>
             <a:r>
-              <a:rPr sz="1300" b="1" i="0">
+              <a:rPr sz="1600" b="1" i="0">
                 <a:solidFill>
                   <a:srgbClr val="1B334A"/>
                 </a:solidFill>
@@ -17877,7 +18438,7 @@
           <a:lstStyle/>
           <a:p>
             <a:pPr algn="ctr"/>
-            <a:endParaRPr/>
+            <a:endParaRPr sz="2400"/>
           </a:p>
         </p:txBody>
       </p:sp>
@@ -17922,7 +18483,7 @@
           <a:lstStyle/>
           <a:p>
             <a:pPr algn="ctr"/>
-            <a:endParaRPr/>
+            <a:endParaRPr sz="2400"/>
           </a:p>
         </p:txBody>
       </p:sp>
@@ -17934,8 +18495,8 @@
         </p:nvSpPr>
         <p:spPr>
           <a:xfrm>
-            <a:off x="4800600" y="4114800"/>
-            <a:ext cx="3017520" cy="960120"/>
+            <a:off x="4800600" y="4251176"/>
+            <a:ext cx="3017520" cy="687368"/>
           </a:xfrm>
           <a:prstGeom prst="rect">
             <a:avLst/>
@@ -17950,7 +18511,7 @@
           <a:p>
             <a:pPr algn="ctr"/>
             <a:r>
-              <a:rPr sz="1000" b="1" i="0" spc="150">
+              <a:rPr sz="1100" b="1" i="0" spc="150">
                 <a:solidFill>
                   <a:srgbClr val="C88836"/>
                 </a:solidFill>
@@ -17962,7 +18523,7 @@
           <a:p>
             <a:pPr algn="ctr"/>
             <a:r>
-              <a:rPr sz="1250" b="1" i="0">
+              <a:rPr sz="1600" b="1" i="0">
                 <a:solidFill>
                   <a:srgbClr val="1B334A"/>
                 </a:solidFill>
@@ -17974,7 +18535,7 @@
           <a:p>
             <a:pPr algn="ctr"/>
             <a:r>
-              <a:rPr sz="1250" b="1" i="0">
+              <a:rPr sz="1600" b="1" i="0">
                 <a:solidFill>
                   <a:srgbClr val="1B334A"/>
                 </a:solidFill>
@@ -17994,7 +18555,7 @@
         <p:spPr>
           <a:xfrm>
             <a:off x="8458200" y="2148840"/>
-            <a:ext cx="3291840" cy="457200"/>
+            <a:ext cx="3291840" cy="456535"/>
           </a:xfrm>
           <a:prstGeom prst="rect">
             <a:avLst/>
@@ -18009,7 +18570,7 @@
           <a:p>
             <a:pPr algn="ctr"/>
             <a:r>
-              <a:rPr sz="2200" b="1" i="0">
+              <a:rPr sz="2800" b="1" i="0" dirty="0">
                 <a:solidFill>
                   <a:srgbClr val="8A5082"/>
                 </a:solidFill>
@@ -18061,7 +18622,7 @@
           <a:lstStyle/>
           <a:p>
             <a:pPr algn="ctr"/>
-            <a:endParaRPr/>
+            <a:endParaRPr sz="2400"/>
           </a:p>
         </p:txBody>
       </p:sp>
@@ -18106,7 +18667,7 @@
           <a:lstStyle/>
           <a:p>
             <a:pPr algn="ctr"/>
-            <a:endParaRPr/>
+            <a:endParaRPr sz="2400"/>
           </a:p>
         </p:txBody>
       </p:sp>
@@ -18118,8 +18679,8 @@
         </p:nvSpPr>
         <p:spPr>
           <a:xfrm>
-            <a:off x="8595360" y="2697480"/>
-            <a:ext cx="3017520" cy="960120"/>
+            <a:off x="8595360" y="2833856"/>
+            <a:ext cx="3017520" cy="687368"/>
           </a:xfrm>
           <a:prstGeom prst="rect">
             <a:avLst/>
@@ -18134,7 +18695,7 @@
           <a:p>
             <a:pPr algn="ctr"/>
             <a:r>
-              <a:rPr sz="1000" b="1" i="0" spc="150">
+              <a:rPr sz="1100" b="1" i="0" spc="150">
                 <a:solidFill>
                   <a:srgbClr val="2C5F8A"/>
                 </a:solidFill>
@@ -18146,7 +18707,7 @@
           <a:p>
             <a:pPr algn="ctr"/>
             <a:r>
-              <a:rPr sz="1300" b="1" i="0">
+              <a:rPr sz="1600" b="1" i="0">
                 <a:solidFill>
                   <a:srgbClr val="1B334A"/>
                 </a:solidFill>
@@ -18158,7 +18719,7 @@
           <a:p>
             <a:pPr algn="ctr"/>
             <a:r>
-              <a:rPr sz="1300" b="1" i="0">
+              <a:rPr sz="1600" b="1" i="0">
                 <a:solidFill>
                   <a:srgbClr val="1B334A"/>
                 </a:solidFill>
@@ -18245,7 +18806,7 @@
           <a:lstStyle/>
           <a:p>
             <a:pPr algn="ctr"/>
-            <a:endParaRPr/>
+            <a:endParaRPr sz="2400"/>
           </a:p>
         </p:txBody>
       </p:sp>
@@ -18290,7 +18851,7 @@
           <a:lstStyle/>
           <a:p>
             <a:pPr algn="ctr"/>
-            <a:endParaRPr/>
+            <a:endParaRPr sz="2400"/>
           </a:p>
         </p:txBody>
       </p:sp>
@@ -18302,8 +18863,8 @@
         </p:nvSpPr>
         <p:spPr>
           <a:xfrm>
-            <a:off x="8595360" y="4114800"/>
-            <a:ext cx="3017520" cy="960120"/>
+            <a:off x="8595360" y="4251176"/>
+            <a:ext cx="3017520" cy="687368"/>
           </a:xfrm>
           <a:prstGeom prst="rect">
             <a:avLst/>
@@ -18318,7 +18879,7 @@
           <a:p>
             <a:pPr algn="ctr"/>
             <a:r>
-              <a:rPr sz="1000" b="1" i="0" spc="150">
+              <a:rPr sz="1100" b="1" i="0" spc="150">
                 <a:solidFill>
                   <a:srgbClr val="C88836"/>
                 </a:solidFill>
@@ -18330,7 +18891,7 @@
           <a:p>
             <a:pPr algn="ctr"/>
             <a:r>
-              <a:rPr sz="1250" b="1" i="0">
+              <a:rPr sz="1600" b="1" i="0">
                 <a:solidFill>
                   <a:srgbClr val="1B334A"/>
                 </a:solidFill>
@@ -18342,7 +18903,7 @@
           <a:p>
             <a:pPr algn="ctr"/>
             <a:r>
-              <a:rPr sz="1250" b="1" i="0">
+              <a:rPr sz="1600" b="1" i="0">
                 <a:solidFill>
                   <a:srgbClr val="1B334A"/>
                 </a:solidFill>
@@ -18362,7 +18923,7 @@
         <p:spPr>
           <a:xfrm>
             <a:off x="868680" y="5303520"/>
-            <a:ext cx="7406640" cy="365760"/>
+            <a:ext cx="7406640" cy="271869"/>
           </a:xfrm>
           <a:prstGeom prst="rect">
             <a:avLst/>
@@ -18377,7 +18938,7 @@
           <a:p>
             <a:pPr algn="ctr"/>
             <a:r>
-              <a:rPr sz="1250" b="1" i="0">
+              <a:rPr sz="1600" b="1" i="0">
                 <a:solidFill>
                   <a:srgbClr val="C1492E"/>
                 </a:solidFill>
@@ -18397,7 +18958,7 @@
         <p:spPr>
           <a:xfrm>
             <a:off x="868680" y="5715000"/>
-            <a:ext cx="10515600" cy="457200"/>
+            <a:ext cx="10515600" cy="271869"/>
           </a:xfrm>
           <a:prstGeom prst="rect">
             <a:avLst/>
@@ -18412,7 +18973,7 @@
           <a:p>
             <a:pPr algn="ctr"/>
             <a:r>
-              <a:rPr sz="1200" b="0" i="1">
+              <a:rPr sz="1600" b="0" i="1">
                 <a:solidFill>
                   <a:srgbClr val="2B2A26"/>
                 </a:solidFill>
@@ -18424,6 +18985,11 @@
         </p:txBody>
       </p:sp>
     </p:spTree>
+    <p:extLst>
+      <p:ext uri="{BB962C8B-B14F-4D97-AF65-F5344CB8AC3E}">
+        <p14:creationId xmlns:p14="http://schemas.microsoft.com/office/powerpoint/2010/main" val="205977746"/>
+      </p:ext>
+    </p:extLst>
   </p:cSld>
   <p:clrMapOvr>
     <a:masterClrMapping/>
@@ -18530,7 +19096,7 @@
                 </a:solidFill>
                 <a:latin typeface="Calibri"/>
               </a:rPr>
-              <a:t>AI4FQC · Project 07 — GRANA Captioning</a:t>
+              <a:t>AI4FQC · Project 07: GRANA Captioning</a:t>
             </a:r>
           </a:p>
         </p:txBody>
@@ -19424,7 +19990,7 @@
         <p:spPr>
           <a:xfrm>
             <a:off x="896112" y="4215384"/>
-            <a:ext cx="6528816" cy="1508760"/>
+            <a:ext cx="6528816" cy="1179810"/>
           </a:xfrm>
           <a:prstGeom prst="rect">
             <a:avLst/>
@@ -19438,7 +20004,7 @@
           <a:lstStyle/>
           <a:p>
             <a:r>
-              <a:rPr sz="1450" b="1" i="0">
+              <a:rPr sz="2000" b="1" i="0" dirty="0">
                 <a:solidFill>
                   <a:srgbClr val="1B334A"/>
                 </a:solidFill>
@@ -19454,7 +20020,7 @@
               </a:spcBef>
             </a:pPr>
             <a:r>
-              <a:rPr sz="1000" b="1" i="0">
+              <a:rPr sz="1500" b="1" i="0" dirty="0">
                 <a:solidFill>
                   <a:srgbClr val="2C5F8A"/>
                 </a:solidFill>
@@ -19463,7 +20029,7 @@
               <a:t>● </a:t>
             </a:r>
             <a:r>
-              <a:rPr sz="1200" b="1" i="0">
+              <a:rPr sz="1500" b="1" i="0" dirty="0">
                 <a:solidFill>
                   <a:srgbClr val="2B2A26"/>
                 </a:solidFill>
@@ -19472,13 +20038,49 @@
               <a:t>Sample-disjoint split:</a:t>
             </a:r>
             <a:r>
-              <a:rPr sz="1200" b="0" i="0">
+              <a:rPr sz="1500" b="0" i="0" dirty="0">
                 <a:solidFill>
                   <a:srgbClr val="2B2A26"/>
                 </a:solidFill>
                 <a:latin typeface="Calibri"/>
               </a:rPr>
-              <a:t> 674 train / 143 val / 147 test — no leak</a:t>
+              <a:t> 674 train / 143 </a:t>
+            </a:r>
+            <a:r>
+              <a:rPr sz="1500" b="0" i="0" dirty="0" err="1">
+                <a:solidFill>
+                  <a:srgbClr val="2B2A26"/>
+                </a:solidFill>
+                <a:latin typeface="Calibri"/>
+              </a:rPr>
+              <a:t>val</a:t>
+            </a:r>
+            <a:r>
+              <a:rPr sz="1500" b="0" i="0" dirty="0">
+                <a:solidFill>
+                  <a:srgbClr val="2B2A26"/>
+                </a:solidFill>
+                <a:latin typeface="Calibri"/>
+              </a:rPr>
+              <a:t> / 147 test</a:t>
+            </a:r>
+            <a:r>
+              <a:rPr lang="it-IT" sz="1500" b="0" i="0" dirty="0">
+                <a:solidFill>
+                  <a:srgbClr val="2B2A26"/>
+                </a:solidFill>
+                <a:latin typeface="Calibri"/>
+              </a:rPr>
+              <a:t>,</a:t>
+            </a:r>
+            <a:r>
+              <a:rPr sz="1500" b="0" i="0" dirty="0">
+                <a:solidFill>
+                  <a:srgbClr val="2B2A26"/>
+                </a:solidFill>
+                <a:latin typeface="Calibri"/>
+              </a:rPr>
+              <a:t> no leak</a:t>
             </a:r>
           </a:p>
           <a:p>
@@ -19488,7 +20090,7 @@
               </a:spcBef>
             </a:pPr>
             <a:r>
-              <a:rPr sz="1000" b="1" i="0">
+              <a:rPr sz="1500" b="1" i="0" dirty="0">
                 <a:solidFill>
                   <a:srgbClr val="2C5F8A"/>
                 </a:solidFill>
@@ -19497,7 +20099,7 @@
               <a:t>● </a:t>
             </a:r>
             <a:r>
-              <a:rPr sz="1200" b="1" i="0">
+              <a:rPr sz="1500" b="1" i="0" dirty="0">
                 <a:solidFill>
                   <a:srgbClr val="2B2A26"/>
                 </a:solidFill>
@@ -19506,7 +20108,7 @@
               <a:t>Nucleus sampling</a:t>
             </a:r>
             <a:r>
-              <a:rPr sz="1200" b="0" i="0">
+              <a:rPr sz="1500" b="0" i="0" dirty="0">
                 <a:solidFill>
                   <a:srgbClr val="2B2A26"/>
                 </a:solidFill>
@@ -19522,7 +20124,7 @@
               </a:spcBef>
             </a:pPr>
             <a:r>
-              <a:rPr sz="1000" b="1" i="0">
+              <a:rPr sz="1500" b="1" i="0" dirty="0">
                 <a:solidFill>
                   <a:srgbClr val="2C5F8A"/>
                 </a:solidFill>
@@ -19531,13 +20133,31 @@
               <a:t>● </a:t>
             </a:r>
             <a:r>
-              <a:rPr sz="1200" b="0" i="0">
+              <a:rPr sz="1500" b="0" i="0" dirty="0">
                 <a:solidFill>
                   <a:srgbClr val="2B2A26"/>
                 </a:solidFill>
                 <a:latin typeface="Calibri"/>
               </a:rPr>
-              <a:t>Healthy curves: no overfitting, NaN or collapse</a:t>
+              <a:t>Healthy curves: no overfitting, </a:t>
+            </a:r>
+            <a:r>
+              <a:rPr sz="1500" b="0" i="0" dirty="0" err="1">
+                <a:solidFill>
+                  <a:srgbClr val="2B2A26"/>
+                </a:solidFill>
+                <a:latin typeface="Calibri"/>
+              </a:rPr>
+              <a:t>NaN</a:t>
+            </a:r>
+            <a:r>
+              <a:rPr sz="1500" b="0" i="0" dirty="0">
+                <a:solidFill>
+                  <a:srgbClr val="2B2A26"/>
+                </a:solidFill>
+                <a:latin typeface="Calibri"/>
+              </a:rPr>
+              <a:t> or collapse</a:t>
             </a:r>
           </a:p>
         </p:txBody>
@@ -19641,7 +20261,7 @@
         <p:spPr>
           <a:xfrm>
             <a:off x="7982711" y="2066544"/>
-            <a:ext cx="3419856" cy="3657600"/>
+            <a:ext cx="3419856" cy="2610971"/>
           </a:xfrm>
           <a:prstGeom prst="rect">
             <a:avLst/>
@@ -19655,7 +20275,7 @@
           <a:lstStyle/>
           <a:p>
             <a:r>
-              <a:rPr sz="1500" b="1" i="0">
+              <a:rPr sz="2400" b="1" i="0" dirty="0">
                 <a:solidFill>
                   <a:srgbClr val="E0A458"/>
                 </a:solidFill>
@@ -19666,20 +20286,61 @@
           </a:p>
           <a:p>
             <a:r>
-              <a:rPr sz="1250" b="0" i="0">
+              <a:rPr sz="1600" b="0" i="0" dirty="0">
                 <a:solidFill>
                   <a:srgbClr val="F7F1E3"/>
                 </a:solidFill>
                 <a:latin typeface="Calibri"/>
               </a:rPr>
-              <a:t>The enable_gpu flag in the metadata does NOT actually enable the GPU: it must be turned on manually.
-The free tier tends to the P100 (sm_60): the preinstalled PyTorch must be reinstalled from a cu118 wheel.
+              <a:t>The </a:t>
+            </a:r>
+            <a:r>
+              <a:rPr sz="1600" b="0" i="0" dirty="0" err="1">
+                <a:solidFill>
+                  <a:srgbClr val="F7F1E3"/>
+                </a:solidFill>
+                <a:latin typeface="Calibri"/>
+              </a:rPr>
+              <a:t>enable_gpu</a:t>
+            </a:r>
+            <a:r>
+              <a:rPr sz="1600" b="0" i="0" dirty="0">
+                <a:solidFill>
+                  <a:srgbClr val="F7F1E3"/>
+                </a:solidFill>
+                <a:latin typeface="Calibri"/>
+              </a:rPr>
+              <a:t> flag in the metadata does NOT actually enable the GPU: it must be turned on manually.
+The free tier tends to the P100 (sm_60): the preinstalled </a:t>
+            </a:r>
+            <a:r>
+              <a:rPr sz="1600" b="0" i="0" dirty="0" err="1">
+                <a:solidFill>
+                  <a:srgbClr val="F7F1E3"/>
+                </a:solidFill>
+                <a:latin typeface="Calibri"/>
+              </a:rPr>
+              <a:t>PyTorch</a:t>
+            </a:r>
+            <a:r>
+              <a:rPr sz="1600" b="0" i="0" dirty="0">
+                <a:solidFill>
+                  <a:srgbClr val="F7F1E3"/>
+                </a:solidFill>
+                <a:latin typeface="Calibri"/>
+              </a:rPr>
+              <a:t> must be reinstalled from a cu118 wheel.
 All training: free T4 / P100 GPU.</a:t>
             </a:r>
           </a:p>
         </p:txBody>
       </p:sp>
     </p:spTree>
+    <p:extLst>
+      <p:ext uri="{BB962C8B-B14F-4D97-AF65-F5344CB8AC3E}">
+        <p14:creationId xmlns:p14="http://schemas.microsoft.com/office/powerpoint/2010/main" val="1593879062"/>
+      </p:ext>
+    </p:extLst>
   </p:cSld>
   <p:clrMapOvr>
     <a:masterClrMapping/>
@@ -19786,7 +20447,7 @@
                 </a:solidFill>
                 <a:latin typeface="Calibri"/>
               </a:rPr>
-              <a:t>AI4FQC · Project 07 — GRANA Captioning</a:t>
+              <a:t>AI4FQC · Project 07: GRANA Captioning</a:t>
             </a:r>
           </a:p>
         </p:txBody>
@@ -19869,7 +20530,7 @@
         <p:spPr>
           <a:xfrm>
             <a:off x="640080" y="886968"/>
-            <a:ext cx="10881360" cy="914400"/>
+            <a:ext cx="11328144" cy="518091"/>
           </a:xfrm>
           <a:prstGeom prst="rect">
             <a:avLst/>
@@ -19883,7 +20544,7 @@
           <a:lstStyle/>
           <a:p>
             <a:r>
-              <a:rPr sz="3100" b="1" i="0">
+              <a:rPr sz="3200" b="1" i="0" dirty="0">
                 <a:solidFill>
                   <a:srgbClr val="1B334A"/>
                 </a:solidFill>
@@ -20062,7 +20723,7 @@
         <p:spPr>
           <a:xfrm>
             <a:off x="8485632" y="2157984"/>
-            <a:ext cx="2916936" cy="3474719"/>
+            <a:ext cx="2916936" cy="2816156"/>
           </a:xfrm>
           <a:prstGeom prst="rect">
             <a:avLst/>
@@ -20076,7 +20737,7 @@
           <a:lstStyle/>
           <a:p>
             <a:r>
-              <a:rPr sz="1500" b="1" i="0">
+              <a:rPr sz="2400" b="1" i="0" dirty="0">
                 <a:solidFill>
                   <a:srgbClr val="1B334A"/>
                 </a:solidFill>
@@ -20092,7 +20753,7 @@
               </a:spcBef>
             </a:pPr>
             <a:r>
-              <a:rPr sz="1000" b="1" i="0">
+              <a:rPr sz="1600" b="1" i="0" dirty="0">
                 <a:solidFill>
                   <a:srgbClr val="2C5F8A"/>
                 </a:solidFill>
@@ -20101,7 +20762,7 @@
               <a:t>● </a:t>
             </a:r>
             <a:r>
-              <a:rPr sz="1200" b="1" i="0">
+              <a:rPr sz="1600" b="1" i="0" dirty="0">
                 <a:solidFill>
                   <a:srgbClr val="2B2A26"/>
                 </a:solidFill>
@@ -20110,14 +20771,29 @@
               <a:t>Win:</a:t>
             </a:r>
             <a:r>
-              <a:rPr sz="1200" b="0" i="0">
+              <a:rPr sz="1600" b="0" i="0" dirty="0">
                 <a:solidFill>
                   <a:srgbClr val="2B2A26"/>
                 </a:solidFill>
                 <a:latin typeface="Calibri"/>
               </a:rPr>
-              <a:t> Structure (+0.128), Smell, Texture, Colour</a:t>
-            </a:r>
+              <a:t> Structure (+0.128), Smell, Texture, </a:t>
+            </a:r>
+            <a:r>
+              <a:rPr sz="1600" b="0" i="0" dirty="0" err="1">
+                <a:solidFill>
+                  <a:srgbClr val="2B2A26"/>
+                </a:solidFill>
+                <a:latin typeface="Calibri"/>
+              </a:rPr>
+              <a:t>Colour</a:t>
+            </a:r>
+            <a:endParaRPr sz="1600" b="0" i="0" dirty="0">
+              <a:solidFill>
+                <a:srgbClr val="2B2A26"/>
+              </a:solidFill>
+              <a:latin typeface="Calibri"/>
+            </a:endParaRPr>
           </a:p>
           <a:p>
             <a:pPr>
@@ -20126,7 +20802,7 @@
               </a:spcBef>
             </a:pPr>
             <a:r>
-              <a:rPr sz="1000" b="1" i="0">
+              <a:rPr sz="1600" b="1" i="0" dirty="0">
                 <a:solidFill>
                   <a:srgbClr val="2C5F8A"/>
                 </a:solidFill>
@@ -20135,7 +20811,7 @@
               <a:t>● </a:t>
             </a:r>
             <a:r>
-              <a:rPr sz="1200" b="1" i="0">
+              <a:rPr sz="1600" b="1" i="0" dirty="0">
                 <a:solidFill>
                   <a:srgbClr val="2B2A26"/>
                 </a:solidFill>
@@ -20144,7 +20820,7 @@
               <a:t>Tie/lose:</a:t>
             </a:r>
             <a:r>
-              <a:rPr sz="1200" b="0" i="0">
+              <a:rPr sz="1600" b="0" i="0" dirty="0">
                 <a:solidFill>
                   <a:srgbClr val="2B2A26"/>
                 </a:solidFill>
@@ -20160,7 +20836,7 @@
               </a:spcBef>
             </a:pPr>
             <a:r>
-              <a:rPr sz="1000" b="1" i="0">
+              <a:rPr sz="1600" b="1" i="0" dirty="0">
                 <a:solidFill>
                   <a:srgbClr val="2C5F8A"/>
                 </a:solidFill>
@@ -20169,7 +20845,7 @@
               <a:t>● </a:t>
             </a:r>
             <a:r>
-              <a:rPr sz="1200" b="0" i="0">
+              <a:rPr sz="1600" b="0" i="0" dirty="0">
                 <a:solidFill>
                   <a:srgbClr val="2B2A26"/>
                 </a:solidFill>
@@ -20185,7 +20861,7 @@
               </a:spcBef>
             </a:pPr>
             <a:r>
-              <a:rPr sz="1000" b="1" i="0">
+              <a:rPr sz="1600" b="1" i="0" dirty="0">
                 <a:solidFill>
                   <a:srgbClr val="2C5F8A"/>
                 </a:solidFill>
@@ -20194,7 +20870,7 @@
               <a:t>● </a:t>
             </a:r>
             <a:r>
-              <a:rPr sz="1200" b="1" i="0">
+              <a:rPr sz="1600" b="1" i="0" dirty="0">
                 <a:solidFill>
                   <a:srgbClr val="2B2A26"/>
                 </a:solidFill>
@@ -20203,7 +20879,7 @@
               <a:t>4 / 7</a:t>
             </a:r>
             <a:r>
-              <a:rPr sz="1200" b="0" i="0">
+              <a:rPr sz="1600" b="0" i="0" dirty="0">
                 <a:solidFill>
                   <a:srgbClr val="2B2A26"/>
                 </a:solidFill>
@@ -20215,6 +20891,11 @@
         </p:txBody>
       </p:sp>
     </p:spTree>
+    <p:extLst>
+      <p:ext uri="{BB962C8B-B14F-4D97-AF65-F5344CB8AC3E}">
+        <p14:creationId xmlns:p14="http://schemas.microsoft.com/office/powerpoint/2010/main" val="4059323991"/>
+      </p:ext>
+    </p:extLst>
   </p:cSld>
   <p:clrMapOvr>
     <a:masterClrMapping/>
@@ -20321,7 +21002,7 @@
                 </a:solidFill>
                 <a:latin typeface="Calibri"/>
               </a:rPr>
-              <a:t>AI4FQC · Project 07 — GRANA Captioning</a:t>
+              <a:t>AI4FQC · Project 07: GRANA Captioning</a:t>
             </a:r>
           </a:p>
         </p:txBody>
@@ -20591,7 +21272,7 @@
         <p:spPr>
           <a:xfrm>
             <a:off x="8622792" y="2157984"/>
-            <a:ext cx="2779776" cy="3474719"/>
+            <a:ext cx="2779776" cy="2939266"/>
           </a:xfrm>
           <a:prstGeom prst="rect">
             <a:avLst/>
@@ -20605,7 +21286,7 @@
           <a:lstStyle/>
           <a:p>
             <a:r>
-              <a:rPr sz="1500" b="1" i="0">
+              <a:rPr sz="2400" b="1" i="0" dirty="0">
                 <a:solidFill>
                   <a:srgbClr val="1B334A"/>
                 </a:solidFill>
@@ -20621,7 +21302,7 @@
               </a:spcBef>
             </a:pPr>
             <a:r>
-              <a:rPr sz="1000" b="1" i="0">
+              <a:rPr sz="1600" b="1" i="0" dirty="0">
                 <a:solidFill>
                   <a:srgbClr val="8A5082"/>
                 </a:solidFill>
@@ -20630,7 +21311,7 @@
               <a:t>● </a:t>
             </a:r>
             <a:r>
-              <a:rPr sz="1200" b="0" i="0">
+              <a:rPr sz="1600" b="0" i="0" dirty="0">
                 <a:solidFill>
                   <a:srgbClr val="2B2A26"/>
                 </a:solidFill>
@@ -20646,7 +21327,7 @@
               </a:spcBef>
             </a:pPr>
             <a:r>
-              <a:rPr sz="1000" b="1" i="0">
+              <a:rPr sz="1600" b="1" i="0" dirty="0">
                 <a:solidFill>
                   <a:srgbClr val="8A5082"/>
                 </a:solidFill>
@@ -20655,14 +21336,29 @@
               <a:t>● </a:t>
             </a:r>
             <a:r>
-              <a:rPr sz="1200" b="0" i="0">
+              <a:rPr sz="1600" b="0" i="0" dirty="0">
                 <a:solidFill>
                   <a:srgbClr val="2B2A26"/>
                 </a:solidFill>
                 <a:latin typeface="Calibri"/>
               </a:rPr>
-              <a:t>m3 first on CIDEr</a:t>
-            </a:r>
+              <a:t>m3 first on </a:t>
+            </a:r>
+            <a:r>
+              <a:rPr sz="1600" b="0" i="0" dirty="0" err="1">
+                <a:solidFill>
+                  <a:srgbClr val="2B2A26"/>
+                </a:solidFill>
+                <a:latin typeface="Calibri"/>
+              </a:rPr>
+              <a:t>CIDEr</a:t>
+            </a:r>
+            <a:endParaRPr sz="1600" b="0" i="0" dirty="0">
+              <a:solidFill>
+                <a:srgbClr val="2B2A26"/>
+              </a:solidFill>
+              <a:latin typeface="Calibri"/>
+            </a:endParaRPr>
           </a:p>
           <a:p>
             <a:pPr>
@@ -20671,7 +21367,7 @@
               </a:spcBef>
             </a:pPr>
             <a:r>
-              <a:rPr sz="1000" b="1" i="0">
+              <a:rPr sz="1600" b="1" i="0" dirty="0">
                 <a:solidFill>
                   <a:srgbClr val="8A5082"/>
                 </a:solidFill>
@@ -20680,7 +21376,7 @@
               <a:t>● </a:t>
             </a:r>
             <a:r>
-              <a:rPr sz="1200" b="1" i="0">
+              <a:rPr sz="1600" b="1" i="0" dirty="0">
                 <a:solidFill>
                   <a:srgbClr val="2B2A26"/>
                 </a:solidFill>
@@ -20689,7 +21385,7 @@
               <a:t>0.007</a:t>
             </a:r>
             <a:r>
-              <a:rPr sz="1200" b="0" i="0">
+              <a:rPr sz="1600" b="0" i="0" dirty="0">
                 <a:solidFill>
                   <a:srgbClr val="2B2A26"/>
                 </a:solidFill>
@@ -20705,7 +21401,7 @@
               </a:spcBef>
             </a:pPr>
             <a:r>
-              <a:rPr sz="1000" b="1" i="0">
+              <a:rPr sz="1600" b="1" i="0" dirty="0">
                 <a:solidFill>
                   <a:srgbClr val="8A5082"/>
                 </a:solidFill>
@@ -20714,7 +21410,7 @@
               <a:t>● </a:t>
             </a:r>
             <a:r>
-              <a:rPr sz="1200" b="1" i="0">
+              <a:rPr sz="1600" b="1" i="0" dirty="0">
                 <a:solidFill>
                   <a:srgbClr val="2B2A26"/>
                 </a:solidFill>
@@ -20723,18 +21419,41 @@
               <a:t>⚠</a:t>
             </a:r>
             <a:r>
-              <a:rPr sz="1200" b="0" i="0">
+              <a:rPr sz="1600" b="0" i="0" dirty="0">
                 <a:solidFill>
                   <a:srgbClr val="2B2A26"/>
                 </a:solidFill>
                 <a:latin typeface="Calibri"/>
               </a:rPr>
-              <a:t> most_frequent has the highest BLEU-1 but worst BLEU-4: degenerate</a:t>
+              <a:t> </a:t>
+            </a:r>
+            <a:r>
+              <a:rPr sz="1600" b="0" i="0" dirty="0" err="1">
+                <a:solidFill>
+                  <a:srgbClr val="2B2A26"/>
+                </a:solidFill>
+                <a:latin typeface="Calibri"/>
+              </a:rPr>
+              <a:t>most_frequent</a:t>
+            </a:r>
+            <a:r>
+              <a:rPr sz="1600" b="0" i="0" dirty="0">
+                <a:solidFill>
+                  <a:srgbClr val="2B2A26"/>
+                </a:solidFill>
+                <a:latin typeface="Calibri"/>
+              </a:rPr>
+              <a:t> has the highest BLEU-1 but worst BLEU-4: degenerate</a:t>
             </a:r>
           </a:p>
         </p:txBody>
       </p:sp>
     </p:spTree>
+    <p:extLst>
+      <p:ext uri="{BB962C8B-B14F-4D97-AF65-F5344CB8AC3E}">
+        <p14:creationId xmlns:p14="http://schemas.microsoft.com/office/powerpoint/2010/main" val="3648157181"/>
+      </p:ext>
+    </p:extLst>
   </p:cSld>
   <p:clrMapOvr>
     <a:masterClrMapping/>
@@ -20841,7 +21560,7 @@
                 </a:solidFill>
                 <a:latin typeface="Calibri"/>
               </a:rPr>
-              <a:t>AI4FQC · Project 07 — GRANA Captioning</a:t>
+              <a:t>AI4FQC · Project 07: GRANA Captioning</a:t>
             </a:r>
           </a:p>
         </p:txBody>
@@ -20924,7 +21643,7 @@
         <p:spPr>
           <a:xfrm>
             <a:off x="640080" y="886968"/>
-            <a:ext cx="10881360" cy="914400"/>
+            <a:ext cx="10881360" cy="579646"/>
           </a:xfrm>
           <a:prstGeom prst="rect">
             <a:avLst/>
@@ -20938,7 +21657,7 @@
           <a:lstStyle/>
           <a:p>
             <a:r>
-              <a:rPr sz="3100" b="1" i="0">
+              <a:rPr sz="3600" b="1" i="0" dirty="0">
                 <a:solidFill>
                   <a:srgbClr val="1B334A"/>
                 </a:solidFill>
@@ -21117,7 +21836,7 @@
         <p:spPr>
           <a:xfrm>
             <a:off x="8028432" y="2157984"/>
-            <a:ext cx="3374136" cy="3474719"/>
+            <a:ext cx="3374136" cy="2867452"/>
           </a:xfrm>
           <a:prstGeom prst="rect">
             <a:avLst/>
@@ -21131,7 +21850,7 @@
           <a:lstStyle/>
           <a:p>
             <a:r>
-              <a:rPr sz="1500" b="1" i="0">
+              <a:rPr sz="2400" b="1" i="0" dirty="0">
                 <a:solidFill>
                   <a:srgbClr val="1B334A"/>
                 </a:solidFill>
@@ -21147,7 +21866,7 @@
               </a:spcBef>
             </a:pPr>
             <a:r>
-              <a:rPr sz="1000" b="1" i="0">
+              <a:rPr sz="1600" b="1" i="0" dirty="0">
                 <a:solidFill>
                   <a:srgbClr val="E0A458"/>
                 </a:solidFill>
@@ -21156,7 +21875,7 @@
               <a:t>● </a:t>
             </a:r>
             <a:r>
-              <a:rPr sz="1200" b="0" i="0">
+              <a:rPr sz="1600" b="0" i="0" dirty="0">
                 <a:solidFill>
                   <a:srgbClr val="2B2A26"/>
                 </a:solidFill>
@@ -21172,7 +21891,7 @@
               </a:spcBef>
             </a:pPr>
             <a:r>
-              <a:rPr sz="1000" b="1" i="0">
+              <a:rPr sz="1600" b="1" i="0" dirty="0">
                 <a:solidFill>
                   <a:srgbClr val="E0A458"/>
                 </a:solidFill>
@@ -21181,7 +21900,7 @@
               <a:t>● </a:t>
             </a:r>
             <a:r>
-              <a:rPr sz="1200" b="0" i="0">
+              <a:rPr sz="1600" b="0" i="0" dirty="0">
                 <a:solidFill>
                   <a:srgbClr val="2B2A26"/>
                 </a:solidFill>
@@ -21197,7 +21916,7 @@
               </a:spcBef>
             </a:pPr>
             <a:r>
-              <a:rPr sz="1000" b="1" i="0">
+              <a:rPr sz="1600" b="1" i="0" dirty="0">
                 <a:solidFill>
                   <a:srgbClr val="E0A458"/>
                 </a:solidFill>
@@ -21206,16 +21925,34 @@
               <a:t>● </a:t>
             </a:r>
             <a:r>
-              <a:rPr sz="1200" b="1" i="0">
+              <a:rPr sz="1600" b="1" i="0" dirty="0">
                 <a:solidFill>
                   <a:srgbClr val="2B2A26"/>
                 </a:solidFill>
                 <a:latin typeface="Calibri"/>
               </a:rPr>
-              <a:t>~80–140</a:t>
-            </a:r>
-            <a:r>
-              <a:rPr sz="1200" b="0" i="0">
+              <a:t>~80</a:t>
+            </a:r>
+            <a:r>
+              <a:rPr lang="it-IT" sz="1600" b="1" i="0" dirty="0">
+                <a:solidFill>
+                  <a:srgbClr val="2B2A26"/>
+                </a:solidFill>
+                <a:latin typeface="Calibri"/>
+              </a:rPr>
+              <a:t>-</a:t>
+            </a:r>
+            <a:r>
+              <a:rPr sz="1600" b="1" i="0" dirty="0">
+                <a:solidFill>
+                  <a:srgbClr val="2B2A26"/>
+                </a:solidFill>
+                <a:latin typeface="Calibri"/>
+              </a:rPr>
+              <a:t>140</a:t>
+            </a:r>
+            <a:r>
+              <a:rPr sz="1600" b="0" i="0" dirty="0">
                 <a:solidFill>
                   <a:srgbClr val="2B2A26"/>
                 </a:solidFill>
@@ -21231,7 +21968,7 @@
               </a:spcBef>
             </a:pPr>
             <a:r>
-              <a:rPr sz="1000" b="1" i="0">
+              <a:rPr sz="1600" b="1" i="0" dirty="0">
                 <a:solidFill>
                   <a:srgbClr val="E0A458"/>
                 </a:solidFill>
@@ -21240,7 +21977,7 @@
               <a:t>● </a:t>
             </a:r>
             <a:r>
-              <a:rPr sz="1200" b="1" i="0">
+              <a:rPr sz="1600" b="1" i="0" dirty="0">
                 <a:solidFill>
                   <a:srgbClr val="2B2A26"/>
                 </a:solidFill>
@@ -21249,7 +21986,7 @@
               <a:t>Shared scaffolding:</a:t>
             </a:r>
             <a:r>
-              <a:rPr sz="1200" b="0" i="0">
+              <a:rPr sz="1600" b="0" i="0" dirty="0">
                 <a:solidFill>
                   <a:srgbClr val="2B2A26"/>
                 </a:solidFill>
@@ -21265,7 +22002,7 @@
               </a:spcBef>
             </a:pPr>
             <a:r>
-              <a:rPr sz="1000" b="1" i="0">
+              <a:rPr sz="1600" b="1" i="0" dirty="0">
                 <a:solidFill>
                   <a:srgbClr val="E0A458"/>
                 </a:solidFill>
@@ -21274,7 +22011,7 @@
               <a:t>● </a:t>
             </a:r>
             <a:r>
-              <a:rPr sz="1200" b="1" i="0">
+              <a:rPr sz="1600" b="1" i="0" dirty="0">
                 <a:solidFill>
                   <a:srgbClr val="2B2A26"/>
                 </a:solidFill>
@@ -21283,7 +22020,7 @@
               <a:t>→</a:t>
             </a:r>
             <a:r>
-              <a:rPr sz="1200" b="0" i="0">
+              <a:rPr sz="1600" b="0" i="0" dirty="0">
                 <a:solidFill>
                   <a:srgbClr val="2B2A26"/>
                 </a:solidFill>
@@ -21295,6 +22032,11 @@
         </p:txBody>
       </p:sp>
     </p:spTree>
+    <p:extLst>
+      <p:ext uri="{BB962C8B-B14F-4D97-AF65-F5344CB8AC3E}">
+        <p14:creationId xmlns:p14="http://schemas.microsoft.com/office/powerpoint/2010/main" val="4045368968"/>
+      </p:ext>
+    </p:extLst>
   </p:cSld>
   <p:clrMapOvr>
     <a:masterClrMapping/>
@@ -21395,13 +22137,13 @@
           <a:lstStyle/>
           <a:p>
             <a:r>
-              <a:rPr sz="950" b="0" i="1">
+              <a:rPr sz="950" b="0" i="1" dirty="0">
                 <a:solidFill>
                   <a:srgbClr val="6B6860"/>
                 </a:solidFill>
                 <a:latin typeface="Calibri"/>
               </a:rPr>
-              <a:t>AI4FQC · Project 07 — GRANA Captioning</a:t>
+              <a:t>AI4FQC · Project 07: GRANA Captioning</a:t>
             </a:r>
           </a:p>
         </p:txBody>
@@ -21484,7 +22226,7 @@
         <p:spPr>
           <a:xfrm>
             <a:off x="640080" y="886968"/>
-            <a:ext cx="10881360" cy="914400"/>
+            <a:ext cx="10881360" cy="518091"/>
           </a:xfrm>
           <a:prstGeom prst="rect">
             <a:avLst/>
@@ -21498,7 +22240,7 @@
           <a:lstStyle/>
           <a:p>
             <a:r>
-              <a:rPr sz="3100" b="1" i="0">
+              <a:rPr sz="3200" b="1" i="0" dirty="0">
                 <a:solidFill>
                   <a:srgbClr val="1B334A"/>
                 </a:solidFill>
@@ -21677,7 +22419,7 @@
         <p:spPr>
           <a:xfrm>
             <a:off x="6245352" y="2066544"/>
-            <a:ext cx="5157216" cy="1600199"/>
+            <a:ext cx="5157216" cy="1379865"/>
           </a:xfrm>
           <a:prstGeom prst="rect">
             <a:avLst/>
@@ -21691,7 +22433,7 @@
           <a:lstStyle/>
           <a:p>
             <a:r>
-              <a:rPr sz="1550" b="1" i="0">
+              <a:rPr sz="2400" b="1" i="0" dirty="0">
                 <a:solidFill>
                   <a:srgbClr val="1B334A"/>
                 </a:solidFill>
@@ -21702,13 +22444,66 @@
           </a:p>
           <a:p>
             <a:r>
-              <a:rPr sz="1300" b="0" i="0">
+              <a:rPr sz="1600" b="0" i="0" dirty="0">
                 <a:solidFill>
                   <a:srgbClr val="2B2A26"/>
                 </a:solidFill>
                 <a:latin typeface="Calibri"/>
               </a:rPr>
-              <a:t>Predictions are shuffled across test rows, breaking the prediction↔image alignment. Recompute 100 times → null distribution → z-score. z &gt; 3 ⟺ p &lt; 0.001: strong evidence of image-conditioning.</a:t>
+              <a:t>Predictions are shuffled across test rows, breaking the prediction</a:t>
+            </a:r>
+            <a:r>
+              <a:rPr lang="it-IT" sz="1600" b="0" i="0" dirty="0">
+                <a:solidFill>
+                  <a:srgbClr val="2B2A26"/>
+                </a:solidFill>
+                <a:latin typeface="Calibri"/>
+              </a:rPr>
+              <a:t> </a:t>
+            </a:r>
+            <a:r>
+              <a:rPr sz="1600" b="0" i="0" dirty="0">
+                <a:solidFill>
+                  <a:srgbClr val="2B2A26"/>
+                </a:solidFill>
+                <a:latin typeface="Calibri"/>
+              </a:rPr>
+              <a:t>↔</a:t>
+            </a:r>
+            <a:r>
+              <a:rPr lang="it-IT" sz="1600" b="0" i="0" dirty="0">
+                <a:solidFill>
+                  <a:srgbClr val="2B2A26"/>
+                </a:solidFill>
+                <a:latin typeface="Calibri"/>
+              </a:rPr>
+              <a:t> </a:t>
+            </a:r>
+            <a:r>
+              <a:rPr sz="1600" b="0" i="0" dirty="0">
+                <a:solidFill>
+                  <a:srgbClr val="2B2A26"/>
+                </a:solidFill>
+                <a:latin typeface="Calibri"/>
+              </a:rPr>
+              <a:t>image alignment. </a:t>
+            </a:r>
+            <a:endParaRPr lang="it-IT" sz="1600" b="0" i="0" dirty="0">
+              <a:solidFill>
+                <a:srgbClr val="2B2A26"/>
+              </a:solidFill>
+              <a:latin typeface="Calibri"/>
+            </a:endParaRPr>
+          </a:p>
+          <a:p>
+            <a:r>
+              <a:rPr sz="1600" b="0" i="0" dirty="0">
+                <a:solidFill>
+                  <a:srgbClr val="2B2A26"/>
+                </a:solidFill>
+                <a:latin typeface="Calibri"/>
+              </a:rPr>
+              <a:t>Recompute 100 times → null distribution → z-score. z &gt; 3 ⟺ p &lt; 0.001: strong evidence of image-conditioning.</a:t>
             </a:r>
           </a:p>
         </p:txBody>
@@ -21812,7 +22607,7 @@
         <p:spPr>
           <a:xfrm>
             <a:off x="6245352" y="4078224"/>
-            <a:ext cx="5157216" cy="1920240"/>
+            <a:ext cx="5157216" cy="1585049"/>
           </a:xfrm>
           <a:prstGeom prst="rect">
             <a:avLst/>
@@ -21826,7 +22621,7 @@
           <a:lstStyle/>
           <a:p>
             <a:r>
-              <a:rPr sz="1550" b="1" i="0">
+              <a:rPr sz="2400" b="1" i="0" dirty="0">
                 <a:solidFill>
                   <a:srgbClr val="E0A458"/>
                 </a:solidFill>
@@ -21842,7 +22637,7 @@
               </a:spcBef>
             </a:pPr>
             <a:r>
-              <a:rPr sz="1000" b="1" i="0">
+              <a:rPr sz="1600" b="1" i="0" dirty="0">
                 <a:solidFill>
                   <a:srgbClr val="C1492E"/>
                 </a:solidFill>
@@ -21851,16 +22646,34 @@
               <a:t>● </a:t>
             </a:r>
             <a:r>
-              <a:rPr sz="1250" b="1" i="0">
+              <a:rPr sz="1600" b="1" i="0" dirty="0">
                 <a:solidFill>
                   <a:srgbClr val="F7F1E3"/>
                 </a:solidFill>
                 <a:latin typeface="Calibri"/>
               </a:rPr>
-              <a:t>m1 (ResNet):</a:t>
-            </a:r>
-            <a:r>
-              <a:rPr sz="1250" b="0" i="0">
+              <a:t>m1 (</a:t>
+            </a:r>
+            <a:r>
+              <a:rPr sz="1600" b="1" i="0" dirty="0" err="1">
+                <a:solidFill>
+                  <a:srgbClr val="F7F1E3"/>
+                </a:solidFill>
+                <a:latin typeface="Calibri"/>
+              </a:rPr>
+              <a:t>ResNet</a:t>
+            </a:r>
+            <a:r>
+              <a:rPr sz="1600" b="1" i="0" dirty="0">
+                <a:solidFill>
+                  <a:srgbClr val="F7F1E3"/>
+                </a:solidFill>
+                <a:latin typeface="Calibri"/>
+              </a:rPr>
+              <a:t>):</a:t>
+            </a:r>
+            <a:r>
+              <a:rPr sz="1600" b="0" i="0" dirty="0">
                 <a:solidFill>
                   <a:srgbClr val="D9D2C2"/>
                 </a:solidFill>
@@ -21876,7 +22689,7 @@
               </a:spcBef>
             </a:pPr>
             <a:r>
-              <a:rPr sz="1000" b="1" i="0">
+              <a:rPr sz="1600" b="1" i="0" dirty="0">
                 <a:solidFill>
                   <a:srgbClr val="C1492E"/>
                 </a:solidFill>
@@ -21885,16 +22698,34 @@
               <a:t>● </a:t>
             </a:r>
             <a:r>
-              <a:rPr sz="1250" b="1" i="0">
+              <a:rPr sz="1600" b="1" i="0" dirty="0">
                 <a:solidFill>
                   <a:srgbClr val="F7F1E3"/>
                 </a:solidFill>
                 <a:latin typeface="Calibri"/>
               </a:rPr>
-              <a:t>m3 / m6 (ViT):</a:t>
-            </a:r>
-            <a:r>
-              <a:rPr sz="1250" b="0" i="0">
+              <a:t>m3 / m6 (</a:t>
+            </a:r>
+            <a:r>
+              <a:rPr sz="1600" b="1" i="0" dirty="0" err="1">
+                <a:solidFill>
+                  <a:srgbClr val="F7F1E3"/>
+                </a:solidFill>
+                <a:latin typeface="Calibri"/>
+              </a:rPr>
+              <a:t>ViT</a:t>
+            </a:r>
+            <a:r>
+              <a:rPr sz="1600" b="1" i="0" dirty="0">
+                <a:solidFill>
+                  <a:srgbClr val="F7F1E3"/>
+                </a:solidFill>
+                <a:latin typeface="Calibri"/>
+              </a:rPr>
+              <a:t>):</a:t>
+            </a:r>
+            <a:r>
+              <a:rPr sz="1600" b="0" i="0" dirty="0">
                 <a:solidFill>
                   <a:srgbClr val="D9D2C2"/>
                 </a:solidFill>
@@ -21910,7 +22741,7 @@
               </a:spcBef>
             </a:pPr>
             <a:r>
-              <a:rPr sz="1000" b="1" i="0">
+              <a:rPr sz="1600" b="1" i="0" dirty="0">
                 <a:solidFill>
                   <a:srgbClr val="C1492E"/>
                 </a:solidFill>
@@ -21919,16 +22750,34 @@
               <a:t>● </a:t>
             </a:r>
             <a:r>
-              <a:rPr sz="1250" b="1" i="0">
+              <a:rPr sz="1600" b="1" i="0" dirty="0">
                 <a:solidFill>
                   <a:srgbClr val="F7F1E3"/>
                 </a:solidFill>
                 <a:latin typeface="Calibri"/>
               </a:rPr>
-              <a:t>Smell, Thickness, Colour, Structure</a:t>
-            </a:r>
-            <a:r>
-              <a:rPr sz="1250" b="0" i="0">
+              <a:t>Smell, Thickness, </a:t>
+            </a:r>
+            <a:r>
+              <a:rPr sz="1600" b="1" i="0" dirty="0" err="1">
+                <a:solidFill>
+                  <a:srgbClr val="F7F1E3"/>
+                </a:solidFill>
+                <a:latin typeface="Calibri"/>
+              </a:rPr>
+              <a:t>Colour</a:t>
+            </a:r>
+            <a:r>
+              <a:rPr sz="1600" b="1" i="0" dirty="0">
+                <a:solidFill>
+                  <a:srgbClr val="F7F1E3"/>
+                </a:solidFill>
+                <a:latin typeface="Calibri"/>
+              </a:rPr>
+              <a:t>, Structure</a:t>
+            </a:r>
+            <a:r>
+              <a:rPr sz="1600" b="0" i="0" dirty="0">
                 <a:solidFill>
                   <a:srgbClr val="D9D2C2"/>
                 </a:solidFill>
@@ -21944,7 +22793,7 @@
               </a:spcBef>
             </a:pPr>
             <a:r>
-              <a:rPr sz="1000" b="1" i="0">
+              <a:rPr sz="1600" b="1" i="0" dirty="0">
                 <a:solidFill>
                   <a:srgbClr val="C1492E"/>
                 </a:solidFill>
@@ -21953,7 +22802,7 @@
               <a:t>● </a:t>
             </a:r>
             <a:r>
-              <a:rPr sz="1250" b="1" i="0">
+              <a:rPr sz="1600" b="1" i="0" dirty="0">
                 <a:solidFill>
                   <a:srgbClr val="F7F1E3"/>
                 </a:solidFill>
@@ -21962,7 +22811,7 @@
               <a:t>Aroma</a:t>
             </a:r>
             <a:r>
-              <a:rPr sz="1250" b="0" i="0">
+              <a:rPr sz="1600" b="0" i="0" dirty="0">
                 <a:solidFill>
                   <a:srgbClr val="D9D2C2"/>
                 </a:solidFill>
@@ -21974,6 +22823,11 @@
         </p:txBody>
       </p:sp>
     </p:spTree>
+    <p:extLst>
+      <p:ext uri="{BB962C8B-B14F-4D97-AF65-F5344CB8AC3E}">
+        <p14:creationId xmlns:p14="http://schemas.microsoft.com/office/powerpoint/2010/main" val="1188926515"/>
+      </p:ext>
+    </p:extLst>
   </p:cSld>
   <p:clrMapOvr>
     <a:masterClrMapping/>
@@ -22080,7 +22934,7 @@
                 </a:solidFill>
                 <a:latin typeface="Calibri"/>
               </a:rPr>
-              <a:t>AI4FQC · Project 07 — GRANA Captioning</a:t>
+              <a:t>AI4FQC · Project 07: GRANA Captioning</a:t>
             </a:r>
           </a:p>
         </p:txBody>
@@ -22163,7 +23017,7 @@
         <p:spPr>
           <a:xfrm>
             <a:off x="640080" y="886968"/>
-            <a:ext cx="10881360" cy="914400"/>
+            <a:ext cx="10881360" cy="579646"/>
           </a:xfrm>
           <a:prstGeom prst="rect">
             <a:avLst/>
@@ -22177,7 +23031,7 @@
           <a:lstStyle/>
           <a:p>
             <a:r>
-              <a:rPr sz="3100" b="1" i="0">
+              <a:rPr sz="3600" b="1" i="0" dirty="0">
                 <a:solidFill>
                   <a:srgbClr val="1B334A"/>
                 </a:solidFill>
@@ -22332,7 +23186,7 @@
         <p:spPr>
           <a:xfrm>
             <a:off x="896112" y="2157984"/>
-            <a:ext cx="4974336" cy="2926080"/>
+            <a:ext cx="4974336" cy="1995418"/>
           </a:xfrm>
           <a:prstGeom prst="rect">
             <a:avLst/>
@@ -22346,26 +23200,129 @@
           <a:lstStyle/>
           <a:p>
             <a:r>
-              <a:rPr sz="1600" b="1" i="0">
+              <a:rPr sz="2400" b="1" i="0" dirty="0">
                 <a:solidFill>
                   <a:srgbClr val="1B334A"/>
                 </a:solidFill>
                 <a:latin typeface="Georgia"/>
               </a:rPr>
-              <a:t>m1 vs m3 — isolates the encoder</a:t>
-            </a:r>
-          </a:p>
-          <a:p>
-            <a:r>
-              <a:rPr sz="1400" b="0" i="0">
+              <a:t>m1 vs m3</a:t>
+            </a:r>
+            <a:r>
+              <a:rPr lang="it-IT" sz="2400" b="1" i="0" dirty="0">
+                <a:solidFill>
+                  <a:srgbClr val="1B334A"/>
+                </a:solidFill>
+                <a:latin typeface="Georgia"/>
+              </a:rPr>
+              <a:t>:</a:t>
+            </a:r>
+            <a:r>
+              <a:rPr sz="2400" b="1" i="0" dirty="0">
+                <a:solidFill>
+                  <a:srgbClr val="1B334A"/>
+                </a:solidFill>
+                <a:latin typeface="Georgia"/>
+              </a:rPr>
+              <a:t> isolates the encoder</a:t>
+            </a:r>
+            <a:endParaRPr lang="it-IT" sz="2400" b="1" i="0" dirty="0">
+              <a:solidFill>
+                <a:srgbClr val="1B334A"/>
+              </a:solidFill>
+              <a:latin typeface="Georgia"/>
+            </a:endParaRPr>
+          </a:p>
+          <a:p>
+            <a:endParaRPr sz="2400" b="1" i="0" dirty="0">
+              <a:solidFill>
+                <a:srgbClr val="1B334A"/>
+              </a:solidFill>
+              <a:latin typeface="Georgia"/>
+            </a:endParaRPr>
+          </a:p>
+          <a:p>
+            <a:r>
+              <a:rPr sz="1600" b="0" i="0" dirty="0">
                 <a:solidFill>
                   <a:srgbClr val="2B2A26"/>
                 </a:solidFill>
                 <a:latin typeface="Calibri"/>
               </a:rPr>
-              <a:t>m1 (ResNet) NEVER conditions on the image.
-m3 (ViT) does on most attributes.
-→ A frozen ResNet-50's features aren't enough at this data scale; a frozen ViT-B/16's are.</a:t>
+              <a:t>m1 (</a:t>
+            </a:r>
+            <a:r>
+              <a:rPr sz="1600" b="0" i="0" dirty="0" err="1">
+                <a:solidFill>
+                  <a:srgbClr val="2B2A26"/>
+                </a:solidFill>
+                <a:latin typeface="Calibri"/>
+              </a:rPr>
+              <a:t>ResNet</a:t>
+            </a:r>
+            <a:r>
+              <a:rPr sz="1600" b="0" i="0" dirty="0">
+                <a:solidFill>
+                  <a:srgbClr val="2B2A26"/>
+                </a:solidFill>
+                <a:latin typeface="Calibri"/>
+              </a:rPr>
+              <a:t>) NEVER conditions on the image.
+m3 (</a:t>
+            </a:r>
+            <a:r>
+              <a:rPr sz="1600" b="0" i="0" dirty="0" err="1">
+                <a:solidFill>
+                  <a:srgbClr val="2B2A26"/>
+                </a:solidFill>
+                <a:latin typeface="Calibri"/>
+              </a:rPr>
+              <a:t>ViT</a:t>
+            </a:r>
+            <a:r>
+              <a:rPr sz="1600" b="0" i="0" dirty="0">
+                <a:solidFill>
+                  <a:srgbClr val="2B2A26"/>
+                </a:solidFill>
+                <a:latin typeface="Calibri"/>
+              </a:rPr>
+              <a:t>) does on most attributes.</a:t>
+            </a:r>
+            <a:endParaRPr lang="it-IT" sz="1600" b="0" i="0" dirty="0">
+              <a:solidFill>
+                <a:srgbClr val="2B2A26"/>
+              </a:solidFill>
+              <a:latin typeface="Calibri"/>
+            </a:endParaRPr>
+          </a:p>
+          <a:p>
+            <a:r>
+              <a:rPr sz="1600" b="0" i="0" dirty="0">
+                <a:solidFill>
+                  <a:srgbClr val="2B2A26"/>
+                </a:solidFill>
+                <a:latin typeface="Calibri"/>
+              </a:rPr>
+              <a:t>
+→ A frozen ResNet-50's features aren't enough at this data scale; a frozen </a:t>
+            </a:r>
+            <a:r>
+              <a:rPr sz="1600" b="0" i="0" dirty="0" err="1">
+                <a:solidFill>
+                  <a:srgbClr val="2B2A26"/>
+                </a:solidFill>
+                <a:latin typeface="Calibri"/>
+              </a:rPr>
+              <a:t>ViT</a:t>
+            </a:r>
+            <a:r>
+              <a:rPr sz="1600" b="0" i="0" dirty="0">
+                <a:solidFill>
+                  <a:srgbClr val="2B2A26"/>
+                </a:solidFill>
+                <a:latin typeface="Calibri"/>
+              </a:rPr>
+              <a:t>-B/16's are.</a:t>
             </a:r>
           </a:p>
         </p:txBody>
@@ -22469,7 +23426,7 @@
         <p:spPr>
           <a:xfrm>
             <a:off x="6428232" y="2157984"/>
-            <a:ext cx="4974336" cy="2926080"/>
+            <a:ext cx="4974336" cy="1841530"/>
           </a:xfrm>
           <a:prstGeom prst="rect">
             <a:avLst/>
@@ -22483,18 +23440,50 @@
           <a:lstStyle/>
           <a:p>
             <a:r>
-              <a:rPr sz="1600" b="1" i="0">
+              <a:rPr sz="2400" b="1" i="0" dirty="0">
                 <a:solidFill>
                   <a:srgbClr val="1B334A"/>
                 </a:solidFill>
                 <a:latin typeface="Georgia"/>
               </a:rPr>
-              <a:t>m3 vs m6 — isolates the decoder</a:t>
-            </a:r>
-          </a:p>
-          <a:p>
-            <a:r>
-              <a:rPr sz="1400" b="0" i="0">
+              <a:t>m3 vs m6</a:t>
+            </a:r>
+            <a:r>
+              <a:rPr lang="it-IT" sz="2400" b="1" i="0" dirty="0">
+                <a:solidFill>
+                  <a:srgbClr val="1B334A"/>
+                </a:solidFill>
+                <a:latin typeface="Georgia"/>
+              </a:rPr>
+              <a:t>:</a:t>
+            </a:r>
+            <a:r>
+              <a:rPr sz="2400" b="1" i="0" dirty="0">
+                <a:solidFill>
+                  <a:srgbClr val="1B334A"/>
+                </a:solidFill>
+                <a:latin typeface="Georgia"/>
+              </a:rPr>
+              <a:t> isolates the decoder</a:t>
+            </a:r>
+            <a:endParaRPr lang="it-IT" sz="2400" b="1" i="0" dirty="0">
+              <a:solidFill>
+                <a:srgbClr val="1B334A"/>
+              </a:solidFill>
+              <a:latin typeface="Georgia"/>
+            </a:endParaRPr>
+          </a:p>
+          <a:p>
+            <a:endParaRPr sz="2400" b="1" i="0" dirty="0">
+              <a:solidFill>
+                <a:srgbClr val="1B334A"/>
+              </a:solidFill>
+              <a:latin typeface="Georgia"/>
+            </a:endParaRPr>
+          </a:p>
+          <a:p>
+            <a:r>
+              <a:rPr sz="1400" b="0" i="0" dirty="0">
                 <a:solidFill>
                   <a:srgbClr val="2B2A26"/>
                 </a:solidFill>
@@ -22559,8 +23548,8 @@
         </p:nvSpPr>
         <p:spPr>
           <a:xfrm>
-            <a:off x="914400" y="5394960"/>
-            <a:ext cx="10515600" cy="685800"/>
+            <a:off x="914400" y="5448038"/>
+            <a:ext cx="10515600" cy="579646"/>
           </a:xfrm>
           <a:prstGeom prst="rect">
             <a:avLst/>
@@ -22574,7 +23563,7 @@
           <a:lstStyle/>
           <a:p>
             <a:r>
-              <a:rPr sz="1350" b="1" i="0">
+              <a:rPr b="1" i="0" dirty="0">
                 <a:solidFill>
                   <a:srgbClr val="E0A458"/>
                 </a:solidFill>
@@ -22586,6 +23575,11 @@
         </p:txBody>
       </p:sp>
     </p:spTree>
+    <p:extLst>
+      <p:ext uri="{BB962C8B-B14F-4D97-AF65-F5344CB8AC3E}">
+        <p14:creationId xmlns:p14="http://schemas.microsoft.com/office/powerpoint/2010/main" val="2564263934"/>
+      </p:ext>
+    </p:extLst>
   </p:cSld>
   <p:clrMapOvr>
     <a:masterClrMapping/>
@@ -22692,7 +23686,7 @@
                 </a:solidFill>
                 <a:latin typeface="Calibri"/>
               </a:rPr>
-              <a:t>AI4FQC · Project 07 — GRANA Captioning</a:t>
+              <a:t>AI4FQC · Project 07: GRANA Captioning</a:t>
             </a:r>
           </a:p>
         </p:txBody>
@@ -22775,7 +23769,7 @@
         <p:spPr>
           <a:xfrm>
             <a:off x="640080" y="886968"/>
-            <a:ext cx="10881360" cy="914400"/>
+            <a:ext cx="10881360" cy="579646"/>
           </a:xfrm>
           <a:prstGeom prst="rect">
             <a:avLst/>
@@ -22789,7 +23783,7 @@
           <a:lstStyle/>
           <a:p>
             <a:r>
-              <a:rPr sz="3100" b="1" i="0">
+              <a:rPr sz="3600" b="1" i="0" dirty="0">
                 <a:solidFill>
                   <a:srgbClr val="1B334A"/>
                 </a:solidFill>
@@ -22893,7 +23887,7 @@
                     <a:lstStyle/>
                     <a:p>
                       <a:r>
-                        <a:rPr sz="1300" b="1" i="0">
+                        <a:rPr sz="1600" b="1" i="0">
                           <a:solidFill>
                             <a:srgbClr val="FFFFFF"/>
                           </a:solidFill>
@@ -22915,7 +23909,7 @@
                     <a:lstStyle/>
                     <a:p>
                       <a:r>
-                        <a:rPr sz="1300" b="1" i="0">
+                        <a:rPr sz="1600" b="1" i="0">
                           <a:solidFill>
                             <a:srgbClr val="FFFFFF"/>
                           </a:solidFill>
@@ -22938,7 +23932,7 @@
                     <a:p>
                       <a:pPr algn="ctr"/>
                       <a:r>
-                        <a:rPr sz="1300" b="1" i="0">
+                        <a:rPr sz="1600" b="1" i="0">
                           <a:solidFill>
                             <a:srgbClr val="FFFFFF"/>
                           </a:solidFill>
@@ -22967,7 +23961,7 @@
                     <a:lstStyle/>
                     <a:p>
                       <a:r>
-                        <a:rPr sz="1250" b="1" i="0">
+                        <a:rPr sz="1600" b="1" i="0">
                           <a:solidFill>
                             <a:srgbClr val="2B2A26"/>
                           </a:solidFill>
@@ -22989,7 +23983,7 @@
                     <a:lstStyle/>
                     <a:p>
                       <a:r>
-                        <a:rPr sz="1250" b="0" i="0">
+                        <a:rPr sz="1600" b="0" i="0">
                           <a:solidFill>
                             <a:srgbClr val="2B2A26"/>
                           </a:solidFill>
@@ -23012,7 +24006,7 @@
                     <a:p>
                       <a:pPr algn="ctr"/>
                       <a:r>
-                        <a:rPr sz="1250" b="0" i="0">
+                        <a:rPr sz="1600" b="0" i="0">
                           <a:solidFill>
                             <a:srgbClr val="2B2A26"/>
                           </a:solidFill>
@@ -23041,7 +24035,7 @@
                     <a:lstStyle/>
                     <a:p>
                       <a:r>
-                        <a:rPr sz="1250" b="1" i="0">
+                        <a:rPr sz="1600" b="1" i="0">
                           <a:solidFill>
                             <a:srgbClr val="2B2A26"/>
                           </a:solidFill>
@@ -23063,7 +24057,7 @@
                     <a:lstStyle/>
                     <a:p>
                       <a:r>
-                        <a:rPr sz="1250" b="0" i="0">
+                        <a:rPr sz="1600" b="0" i="0">
                           <a:solidFill>
                             <a:srgbClr val="2B2A26"/>
                           </a:solidFill>
@@ -23086,7 +24080,7 @@
                     <a:p>
                       <a:pPr algn="ctr"/>
                       <a:r>
-                        <a:rPr sz="1250" b="0" i="0">
+                        <a:rPr sz="1600" b="0" i="0">
                           <a:solidFill>
                             <a:srgbClr val="2B2A26"/>
                           </a:solidFill>
@@ -23115,7 +24109,7 @@
                     <a:lstStyle/>
                     <a:p>
                       <a:r>
-                        <a:rPr sz="1250" b="1" i="0">
+                        <a:rPr sz="1600" b="1" i="0">
                           <a:solidFill>
                             <a:srgbClr val="2B2A26"/>
                           </a:solidFill>
@@ -23137,7 +24131,7 @@
                     <a:lstStyle/>
                     <a:p>
                       <a:r>
-                        <a:rPr sz="1250" b="0" i="0">
+                        <a:rPr sz="1600" b="0" i="0">
                           <a:solidFill>
                             <a:srgbClr val="2B2A26"/>
                           </a:solidFill>
@@ -23160,7 +24154,7 @@
                     <a:p>
                       <a:pPr algn="ctr"/>
                       <a:r>
-                        <a:rPr sz="1250" b="0" i="0">
+                        <a:rPr sz="1600" b="0" i="0">
                           <a:solidFill>
                             <a:srgbClr val="2B2A26"/>
                           </a:solidFill>
@@ -23189,7 +24183,7 @@
                     <a:lstStyle/>
                     <a:p>
                       <a:r>
-                        <a:rPr sz="1250" b="1" i="0">
+                        <a:rPr sz="1600" b="1" i="0">
                           <a:solidFill>
                             <a:srgbClr val="2B2A26"/>
                           </a:solidFill>
@@ -23211,7 +24205,7 @@
                     <a:lstStyle/>
                     <a:p>
                       <a:r>
-                        <a:rPr sz="1250" b="0" i="0">
+                        <a:rPr sz="1600" b="0" i="0">
                           <a:solidFill>
                             <a:srgbClr val="2B2A26"/>
                           </a:solidFill>
@@ -23234,7 +24228,7 @@
                     <a:p>
                       <a:pPr algn="ctr"/>
                       <a:r>
-                        <a:rPr sz="1250" b="0" i="0">
+                        <a:rPr sz="1600" b="0" i="0">
                           <a:solidFill>
                             <a:srgbClr val="2B2A26"/>
                           </a:solidFill>
@@ -23263,7 +24257,7 @@
                     <a:lstStyle/>
                     <a:p>
                       <a:r>
-                        <a:rPr sz="1250" b="1" i="0">
+                        <a:rPr sz="1600" b="1" i="0">
                           <a:solidFill>
                             <a:srgbClr val="2B2A26"/>
                           </a:solidFill>
@@ -23285,7 +24279,7 @@
                     <a:lstStyle/>
                     <a:p>
                       <a:r>
-                        <a:rPr sz="1250" b="0" i="0">
+                        <a:rPr sz="1600" b="0" i="0">
                           <a:solidFill>
                             <a:srgbClr val="2B2A26"/>
                           </a:solidFill>
@@ -23308,7 +24302,7 @@
                     <a:p>
                       <a:pPr algn="ctr"/>
                       <a:r>
-                        <a:rPr sz="1250" b="0" i="0">
+                        <a:rPr sz="1600" b="0" i="0">
                           <a:solidFill>
                             <a:srgbClr val="2B2A26"/>
                           </a:solidFill>
@@ -23337,7 +24331,7 @@
                     <a:lstStyle/>
                     <a:p>
                       <a:r>
-                        <a:rPr sz="1250" b="1" i="0">
+                        <a:rPr sz="1600" b="1" i="0">
                           <a:solidFill>
                             <a:srgbClr val="2B2A26"/>
                           </a:solidFill>
@@ -23359,7 +24353,7 @@
                     <a:lstStyle/>
                     <a:p>
                       <a:r>
-                        <a:rPr sz="1250" b="0" i="0">
+                        <a:rPr sz="1600" b="0" i="0">
                           <a:solidFill>
                             <a:srgbClr val="2B2A26"/>
                           </a:solidFill>
@@ -23382,7 +24376,7 @@
                     <a:p>
                       <a:pPr algn="ctr"/>
                       <a:r>
-                        <a:rPr sz="1250" b="0" i="0">
+                        <a:rPr sz="1600" b="0" i="0">
                           <a:solidFill>
                             <a:srgbClr val="2B2A26"/>
                           </a:solidFill>
@@ -23411,7 +24405,7 @@
                     <a:lstStyle/>
                     <a:p>
                       <a:r>
-                        <a:rPr sz="1250" b="1" i="0">
+                        <a:rPr sz="1600" b="1" i="0">
                           <a:solidFill>
                             <a:srgbClr val="C88836"/>
                           </a:solidFill>
@@ -23433,7 +24427,7 @@
                     <a:lstStyle/>
                     <a:p>
                       <a:r>
-                        <a:rPr sz="1250" b="1" i="0">
+                        <a:rPr sz="1600" b="1" i="0">
                           <a:solidFill>
                             <a:srgbClr val="C88836"/>
                           </a:solidFill>
@@ -23456,7 +24450,7 @@
                     <a:p>
                       <a:pPr algn="ctr"/>
                       <a:r>
-                        <a:rPr sz="1250" b="1" i="0">
+                        <a:rPr sz="1600" b="1" i="0" dirty="0">
                           <a:solidFill>
                             <a:srgbClr val="C88836"/>
                           </a:solidFill>
@@ -23483,6 +24477,11 @@
         </a:graphic>
       </p:graphicFrame>
     </p:spTree>
+    <p:extLst>
+      <p:ext uri="{BB962C8B-B14F-4D97-AF65-F5344CB8AC3E}">
+        <p14:creationId xmlns:p14="http://schemas.microsoft.com/office/powerpoint/2010/main" val="1756224429"/>
+      </p:ext>
+    </p:extLst>
   </p:cSld>
   <p:clrMapOvr>
     <a:masterClrMapping/>
@@ -23589,7 +24588,7 @@
                 </a:solidFill>
                 <a:latin typeface="Calibri"/>
               </a:rPr>
-              <a:t>AI4FQC · Project 07 — GRANA Captioning</a:t>
+              <a:t>AI4FQC · Project 07: GRANA Captioning</a:t>
             </a:r>
           </a:p>
         </p:txBody>
@@ -23672,7 +24671,7 @@
         <p:spPr>
           <a:xfrm>
             <a:off x="640080" y="886968"/>
-            <a:ext cx="10881360" cy="914400"/>
+            <a:ext cx="10881360" cy="579646"/>
           </a:xfrm>
           <a:prstGeom prst="rect">
             <a:avLst/>
@@ -23686,7 +24685,7 @@
           <a:lstStyle/>
           <a:p>
             <a:r>
-              <a:rPr sz="3100" b="1" i="0">
+              <a:rPr sz="3600" b="1" i="0" dirty="0">
                 <a:solidFill>
                   <a:srgbClr val="1B334A"/>
                 </a:solidFill>
@@ -23859,7 +24858,7 @@
         <p:spPr>
           <a:xfrm>
             <a:off x="8028432" y="2157984"/>
-            <a:ext cx="3374136" cy="3474719"/>
+            <a:ext cx="3374136" cy="2569934"/>
           </a:xfrm>
           <a:prstGeom prst="rect">
             <a:avLst/>
@@ -23873,7 +24872,7 @@
           <a:lstStyle/>
           <a:p>
             <a:r>
-              <a:rPr sz="1500" b="1" i="0">
+              <a:rPr sz="2400" b="1" i="0" dirty="0">
                 <a:solidFill>
                   <a:srgbClr val="1B334A"/>
                 </a:solidFill>
@@ -23889,7 +24888,7 @@
               </a:spcBef>
             </a:pPr>
             <a:r>
-              <a:rPr sz="1000" b="1" i="0">
+              <a:rPr sz="1600" b="1" i="0" dirty="0">
                 <a:solidFill>
                   <a:srgbClr val="8A5082"/>
                 </a:solidFill>
@@ -23898,7 +24897,7 @@
               <a:t>● </a:t>
             </a:r>
             <a:r>
-              <a:rPr sz="1150" b="1" i="0">
+              <a:rPr sz="1600" b="1" i="0" dirty="0">
                 <a:solidFill>
                   <a:srgbClr val="2B2A26"/>
                 </a:solidFill>
@@ -23907,13 +24906,31 @@
               <a:t>Orders the models:</a:t>
             </a:r>
             <a:r>
-              <a:rPr sz="1150" b="0" i="0">
+              <a:rPr sz="1600" b="0" i="0" dirty="0">
                 <a:solidFill>
                   <a:srgbClr val="2B2A26"/>
                 </a:solidFill>
                 <a:latin typeface="Calibri"/>
               </a:rPr>
-              <a:t> random &lt; freq &lt; m1 &lt; m3 &lt; m6</a:t>
+              <a:t> random &lt; </a:t>
+            </a:r>
+            <a:r>
+              <a:rPr sz="1600" b="0" i="0" dirty="0" err="1">
+                <a:solidFill>
+                  <a:srgbClr val="2B2A26"/>
+                </a:solidFill>
+                <a:latin typeface="Calibri"/>
+              </a:rPr>
+              <a:t>freq</a:t>
+            </a:r>
+            <a:r>
+              <a:rPr sz="1600" b="0" i="0" dirty="0">
+                <a:solidFill>
+                  <a:srgbClr val="2B2A26"/>
+                </a:solidFill>
+                <a:latin typeface="Calibri"/>
+              </a:rPr>
+              <a:t> &lt; m1 &lt; m3 &lt; m6</a:t>
             </a:r>
           </a:p>
           <a:p>
@@ -23923,7 +24940,7 @@
               </a:spcBef>
             </a:pPr>
             <a:r>
-              <a:rPr sz="1000" b="1" i="0">
+              <a:rPr sz="1600" b="1" i="0" dirty="0">
                 <a:solidFill>
                   <a:srgbClr val="8A5082"/>
                 </a:solidFill>
@@ -23932,7 +24949,7 @@
               <a:t>● </a:t>
             </a:r>
             <a:r>
-              <a:rPr sz="1150" b="0" i="0">
+              <a:rPr sz="1600" b="0" i="0" dirty="0">
                 <a:solidFill>
                   <a:srgbClr val="2B2A26"/>
                 </a:solidFill>
@@ -23948,7 +24965,7 @@
               </a:spcBef>
             </a:pPr>
             <a:r>
-              <a:rPr sz="1000" b="1" i="0">
+              <a:rPr sz="1600" b="1" i="0" dirty="0">
                 <a:solidFill>
                   <a:srgbClr val="8A5082"/>
                 </a:solidFill>
@@ -23957,7 +24974,7 @@
               <a:t>● </a:t>
             </a:r>
             <a:r>
-              <a:rPr sz="1150" b="1" i="0">
+              <a:rPr sz="1600" b="1" i="0" dirty="0">
                 <a:solidFill>
                   <a:srgbClr val="2B2A26"/>
                 </a:solidFill>
@@ -23966,7 +24983,7 @@
               <a:t>m6</a:t>
             </a:r>
             <a:r>
-              <a:rPr sz="1150" b="0" i="0">
+              <a:rPr sz="1600" b="0" i="0" dirty="0">
                 <a:solidFill>
                   <a:srgbClr val="2B2A26"/>
                 </a:solidFill>
@@ -23982,7 +24999,7 @@
               </a:spcBef>
             </a:pPr>
             <a:r>
-              <a:rPr sz="1000" b="1" i="0">
+              <a:rPr sz="1600" b="1" i="0" dirty="0">
                 <a:solidFill>
                   <a:srgbClr val="8A5082"/>
                 </a:solidFill>
@@ -23991,27 +25008,41 @@
               <a:t>● </a:t>
             </a:r>
             <a:r>
-              <a:rPr sz="1150" b="1" i="0">
+              <a:rPr sz="1600" b="1" i="0" dirty="0" err="1">
                 <a:solidFill>
                   <a:srgbClr val="2B2A26"/>
                 </a:solidFill>
                 <a:latin typeface="Calibri"/>
               </a:rPr>
-              <a:t>most_frequent (0.79)</a:t>
-            </a:r>
-            <a:r>
-              <a:rPr sz="1150" b="0" i="0">
+              <a:t>most_frequent</a:t>
+            </a:r>
+            <a:r>
+              <a:rPr sz="1600" b="1" i="0" dirty="0">
                 <a:solidFill>
                   <a:srgbClr val="2B2A26"/>
                 </a:solidFill>
                 <a:latin typeface="Calibri"/>
               </a:rPr>
+              <a:t> (0.79)</a:t>
+            </a:r>
+            <a:r>
+              <a:rPr sz="1600" b="0" i="0" dirty="0">
+                <a:solidFill>
+                  <a:srgbClr val="2B2A26"/>
+                </a:solidFill>
+                <a:latin typeface="Calibri"/>
+              </a:rPr>
               <a:t> leads only because the reference IS often the frequent sentence: artifact, not quality</a:t>
             </a:r>
           </a:p>
         </p:txBody>
       </p:sp>
     </p:spTree>
+    <p:extLst>
+      <p:ext uri="{BB962C8B-B14F-4D97-AF65-F5344CB8AC3E}">
+        <p14:creationId xmlns:p14="http://schemas.microsoft.com/office/powerpoint/2010/main" val="2917709729"/>
+      </p:ext>
+    </p:extLst>
   </p:cSld>
   <p:clrMapOvr>
     <a:masterClrMapping/>
@@ -24118,7 +25149,7 @@
                 </a:solidFill>
                 <a:latin typeface="Calibri"/>
               </a:rPr>
-              <a:t>AI4FQC · Project 07 — GRANA Captioning</a:t>
+              <a:t>AI4FQC · Project 07: GRANA Captioning</a:t>
             </a:r>
           </a:p>
         </p:txBody>
@@ -24298,7 +25329,7 @@
         <p:spPr>
           <a:xfrm>
             <a:off x="640080" y="1874520"/>
-            <a:ext cx="5394960" cy="292608"/>
+            <a:ext cx="5394960" cy="271869"/>
           </a:xfrm>
           <a:prstGeom prst="rect">
             <a:avLst/>
@@ -24313,7 +25344,7 @@
           <a:p>
             <a:pPr algn="ctr"/>
             <a:r>
-              <a:rPr sz="1200" b="1" i="0">
+              <a:rPr sz="1600" b="1" i="0">
                 <a:solidFill>
                   <a:srgbClr val="1B334A"/>
                 </a:solidFill>
@@ -24351,7 +25382,7 @@
         <p:spPr>
           <a:xfrm>
             <a:off x="6263640" y="1874520"/>
-            <a:ext cx="5303520" cy="292608"/>
+            <a:ext cx="5303520" cy="271869"/>
           </a:xfrm>
           <a:prstGeom prst="rect">
             <a:avLst/>
@@ -24366,7 +25397,7 @@
           <a:p>
             <a:pPr algn="ctr"/>
             <a:r>
-              <a:rPr sz="1200" b="1" i="0">
+              <a:rPr sz="1600" b="1" i="0" dirty="0">
                 <a:solidFill>
                   <a:srgbClr val="1B334A"/>
                 </a:solidFill>
@@ -24430,8 +25461,8 @@
         </p:nvSpPr>
         <p:spPr>
           <a:xfrm>
-            <a:off x="914400" y="5623560"/>
-            <a:ext cx="10515600" cy="548640"/>
+            <a:off x="914400" y="5761945"/>
+            <a:ext cx="10515600" cy="271869"/>
           </a:xfrm>
           <a:prstGeom prst="rect">
             <a:avLst/>
@@ -24445,7 +25476,7 @@
           <a:lstStyle/>
           <a:p>
             <a:r>
-              <a:rPr sz="1250" b="1" i="0">
+              <a:rPr sz="1600" b="1" i="0" dirty="0">
                 <a:solidFill>
                   <a:srgbClr val="E0A458"/>
                 </a:solidFill>
@@ -24457,6 +25488,11 @@
         </p:txBody>
       </p:sp>
     </p:spTree>
+    <p:extLst>
+      <p:ext uri="{BB962C8B-B14F-4D97-AF65-F5344CB8AC3E}">
+        <p14:creationId xmlns:p14="http://schemas.microsoft.com/office/powerpoint/2010/main" val="3390183108"/>
+      </p:ext>
+    </p:extLst>
   </p:cSld>
   <p:clrMapOvr>
     <a:masterClrMapping/>
@@ -24543,7 +25579,7 @@
         <p:spPr>
           <a:xfrm>
             <a:off x="411480" y="6473952"/>
-            <a:ext cx="8229600" cy="292608"/>
+            <a:ext cx="2343295" cy="171842"/>
           </a:xfrm>
           <a:prstGeom prst="rect">
             <a:avLst/>
@@ -24563,7 +25599,7 @@
                 </a:solidFill>
                 <a:latin typeface="Calibri"/>
               </a:rPr>
-              <a:t>AI4FQC · Project 07 — GRANA Captioning</a:t>
+              <a:t>AI4FQC · Project 07: GRANA Captioning</a:t>
             </a:r>
           </a:p>
         </p:txBody>
@@ -24612,7 +25648,7 @@
         <p:spPr>
           <a:xfrm>
             <a:off x="640080" y="502920"/>
-            <a:ext cx="10881360" cy="365760"/>
+            <a:ext cx="1389888" cy="218008"/>
           </a:xfrm>
           <a:prstGeom prst="rect">
             <a:avLst/>
@@ -24646,7 +25682,7 @@
         <p:spPr>
           <a:xfrm>
             <a:off x="640080" y="886968"/>
-            <a:ext cx="10881360" cy="914400"/>
+            <a:ext cx="10881360" cy="579646"/>
           </a:xfrm>
           <a:prstGeom prst="rect">
             <a:avLst/>
@@ -24660,7 +25696,7 @@
           <a:lstStyle/>
           <a:p>
             <a:r>
-              <a:rPr sz="3100" b="1" i="0">
+              <a:rPr sz="3600" b="1" i="0" dirty="0">
                 <a:solidFill>
                   <a:srgbClr val="1B334A"/>
                 </a:solidFill>
@@ -24725,7 +25761,7 @@
         <p:spPr>
           <a:xfrm>
             <a:off x="640080" y="1874520"/>
-            <a:ext cx="10881360" cy="548640"/>
+            <a:ext cx="10881360" cy="641201"/>
           </a:xfrm>
           <a:prstGeom prst="rect">
             <a:avLst/>
@@ -24739,13 +25775,31 @@
           <a:lstStyle/>
           <a:p>
             <a:r>
-              <a:rPr sz="1350" b="0" i="0">
+              <a:rPr sz="2000" b="0" i="0" dirty="0">
                 <a:solidFill>
                   <a:srgbClr val="2B2A26"/>
                 </a:solidFill>
                 <a:latin typeface="Calibri"/>
               </a:rPr>
-              <a:t>For each wheel the panel describes seven dimensions. Three are visible in the image, four are not — a distinction that returns in the results.</a:t>
+              <a:t>For each wheel the panel describes seven dimensions. Three are visible in the image, four are not</a:t>
+            </a:r>
+            <a:r>
+              <a:rPr lang="it-IT" sz="2000" b="0" i="0" dirty="0">
+                <a:solidFill>
+                  <a:srgbClr val="2B2A26"/>
+                </a:solidFill>
+                <a:latin typeface="Calibri"/>
+              </a:rPr>
+              <a:t>,</a:t>
+            </a:r>
+            <a:r>
+              <a:rPr sz="2000" b="0" i="0" dirty="0">
+                <a:solidFill>
+                  <a:srgbClr val="2B2A26"/>
+                </a:solidFill>
+                <a:latin typeface="Calibri"/>
+              </a:rPr>
+              <a:t> a distinction that returns in the results.</a:t>
             </a:r>
           </a:p>
         </p:txBody>
@@ -24791,7 +25845,7 @@
           <a:lstStyle/>
           <a:p>
             <a:pPr algn="ctr"/>
-            <a:endParaRPr/>
+            <a:endParaRPr sz="2800"/>
           </a:p>
         </p:txBody>
       </p:sp>
@@ -24836,7 +25890,7 @@
           <a:lstStyle/>
           <a:p>
             <a:pPr algn="ctr"/>
-            <a:endParaRPr/>
+            <a:endParaRPr sz="2800"/>
           </a:p>
         </p:txBody>
       </p:sp>
@@ -24883,7 +25937,7 @@
           <a:lstStyle/>
           <a:p>
             <a:pPr algn="ctr"/>
-            <a:endParaRPr/>
+            <a:endParaRPr sz="2800"/>
           </a:p>
         </p:txBody>
       </p:sp>
@@ -24896,7 +25950,7 @@
         <p:spPr>
           <a:xfrm>
             <a:off x="841248" y="2862072"/>
-            <a:ext cx="2304288" cy="1051560"/>
+            <a:ext cx="2304288" cy="630942"/>
           </a:xfrm>
           <a:prstGeom prst="rect">
             <a:avLst/>
@@ -24910,14 +25964,29 @@
           <a:lstStyle/>
           <a:p>
             <a:r>
-              <a:rPr sz="1500" b="1" i="0">
+              <a:rPr sz="2000" b="1" i="0" dirty="0">
                 <a:solidFill>
                   <a:srgbClr val="1B334A"/>
                 </a:solidFill>
                 <a:latin typeface="Georgia"/>
               </a:rPr>
-              <a:t>Paste Colour</a:t>
-            </a:r>
+              <a:t>Paste </a:t>
+            </a:r>
+            <a:r>
+              <a:rPr sz="2000" b="1" i="0" dirty="0" err="1">
+                <a:solidFill>
+                  <a:srgbClr val="1B334A"/>
+                </a:solidFill>
+                <a:latin typeface="Georgia"/>
+              </a:rPr>
+              <a:t>Colour</a:t>
+            </a:r>
+            <a:endParaRPr sz="2000" b="1" i="0" dirty="0">
+              <a:solidFill>
+                <a:srgbClr val="1B334A"/>
+              </a:solidFill>
+              <a:latin typeface="Georgia"/>
+            </a:endParaRPr>
           </a:p>
           <a:p>
             <a:pPr>
@@ -24926,7 +25995,7 @@
               </a:spcBef>
             </a:pPr>
             <a:r>
-              <a:rPr sz="1100" b="1" i="0" spc="150">
+              <a:rPr sz="1600" b="1" i="0" spc="150" dirty="0">
                 <a:solidFill>
                   <a:srgbClr val="5B8C5A"/>
                 </a:solidFill>
@@ -24978,7 +26047,7 @@
           <a:lstStyle/>
           <a:p>
             <a:pPr algn="ctr"/>
-            <a:endParaRPr/>
+            <a:endParaRPr sz="2800"/>
           </a:p>
         </p:txBody>
       </p:sp>
@@ -25023,7 +26092,7 @@
           <a:lstStyle/>
           <a:p>
             <a:pPr algn="ctr"/>
-            <a:endParaRPr/>
+            <a:endParaRPr sz="2800"/>
           </a:p>
         </p:txBody>
       </p:sp>
@@ -25070,7 +26139,7 @@
           <a:lstStyle/>
           <a:p>
             <a:pPr algn="ctr"/>
-            <a:endParaRPr/>
+            <a:endParaRPr sz="2800"/>
           </a:p>
         </p:txBody>
       </p:sp>
@@ -25083,7 +26152,7 @@
         <p:spPr>
           <a:xfrm>
             <a:off x="3675888" y="2862072"/>
-            <a:ext cx="2304288" cy="1051560"/>
+            <a:ext cx="2304288" cy="630942"/>
           </a:xfrm>
           <a:prstGeom prst="rect">
             <a:avLst/>
@@ -25097,7 +26166,7 @@
           <a:lstStyle/>
           <a:p>
             <a:r>
-              <a:rPr sz="1500" b="1" i="0">
+              <a:rPr sz="2000" b="1" i="0">
                 <a:solidFill>
                   <a:srgbClr val="1B334A"/>
                 </a:solidFill>
@@ -25113,7 +26182,7 @@
               </a:spcBef>
             </a:pPr>
             <a:r>
-              <a:rPr sz="1100" b="1" i="0" spc="150">
+              <a:rPr sz="1600" b="1" i="0" spc="150">
                 <a:solidFill>
                   <a:srgbClr val="5B8C5A"/>
                 </a:solidFill>
@@ -25165,7 +26234,7 @@
           <a:lstStyle/>
           <a:p>
             <a:pPr algn="ctr"/>
-            <a:endParaRPr/>
+            <a:endParaRPr sz="2800"/>
           </a:p>
         </p:txBody>
       </p:sp>
@@ -25210,7 +26279,7 @@
           <a:lstStyle/>
           <a:p>
             <a:pPr algn="ctr"/>
-            <a:endParaRPr/>
+            <a:endParaRPr sz="2800"/>
           </a:p>
         </p:txBody>
       </p:sp>
@@ -25257,7 +26326,7 @@
           <a:lstStyle/>
           <a:p>
             <a:pPr algn="ctr"/>
-            <a:endParaRPr/>
+            <a:endParaRPr sz="2800"/>
           </a:p>
         </p:txBody>
       </p:sp>
@@ -25270,7 +26339,7 @@
         <p:spPr>
           <a:xfrm>
             <a:off x="6510528" y="2862072"/>
-            <a:ext cx="2304288" cy="1051560"/>
+            <a:ext cx="2011680" cy="938719"/>
           </a:xfrm>
           <a:prstGeom prst="rect">
             <a:avLst/>
@@ -25284,7 +26353,7 @@
           <a:lstStyle/>
           <a:p>
             <a:r>
-              <a:rPr sz="1500" b="1" i="0" dirty="0">
+              <a:rPr sz="2000" b="1" i="0" dirty="0">
                 <a:solidFill>
                   <a:srgbClr val="1B334A"/>
                 </a:solidFill>
@@ -25300,7 +26369,7 @@
               </a:spcBef>
             </a:pPr>
             <a:r>
-              <a:rPr sz="1100" b="1" i="0" spc="150" dirty="0">
+              <a:rPr sz="1600" b="1" i="0" spc="150" dirty="0">
                 <a:solidFill>
                   <a:srgbClr val="5B8C5A"/>
                 </a:solidFill>
@@ -25352,7 +26421,7 @@
           <a:lstStyle/>
           <a:p>
             <a:pPr algn="ctr"/>
-            <a:endParaRPr/>
+            <a:endParaRPr sz="2800"/>
           </a:p>
         </p:txBody>
       </p:sp>
@@ -25397,7 +26466,7 @@
           <a:lstStyle/>
           <a:p>
             <a:pPr algn="ctr"/>
-            <a:endParaRPr/>
+            <a:endParaRPr sz="2800"/>
           </a:p>
         </p:txBody>
       </p:sp>
@@ -25444,7 +26513,7 @@
           <a:lstStyle/>
           <a:p>
             <a:pPr algn="ctr"/>
-            <a:endParaRPr/>
+            <a:endParaRPr sz="2800"/>
           </a:p>
         </p:txBody>
       </p:sp>
@@ -25457,7 +26526,7 @@
         <p:spPr>
           <a:xfrm>
             <a:off x="9345168" y="2862072"/>
-            <a:ext cx="2304288" cy="1051560"/>
+            <a:ext cx="2011680" cy="938719"/>
           </a:xfrm>
           <a:prstGeom prst="rect">
             <a:avLst/>
@@ -25471,7 +26540,7 @@
           <a:lstStyle/>
           <a:p>
             <a:r>
-              <a:rPr sz="1500" b="1" i="0">
+              <a:rPr sz="2000" b="1" i="0" dirty="0">
                 <a:solidFill>
                   <a:srgbClr val="1B334A"/>
                 </a:solidFill>
@@ -25487,7 +26556,7 @@
               </a:spcBef>
             </a:pPr>
             <a:r>
-              <a:rPr sz="1100" b="1" i="0" spc="150">
+              <a:rPr sz="1600" b="1" i="0" spc="150" dirty="0">
                 <a:solidFill>
                   <a:srgbClr val="C88836"/>
                 </a:solidFill>
@@ -25539,7 +26608,7 @@
           <a:lstStyle/>
           <a:p>
             <a:pPr algn="ctr"/>
-            <a:endParaRPr/>
+            <a:endParaRPr sz="2800"/>
           </a:p>
         </p:txBody>
       </p:sp>
@@ -25584,7 +26653,7 @@
           <a:lstStyle/>
           <a:p>
             <a:pPr algn="ctr"/>
-            <a:endParaRPr/>
+            <a:endParaRPr sz="2800"/>
           </a:p>
         </p:txBody>
       </p:sp>
@@ -25631,7 +26700,7 @@
           <a:lstStyle/>
           <a:p>
             <a:pPr algn="ctr"/>
-            <a:endParaRPr/>
+            <a:endParaRPr sz="2800"/>
           </a:p>
         </p:txBody>
       </p:sp>
@@ -25644,7 +26713,7 @@
         <p:spPr>
           <a:xfrm>
             <a:off x="841248" y="4507992"/>
-            <a:ext cx="2304288" cy="1051560"/>
+            <a:ext cx="2304288" cy="630942"/>
           </a:xfrm>
           <a:prstGeom prst="rect">
             <a:avLst/>
@@ -25658,7 +26727,7 @@
           <a:lstStyle/>
           <a:p>
             <a:r>
-              <a:rPr sz="1500" b="1" i="0">
+              <a:rPr sz="2000" b="1" i="0" dirty="0">
                 <a:solidFill>
                   <a:srgbClr val="1B334A"/>
                 </a:solidFill>
@@ -25674,7 +26743,7 @@
               </a:spcBef>
             </a:pPr>
             <a:r>
-              <a:rPr sz="1100" b="1" i="0" spc="150">
+              <a:rPr sz="1600" b="1" i="0" spc="150" dirty="0">
                 <a:solidFill>
                   <a:srgbClr val="2C5F8A"/>
                 </a:solidFill>
@@ -25726,7 +26795,7 @@
           <a:lstStyle/>
           <a:p>
             <a:pPr algn="ctr"/>
-            <a:endParaRPr/>
+            <a:endParaRPr sz="2800"/>
           </a:p>
         </p:txBody>
       </p:sp>
@@ -25771,7 +26840,7 @@
           <a:lstStyle/>
           <a:p>
             <a:pPr algn="ctr"/>
-            <a:endParaRPr/>
+            <a:endParaRPr sz="2800"/>
           </a:p>
         </p:txBody>
       </p:sp>
@@ -25818,7 +26887,7 @@
           <a:lstStyle/>
           <a:p>
             <a:pPr algn="ctr"/>
-            <a:endParaRPr/>
+            <a:endParaRPr sz="2800"/>
           </a:p>
         </p:txBody>
       </p:sp>
@@ -25831,7 +26900,7 @@
         <p:spPr>
           <a:xfrm>
             <a:off x="3675888" y="4507992"/>
-            <a:ext cx="2304288" cy="1051560"/>
+            <a:ext cx="2304288" cy="630942"/>
           </a:xfrm>
           <a:prstGeom prst="rect">
             <a:avLst/>
@@ -25845,7 +26914,7 @@
           <a:lstStyle/>
           <a:p>
             <a:r>
-              <a:rPr sz="1500" b="1" i="0">
+              <a:rPr sz="2000" b="1" i="0">
                 <a:solidFill>
                   <a:srgbClr val="1B334A"/>
                 </a:solidFill>
@@ -25861,7 +26930,7 @@
               </a:spcBef>
             </a:pPr>
             <a:r>
-              <a:rPr sz="1100" b="1" i="0" spc="150">
+              <a:rPr sz="1600" b="1" i="0" spc="150">
                 <a:solidFill>
                   <a:srgbClr val="2C5F8A"/>
                 </a:solidFill>
@@ -25913,7 +26982,7 @@
           <a:lstStyle/>
           <a:p>
             <a:pPr algn="ctr"/>
-            <a:endParaRPr/>
+            <a:endParaRPr sz="2800"/>
           </a:p>
         </p:txBody>
       </p:sp>
@@ -25958,7 +27027,7 @@
           <a:lstStyle/>
           <a:p>
             <a:pPr algn="ctr"/>
-            <a:endParaRPr/>
+            <a:endParaRPr sz="2800"/>
           </a:p>
         </p:txBody>
       </p:sp>
@@ -26005,7 +27074,7 @@
           <a:lstStyle/>
           <a:p>
             <a:pPr algn="ctr"/>
-            <a:endParaRPr/>
+            <a:endParaRPr sz="2800"/>
           </a:p>
         </p:txBody>
       </p:sp>
@@ -26018,7 +27087,7 @@
         <p:spPr>
           <a:xfrm>
             <a:off x="6510528" y="4507992"/>
-            <a:ext cx="2304288" cy="1051560"/>
+            <a:ext cx="2304288" cy="630942"/>
           </a:xfrm>
           <a:prstGeom prst="rect">
             <a:avLst/>
@@ -26032,7 +27101,7 @@
           <a:lstStyle/>
           <a:p>
             <a:r>
-              <a:rPr sz="1500" b="1" i="0">
+              <a:rPr sz="2000" b="1" i="0">
                 <a:solidFill>
                   <a:srgbClr val="1B334A"/>
                 </a:solidFill>
@@ -26048,7 +27117,7 @@
               </a:spcBef>
             </a:pPr>
             <a:r>
-              <a:rPr sz="1100" b="1" i="0" spc="150">
+              <a:rPr sz="1600" b="1" i="0" spc="150">
                 <a:solidFill>
                   <a:srgbClr val="C1492E"/>
                 </a:solidFill>
@@ -26100,7 +27169,7 @@
           <a:lstStyle/>
           <a:p>
             <a:pPr algn="ctr"/>
-            <a:endParaRPr/>
+            <a:endParaRPr sz="2800"/>
           </a:p>
         </p:txBody>
       </p:sp>
@@ -26113,7 +27182,7 @@
         <p:spPr>
           <a:xfrm>
             <a:off x="9345168" y="4434840"/>
-            <a:ext cx="2304288" cy="1051560"/>
+            <a:ext cx="2304288" cy="833562"/>
           </a:xfrm>
           <a:prstGeom prst="rect">
             <a:avLst/>
@@ -26127,7 +27196,7 @@
           <a:lstStyle/>
           <a:p>
             <a:r>
-              <a:rPr sz="1200" b="1" i="0">
+              <a:rPr b="1" i="0">
                 <a:solidFill>
                   <a:srgbClr val="E0A458"/>
                 </a:solidFill>
@@ -26143,7 +27212,7 @@
               </a:spcBef>
             </a:pPr>
             <a:r>
-              <a:rPr sz="1150" b="0" i="0">
+              <a:rPr sz="1600" b="0" i="0">
                 <a:solidFill>
                   <a:srgbClr val="F7F1E3"/>
                 </a:solidFill>
@@ -26155,6 +27224,11 @@
         </p:txBody>
       </p:sp>
     </p:spTree>
+    <p:extLst>
+      <p:ext uri="{BB962C8B-B14F-4D97-AF65-F5344CB8AC3E}">
+        <p14:creationId xmlns:p14="http://schemas.microsoft.com/office/powerpoint/2010/main" val="2123928237"/>
+      </p:ext>
+    </p:extLst>
   </p:cSld>
   <p:clrMapOvr>
     <a:masterClrMapping/>
@@ -26261,7 +27335,7 @@
                 </a:solidFill>
                 <a:latin typeface="Calibri"/>
               </a:rPr>
-              <a:t>AI4FQC · Project 07 — GRANA Captioning</a:t>
+              <a:t>AI4FQC · Project 07: GRANA Captioning</a:t>
             </a:r>
           </a:p>
         </p:txBody>
@@ -26344,7 +27418,7 @@
         <p:spPr>
           <a:xfrm>
             <a:off x="640080" y="886968"/>
-            <a:ext cx="10881360" cy="914400"/>
+            <a:ext cx="10881360" cy="579646"/>
           </a:xfrm>
           <a:prstGeom prst="rect">
             <a:avLst/>
@@ -26358,13 +27432,13 @@
           <a:lstStyle/>
           <a:p>
             <a:r>
-              <a:rPr sz="3100" b="1" i="0">
+              <a:rPr sz="3600" b="1" i="0" dirty="0">
                 <a:solidFill>
                   <a:srgbClr val="1B334A"/>
                 </a:solidFill>
                 <a:latin typeface="Georgia"/>
               </a:rPr>
-              <a:t>The BLEU trap, visualised</a:t>
+              <a:t>The BLEU trap, visualized</a:t>
             </a:r>
           </a:p>
         </p:txBody>
@@ -26537,7 +27611,7 @@
         <p:spPr>
           <a:xfrm>
             <a:off x="8577072" y="2157984"/>
-            <a:ext cx="2825496" cy="3474719"/>
+            <a:ext cx="2825496" cy="2364750"/>
           </a:xfrm>
           <a:prstGeom prst="rect">
             <a:avLst/>
@@ -26551,7 +27625,7 @@
           <a:lstStyle/>
           <a:p>
             <a:r>
-              <a:rPr sz="1550" b="1" i="0">
+              <a:rPr sz="2400" b="1" i="0" dirty="0">
                 <a:solidFill>
                   <a:srgbClr val="E0A458"/>
                 </a:solidFill>
@@ -26562,20 +27636,61 @@
           </a:p>
           <a:p>
             <a:r>
-              <a:rPr sz="1350" b="0" i="0">
+              <a:rPr sz="1600" b="0" i="0" dirty="0">
                 <a:solidFill>
                   <a:srgbClr val="F7F1E3"/>
                 </a:solidFill>
                 <a:latin typeface="Calibri"/>
               </a:rPr>
-              <a:t>Left, BLEU-1: the constant caption most_frequent WINS.
-Right, CLIPScore: the two models are practically equal.
+              <a:t>Left, BLEU-1: the constant caption </a:t>
+            </a:r>
+            <a:r>
+              <a:rPr sz="1600" b="0" i="0" dirty="0" err="1">
+                <a:solidFill>
+                  <a:srgbClr val="F7F1E3"/>
+                </a:solidFill>
+                <a:latin typeface="Calibri"/>
+              </a:rPr>
+              <a:t>most_frequent</a:t>
+            </a:r>
+            <a:r>
+              <a:rPr sz="1600" b="0" i="0" dirty="0">
+                <a:solidFill>
+                  <a:srgbClr val="F7F1E3"/>
+                </a:solidFill>
+                <a:latin typeface="Calibri"/>
+              </a:rPr>
+              <a:t> WINS.
+Right, </a:t>
+            </a:r>
+            <a:r>
+              <a:rPr sz="1600" b="0" i="0" dirty="0" err="1">
+                <a:solidFill>
+                  <a:srgbClr val="F7F1E3"/>
+                </a:solidFill>
+                <a:latin typeface="Calibri"/>
+              </a:rPr>
+              <a:t>CLIPScore</a:t>
+            </a:r>
+            <a:r>
+              <a:rPr sz="1600" b="0" i="0" dirty="0">
+                <a:solidFill>
+                  <a:srgbClr val="F7F1E3"/>
+                </a:solidFill>
+                <a:latin typeface="Calibri"/>
+              </a:rPr>
+              <a:t>: the two models are practically equal.
 → BLEU-1 alone is misleading. Metrics must be read together.</a:t>
             </a:r>
           </a:p>
         </p:txBody>
       </p:sp>
     </p:spTree>
+    <p:extLst>
+      <p:ext uri="{BB962C8B-B14F-4D97-AF65-F5344CB8AC3E}">
+        <p14:creationId xmlns:p14="http://schemas.microsoft.com/office/powerpoint/2010/main" val="3861128791"/>
+      </p:ext>
+    </p:extLst>
   </p:cSld>
   <p:clrMapOvr>
     <a:masterClrMapping/>
@@ -26682,7 +27797,7 @@
                 </a:solidFill>
                 <a:latin typeface="Calibri"/>
               </a:rPr>
-              <a:t>AI4FQC · Project 07 — GRANA Captioning</a:t>
+              <a:t>AI4FQC · Project 07: GRANA Captioning</a:t>
             </a:r>
           </a:p>
         </p:txBody>
@@ -26765,7 +27880,7 @@
         <p:spPr>
           <a:xfrm>
             <a:off x="640080" y="886968"/>
-            <a:ext cx="10881360" cy="914400"/>
+            <a:ext cx="10881360" cy="579646"/>
           </a:xfrm>
           <a:prstGeom prst="rect">
             <a:avLst/>
@@ -26779,7 +27894,7 @@
           <a:lstStyle/>
           <a:p>
             <a:r>
-              <a:rPr sz="3100" b="1" i="0">
+              <a:rPr sz="3600" b="1" i="0" dirty="0">
                 <a:solidFill>
                   <a:srgbClr val="1B334A"/>
                 </a:solidFill>
@@ -26883,7 +27998,7 @@
                     <a:lstStyle/>
                     <a:p>
                       <a:r>
-                        <a:rPr sz="1250" b="1" i="0">
+                        <a:rPr sz="1600" b="1" i="0">
                           <a:solidFill>
                             <a:srgbClr val="FFFFFF"/>
                           </a:solidFill>
@@ -26905,7 +28020,7 @@
                     <a:lstStyle/>
                     <a:p>
                       <a:r>
-                        <a:rPr sz="1250" b="1" i="0">
+                        <a:rPr sz="1600" b="1" i="0">
                           <a:solidFill>
                             <a:srgbClr val="FFFFFF"/>
                           </a:solidFill>
@@ -26927,7 +28042,7 @@
                     <a:lstStyle/>
                     <a:p>
                       <a:r>
-                        <a:rPr sz="1250" b="1" i="0">
+                        <a:rPr sz="1600" b="1" i="0">
                           <a:solidFill>
                             <a:srgbClr val="FFFFFF"/>
                           </a:solidFill>
@@ -26956,7 +28071,7 @@
                     <a:lstStyle/>
                     <a:p>
                       <a:r>
-                        <a:rPr sz="1200" b="1" i="0">
+                        <a:rPr sz="1600" b="1" i="0">
                           <a:solidFill>
                             <a:srgbClr val="2B2A26"/>
                           </a:solidFill>
@@ -26978,7 +28093,7 @@
                     <a:lstStyle/>
                     <a:p>
                       <a:r>
-                        <a:rPr sz="1200" b="0" i="0">
+                        <a:rPr sz="1600" b="0" i="0">
                           <a:solidFill>
                             <a:srgbClr val="2B2A26"/>
                           </a:solidFill>
@@ -27000,7 +28115,7 @@
                     <a:lstStyle/>
                     <a:p>
                       <a:r>
-                        <a:rPr sz="1200" b="1" i="0">
+                        <a:rPr sz="1600" b="1" i="0">
                           <a:solidFill>
                             <a:srgbClr val="5B8C5A"/>
                           </a:solidFill>
@@ -27029,7 +28144,7 @@
                     <a:lstStyle/>
                     <a:p>
                       <a:r>
-                        <a:rPr sz="1200" b="1" i="0">
+                        <a:rPr sz="1600" b="1" i="0">
                           <a:solidFill>
                             <a:srgbClr val="2B2A26"/>
                           </a:solidFill>
@@ -27051,7 +28166,7 @@
                     <a:lstStyle/>
                     <a:p>
                       <a:r>
-                        <a:rPr sz="1200" b="0" i="0">
+                        <a:rPr sz="1600" b="0" i="0">
                           <a:solidFill>
                             <a:srgbClr val="2B2A26"/>
                           </a:solidFill>
@@ -27073,7 +28188,7 @@
                     <a:lstStyle/>
                     <a:p>
                       <a:r>
-                        <a:rPr sz="1200" b="0" i="0">
+                        <a:rPr sz="1600" b="0" i="0">
                           <a:solidFill>
                             <a:srgbClr val="2B2A26"/>
                           </a:solidFill>
@@ -27102,7 +28217,7 @@
                     <a:lstStyle/>
                     <a:p>
                       <a:r>
-                        <a:rPr sz="1200" b="1" i="0">
+                        <a:rPr sz="1600" b="1" i="0">
                           <a:solidFill>
                             <a:srgbClr val="2B2A26"/>
                           </a:solidFill>
@@ -27124,7 +28239,7 @@
                     <a:lstStyle/>
                     <a:p>
                       <a:r>
-                        <a:rPr sz="1200" b="0" i="0">
+                        <a:rPr sz="1600" b="0" i="0">
                           <a:solidFill>
                             <a:srgbClr val="2B2A26"/>
                           </a:solidFill>
@@ -27146,7 +28261,7 @@
                     <a:lstStyle/>
                     <a:p>
                       <a:r>
-                        <a:rPr sz="1200" b="1" i="0">
+                        <a:rPr sz="1600" b="1" i="0">
                           <a:solidFill>
                             <a:srgbClr val="5B8C5A"/>
                           </a:solidFill>
@@ -27175,7 +28290,7 @@
                     <a:lstStyle/>
                     <a:p>
                       <a:r>
-                        <a:rPr sz="1200" b="1" i="0">
+                        <a:rPr sz="1600" b="1" i="0">
                           <a:solidFill>
                             <a:srgbClr val="2B2A26"/>
                           </a:solidFill>
@@ -27197,7 +28312,7 @@
                     <a:lstStyle/>
                     <a:p>
                       <a:r>
-                        <a:rPr sz="1200" b="0" i="0">
+                        <a:rPr sz="1600" b="0" i="0">
                           <a:solidFill>
                             <a:srgbClr val="2B2A26"/>
                           </a:solidFill>
@@ -27219,7 +28334,7 @@
                     <a:lstStyle/>
                     <a:p>
                       <a:r>
-                        <a:rPr sz="1200" b="0" i="0">
+                        <a:rPr sz="1600" b="0" i="0">
                           <a:solidFill>
                             <a:srgbClr val="2B2A26"/>
                           </a:solidFill>
@@ -27248,7 +28363,7 @@
                     <a:lstStyle/>
                     <a:p>
                       <a:r>
-                        <a:rPr sz="1200" b="1" i="0">
+                        <a:rPr sz="1600" b="1" i="0">
                           <a:solidFill>
                             <a:srgbClr val="2B2A26"/>
                           </a:solidFill>
@@ -27270,7 +28385,7 @@
                     <a:lstStyle/>
                     <a:p>
                       <a:r>
-                        <a:rPr sz="1200" b="0" i="0">
+                        <a:rPr sz="1600" b="0" i="0">
                           <a:solidFill>
                             <a:srgbClr val="2B2A26"/>
                           </a:solidFill>
@@ -27292,7 +28407,7 @@
                     <a:lstStyle/>
                     <a:p>
                       <a:r>
-                        <a:rPr sz="1200" b="0" i="0">
+                        <a:rPr sz="1600" b="0" i="0" dirty="0">
                           <a:solidFill>
                             <a:srgbClr val="2B2A26"/>
                           </a:solidFill>
@@ -27417,7 +28532,7 @@
         <p:spPr>
           <a:xfrm>
             <a:off x="896112" y="5221224"/>
-            <a:ext cx="10506456" cy="548640"/>
+            <a:ext cx="10506456" cy="456535"/>
           </a:xfrm>
           <a:prstGeom prst="rect">
             <a:avLst/>
@@ -27431,7 +28546,7 @@
           <a:lstStyle/>
           <a:p>
             <a:r>
-              <a:rPr sz="1250" b="0" i="0">
+              <a:rPr sz="1400" b="0" i="0" dirty="0">
                 <a:solidFill>
                   <a:srgbClr val="2B2A26"/>
                 </a:solidFill>
@@ -27443,6 +28558,11 @@
         </p:txBody>
       </p:sp>
     </p:spTree>
+    <p:extLst>
+      <p:ext uri="{BB962C8B-B14F-4D97-AF65-F5344CB8AC3E}">
+        <p14:creationId xmlns:p14="http://schemas.microsoft.com/office/powerpoint/2010/main" val="3715004559"/>
+      </p:ext>
+    </p:extLst>
   </p:cSld>
   <p:clrMapOvr>
     <a:masterClrMapping/>
@@ -27764,7 +28884,7 @@
         <p:spPr>
           <a:xfrm>
             <a:off x="777240" y="548640"/>
-            <a:ext cx="10058400" cy="822960"/>
+            <a:ext cx="10058400" cy="579646"/>
           </a:xfrm>
           <a:prstGeom prst="rect">
             <a:avLst/>
@@ -27778,7 +28898,7 @@
           <a:lstStyle/>
           <a:p>
             <a:r>
-              <a:rPr sz="3400" b="1" i="0">
+              <a:rPr sz="3600" b="1" i="0" dirty="0">
                 <a:solidFill>
                   <a:srgbClr val="F7F1E3"/>
                 </a:solidFill>
@@ -27933,7 +29053,7 @@
         <p:spPr>
           <a:xfrm>
             <a:off x="868680" y="1828800"/>
-            <a:ext cx="3108960" cy="2880360"/>
+            <a:ext cx="3108960" cy="2103140"/>
           </a:xfrm>
           <a:prstGeom prst="rect">
             <a:avLst/>
@@ -27947,7 +29067,7 @@
           <a:lstStyle/>
           <a:p>
             <a:r>
-              <a:rPr sz="1550" b="1" i="0">
+              <a:rPr sz="2400" b="1" i="0" dirty="0">
                 <a:solidFill>
                   <a:srgbClr val="5B8C5A"/>
                 </a:solidFill>
@@ -27963,7 +29083,7 @@
               </a:spcBef>
             </a:pPr>
             <a:r>
-              <a:rPr sz="1000" b="1" i="0">
+              <a:rPr sz="1600" b="1" i="0" dirty="0">
                 <a:solidFill>
                   <a:srgbClr val="5B8C5A"/>
                 </a:solidFill>
@@ -27972,7 +29092,7 @@
               <a:t>● </a:t>
             </a:r>
             <a:r>
-              <a:rPr sz="1250" b="1" i="0">
+              <a:rPr sz="1600" b="1" i="0" dirty="0">
                 <a:solidFill>
                   <a:srgbClr val="F7F1E3"/>
                 </a:solidFill>
@@ -27981,13 +29101,49 @@
               <a:t>The encoder matters:</a:t>
             </a:r>
             <a:r>
-              <a:rPr sz="1250" b="0" i="0">
+              <a:rPr sz="1600" b="0" i="0" dirty="0">
                 <a:solidFill>
                   <a:srgbClr val="D9D2C2"/>
                 </a:solidFill>
                 <a:latin typeface="Calibri"/>
               </a:rPr>
-              <a:t> ResNet ignores the image, ViT uses it on 4/7</a:t>
+              <a:t> </a:t>
+            </a:r>
+            <a:r>
+              <a:rPr sz="1600" b="0" i="0" dirty="0" err="1">
+                <a:solidFill>
+                  <a:srgbClr val="D9D2C2"/>
+                </a:solidFill>
+                <a:latin typeface="Calibri"/>
+              </a:rPr>
+              <a:t>ResNet</a:t>
+            </a:r>
+            <a:r>
+              <a:rPr sz="1600" b="0" i="0" dirty="0">
+                <a:solidFill>
+                  <a:srgbClr val="D9D2C2"/>
+                </a:solidFill>
+                <a:latin typeface="Calibri"/>
+              </a:rPr>
+              <a:t> ignores the image, </a:t>
+            </a:r>
+            <a:r>
+              <a:rPr sz="1600" b="0" i="0" dirty="0" err="1">
+                <a:solidFill>
+                  <a:srgbClr val="D9D2C2"/>
+                </a:solidFill>
+                <a:latin typeface="Calibri"/>
+              </a:rPr>
+              <a:t>ViT</a:t>
+            </a:r>
+            <a:r>
+              <a:rPr sz="1600" b="0" i="0" dirty="0">
+                <a:solidFill>
+                  <a:srgbClr val="D9D2C2"/>
+                </a:solidFill>
+                <a:latin typeface="Calibri"/>
+              </a:rPr>
+              <a:t> uses it on 4/7</a:t>
             </a:r>
           </a:p>
           <a:p>
@@ -27997,7 +29153,7 @@
               </a:spcBef>
             </a:pPr>
             <a:r>
-              <a:rPr sz="1000" b="1" i="0">
+              <a:rPr sz="1600" b="1" i="0" dirty="0">
                 <a:solidFill>
                   <a:srgbClr val="5B8C5A"/>
                 </a:solidFill>
@@ -28006,7 +29162,7 @@
               <a:t>● </a:t>
             </a:r>
             <a:r>
-              <a:rPr sz="1250" b="0" i="0">
+              <a:rPr sz="1600" b="0" i="0" dirty="0">
                 <a:solidFill>
                   <a:srgbClr val="D9D2C2"/>
                 </a:solidFill>
@@ -28022,7 +29178,7 @@
               </a:spcBef>
             </a:pPr>
             <a:r>
-              <a:rPr sz="1000" b="1" i="0">
+              <a:rPr sz="1600" b="1" i="0" dirty="0">
                 <a:solidFill>
                   <a:srgbClr val="5B8C5A"/>
                 </a:solidFill>
@@ -28031,14 +29187,29 @@
               <a:t>● </a:t>
             </a:r>
             <a:r>
-              <a:rPr sz="1250" b="0" i="0">
+              <a:rPr sz="1600" b="0" i="0" dirty="0">
                 <a:solidFill>
                   <a:srgbClr val="D9D2C2"/>
                 </a:solidFill>
                 <a:latin typeface="Calibri"/>
               </a:rPr>
-              <a:t>Confirmed by shuffle test + CLIPScore</a:t>
-            </a:r>
+              <a:t>Confirmed by shuffle test + </a:t>
+            </a:r>
+            <a:r>
+              <a:rPr sz="1600" b="0" i="0" dirty="0" err="1">
+                <a:solidFill>
+                  <a:srgbClr val="D9D2C2"/>
+                </a:solidFill>
+                <a:latin typeface="Calibri"/>
+              </a:rPr>
+              <a:t>CLIPScore</a:t>
+            </a:r>
+            <a:endParaRPr sz="1600" b="0" i="0" dirty="0">
+              <a:solidFill>
+                <a:srgbClr val="D9D2C2"/>
+              </a:solidFill>
+              <a:latin typeface="Calibri"/>
+            </a:endParaRPr>
           </a:p>
         </p:txBody>
       </p:sp>
@@ -28141,7 +29312,7 @@
         <p:spPr>
           <a:xfrm>
             <a:off x="4562856" y="1828800"/>
-            <a:ext cx="3108960" cy="2880360"/>
+            <a:ext cx="3108960" cy="2103140"/>
           </a:xfrm>
           <a:prstGeom prst="rect">
             <a:avLst/>
@@ -28155,7 +29326,7 @@
           <a:lstStyle/>
           <a:p>
             <a:r>
-              <a:rPr sz="1550" b="1" i="0">
+              <a:rPr sz="2400" b="1" i="0" dirty="0">
                 <a:solidFill>
                   <a:srgbClr val="E0A458"/>
                 </a:solidFill>
@@ -28171,7 +29342,7 @@
               </a:spcBef>
             </a:pPr>
             <a:r>
-              <a:rPr sz="1000" b="1" i="0">
+              <a:rPr sz="1600" b="1" i="0" dirty="0">
                 <a:solidFill>
                   <a:srgbClr val="E0A458"/>
                 </a:solidFill>
@@ -28180,7 +29351,7 @@
               <a:t>● </a:t>
             </a:r>
             <a:r>
-              <a:rPr sz="1250" b="1" i="0">
+              <a:rPr sz="1600" b="1" i="0" dirty="0">
                 <a:solidFill>
                   <a:srgbClr val="F7F1E3"/>
                 </a:solidFill>
@@ -28189,7 +29360,7 @@
               <a:t>4/7</a:t>
             </a:r>
             <a:r>
-              <a:rPr sz="1250" b="0" i="0">
+              <a:rPr sz="1600" b="0" i="0" dirty="0">
                 <a:solidFill>
                   <a:srgbClr val="D9D2C2"/>
                 </a:solidFill>
@@ -28205,7 +29376,7 @@
               </a:spcBef>
             </a:pPr>
             <a:r>
-              <a:rPr sz="1000" b="1" i="0">
+              <a:rPr sz="1600" b="1" i="0" dirty="0">
                 <a:solidFill>
                   <a:srgbClr val="E0A458"/>
                 </a:solidFill>
@@ -28214,16 +29385,34 @@
               <a:t>● </a:t>
             </a:r>
             <a:r>
-              <a:rPr sz="1250" b="1" i="0">
+              <a:rPr sz="1600" b="1" i="0" dirty="0">
                 <a:solidFill>
                   <a:srgbClr val="F7F1E3"/>
                 </a:solidFill>
                 <a:latin typeface="Calibri"/>
               </a:rPr>
-              <a:t>m6 (ViT+GePpeTto)</a:t>
-            </a:r>
-            <a:r>
-              <a:rPr sz="1250" b="0" i="0">
+              <a:t>m6 (</a:t>
+            </a:r>
+            <a:r>
+              <a:rPr sz="1600" b="1" i="0" dirty="0" err="1">
+                <a:solidFill>
+                  <a:srgbClr val="F7F1E3"/>
+                </a:solidFill>
+                <a:latin typeface="Calibri"/>
+              </a:rPr>
+              <a:t>ViT+GePpeTto</a:t>
+            </a:r>
+            <a:r>
+              <a:rPr sz="1600" b="1" i="0" dirty="0">
+                <a:solidFill>
+                  <a:srgbClr val="F7F1E3"/>
+                </a:solidFill>
+                <a:latin typeface="Calibri"/>
+              </a:rPr>
+              <a:t>)</a:t>
+            </a:r>
+            <a:r>
+              <a:rPr sz="1600" b="0" i="0" dirty="0">
                 <a:solidFill>
                   <a:srgbClr val="D9D2C2"/>
                 </a:solidFill>
@@ -28239,7 +29428,7 @@
               </a:spcBef>
             </a:pPr>
             <a:r>
-              <a:rPr sz="1000" b="1" i="0">
+              <a:rPr sz="1600" b="1" i="0" dirty="0">
                 <a:solidFill>
                   <a:srgbClr val="E0A458"/>
                 </a:solidFill>
@@ -28248,7 +29437,7 @@
               <a:t>● </a:t>
             </a:r>
             <a:r>
-              <a:rPr sz="1250" b="1" i="0">
+              <a:rPr sz="1600" b="1" i="0" dirty="0">
                 <a:solidFill>
                   <a:srgbClr val="F7F1E3"/>
                 </a:solidFill>
@@ -28257,7 +29446,7 @@
               <a:t>$5.60</a:t>
             </a:r>
             <a:r>
-              <a:rPr sz="1250" b="0" i="0">
+              <a:rPr sz="1600" b="0" i="0" dirty="0">
                 <a:solidFill>
                   <a:srgbClr val="D9D2C2"/>
                 </a:solidFill>
@@ -28367,7 +29556,7 @@
         <p:spPr>
           <a:xfrm>
             <a:off x="8257031" y="1828800"/>
-            <a:ext cx="3127248" cy="2880360"/>
+            <a:ext cx="3127248" cy="2103140"/>
           </a:xfrm>
           <a:prstGeom prst="rect">
             <a:avLst/>
@@ -28381,7 +29570,7 @@
           <a:lstStyle/>
           <a:p>
             <a:r>
-              <a:rPr sz="1550" b="1" i="0">
+              <a:rPr sz="2400" b="1" i="0" dirty="0">
                 <a:solidFill>
                   <a:srgbClr val="2C5F8A"/>
                 </a:solidFill>
@@ -28397,7 +29586,7 @@
               </a:spcBef>
             </a:pPr>
             <a:r>
-              <a:rPr sz="1000" b="1" i="0">
+              <a:rPr sz="1600" b="1" i="0" dirty="0">
                 <a:solidFill>
                   <a:srgbClr val="2C5F8A"/>
                 </a:solidFill>
@@ -28406,7 +29595,7 @@
               <a:t>● </a:t>
             </a:r>
             <a:r>
-              <a:rPr sz="1250" b="1" i="0">
+              <a:rPr sz="1600" b="1" i="0" dirty="0">
                 <a:solidFill>
                   <a:srgbClr val="F7F1E3"/>
                 </a:solidFill>
@@ -28415,14 +29604,29 @@
               <a:t>Fine-tune the encoder</a:t>
             </a:r>
             <a:r>
-              <a:rPr sz="1250" b="0" i="0">
+              <a:rPr sz="1600" b="0" i="0" dirty="0">
                 <a:solidFill>
                   <a:srgbClr val="D9D2C2"/>
                 </a:solidFill>
                 <a:latin typeface="Calibri"/>
               </a:rPr>
-              <a:t> and re-measure CLIPScore</a:t>
-            </a:r>
+              <a:t> and re-measure </a:t>
+            </a:r>
+            <a:r>
+              <a:rPr sz="1600" b="0" i="0" dirty="0" err="1">
+                <a:solidFill>
+                  <a:srgbClr val="D9D2C2"/>
+                </a:solidFill>
+                <a:latin typeface="Calibri"/>
+              </a:rPr>
+              <a:t>CLIPScore</a:t>
+            </a:r>
+            <a:endParaRPr sz="1600" b="0" i="0" dirty="0">
+              <a:solidFill>
+                <a:srgbClr val="D9D2C2"/>
+              </a:solidFill>
+              <a:latin typeface="Calibri"/>
+            </a:endParaRPr>
           </a:p>
           <a:p>
             <a:pPr>
@@ -28431,7 +29635,7 @@
               </a:spcBef>
             </a:pPr>
             <a:r>
-              <a:rPr sz="1000" b="1" i="0">
+              <a:rPr sz="1600" b="1" i="0" dirty="0">
                 <a:solidFill>
                   <a:srgbClr val="2C5F8A"/>
                 </a:solidFill>
@@ -28440,7 +29644,7 @@
               <a:t>● </a:t>
             </a:r>
             <a:r>
-              <a:rPr sz="1250" b="0" i="0">
+              <a:rPr sz="1600" b="0" i="0" dirty="0">
                 <a:solidFill>
                   <a:srgbClr val="D9D2C2"/>
                 </a:solidFill>
@@ -28456,7 +29660,7 @@
               </a:spcBef>
             </a:pPr>
             <a:r>
-              <a:rPr sz="1000" b="1" i="0">
+              <a:rPr sz="1600" b="1" i="0" dirty="0">
                 <a:solidFill>
                   <a:srgbClr val="2C5F8A"/>
                 </a:solidFill>
@@ -28465,7 +29669,7 @@
               <a:t>● </a:t>
             </a:r>
             <a:r>
-              <a:rPr sz="1250" b="0" i="0">
+              <a:rPr sz="1600" b="0" i="0" dirty="0">
                 <a:solidFill>
                   <a:srgbClr val="D9D2C2"/>
                 </a:solidFill>
@@ -28485,7 +29689,7 @@
         <p:spPr>
           <a:xfrm>
             <a:off x="640080" y="4983480"/>
-            <a:ext cx="10881360" cy="868680"/>
+            <a:ext cx="10881360" cy="518091"/>
           </a:xfrm>
           <a:prstGeom prst="rect">
             <a:avLst/>
@@ -28499,7 +29703,7 @@
           <a:lstStyle/>
           <a:p>
             <a:r>
-              <a:rPr sz="1300" b="1" i="0">
+              <a:rPr sz="1600" b="1" i="0" dirty="0">
                 <a:solidFill>
                   <a:srgbClr val="E0A458"/>
                 </a:solidFill>
@@ -28508,13 +29712,67 @@
               <a:t>Honest framing:  </a:t>
             </a:r>
             <a:r>
-              <a:rPr sz="1300" b="0" i="0">
+              <a:rPr sz="1600" b="0" i="0" dirty="0">
                 <a:solidFill>
                   <a:srgbClr val="F7F1E3"/>
                 </a:solidFill>
                 <a:latin typeface="Calibri"/>
               </a:rPr>
-              <a:t>no model would replace a taster. They learned the vocabulary and a partial image→descriptor map — consistent with the data scale and the noise of multi-taster annotation.</a:t>
+              <a:t>no model would replace a taster. They learned the vocabulary and a partial image</a:t>
+            </a:r>
+            <a:r>
+              <a:rPr lang="it-IT" sz="1600" b="0" i="0" dirty="0">
+                <a:solidFill>
+                  <a:srgbClr val="F7F1E3"/>
+                </a:solidFill>
+                <a:latin typeface="Calibri"/>
+              </a:rPr>
+              <a:t> </a:t>
+            </a:r>
+            <a:r>
+              <a:rPr sz="1600" b="0" i="0" dirty="0">
+                <a:solidFill>
+                  <a:srgbClr val="F7F1E3"/>
+                </a:solidFill>
+                <a:latin typeface="Calibri"/>
+              </a:rPr>
+              <a:t>→</a:t>
+            </a:r>
+            <a:r>
+              <a:rPr lang="it-IT" sz="1600" b="0" i="0" dirty="0">
+                <a:solidFill>
+                  <a:srgbClr val="F7F1E3"/>
+                </a:solidFill>
+                <a:latin typeface="Calibri"/>
+              </a:rPr>
+              <a:t> </a:t>
+            </a:r>
+            <a:r>
+              <a:rPr sz="1600" b="0" i="0" dirty="0">
+                <a:solidFill>
+                  <a:srgbClr val="F7F1E3"/>
+                </a:solidFill>
+                <a:latin typeface="Calibri"/>
+              </a:rPr>
+              <a:t>descriptor map</a:t>
+            </a:r>
+            <a:r>
+              <a:rPr lang="it-IT" sz="1600" b="0" i="0" dirty="0">
+                <a:solidFill>
+                  <a:srgbClr val="F7F1E3"/>
+                </a:solidFill>
+                <a:latin typeface="Calibri"/>
+              </a:rPr>
+              <a:t>,</a:t>
+            </a:r>
+            <a:r>
+              <a:rPr sz="1600" b="0" i="0" dirty="0">
+                <a:solidFill>
+                  <a:srgbClr val="F7F1E3"/>
+                </a:solidFill>
+                <a:latin typeface="Calibri"/>
+              </a:rPr>
+              <a:t> consistent with the data scale and the noise of multi-taster annotation.</a:t>
             </a:r>
           </a:p>
         </p:txBody>
@@ -28528,7 +29786,7 @@
         <p:spPr>
           <a:xfrm>
             <a:off x="640080" y="5989320"/>
-            <a:ext cx="10881360" cy="548640"/>
+            <a:ext cx="10881360" cy="456535"/>
           </a:xfrm>
           <a:prstGeom prst="rect">
             <a:avLst/>
@@ -28543,18 +29801,23 @@
           <a:p>
             <a:pPr algn="ctr"/>
             <a:r>
-              <a:rPr sz="1800" b="1" i="0">
+              <a:rPr sz="2800" b="1" i="0">
                 <a:solidFill>
                   <a:srgbClr val="E0A458"/>
                 </a:solidFill>
                 <a:latin typeface="Georgia"/>
               </a:rPr>
-              <a:t>Thank you. — Questions?</a:t>
+              <a:t>Thank you. Questions?</a:t>
             </a:r>
           </a:p>
         </p:txBody>
       </p:sp>
     </p:spTree>
+    <p:extLst>
+      <p:ext uri="{BB962C8B-B14F-4D97-AF65-F5344CB8AC3E}">
+        <p14:creationId xmlns:p14="http://schemas.microsoft.com/office/powerpoint/2010/main" val="1968846971"/>
+      </p:ext>
+    </p:extLst>
   </p:cSld>
   <p:clrMapOvr>
     <a:masterClrMapping/>
@@ -28641,7 +29904,7 @@
         <p:spPr>
           <a:xfrm>
             <a:off x="411480" y="6473952"/>
-            <a:ext cx="8229600" cy="292608"/>
+            <a:ext cx="2505340" cy="171842"/>
           </a:xfrm>
           <a:prstGeom prst="rect">
             <a:avLst/>
@@ -28661,7 +29924,7 @@
                 </a:solidFill>
                 <a:latin typeface="Calibri"/>
               </a:rPr>
-              <a:t>AI4FQC · Project 07 — GRANA Captioning</a:t>
+              <a:t>AI4FQC · Project 07: GRANA Captioning</a:t>
             </a:r>
           </a:p>
         </p:txBody>
@@ -28710,7 +29973,7 @@
         <p:spPr>
           <a:xfrm>
             <a:off x="640080" y="502920"/>
-            <a:ext cx="10881360" cy="365760"/>
+            <a:ext cx="1125059" cy="218008"/>
           </a:xfrm>
           <a:prstGeom prst="rect">
             <a:avLst/>
@@ -28744,7 +30007,7 @@
         <p:spPr>
           <a:xfrm>
             <a:off x="640080" y="886968"/>
-            <a:ext cx="10881360" cy="914400"/>
+            <a:ext cx="10881360" cy="579646"/>
           </a:xfrm>
           <a:prstGeom prst="rect">
             <a:avLst/>
@@ -28758,7 +30021,7 @@
           <a:lstStyle/>
           <a:p>
             <a:r>
-              <a:rPr sz="3100" b="1" i="0">
+              <a:rPr sz="3600" b="1" i="0" dirty="0">
                 <a:solidFill>
                   <a:srgbClr val="1B334A"/>
                 </a:solidFill>
@@ -28913,7 +30176,7 @@
         <p:spPr>
           <a:xfrm>
             <a:off x="896112" y="2157984"/>
-            <a:ext cx="4974336" cy="3108960"/>
+            <a:ext cx="4974336" cy="2077492"/>
           </a:xfrm>
           <a:prstGeom prst="rect">
             <a:avLst/>
@@ -28927,7 +30190,7 @@
           <a:lstStyle/>
           <a:p>
             <a:r>
-              <a:rPr sz="1650" b="1" i="0">
+              <a:rPr sz="2400" b="1" i="0" dirty="0">
                 <a:solidFill>
                   <a:srgbClr val="1B334A"/>
                 </a:solidFill>
@@ -28943,7 +30206,7 @@
               </a:spcBef>
             </a:pPr>
             <a:r>
-              <a:rPr sz="1000" b="1" i="0">
+              <a:rPr sz="1600" b="1" i="0" dirty="0">
                 <a:solidFill>
                   <a:srgbClr val="2C5F8A"/>
                 </a:solidFill>
@@ -28952,13 +30215,13 @@
               <a:t>● </a:t>
             </a:r>
             <a:r>
-              <a:rPr sz="1350" b="0" i="0">
+              <a:rPr sz="1600" b="0" i="0" dirty="0">
                 <a:solidFill>
                   <a:srgbClr val="2B2A26"/>
                 </a:solidFill>
                 <a:latin typeface="Calibri"/>
               </a:rPr>
-              <a:t>Clean and normalise telegraphic, dialectal, inconsistent descriptions</a:t>
+              <a:t>Clean and normalize telegraphic, dialectal, inconsistent descriptions</a:t>
             </a:r>
           </a:p>
           <a:p>
@@ -28968,7 +30231,7 @@
               </a:spcBef>
             </a:pPr>
             <a:r>
-              <a:rPr sz="1000" b="1" i="0">
+              <a:rPr sz="1600" b="1" i="0" dirty="0">
                 <a:solidFill>
                   <a:srgbClr val="2C5F8A"/>
                 </a:solidFill>
@@ -28977,7 +30240,7 @@
               <a:t>● </a:t>
             </a:r>
             <a:r>
-              <a:rPr sz="1350" b="0" i="0">
+              <a:rPr sz="1600" b="0" i="0" dirty="0">
                 <a:solidFill>
                   <a:srgbClr val="2B2A26"/>
                 </a:solidFill>
@@ -28993,7 +30256,7 @@
               </a:spcBef>
             </a:pPr>
             <a:r>
-              <a:rPr sz="1000" b="1" i="0">
+              <a:rPr sz="1600" b="1" i="0" dirty="0">
                 <a:solidFill>
                   <a:srgbClr val="2C5F8A"/>
                 </a:solidFill>
@@ -29002,7 +30265,7 @@
               <a:t>● </a:t>
             </a:r>
             <a:r>
-              <a:rPr sz="1350" b="0" i="0">
+              <a:rPr sz="1600" b="0" i="0" dirty="0">
                 <a:solidFill>
                   <a:srgbClr val="2B2A26"/>
                 </a:solidFill>
@@ -29018,7 +30281,7 @@
               </a:spcBef>
             </a:pPr>
             <a:r>
-              <a:rPr sz="1000" b="1" i="0">
+              <a:rPr sz="1600" b="1" i="0" dirty="0">
                 <a:solidFill>
                   <a:srgbClr val="2C5F8A"/>
                 </a:solidFill>
@@ -29027,7 +30290,7 @@
               <a:t>● </a:t>
             </a:r>
             <a:r>
-              <a:rPr sz="1350" b="1" i="0">
+              <a:rPr sz="1600" b="1" i="0" dirty="0">
                 <a:solidFill>
                   <a:srgbClr val="2B2A26"/>
                 </a:solidFill>
@@ -29036,7 +30299,7 @@
               <a:t>≈ 70%</a:t>
             </a:r>
             <a:r>
-              <a:rPr sz="1350" b="0" i="0">
+              <a:rPr sz="1600" b="0" i="0" dirty="0">
                 <a:solidFill>
                   <a:srgbClr val="2B2A26"/>
                 </a:solidFill>
@@ -29146,7 +30409,7 @@
         <p:spPr>
           <a:xfrm>
             <a:off x="6428232" y="2157984"/>
-            <a:ext cx="4974336" cy="3108960"/>
+            <a:ext cx="4974336" cy="2446824"/>
           </a:xfrm>
           <a:prstGeom prst="rect">
             <a:avLst/>
@@ -29160,7 +30423,7 @@
           <a:lstStyle/>
           <a:p>
             <a:r>
-              <a:rPr sz="1650" b="1" i="0">
+              <a:rPr sz="2400" b="1" i="0" dirty="0">
                 <a:solidFill>
                   <a:srgbClr val="1B334A"/>
                 </a:solidFill>
@@ -29176,7 +30439,7 @@
               </a:spcBef>
             </a:pPr>
             <a:r>
-              <a:rPr sz="1000" b="1" i="0">
+              <a:rPr sz="1600" b="1" i="0" dirty="0">
                 <a:solidFill>
                   <a:srgbClr val="E0A458"/>
                 </a:solidFill>
@@ -29185,13 +30448,31 @@
               <a:t>● </a:t>
             </a:r>
             <a:r>
-              <a:rPr sz="1350" b="0" i="0">
+              <a:rPr sz="1600" b="0" i="0" dirty="0">
                 <a:solidFill>
                   <a:srgbClr val="2B2A26"/>
                 </a:solidFill>
                 <a:latin typeface="Calibri"/>
               </a:rPr>
-              <a:t>Apply three «as conceptually different as possible» encoder–decoders</a:t>
+              <a:t>Apply three «as conceptually different as possible» </a:t>
+            </a:r>
+            <a:r>
+              <a:rPr lang="it-IT" sz="1600" b="0" i="0" dirty="0">
+                <a:solidFill>
+                  <a:srgbClr val="2B2A26"/>
+                </a:solidFill>
+                <a:latin typeface="Calibri"/>
+              </a:rPr>
+              <a:t>   </a:t>
+            </a:r>
+            <a:r>
+              <a:rPr sz="1600" b="0" i="0" dirty="0">
+                <a:solidFill>
+                  <a:srgbClr val="2B2A26"/>
+                </a:solidFill>
+                <a:latin typeface="Calibri"/>
+              </a:rPr>
+              <a:t>encoder–decoders</a:t>
             </a:r>
           </a:p>
           <a:p>
@@ -29201,7 +30482,7 @@
               </a:spcBef>
             </a:pPr>
             <a:r>
-              <a:rPr sz="1000" b="1" i="0">
+              <a:rPr sz="1600" b="1" i="0" dirty="0">
                 <a:solidFill>
                   <a:srgbClr val="E0A458"/>
                 </a:solidFill>
@@ -29210,7 +30491,7 @@
               <a:t>● </a:t>
             </a:r>
             <a:r>
-              <a:rPr sz="1350" b="0" i="0">
+              <a:rPr sz="1600" b="0" i="0" dirty="0">
                 <a:solidFill>
                   <a:srgbClr val="2B2A26"/>
                 </a:solidFill>
@@ -29226,7 +30507,7 @@
               </a:spcBef>
             </a:pPr>
             <a:r>
-              <a:rPr sz="1000" b="1" i="0">
+              <a:rPr sz="1600" b="1" i="0" dirty="0">
                 <a:solidFill>
                   <a:srgbClr val="E0A458"/>
                 </a:solidFill>
@@ -29235,7 +30516,7 @@
               <a:t>● </a:t>
             </a:r>
             <a:r>
-              <a:rPr sz="1350" b="0" i="0">
+              <a:rPr sz="1600" b="0" i="0" dirty="0">
                 <a:solidFill>
                   <a:srgbClr val="2B2A26"/>
                 </a:solidFill>
@@ -29251,7 +30532,7 @@
               </a:spcBef>
             </a:pPr>
             <a:r>
-              <a:rPr sz="1000" b="1" i="0">
+              <a:rPr sz="1600" b="1" i="0" dirty="0">
                 <a:solidFill>
                   <a:srgbClr val="E0A458"/>
                 </a:solidFill>
@@ -29260,7 +30541,7 @@
               <a:t>● </a:t>
             </a:r>
             <a:r>
-              <a:rPr sz="1350" b="1" i="0">
+              <a:rPr sz="1600" b="1" i="0" dirty="0">
                 <a:solidFill>
                   <a:srgbClr val="2B2A26"/>
                 </a:solidFill>
@@ -29269,7 +30550,7 @@
               <a:t>≈ 30%</a:t>
             </a:r>
             <a:r>
-              <a:rPr sz="1350" b="0" i="0">
+              <a:rPr sz="1600" b="0" i="0" dirty="0">
                 <a:solidFill>
                   <a:srgbClr val="2B2A26"/>
                 </a:solidFill>
@@ -29281,6 +30562,11 @@
         </p:txBody>
       </p:sp>
     </p:spTree>
+    <p:extLst>
+      <p:ext uri="{BB962C8B-B14F-4D97-AF65-F5344CB8AC3E}">
+        <p14:creationId xmlns:p14="http://schemas.microsoft.com/office/powerpoint/2010/main" val="2048947903"/>
+      </p:ext>
+    </p:extLst>
   </p:cSld>
   <p:clrMapOvr>
     <a:masterClrMapping/>
@@ -29885,7 +31171,7 @@
           <a:lstStyle/>
           <a:p>
             <a:r>
-              <a:rPr sz="4600" b="1" i="0">
+              <a:rPr sz="4600" b="1" i="0" dirty="0">
                 <a:solidFill>
                   <a:srgbClr val="F7F1E3"/>
                 </a:solidFill>
@@ -29950,7 +31236,7 @@
         <p:spPr>
           <a:xfrm>
             <a:off x="914400" y="4434840"/>
-            <a:ext cx="9601200" cy="731520"/>
+            <a:ext cx="9601200" cy="302647"/>
           </a:xfrm>
           <a:prstGeom prst="rect">
             <a:avLst/>
@@ -29964,7 +31250,7 @@
           <a:lstStyle/>
           <a:p>
             <a:r>
-              <a:rPr sz="1700" b="0" i="1">
+              <a:rPr b="0" i="1" dirty="0">
                 <a:solidFill>
                   <a:srgbClr val="D9D2C2"/>
                 </a:solidFill>
@@ -30082,7 +31368,7 @@
                 </a:solidFill>
                 <a:latin typeface="Calibri"/>
               </a:rPr>
-              <a:t>AI4FQC · Project 07 — GRANA Captioning</a:t>
+              <a:t>AI4FQC · Project 07: GRANA Captioning</a:t>
             </a:r>
           </a:p>
         </p:txBody>
@@ -30165,7 +31451,7 @@
         <p:spPr>
           <a:xfrm>
             <a:off x="640080" y="886968"/>
-            <a:ext cx="10881360" cy="914400"/>
+            <a:ext cx="10881360" cy="579646"/>
           </a:xfrm>
           <a:prstGeom prst="rect">
             <a:avLst/>
@@ -30179,7 +31465,7 @@
           <a:lstStyle/>
           <a:p>
             <a:r>
-              <a:rPr sz="3100" b="1" i="0">
+              <a:rPr sz="3600" b="1" i="0" dirty="0">
                 <a:solidFill>
                   <a:srgbClr val="1B334A"/>
                 </a:solidFill>
@@ -30334,7 +31620,7 @@
         <p:spPr>
           <a:xfrm>
             <a:off x="896112" y="2066544"/>
-            <a:ext cx="2816352" cy="2180084"/>
+            <a:ext cx="2992982" cy="2026196"/>
           </a:xfrm>
           <a:prstGeom prst="rect">
             <a:avLst/>
@@ -30348,7 +31634,7 @@
           <a:lstStyle/>
           <a:p>
             <a:r>
-              <a:rPr b="1" i="0" dirty="0">
+              <a:rPr sz="2400" b="1" i="0" dirty="0">
                 <a:solidFill>
                   <a:srgbClr val="1B334A"/>
                 </a:solidFill>
@@ -30414,7 +31700,25 @@
                 </a:solidFill>
                 <a:latin typeface="Calibri"/>
               </a:rPr>
-              <a:t> Excel workbooks (2018–2021), one sheet per attribute</a:t>
+              <a:t> Excel workbooks (201</a:t>
+            </a:r>
+            <a:r>
+              <a:rPr lang="it-IT" sz="1600" dirty="0">
+                <a:solidFill>
+                  <a:srgbClr val="2B2A26"/>
+                </a:solidFill>
+                <a:latin typeface="Calibri"/>
+              </a:rPr>
+              <a:t>8-</a:t>
+            </a:r>
+            <a:r>
+              <a:rPr sz="1600" b="0" i="0" dirty="0">
+                <a:solidFill>
+                  <a:srgbClr val="2B2A26"/>
+                </a:solidFill>
+                <a:latin typeface="Calibri"/>
+              </a:rPr>
+              <a:t>2021), one sheet per attribute</a:t>
             </a:r>
           </a:p>
           <a:p>
@@ -30548,7 +31852,7 @@
         <p:spPr>
           <a:xfrm>
             <a:off x="4553712" y="2066544"/>
-            <a:ext cx="3099816" cy="2056973"/>
+            <a:ext cx="3099816" cy="2149306"/>
           </a:xfrm>
           <a:prstGeom prst="rect">
             <a:avLst/>
@@ -30562,7 +31866,7 @@
           <a:lstStyle/>
           <a:p>
             <a:r>
-              <a:rPr b="1" i="0" dirty="0">
+              <a:rPr sz="2400" b="1" i="0" dirty="0">
                 <a:solidFill>
                   <a:srgbClr val="1B334A"/>
                 </a:solidFill>
@@ -30570,7 +31874,7 @@
               </a:rPr>
               <a:t>The join problem</a:t>
             </a:r>
-            <a:endParaRPr lang="it-IT" b="1" i="0" dirty="0">
+            <a:endParaRPr lang="it-IT" sz="2400" b="1" i="0" dirty="0">
               <a:solidFill>
                 <a:srgbClr val="1B334A"/>
               </a:solidFill>
@@ -30593,7 +31897,25 @@
                 </a:solidFill>
                 <a:latin typeface="Calibri"/>
               </a:rPr>
-              <a:t>Images and comments «spoke different languages». The filename identifies the single wheel; the comment only the taster's tray. No row-level join — only a dairy-level join, via the codebook.</a:t>
+              <a:t>Images and comments «spoke different languages». The filename identifies the single wheel; the comment only the taster's tray. No row-level join</a:t>
+            </a:r>
+            <a:r>
+              <a:rPr lang="it-IT" sz="1600" b="0" i="0" dirty="0">
+                <a:solidFill>
+                  <a:srgbClr val="2B2A26"/>
+                </a:solidFill>
+                <a:latin typeface="Calibri"/>
+              </a:rPr>
+              <a:t>,</a:t>
+            </a:r>
+            <a:r>
+              <a:rPr sz="1600" b="0" i="0" dirty="0">
+                <a:solidFill>
+                  <a:srgbClr val="2B2A26"/>
+                </a:solidFill>
+                <a:latin typeface="Calibri"/>
+              </a:rPr>
+              <a:t> only a dairy-level join, via the codebook.</a:t>
             </a:r>
           </a:p>
         </p:txBody>
@@ -30697,7 +32019,7 @@
         <p:spPr>
           <a:xfrm>
             <a:off x="8211311" y="2066544"/>
-            <a:ext cx="3191256" cy="1985159"/>
+            <a:ext cx="3191256" cy="2077492"/>
           </a:xfrm>
           <a:prstGeom prst="rect">
             <a:avLst/>
@@ -30711,7 +32033,7 @@
           <a:lstStyle/>
           <a:p>
             <a:r>
-              <a:rPr b="1" i="0" dirty="0">
+              <a:rPr sz="2400" b="1" i="0" dirty="0">
                 <a:solidFill>
                   <a:srgbClr val="1B334A"/>
                 </a:solidFill>
@@ -30807,6 +32129,11 @@
         </p:txBody>
       </p:sp>
     </p:spTree>
+    <p:extLst>
+      <p:ext uri="{BB962C8B-B14F-4D97-AF65-F5344CB8AC3E}">
+        <p14:creationId xmlns:p14="http://schemas.microsoft.com/office/powerpoint/2010/main" val="1603431878"/>
+      </p:ext>
+    </p:extLst>
   </p:cSld>
   <p:clrMapOvr>
     <a:masterClrMapping/>
@@ -30913,7 +32240,7 @@
                 </a:solidFill>
                 <a:latin typeface="Calibri"/>
               </a:rPr>
-              <a:t>AI4FQC · Project 07 — GRANA Captioning</a:t>
+              <a:t>AI4FQC · Project 07: GRANA Captioning</a:t>
             </a:r>
           </a:p>
         </p:txBody>
@@ -30996,7 +32323,7 @@
         <p:spPr>
           <a:xfrm>
             <a:off x="640080" y="886968"/>
-            <a:ext cx="10881360" cy="914400"/>
+            <a:ext cx="10881360" cy="579646"/>
           </a:xfrm>
           <a:prstGeom prst="rect">
             <a:avLst/>
@@ -31010,13 +32337,22 @@
           <a:lstStyle/>
           <a:p>
             <a:r>
-              <a:rPr sz="3100" b="1" i="0">
+              <a:rPr sz="3600" b="1" i="0" dirty="0">
                 <a:solidFill>
                   <a:srgbClr val="1B334A"/>
                 </a:solidFill>
                 <a:latin typeface="Georgia"/>
               </a:rPr>
-              <a:t>Dairy-level broadcast</a:t>
+              <a:t>Dairy-level</a:t>
+            </a:r>
+            <a:r>
+              <a:rPr sz="3100" b="1" i="0" dirty="0">
+                <a:solidFill>
+                  <a:srgbClr val="1B334A"/>
+                </a:solidFill>
+                <a:latin typeface="Georgia"/>
+              </a:rPr>
+              <a:t> broadcast</a:t>
             </a:r>
           </a:p>
         </p:txBody>
@@ -31075,7 +32411,7 @@
         <p:spPr>
           <a:xfrm>
             <a:off x="640080" y="1874520"/>
-            <a:ext cx="10881360" cy="502920"/>
+            <a:ext cx="10881360" cy="579646"/>
           </a:xfrm>
           <a:prstGeom prst="rect">
             <a:avLst/>
@@ -31089,7 +32425,7 @@
           <a:lstStyle/>
           <a:p>
             <a:r>
-              <a:rPr sz="1350" b="0" i="0">
+              <a:rPr b="0" i="0" dirty="0">
                 <a:solidFill>
                   <a:srgbClr val="2B2A26"/>
                 </a:solidFill>
@@ -31141,7 +32477,7 @@
           <a:lstStyle/>
           <a:p>
             <a:pPr algn="ctr"/>
-            <a:endParaRPr/>
+            <a:endParaRPr sz="2400"/>
           </a:p>
         </p:txBody>
       </p:sp>
@@ -31186,7 +32522,7 @@
           <a:lstStyle/>
           <a:p>
             <a:pPr algn="ctr"/>
-            <a:endParaRPr/>
+            <a:endParaRPr sz="2400"/>
           </a:p>
         </p:txBody>
       </p:sp>
@@ -31198,8 +32534,8 @@
         </p:nvSpPr>
         <p:spPr>
           <a:xfrm>
-            <a:off x="914400" y="3474720"/>
-            <a:ext cx="2194560" cy="1005840"/>
+            <a:off x="914400" y="3610874"/>
+            <a:ext cx="2194560" cy="733534"/>
           </a:xfrm>
           <a:prstGeom prst="rect">
             <a:avLst/>
@@ -31213,7 +32549,7 @@
           <a:lstStyle/>
           <a:p>
             <a:r>
-              <a:rPr sz="1200" b="1" i="0">
+              <a:rPr sz="1600" b="1" i="0" dirty="0">
                 <a:solidFill>
                   <a:srgbClr val="1B334A"/>
                 </a:solidFill>
@@ -31224,7 +32560,7 @@
           </a:p>
           <a:p>
             <a:r>
-              <a:rPr sz="1500" b="1" i="1">
+              <a:rPr b="1" i="1" dirty="0">
                 <a:solidFill>
                   <a:srgbClr val="C1492E"/>
                 </a:solidFill>
@@ -31235,7 +32571,7 @@
           </a:p>
           <a:p>
             <a:r>
-              <a:rPr sz="1050" b="0" i="0">
+              <a:rPr sz="1200" b="0" i="0" dirty="0">
                 <a:solidFill>
                   <a:srgbClr val="8A8A84"/>
                 </a:solidFill>
@@ -31287,7 +32623,7 @@
           <a:lstStyle/>
           <a:p>
             <a:pPr algn="ctr"/>
-            <a:endParaRPr/>
+            <a:endParaRPr sz="2400"/>
           </a:p>
         </p:txBody>
       </p:sp>
@@ -31332,7 +32668,7 @@
           <a:lstStyle/>
           <a:p>
             <a:pPr algn="ctr"/>
-            <a:endParaRPr/>
+            <a:endParaRPr sz="2400"/>
           </a:p>
         </p:txBody>
       </p:sp>
@@ -31344,8 +32680,8 @@
         </p:nvSpPr>
         <p:spPr>
           <a:xfrm>
-            <a:off x="4754880" y="2560320"/>
-            <a:ext cx="2286000" cy="566928"/>
+            <a:off x="4754880" y="2707850"/>
+            <a:ext cx="2286000" cy="271869"/>
           </a:xfrm>
           <a:prstGeom prst="rect">
             <a:avLst/>
@@ -31359,13 +32695,31 @@
           <a:lstStyle/>
           <a:p>
             <a:r>
-              <a:rPr sz="1250" b="1" i="0">
+              <a:rPr sz="1600" b="1" i="0" dirty="0">
                 <a:solidFill>
                   <a:srgbClr val="2B2A26"/>
                 </a:solidFill>
                 <a:latin typeface="Calibri"/>
               </a:rPr>
-              <a:t>P3a — Slice</a:t>
+              <a:t>P3a </a:t>
+            </a:r>
+            <a:r>
+              <a:rPr lang="it-IT" sz="1600" b="1" i="0" dirty="0">
+                <a:solidFill>
+                  <a:srgbClr val="2B2A26"/>
+                </a:solidFill>
+                <a:latin typeface="Calibri"/>
+              </a:rPr>
+              <a:t>-</a:t>
+            </a:r>
+            <a:r>
+              <a:rPr sz="1600" b="1" i="0" dirty="0">
+                <a:solidFill>
+                  <a:srgbClr val="2B2A26"/>
+                </a:solidFill>
+                <a:latin typeface="Calibri"/>
+              </a:rPr>
+              <a:t> Slice</a:t>
             </a:r>
           </a:p>
         </p:txBody>
@@ -31446,7 +32800,7 @@
           <a:lstStyle/>
           <a:p>
             <a:pPr algn="ctr"/>
-            <a:endParaRPr/>
+            <a:endParaRPr sz="2400"/>
           </a:p>
         </p:txBody>
       </p:sp>
@@ -31491,7 +32845,7 @@
           <a:lstStyle/>
           <a:p>
             <a:pPr algn="ctr"/>
-            <a:endParaRPr/>
+            <a:endParaRPr sz="2400"/>
           </a:p>
         </p:txBody>
       </p:sp>
@@ -31503,8 +32857,8 @@
         </p:nvSpPr>
         <p:spPr>
           <a:xfrm>
-            <a:off x="4754880" y="3273552"/>
-            <a:ext cx="2286000" cy="566928"/>
+            <a:off x="4754880" y="3421082"/>
+            <a:ext cx="2286000" cy="271869"/>
           </a:xfrm>
           <a:prstGeom prst="rect">
             <a:avLst/>
@@ -31518,13 +32872,31 @@
           <a:lstStyle/>
           <a:p>
             <a:r>
-              <a:rPr sz="1250" b="1" i="0">
+              <a:rPr sz="1600" b="1" i="0" dirty="0">
                 <a:solidFill>
                   <a:srgbClr val="2B2A26"/>
                 </a:solidFill>
                 <a:latin typeface="Calibri"/>
               </a:rPr>
-              <a:t>P3a — Grain</a:t>
+              <a:t>P3a </a:t>
+            </a:r>
+            <a:r>
+              <a:rPr lang="it-IT" sz="1600" b="1" i="0" dirty="0">
+                <a:solidFill>
+                  <a:srgbClr val="2B2A26"/>
+                </a:solidFill>
+                <a:latin typeface="Calibri"/>
+              </a:rPr>
+              <a:t>-</a:t>
+            </a:r>
+            <a:r>
+              <a:rPr sz="1600" b="1" i="0" dirty="0">
+                <a:solidFill>
+                  <a:srgbClr val="2B2A26"/>
+                </a:solidFill>
+                <a:latin typeface="Calibri"/>
+              </a:rPr>
+              <a:t> Grain</a:t>
             </a:r>
           </a:p>
         </p:txBody>
@@ -31605,7 +32977,7 @@
           <a:lstStyle/>
           <a:p>
             <a:pPr algn="ctr"/>
-            <a:endParaRPr/>
+            <a:endParaRPr sz="2400"/>
           </a:p>
         </p:txBody>
       </p:sp>
@@ -31650,7 +33022,7 @@
           <a:lstStyle/>
           <a:p>
             <a:pPr algn="ctr"/>
-            <a:endParaRPr/>
+            <a:endParaRPr sz="2400"/>
           </a:p>
         </p:txBody>
       </p:sp>
@@ -31662,8 +33034,8 @@
         </p:nvSpPr>
         <p:spPr>
           <a:xfrm>
-            <a:off x="4754880" y="3986784"/>
-            <a:ext cx="2286000" cy="566928"/>
+            <a:off x="4754880" y="4134314"/>
+            <a:ext cx="2286000" cy="271869"/>
           </a:xfrm>
           <a:prstGeom prst="rect">
             <a:avLst/>
@@ -31677,13 +33049,31 @@
           <a:lstStyle/>
           <a:p>
             <a:r>
-              <a:rPr sz="1250" b="1" i="0">
+              <a:rPr sz="1600" b="1" i="0" dirty="0">
                 <a:solidFill>
                   <a:srgbClr val="2B2A26"/>
                 </a:solidFill>
                 <a:latin typeface="Calibri"/>
               </a:rPr>
-              <a:t>P3b — Slice</a:t>
+              <a:t>P3b </a:t>
+            </a:r>
+            <a:r>
+              <a:rPr lang="it-IT" sz="1600" b="1" i="0" dirty="0">
+                <a:solidFill>
+                  <a:srgbClr val="2B2A26"/>
+                </a:solidFill>
+                <a:latin typeface="Calibri"/>
+              </a:rPr>
+              <a:t>-</a:t>
+            </a:r>
+            <a:r>
+              <a:rPr sz="1600" b="1" i="0" dirty="0">
+                <a:solidFill>
+                  <a:srgbClr val="2B2A26"/>
+                </a:solidFill>
+                <a:latin typeface="Calibri"/>
+              </a:rPr>
+              <a:t> Slice</a:t>
             </a:r>
           </a:p>
         </p:txBody>
@@ -31764,7 +33154,7 @@
           <a:lstStyle/>
           <a:p>
             <a:pPr algn="ctr"/>
-            <a:endParaRPr/>
+            <a:endParaRPr sz="2400"/>
           </a:p>
         </p:txBody>
       </p:sp>
@@ -31809,7 +33199,7 @@
           <a:lstStyle/>
           <a:p>
             <a:pPr algn="ctr"/>
-            <a:endParaRPr/>
+            <a:endParaRPr sz="2400"/>
           </a:p>
         </p:txBody>
       </p:sp>
@@ -31821,8 +33211,8 @@
         </p:nvSpPr>
         <p:spPr>
           <a:xfrm>
-            <a:off x="4754880" y="4700016"/>
-            <a:ext cx="2286000" cy="566928"/>
+            <a:off x="4754880" y="4847546"/>
+            <a:ext cx="2286000" cy="271869"/>
           </a:xfrm>
           <a:prstGeom prst="rect">
             <a:avLst/>
@@ -31836,13 +33226,31 @@
           <a:lstStyle/>
           <a:p>
             <a:r>
-              <a:rPr sz="1250" b="1" i="0">
+              <a:rPr sz="1600" b="1" i="0" dirty="0">
                 <a:solidFill>
                   <a:srgbClr val="2B2A26"/>
                 </a:solidFill>
                 <a:latin typeface="Calibri"/>
               </a:rPr>
-              <a:t>P3b — Grain</a:t>
+              <a:t>P3b </a:t>
+            </a:r>
+            <a:r>
+              <a:rPr lang="it-IT" sz="1600" b="1" i="0" dirty="0">
+                <a:solidFill>
+                  <a:srgbClr val="2B2A26"/>
+                </a:solidFill>
+                <a:latin typeface="Calibri"/>
+              </a:rPr>
+              <a:t>-</a:t>
+            </a:r>
+            <a:r>
+              <a:rPr sz="1600" b="1" i="0" dirty="0">
+                <a:solidFill>
+                  <a:srgbClr val="2B2A26"/>
+                </a:solidFill>
+                <a:latin typeface="Calibri"/>
+              </a:rPr>
+              <a:t> Grain</a:t>
             </a:r>
           </a:p>
         </p:txBody>
@@ -31923,7 +33331,7 @@
           <a:lstStyle/>
           <a:p>
             <a:pPr algn="ctr"/>
-            <a:endParaRPr/>
+            <a:endParaRPr sz="2400"/>
           </a:p>
         </p:txBody>
       </p:sp>
@@ -31968,7 +33376,7 @@
           <a:lstStyle/>
           <a:p>
             <a:pPr algn="ctr"/>
-            <a:endParaRPr/>
+            <a:endParaRPr sz="2400"/>
           </a:p>
         </p:txBody>
       </p:sp>
@@ -31980,8 +33388,8 @@
         </p:nvSpPr>
         <p:spPr>
           <a:xfrm>
-            <a:off x="8595360" y="3429000"/>
-            <a:ext cx="2743200" cy="1097280"/>
+            <a:off x="8595360" y="3733984"/>
+            <a:ext cx="2743200" cy="487313"/>
           </a:xfrm>
           <a:prstGeom prst="rect">
             <a:avLst/>
@@ -31995,18 +33403,36 @@
           <a:lstStyle/>
           <a:p>
             <a:r>
-              <a:rPr sz="1300" b="1" i="0">
+              <a:rPr sz="1600" b="1" i="0" dirty="0">
                 <a:solidFill>
                   <a:srgbClr val="1B334A"/>
                 </a:solidFill>
                 <a:latin typeface="Calibri"/>
               </a:rPr>
-              <a:t>4 image–caption rows</a:t>
-            </a:r>
-          </a:p>
-          <a:p>
-            <a:r>
-              <a:rPr sz="1150" b="0" i="0">
+              <a:t>4 image</a:t>
+            </a:r>
+            <a:r>
+              <a:rPr lang="it-IT" sz="1600" b="1" i="0" dirty="0">
+                <a:solidFill>
+                  <a:srgbClr val="1B334A"/>
+                </a:solidFill>
+                <a:latin typeface="Calibri"/>
+              </a:rPr>
+              <a:t>-</a:t>
+            </a:r>
+            <a:r>
+              <a:rPr sz="1600" b="1" i="0" dirty="0">
+                <a:solidFill>
+                  <a:srgbClr val="1B334A"/>
+                </a:solidFill>
+                <a:latin typeface="Calibri"/>
+              </a:rPr>
+              <a:t>caption rows</a:t>
+            </a:r>
+          </a:p>
+          <a:p>
+            <a:r>
+              <a:rPr sz="1400" b="0" i="0" dirty="0">
                 <a:solidFill>
                   <a:srgbClr val="5B8C5A"/>
                 </a:solidFill>
@@ -32157,95 +33583,121 @@
           </a:fontRef>
         </p:style>
       </p:cxnSp>
-      <p:sp>
-        <p:nvSpPr>
-          <p:cNvPr id="35" name="Rounded Rectangle 34"/>
-          <p:cNvSpPr/>
-          <p:nvPr/>
-        </p:nvSpPr>
-        <p:spPr>
-          <a:xfrm>
-            <a:off x="731520" y="4892040"/>
+      <p:grpSp>
+        <p:nvGrpSpPr>
+          <p:cNvPr id="37" name="Gruppo 36">
+            <a:extLst>
+              <a:ext uri="{FF2B5EF4-FFF2-40B4-BE49-F238E27FC236}">
+                <a16:creationId xmlns:a16="http://schemas.microsoft.com/office/drawing/2014/main" id="{417E1E9B-2FE2-82B9-DCD6-8C068B39B11A}"/>
+              </a:ext>
+            </a:extLst>
+          </p:cNvPr>
+          <p:cNvGrpSpPr/>
+          <p:nvPr/>
+        </p:nvGrpSpPr>
+        <p:grpSpPr>
+          <a:xfrm>
+            <a:off x="723418" y="5413248"/>
             <a:ext cx="10698480" cy="640080"/>
-          </a:xfrm>
-          <a:prstGeom prst="roundRect">
-            <a:avLst/>
-          </a:prstGeom>
-          <a:solidFill>
-            <a:srgbClr val="1B334A"/>
-          </a:solidFill>
-          <a:ln>
+            <a:chOff x="731520" y="4892040"/>
+            <a:chExt cx="10698480" cy="640080"/>
+          </a:xfrm>
+        </p:grpSpPr>
+        <p:sp>
+          <p:nvSpPr>
+            <p:cNvPr id="35" name="Rounded Rectangle 34"/>
+            <p:cNvSpPr/>
+            <p:nvPr/>
+          </p:nvSpPr>
+          <p:spPr>
+            <a:xfrm>
+              <a:off x="731520" y="4892040"/>
+              <a:ext cx="10698480" cy="640080"/>
+            </a:xfrm>
+            <a:prstGeom prst="roundRect">
+              <a:avLst/>
+            </a:prstGeom>
+            <a:solidFill>
+              <a:srgbClr val="1B334A"/>
+            </a:solidFill>
+            <a:ln>
+              <a:noFill/>
+            </a:ln>
+            <a:effectLst/>
+          </p:spPr>
+          <p:style>
+            <a:lnRef idx="1">
+              <a:schemeClr val="accent1"/>
+            </a:lnRef>
+            <a:fillRef idx="3">
+              <a:schemeClr val="accent1"/>
+            </a:fillRef>
+            <a:effectRef idx="2">
+              <a:schemeClr val="accent1"/>
+            </a:effectRef>
+            <a:fontRef idx="minor">
+              <a:schemeClr val="lt1"/>
+            </a:fontRef>
+          </p:style>
+          <p:txBody>
+            <a:bodyPr rtlCol="0" anchor="ctr"/>
+            <a:lstStyle/>
+            <a:p>
+              <a:pPr algn="ctr"/>
+              <a:endParaRPr sz="2000"/>
+            </a:p>
+          </p:txBody>
+        </p:sp>
+        <p:sp>
+          <p:nvSpPr>
+            <p:cNvPr id="36" name="TextBox 35"/>
+            <p:cNvSpPr txBox="1"/>
+            <p:nvPr/>
+          </p:nvSpPr>
+          <p:spPr>
+            <a:xfrm>
+              <a:off x="929640" y="4993850"/>
+              <a:ext cx="10332720" cy="271869"/>
+            </a:xfrm>
+            <a:prstGeom prst="rect">
+              <a:avLst/>
+            </a:prstGeom>
             <a:noFill/>
-          </a:ln>
-          <a:effectLst/>
-        </p:spPr>
-        <p:style>
-          <a:lnRef idx="1">
-            <a:schemeClr val="accent1"/>
-          </a:lnRef>
-          <a:fillRef idx="3">
-            <a:schemeClr val="accent1"/>
-          </a:fillRef>
-          <a:effectRef idx="2">
-            <a:schemeClr val="accent1"/>
-          </a:effectRef>
-          <a:fontRef idx="minor">
-            <a:schemeClr val="lt1"/>
-          </a:fontRef>
-        </p:style>
-        <p:txBody>
-          <a:bodyPr rtlCol="0" anchor="ctr"/>
-          <a:lstStyle/>
-          <a:p>
-            <a:pPr algn="ctr"/>
-            <a:endParaRPr/>
-          </a:p>
-        </p:txBody>
-      </p:sp>
-      <p:sp>
-        <p:nvSpPr>
-          <p:cNvPr id="36" name="TextBox 35"/>
-          <p:cNvSpPr txBox="1"/>
-          <p:nvPr/>
-        </p:nvSpPr>
-        <p:spPr>
-          <a:xfrm>
-            <a:off x="914400" y="4892040"/>
-            <a:ext cx="10332720" cy="640080"/>
-          </a:xfrm>
-          <a:prstGeom prst="rect">
-            <a:avLst/>
-          </a:prstGeom>
-          <a:noFill/>
-        </p:spPr>
-        <p:txBody>
-          <a:bodyPr wrap="square" lIns="25400" tIns="12700" rIns="25400" bIns="12700" anchor="ctr">
-            <a:spAutoFit/>
-          </a:bodyPr>
-          <a:lstStyle/>
-          <a:p>
-            <a:r>
-              <a:rPr sz="1250" b="1" i="0">
-                <a:solidFill>
-                  <a:srgbClr val="E0A458"/>
-                </a:solidFill>
-                <a:latin typeface="Calibri"/>
-              </a:rPr>
-              <a:t>Net effect:  </a:t>
-            </a:r>
-            <a:r>
-              <a:rPr sz="1250" b="0" i="0">
-                <a:solidFill>
-                  <a:srgbClr val="F7F1E3"/>
-                </a:solidFill>
-                <a:latin typeface="Calibri"/>
-              </a:rPr>
-              <a:t>51,988 rows (image × panelist × attribute) · 39,510 with a comment · pairing rate ≈ 76%</a:t>
-            </a:r>
-          </a:p>
-        </p:txBody>
-      </p:sp>
+          </p:spPr>
+          <p:txBody>
+            <a:bodyPr wrap="square" lIns="25400" tIns="12700" rIns="25400" bIns="12700" anchor="ctr">
+              <a:spAutoFit/>
+            </a:bodyPr>
+            <a:lstStyle/>
+            <a:p>
+              <a:r>
+                <a:rPr sz="1600" b="1" i="0" dirty="0">
+                  <a:solidFill>
+                    <a:srgbClr val="E0A458"/>
+                  </a:solidFill>
+                  <a:latin typeface="Calibri"/>
+                </a:rPr>
+                <a:t>Net effect:  </a:t>
+              </a:r>
+              <a:r>
+                <a:rPr sz="1600" b="0" i="0" dirty="0">
+                  <a:solidFill>
+                    <a:srgbClr val="F7F1E3"/>
+                  </a:solidFill>
+                  <a:latin typeface="Calibri"/>
+                </a:rPr>
+                <a:t>51,988 rows (image × panelist × attribute) · 39,510 with a comment · pairing rate ≈ 76%</a:t>
+              </a:r>
+            </a:p>
+          </p:txBody>
+        </p:sp>
+      </p:grpSp>
     </p:spTree>
+    <p:extLst>
+      <p:ext uri="{BB962C8B-B14F-4D97-AF65-F5344CB8AC3E}">
+        <p14:creationId xmlns:p14="http://schemas.microsoft.com/office/powerpoint/2010/main" val="131756113"/>
+      </p:ext>
+    </p:extLst>
   </p:cSld>
   <p:clrMapOvr>
     <a:masterClrMapping/>
@@ -32352,7 +33804,7 @@
                 </a:solidFill>
                 <a:latin typeface="Calibri"/>
               </a:rPr>
-              <a:t>AI4FQC · Project 07 — GRANA Captioning</a:t>
+              <a:t>AI4FQC · Project 07: GRANA Captioning</a:t>
             </a:r>
           </a:p>
         </p:txBody>
@@ -32435,7 +33887,7 @@
         <p:spPr>
           <a:xfrm>
             <a:off x="640080" y="886968"/>
-            <a:ext cx="10881360" cy="914400"/>
+            <a:ext cx="10881360" cy="579646"/>
           </a:xfrm>
           <a:prstGeom prst="rect">
             <a:avLst/>
@@ -32449,7 +33901,7 @@
           <a:lstStyle/>
           <a:p>
             <a:r>
-              <a:rPr sz="3100" b="1" i="0">
+              <a:rPr sz="3600" b="1" i="0" dirty="0">
                 <a:solidFill>
                   <a:srgbClr val="1B334A"/>
                 </a:solidFill>
@@ -32514,7 +33966,7 @@
         <p:spPr>
           <a:xfrm>
             <a:off x="640080" y="1874520"/>
-            <a:ext cx="10881360" cy="457200"/>
+            <a:ext cx="10881360" cy="579646"/>
           </a:xfrm>
           <a:prstGeom prst="rect">
             <a:avLst/>
@@ -32528,7 +33980,7 @@
           <a:lstStyle/>
           <a:p>
             <a:r>
-              <a:rPr sz="1350" b="1" i="0">
+              <a:rPr b="1" i="0" dirty="0">
                 <a:solidFill>
                   <a:srgbClr val="2B2A26"/>
                 </a:solidFill>
@@ -32537,13 +33989,31 @@
               <a:t>Guiding principle: </a:t>
             </a:r>
             <a:r>
-              <a:rPr sz="1350" b="0" i="0">
+              <a:rPr b="0" i="0" dirty="0">
                 <a:solidFill>
                   <a:srgbClr val="2B2A26"/>
                 </a:solidFill>
                 <a:latin typeface="Calibri"/>
               </a:rPr>
-              <a:t>deterministic-before-the-LLM — everything that can be done with reproducible, free code is done before calling the model.</a:t>
+              <a:t>deterministic-before-the-LLM</a:t>
+            </a:r>
+            <a:r>
+              <a:rPr lang="it-IT" b="0" i="0" dirty="0">
+                <a:solidFill>
+                  <a:srgbClr val="2B2A26"/>
+                </a:solidFill>
+                <a:latin typeface="Calibri"/>
+              </a:rPr>
+              <a:t>,</a:t>
+            </a:r>
+            <a:r>
+              <a:rPr b="0" i="0" dirty="0">
+                <a:solidFill>
+                  <a:srgbClr val="2B2A26"/>
+                </a:solidFill>
+                <a:latin typeface="Calibri"/>
+              </a:rPr>
+              <a:t> everything that can be done with reproducible, free code is done before calling the model.</a:t>
             </a:r>
           </a:p>
         </p:txBody>
@@ -32589,7 +34059,7 @@
           <a:lstStyle/>
           <a:p>
             <a:pPr algn="ctr"/>
-            <a:endParaRPr/>
+            <a:endParaRPr sz="2800"/>
           </a:p>
         </p:txBody>
       </p:sp>
@@ -32634,7 +34104,7 @@
           <a:lstStyle/>
           <a:p>
             <a:pPr algn="ctr"/>
-            <a:endParaRPr/>
+            <a:endParaRPr sz="2800"/>
           </a:p>
         </p:txBody>
       </p:sp>
@@ -32646,8 +34116,8 @@
         </p:nvSpPr>
         <p:spPr>
           <a:xfrm>
-            <a:off x="850392" y="2788920"/>
-            <a:ext cx="530352" cy="530352"/>
+            <a:off x="850392" y="2902773"/>
+            <a:ext cx="530352" cy="302647"/>
           </a:xfrm>
           <a:prstGeom prst="rect">
             <a:avLst/>
@@ -32662,7 +34132,7 @@
           <a:p>
             <a:pPr algn="ctr"/>
             <a:r>
-              <a:rPr sz="1250" b="1" i="0">
+              <a:rPr b="1" i="0">
                 <a:solidFill>
                   <a:srgbClr val="FFFFFF"/>
                 </a:solidFill>
@@ -32681,8 +34151,8 @@
         </p:nvSpPr>
         <p:spPr>
           <a:xfrm>
-            <a:off x="1527048" y="2660904"/>
-            <a:ext cx="2606040" cy="804672"/>
+            <a:off x="1527048" y="2773418"/>
+            <a:ext cx="2606040" cy="579646"/>
           </a:xfrm>
           <a:prstGeom prst="rect">
             <a:avLst/>
@@ -32696,7 +34166,7 @@
           <a:lstStyle/>
           <a:p>
             <a:r>
-              <a:rPr sz="1350" b="1" i="0">
+              <a:rPr b="1" i="0">
                 <a:solidFill>
                   <a:srgbClr val="1B334A"/>
                 </a:solidFill>
@@ -32707,7 +34177,7 @@
           </a:p>
           <a:p>
             <a:r>
-              <a:rPr sz="1200" b="1" i="0">
+              <a:rPr b="1" i="0">
                 <a:solidFill>
                   <a:srgbClr val="2C5F8A"/>
                 </a:solidFill>
@@ -32759,7 +34229,7 @@
           <a:lstStyle/>
           <a:p>
             <a:pPr algn="ctr"/>
-            <a:endParaRPr/>
+            <a:endParaRPr sz="2800"/>
           </a:p>
         </p:txBody>
       </p:sp>
@@ -32804,7 +34274,7 @@
           <a:lstStyle/>
           <a:p>
             <a:pPr algn="ctr"/>
-            <a:endParaRPr/>
+            <a:endParaRPr sz="2800"/>
           </a:p>
         </p:txBody>
       </p:sp>
@@ -32816,8 +34286,8 @@
         </p:nvSpPr>
         <p:spPr>
           <a:xfrm>
-            <a:off x="4553712" y="2788920"/>
-            <a:ext cx="530352" cy="530352"/>
+            <a:off x="4553712" y="2902773"/>
+            <a:ext cx="530352" cy="302647"/>
           </a:xfrm>
           <a:prstGeom prst="rect">
             <a:avLst/>
@@ -32832,7 +34302,7 @@
           <a:p>
             <a:pPr algn="ctr"/>
             <a:r>
-              <a:rPr sz="1250" b="1" i="0">
+              <a:rPr b="1" i="0">
                 <a:solidFill>
                   <a:srgbClr val="FFFFFF"/>
                 </a:solidFill>
@@ -32851,8 +34321,8 @@
         </p:nvSpPr>
         <p:spPr>
           <a:xfrm>
-            <a:off x="5230368" y="2660904"/>
-            <a:ext cx="2606040" cy="804672"/>
+            <a:off x="5230368" y="2773418"/>
+            <a:ext cx="2606040" cy="579646"/>
           </a:xfrm>
           <a:prstGeom prst="rect">
             <a:avLst/>
@@ -32866,7 +34336,7 @@
           <a:lstStyle/>
           <a:p>
             <a:r>
-              <a:rPr sz="1350" b="1" i="0">
+              <a:rPr b="1" i="0">
                 <a:solidFill>
                   <a:srgbClr val="1B334A"/>
                 </a:solidFill>
@@ -32877,7 +34347,7 @@
           </a:p>
           <a:p>
             <a:r>
-              <a:rPr sz="1200" b="1" i="0">
+              <a:rPr b="1" i="0">
                 <a:solidFill>
                   <a:srgbClr val="2C5F8A"/>
                 </a:solidFill>
@@ -32929,7 +34399,7 @@
           <a:lstStyle/>
           <a:p>
             <a:pPr algn="ctr"/>
-            <a:endParaRPr/>
+            <a:endParaRPr sz="2800"/>
           </a:p>
         </p:txBody>
       </p:sp>
@@ -32974,7 +34444,7 @@
           <a:lstStyle/>
           <a:p>
             <a:pPr algn="ctr"/>
-            <a:endParaRPr/>
+            <a:endParaRPr sz="2800"/>
           </a:p>
         </p:txBody>
       </p:sp>
@@ -32986,8 +34456,8 @@
         </p:nvSpPr>
         <p:spPr>
           <a:xfrm>
-            <a:off x="8257032" y="2788920"/>
-            <a:ext cx="530352" cy="530352"/>
+            <a:off x="8257032" y="2902773"/>
+            <a:ext cx="530352" cy="302647"/>
           </a:xfrm>
           <a:prstGeom prst="rect">
             <a:avLst/>
@@ -33002,7 +34472,7 @@
           <a:p>
             <a:pPr algn="ctr"/>
             <a:r>
-              <a:rPr sz="1250" b="1" i="0">
+              <a:rPr b="1" i="0">
                 <a:solidFill>
                   <a:srgbClr val="FFFFFF"/>
                 </a:solidFill>
@@ -33021,8 +34491,8 @@
         </p:nvSpPr>
         <p:spPr>
           <a:xfrm>
-            <a:off x="8933688" y="2660904"/>
-            <a:ext cx="2606040" cy="804672"/>
+            <a:off x="8933688" y="2773418"/>
+            <a:ext cx="2606040" cy="579646"/>
           </a:xfrm>
           <a:prstGeom prst="rect">
             <a:avLst/>
@@ -33036,7 +34506,7 @@
           <a:lstStyle/>
           <a:p>
             <a:r>
-              <a:rPr sz="1350" b="1" i="0">
+              <a:rPr b="1" i="0">
                 <a:solidFill>
                   <a:srgbClr val="1B334A"/>
                 </a:solidFill>
@@ -33047,7 +34517,7 @@
           </a:p>
           <a:p>
             <a:r>
-              <a:rPr sz="1200" b="1" i="0">
+              <a:rPr b="1" i="0">
                 <a:solidFill>
                   <a:srgbClr val="2C5F8A"/>
                 </a:solidFill>
@@ -33099,7 +34569,7 @@
           <a:lstStyle/>
           <a:p>
             <a:pPr algn="ctr"/>
-            <a:endParaRPr/>
+            <a:endParaRPr sz="2800"/>
           </a:p>
         </p:txBody>
       </p:sp>
@@ -33144,7 +34614,7 @@
           <a:lstStyle/>
           <a:p>
             <a:pPr algn="ctr"/>
-            <a:endParaRPr/>
+            <a:endParaRPr sz="2800"/>
           </a:p>
         </p:txBody>
       </p:sp>
@@ -33156,8 +34626,8 @@
         </p:nvSpPr>
         <p:spPr>
           <a:xfrm>
-            <a:off x="850392" y="4032504"/>
-            <a:ext cx="530352" cy="530352"/>
+            <a:off x="850392" y="4146357"/>
+            <a:ext cx="530352" cy="302647"/>
           </a:xfrm>
           <a:prstGeom prst="rect">
             <a:avLst/>
@@ -33172,7 +34642,7 @@
           <a:p>
             <a:pPr algn="ctr"/>
             <a:r>
-              <a:rPr sz="1250" b="1" i="0">
+              <a:rPr b="1" i="0">
                 <a:solidFill>
                   <a:srgbClr val="FFFFFF"/>
                 </a:solidFill>
@@ -33191,8 +34661,8 @@
         </p:nvSpPr>
         <p:spPr>
           <a:xfrm>
-            <a:off x="1527048" y="3904488"/>
-            <a:ext cx="2606040" cy="804672"/>
+            <a:off x="1527048" y="4017002"/>
+            <a:ext cx="2606040" cy="579646"/>
           </a:xfrm>
           <a:prstGeom prst="rect">
             <a:avLst/>
@@ -33206,7 +34676,7 @@
           <a:lstStyle/>
           <a:p>
             <a:r>
-              <a:rPr sz="1350" b="1" i="0">
+              <a:rPr b="1" i="0">
                 <a:solidFill>
                   <a:srgbClr val="1B334A"/>
                 </a:solidFill>
@@ -33217,7 +34687,7 @@
           </a:p>
           <a:p>
             <a:r>
-              <a:rPr sz="1200" b="1" i="0">
+              <a:rPr b="1" i="0">
                 <a:solidFill>
                   <a:srgbClr val="2C5F8A"/>
                 </a:solidFill>
@@ -33269,7 +34739,7 @@
           <a:lstStyle/>
           <a:p>
             <a:pPr algn="ctr"/>
-            <a:endParaRPr/>
+            <a:endParaRPr sz="2800"/>
           </a:p>
         </p:txBody>
       </p:sp>
@@ -33314,7 +34784,7 @@
           <a:lstStyle/>
           <a:p>
             <a:pPr algn="ctr"/>
-            <a:endParaRPr/>
+            <a:endParaRPr sz="2800"/>
           </a:p>
         </p:txBody>
       </p:sp>
@@ -33326,8 +34796,8 @@
         </p:nvSpPr>
         <p:spPr>
           <a:xfrm>
-            <a:off x="4553712" y="4032504"/>
-            <a:ext cx="530352" cy="530352"/>
+            <a:off x="4553712" y="4146357"/>
+            <a:ext cx="530352" cy="302647"/>
           </a:xfrm>
           <a:prstGeom prst="rect">
             <a:avLst/>
@@ -33342,7 +34812,7 @@
           <a:p>
             <a:pPr algn="ctr"/>
             <a:r>
-              <a:rPr sz="1250" b="1" i="0">
+              <a:rPr b="1" i="0">
                 <a:solidFill>
                   <a:srgbClr val="FFFFFF"/>
                 </a:solidFill>
@@ -33361,8 +34831,8 @@
         </p:nvSpPr>
         <p:spPr>
           <a:xfrm>
-            <a:off x="5230368" y="3904488"/>
-            <a:ext cx="2606040" cy="804672"/>
+            <a:off x="5230368" y="4017002"/>
+            <a:ext cx="2606040" cy="579646"/>
           </a:xfrm>
           <a:prstGeom prst="rect">
             <a:avLst/>
@@ -33376,7 +34846,7 @@
           <a:lstStyle/>
           <a:p>
             <a:r>
-              <a:rPr sz="1350" b="1" i="0">
+              <a:rPr b="1" i="0">
                 <a:solidFill>
                   <a:srgbClr val="1B334A"/>
                 </a:solidFill>
@@ -33387,7 +34857,7 @@
           </a:p>
           <a:p>
             <a:r>
-              <a:rPr sz="1200" b="1" i="0">
+              <a:rPr b="1" i="0">
                 <a:solidFill>
                   <a:srgbClr val="2C5F8A"/>
                 </a:solidFill>
@@ -33439,7 +34909,7 @@
           <a:lstStyle/>
           <a:p>
             <a:pPr algn="ctr"/>
-            <a:endParaRPr/>
+            <a:endParaRPr sz="2800"/>
           </a:p>
         </p:txBody>
       </p:sp>
@@ -33484,7 +34954,7 @@
           <a:lstStyle/>
           <a:p>
             <a:pPr algn="ctr"/>
-            <a:endParaRPr/>
+            <a:endParaRPr sz="2800"/>
           </a:p>
         </p:txBody>
       </p:sp>
@@ -33496,8 +34966,8 @@
         </p:nvSpPr>
         <p:spPr>
           <a:xfrm>
-            <a:off x="8257032" y="4032504"/>
-            <a:ext cx="530352" cy="530352"/>
+            <a:off x="8257032" y="4146357"/>
+            <a:ext cx="530352" cy="302647"/>
           </a:xfrm>
           <a:prstGeom prst="rect">
             <a:avLst/>
@@ -33512,7 +34982,7 @@
           <a:p>
             <a:pPr algn="ctr"/>
             <a:r>
-              <a:rPr sz="1250" b="1" i="0">
+              <a:rPr b="1" i="0">
                 <a:solidFill>
                   <a:srgbClr val="FFFFFF"/>
                 </a:solidFill>
@@ -33531,8 +35001,8 @@
         </p:nvSpPr>
         <p:spPr>
           <a:xfrm>
-            <a:off x="8933688" y="3904488"/>
-            <a:ext cx="2606040" cy="804672"/>
+            <a:off x="8933688" y="4017002"/>
+            <a:ext cx="2606040" cy="579646"/>
           </a:xfrm>
           <a:prstGeom prst="rect">
             <a:avLst/>
@@ -33546,7 +35016,7 @@
           <a:lstStyle/>
           <a:p>
             <a:r>
-              <a:rPr sz="1350" b="1" i="0">
+              <a:rPr b="1" i="0">
                 <a:solidFill>
                   <a:srgbClr val="1B334A"/>
                 </a:solidFill>
@@ -33557,7 +35027,7 @@
           </a:p>
           <a:p>
             <a:r>
-              <a:rPr sz="1200" b="1" i="0">
+              <a:rPr b="1" i="0">
                 <a:solidFill>
                   <a:srgbClr val="C88836"/>
                 </a:solidFill>
@@ -33609,7 +35079,7 @@
           <a:lstStyle/>
           <a:p>
             <a:pPr algn="ctr"/>
-            <a:endParaRPr/>
+            <a:endParaRPr sz="2800"/>
           </a:p>
         </p:txBody>
       </p:sp>
@@ -33654,7 +35124,7 @@
           <a:lstStyle/>
           <a:p>
             <a:pPr algn="ctr"/>
-            <a:endParaRPr/>
+            <a:endParaRPr sz="2800"/>
           </a:p>
         </p:txBody>
       </p:sp>
@@ -33666,8 +35136,8 @@
         </p:nvSpPr>
         <p:spPr>
           <a:xfrm>
-            <a:off x="850392" y="5276088"/>
-            <a:ext cx="530352" cy="530352"/>
+            <a:off x="850392" y="5389941"/>
+            <a:ext cx="530352" cy="302647"/>
           </a:xfrm>
           <a:prstGeom prst="rect">
             <a:avLst/>
@@ -33682,7 +35152,7 @@
           <a:p>
             <a:pPr algn="ctr"/>
             <a:r>
-              <a:rPr sz="1250" b="1" i="0">
+              <a:rPr b="1" i="0">
                 <a:solidFill>
                   <a:srgbClr val="FFFFFF"/>
                 </a:solidFill>
@@ -33701,8 +35171,8 @@
         </p:nvSpPr>
         <p:spPr>
           <a:xfrm>
-            <a:off x="1527048" y="5148072"/>
-            <a:ext cx="2606040" cy="804672"/>
+            <a:off x="1527048" y="5260586"/>
+            <a:ext cx="2606040" cy="579646"/>
           </a:xfrm>
           <a:prstGeom prst="rect">
             <a:avLst/>
@@ -33716,7 +35186,7 @@
           <a:lstStyle/>
           <a:p>
             <a:r>
-              <a:rPr sz="1350" b="1" i="0">
+              <a:rPr b="1" i="0">
                 <a:solidFill>
                   <a:srgbClr val="1B334A"/>
                 </a:solidFill>
@@ -33727,7 +35197,7 @@
           </a:p>
           <a:p>
             <a:r>
-              <a:rPr sz="1200" b="1" i="0">
+              <a:rPr b="1" i="0">
                 <a:solidFill>
                   <a:srgbClr val="C88836"/>
                 </a:solidFill>
@@ -33779,7 +35249,7 @@
           <a:lstStyle/>
           <a:p>
             <a:pPr algn="ctr"/>
-            <a:endParaRPr/>
+            <a:endParaRPr sz="2800"/>
           </a:p>
         </p:txBody>
       </p:sp>
@@ -33824,7 +35294,7 @@
           <a:lstStyle/>
           <a:p>
             <a:pPr algn="ctr"/>
-            <a:endParaRPr/>
+            <a:endParaRPr sz="2800"/>
           </a:p>
         </p:txBody>
       </p:sp>
@@ -33836,8 +35306,8 @@
         </p:nvSpPr>
         <p:spPr>
           <a:xfrm>
-            <a:off x="4553712" y="5276088"/>
-            <a:ext cx="530352" cy="530352"/>
+            <a:off x="4553712" y="5389941"/>
+            <a:ext cx="530352" cy="302647"/>
           </a:xfrm>
           <a:prstGeom prst="rect">
             <a:avLst/>
@@ -33852,7 +35322,7 @@
           <a:p>
             <a:pPr algn="ctr"/>
             <a:r>
-              <a:rPr sz="1250" b="1" i="0">
+              <a:rPr b="1" i="0">
                 <a:solidFill>
                   <a:srgbClr val="FFFFFF"/>
                 </a:solidFill>
@@ -33871,8 +35341,8 @@
         </p:nvSpPr>
         <p:spPr>
           <a:xfrm>
-            <a:off x="5230368" y="5148072"/>
-            <a:ext cx="2606040" cy="804672"/>
+            <a:off x="5230368" y="5260586"/>
+            <a:ext cx="2606040" cy="579646"/>
           </a:xfrm>
           <a:prstGeom prst="rect">
             <a:avLst/>
@@ -33886,7 +35356,7 @@
           <a:lstStyle/>
           <a:p>
             <a:r>
-              <a:rPr sz="1350" b="1" i="0">
+              <a:rPr b="1" i="0">
                 <a:solidFill>
                   <a:srgbClr val="1B334A"/>
                 </a:solidFill>
@@ -33897,7 +35367,7 @@
           </a:p>
           <a:p>
             <a:r>
-              <a:rPr sz="1200" b="1" i="0">
+              <a:rPr b="1" i="0">
                 <a:solidFill>
                   <a:srgbClr val="5B8C5A"/>
                 </a:solidFill>
@@ -33949,7 +35419,7 @@
           <a:lstStyle/>
           <a:p>
             <a:pPr algn="ctr"/>
-            <a:endParaRPr/>
+            <a:endParaRPr sz="2800"/>
           </a:p>
         </p:txBody>
       </p:sp>
@@ -33994,7 +35464,7 @@
           <a:lstStyle/>
           <a:p>
             <a:pPr algn="ctr"/>
-            <a:endParaRPr/>
+            <a:endParaRPr sz="2800"/>
           </a:p>
         </p:txBody>
       </p:sp>
@@ -34006,8 +35476,8 @@
         </p:nvSpPr>
         <p:spPr>
           <a:xfrm>
-            <a:off x="8257032" y="5276088"/>
-            <a:ext cx="530352" cy="530352"/>
+            <a:off x="8257032" y="5389941"/>
+            <a:ext cx="530352" cy="302647"/>
           </a:xfrm>
           <a:prstGeom prst="rect">
             <a:avLst/>
@@ -34022,7 +35492,7 @@
           <a:p>
             <a:pPr algn="ctr"/>
             <a:r>
-              <a:rPr sz="1250" b="1" i="0">
+              <a:rPr b="1" i="0">
                 <a:solidFill>
                   <a:srgbClr val="FFFFFF"/>
                 </a:solidFill>
@@ -34041,8 +35511,8 @@
         </p:nvSpPr>
         <p:spPr>
           <a:xfrm>
-            <a:off x="8933688" y="5148072"/>
-            <a:ext cx="2606040" cy="804672"/>
+            <a:off x="8933688" y="5260586"/>
+            <a:ext cx="2606040" cy="579646"/>
           </a:xfrm>
           <a:prstGeom prst="rect">
             <a:avLst/>
@@ -34056,7 +35526,7 @@
           <a:lstStyle/>
           <a:p>
             <a:r>
-              <a:rPr sz="1350" b="1" i="0">
+              <a:rPr b="1" i="0">
                 <a:solidFill>
                   <a:srgbClr val="1B334A"/>
                 </a:solidFill>
@@ -34067,7 +35537,7 @@
           </a:p>
           <a:p>
             <a:r>
-              <a:rPr sz="1200" b="1" i="0">
+              <a:rPr b="1" i="0">
                 <a:solidFill>
                   <a:srgbClr val="5B8C5A"/>
                 </a:solidFill>
@@ -34086,8 +35556,8 @@
         </p:nvSpPr>
         <p:spPr>
           <a:xfrm>
-            <a:off x="685800" y="6227064"/>
-            <a:ext cx="10789920" cy="365760"/>
+            <a:off x="658368" y="6137491"/>
+            <a:ext cx="10789920" cy="271869"/>
           </a:xfrm>
           <a:prstGeom prst="rect">
             <a:avLst/>
@@ -34101,7 +35571,7 @@
           <a:lstStyle/>
           <a:p>
             <a:r>
-              <a:rPr sz="1300" b="1" i="0">
+              <a:rPr sz="1600" b="1" i="0">
                 <a:solidFill>
                   <a:srgbClr val="2C5F8A"/>
                 </a:solidFill>
@@ -34110,7 +35580,7 @@
               <a:t>■ </a:t>
             </a:r>
             <a:r>
-              <a:rPr sz="1150" b="0" i="0">
+              <a:rPr sz="1400" b="0" i="0">
                 <a:solidFill>
                   <a:srgbClr val="2B2A26"/>
                 </a:solidFill>
@@ -34119,7 +35589,7 @@
               <a:t>deterministic (free)    </a:t>
             </a:r>
             <a:r>
-              <a:rPr sz="1300" b="1" i="0">
+              <a:rPr sz="1600" b="1" i="0">
                 <a:solidFill>
                   <a:srgbClr val="C88836"/>
                 </a:solidFill>
@@ -34128,7 +35598,7 @@
               <a:t>■ </a:t>
             </a:r>
             <a:r>
-              <a:rPr sz="1150" b="0" i="0">
+              <a:rPr sz="1400" b="0" i="0">
                 <a:solidFill>
                   <a:srgbClr val="2B2A26"/>
                 </a:solidFill>
@@ -34137,7 +35607,7 @@
               <a:t>with LLM    </a:t>
             </a:r>
             <a:r>
-              <a:rPr sz="1300" b="1" i="0">
+              <a:rPr sz="1600" b="1" i="0">
                 <a:solidFill>
                   <a:srgbClr val="5B8C5A"/>
                 </a:solidFill>
@@ -34146,7 +35616,7 @@
               <a:t>■ </a:t>
             </a:r>
             <a:r>
-              <a:rPr sz="1150" b="0" i="0">
+              <a:rPr sz="1400" b="0" i="0">
                 <a:solidFill>
                   <a:srgbClr val="2B2A26"/>
                 </a:solidFill>
@@ -34158,6 +35628,11 @@
         </p:txBody>
       </p:sp>
     </p:spTree>
+    <p:extLst>
+      <p:ext uri="{BB962C8B-B14F-4D97-AF65-F5344CB8AC3E}">
+        <p14:creationId xmlns:p14="http://schemas.microsoft.com/office/powerpoint/2010/main" val="3734075147"/>
+      </p:ext>
+    </p:extLst>
   </p:cSld>
   <p:clrMapOvr>
     <a:masterClrMapping/>
@@ -34264,7 +35739,7 @@
                 </a:solidFill>
                 <a:latin typeface="Calibri"/>
               </a:rPr>
-              <a:t>AI4FQC · Project 07 — GRANA Captioning</a:t>
+              <a:t>AI4FQC · Project 07: GRANA Captioning</a:t>
             </a:r>
           </a:p>
         </p:txBody>
@@ -34347,7 +35822,7 @@
         <p:spPr>
           <a:xfrm>
             <a:off x="640080" y="886968"/>
-            <a:ext cx="10881360" cy="914400"/>
+            <a:ext cx="10881360" cy="579646"/>
           </a:xfrm>
           <a:prstGeom prst="rect">
             <a:avLst/>
@@ -34361,7 +35836,7 @@
           <a:lstStyle/>
           <a:p>
             <a:r>
-              <a:rPr sz="3100" b="1" i="0">
+              <a:rPr sz="3600" b="1" i="0" dirty="0">
                 <a:solidFill>
                   <a:srgbClr val="1B334A"/>
                 </a:solidFill>
@@ -34540,7 +36015,7 @@
         <p:spPr>
           <a:xfrm>
             <a:off x="8211311" y="2157984"/>
-            <a:ext cx="3191256" cy="3474719"/>
+            <a:ext cx="3191256" cy="1831271"/>
           </a:xfrm>
           <a:prstGeom prst="rect">
             <a:avLst/>
@@ -34554,7 +36029,7 @@
           <a:lstStyle/>
           <a:p>
             <a:r>
-              <a:rPr sz="1500" b="1" i="0">
+              <a:rPr sz="2400" b="1" i="0" dirty="0">
                 <a:solidFill>
                   <a:srgbClr val="1B334A"/>
                 </a:solidFill>
@@ -34570,7 +36045,7 @@
               </a:spcBef>
             </a:pPr>
             <a:r>
-              <a:rPr sz="1000" b="1" i="0">
+              <a:rPr sz="1100" b="1" i="0" dirty="0">
                 <a:solidFill>
                   <a:srgbClr val="E0A458"/>
                 </a:solidFill>
@@ -34579,16 +36054,25 @@
               <a:t>● </a:t>
             </a:r>
             <a:r>
-              <a:rPr sz="1250" b="1" i="0">
+              <a:rPr lang="it-IT" sz="1600" b="1" dirty="0">
                 <a:solidFill>
                   <a:srgbClr val="2B2A26"/>
                 </a:solidFill>
                 <a:latin typeface="Calibri"/>
               </a:rPr>
-              <a:t>−12,632</a:t>
-            </a:r>
-            <a:r>
-              <a:rPr sz="1250" b="0" i="0">
+              <a:t>-</a:t>
+            </a:r>
+            <a:r>
+              <a:rPr sz="1600" b="1" i="0" dirty="0">
+                <a:solidFill>
+                  <a:srgbClr val="2B2A26"/>
+                </a:solidFill>
+                <a:latin typeface="Calibri"/>
+              </a:rPr>
+              <a:t>12,632</a:t>
+            </a:r>
+            <a:r>
+              <a:rPr sz="1600" b="0" i="0" dirty="0">
                 <a:solidFill>
                   <a:srgbClr val="2B2A26"/>
                 </a:solidFill>
@@ -34604,7 +36088,7 @@
               </a:spcBef>
             </a:pPr>
             <a:r>
-              <a:rPr sz="1000" b="1" i="0">
+              <a:rPr sz="1100" b="1" i="0" dirty="0">
                 <a:solidFill>
                   <a:srgbClr val="E0A458"/>
                 </a:solidFill>
@@ -34613,7 +36097,7 @@
               <a:t>● </a:t>
             </a:r>
             <a:r>
-              <a:rPr sz="1250" b="1" i="0">
+              <a:rPr sz="1600" b="1" i="0" dirty="0">
                 <a:solidFill>
                   <a:srgbClr val="2B2A26"/>
                 </a:solidFill>
@@ -34622,7 +36106,7 @@
               <a:t>12,478</a:t>
             </a:r>
             <a:r>
-              <a:rPr sz="1250" b="0" i="0">
+              <a:rPr sz="1600" b="0" i="0" dirty="0">
                 <a:solidFill>
                   <a:srgbClr val="2B2A26"/>
                 </a:solidFill>
@@ -34638,7 +36122,7 @@
               </a:spcBef>
             </a:pPr>
             <a:r>
-              <a:rPr sz="1000" b="1" i="0">
+              <a:rPr sz="1100" b="1" i="0" dirty="0">
                 <a:solidFill>
                   <a:srgbClr val="E0A458"/>
                 </a:solidFill>
@@ -34647,7 +36131,7 @@
               <a:t>● </a:t>
             </a:r>
             <a:r>
-              <a:rPr sz="1250" b="1" i="0">
+              <a:rPr sz="1600" b="1" i="0" dirty="0">
                 <a:solidFill>
                   <a:srgbClr val="2B2A26"/>
                 </a:solidFill>
@@ -34656,7 +36140,7 @@
               <a:t>86</a:t>
             </a:r>
             <a:r>
-              <a:rPr sz="1250" b="0" i="0">
+              <a:rPr sz="1600" b="0" i="0" dirty="0">
                 <a:solidFill>
                   <a:srgbClr val="2B2A26"/>
                 </a:solidFill>
@@ -34672,7 +36156,7 @@
               </a:spcBef>
             </a:pPr>
             <a:r>
-              <a:rPr sz="1000" b="1" i="0">
+              <a:rPr sz="1100" b="1" i="0" dirty="0">
                 <a:solidFill>
                   <a:srgbClr val="E0A458"/>
                 </a:solidFill>
@@ -34681,7 +36165,7 @@
               <a:t>● </a:t>
             </a:r>
             <a:r>
-              <a:rPr sz="1250" b="1" i="0">
+              <a:rPr sz="1600" b="1" i="0" dirty="0">
                 <a:solidFill>
                   <a:srgbClr val="2B2A26"/>
                 </a:solidFill>
@@ -34690,7 +36174,7 @@
               <a:t>75.7%</a:t>
             </a:r>
             <a:r>
-              <a:rPr sz="1250" b="0" i="0">
+              <a:rPr sz="1600" b="0" i="0" dirty="0">
                 <a:solidFill>
                   <a:srgbClr val="2B2A26"/>
                 </a:solidFill>
@@ -34702,6 +36186,11 @@
         </p:txBody>
       </p:sp>
     </p:spTree>
+    <p:extLst>
+      <p:ext uri="{BB962C8B-B14F-4D97-AF65-F5344CB8AC3E}">
+        <p14:creationId xmlns:p14="http://schemas.microsoft.com/office/powerpoint/2010/main" val="1496007620"/>
+      </p:ext>
+    </p:extLst>
   </p:cSld>
   <p:clrMapOvr>
     <a:masterClrMapping/>
@@ -35342,4 +36831,26 @@
     </a:ext>
   </a:extLst>
 </a:theme>
+</file>
+
+<file path=ppt/webextensions/taskpanes.xml><?xml version="1.0" encoding="utf-8"?>
+<wetp:taskpanes xmlns:wetp="http://schemas.microsoft.com/office/webextensions/taskpanes/2010/11">
+  <wetp:taskpane dockstate="right" visibility="0" width="739" row="0">
+    <wetp:webextensionref xmlns:r="http://schemas.openxmlformats.org/officeDocument/2006/relationships" r:id="rId1"/>
+  </wetp:taskpane>
+</wetp:taskpanes>
+</file>
+
+<file path=ppt/webextensions/webextension1.xml><?xml version="1.0" encoding="utf-8"?>
+<we:webextension xmlns:we="http://schemas.microsoft.com/office/webextensions/webextension/2010/11" id="{EB094F68-EA9A-4AEB-AB68-A8948F3628CD}">
+  <we:reference id="WA200010001" version="1.0.0.1" store="Omex" storeType="OMEX"/>
+  <we:alternateReferences>
+    <we:reference id="WA200010001" version="1.0.0.1" store="WA200010001" storeType="OMEX"/>
+  </we:alternateReferences>
+  <we:properties>
+    <we:property name="claude.fileId" value="&quot;74f756ff-e9dd-44c3-a091-26b1d22725e6&quot;"/>
+  </we:properties>
+  <we:bindings/>
+  <we:snapshot xmlns:r="http://schemas.openxmlformats.org/officeDocument/2006/relationships"/>
+</we:webextension>
 </file>
--- a/presentation/Trentingrana_Captioning_EN.pptx
+++ b/presentation/Trentingrana_Captioning_EN.pptx
@@ -32,12 +32,12 @@
     <p:sldId id="336" r:id="rId23"/>
     <p:sldId id="337" r:id="rId24"/>
     <p:sldId id="309" r:id="rId25"/>
-    <p:sldId id="338" r:id="rId26"/>
-    <p:sldId id="339" r:id="rId27"/>
-    <p:sldId id="340" r:id="rId28"/>
-    <p:sldId id="341" r:id="rId29"/>
-    <p:sldId id="345" r:id="rId30"/>
-    <p:sldId id="344" r:id="rId31"/>
+    <p:sldId id="340" r:id="rId26"/>
+    <p:sldId id="341" r:id="rId27"/>
+    <p:sldId id="345" r:id="rId28"/>
+    <p:sldId id="344" r:id="rId29"/>
+    <p:sldId id="339" r:id="rId30"/>
+    <p:sldId id="338" r:id="rId31"/>
     <p:sldId id="342" r:id="rId32"/>
   </p:sldIdLst>
   <p:sldSz cx="12192000" cy="6858000"/>
@@ -162,7 +162,7 @@
 <file path=ppt/charts/chart1.xml><?xml version="1.0" encoding="utf-8"?>
 <c:chartSpace xmlns:c="http://schemas.openxmlformats.org/drawingml/2006/chart" xmlns:a="http://schemas.openxmlformats.org/drawingml/2006/main" xmlns:r="http://schemas.openxmlformats.org/officeDocument/2006/relationships" xmlns:c16r2="http://schemas.microsoft.com/office/drawing/2015/06/chart">
   <c:date1904 val="0"/>
-  <c:lang val="it-IT"/>
+  <c:lang val="en-US"/>
   <c:roundedCorners val="1"/>
   <c:style val="2"/>
   <c:chart>
@@ -421,7 +421,7 @@
 <file path=ppt/charts/chart2.xml><?xml version="1.0" encoding="utf-8"?>
 <c:chartSpace xmlns:c="http://schemas.openxmlformats.org/drawingml/2006/chart" xmlns:a="http://schemas.openxmlformats.org/drawingml/2006/main" xmlns:r="http://schemas.openxmlformats.org/officeDocument/2006/relationships" xmlns:c16r2="http://schemas.microsoft.com/office/drawing/2015/06/chart">
   <c:date1904 val="0"/>
-  <c:lang val="it-IT"/>
+  <c:lang val="en-US"/>
   <c:roundedCorners val="1"/>
   <c:style val="2"/>
   <c:chart>
@@ -813,7 +813,7 @@
 <file path=ppt/charts/chart3.xml><?xml version="1.0" encoding="utf-8"?>
 <c:chartSpace xmlns:c="http://schemas.openxmlformats.org/drawingml/2006/chart" xmlns:a="http://schemas.openxmlformats.org/drawingml/2006/main" xmlns:r="http://schemas.openxmlformats.org/officeDocument/2006/relationships" xmlns:c16r2="http://schemas.microsoft.com/office/drawing/2015/06/chart">
   <c:date1904 val="0"/>
-  <c:lang val="it-IT"/>
+  <c:lang val="en-US"/>
   <c:roundedCorners val="1"/>
   <c:style val="2"/>
   <c:chart>
@@ -1140,7 +1140,7 @@
 <file path=ppt/charts/chart4.xml><?xml version="1.0" encoding="utf-8"?>
 <c:chartSpace xmlns:c="http://schemas.openxmlformats.org/drawingml/2006/chart" xmlns:a="http://schemas.openxmlformats.org/drawingml/2006/main" xmlns:r="http://schemas.openxmlformats.org/officeDocument/2006/relationships" xmlns:c16r2="http://schemas.microsoft.com/office/drawing/2015/06/chart">
   <c:date1904 val="0"/>
-  <c:lang val="it-IT"/>
+  <c:lang val="en-US"/>
   <c:roundedCorners val="1"/>
   <c:style val="2"/>
   <c:chart>
@@ -1435,7 +1435,7 @@
 <file path=ppt/charts/chart5.xml><?xml version="1.0" encoding="utf-8"?>
 <c:chartSpace xmlns:c="http://schemas.openxmlformats.org/drawingml/2006/chart" xmlns:a="http://schemas.openxmlformats.org/drawingml/2006/main" xmlns:r="http://schemas.openxmlformats.org/officeDocument/2006/relationships" xmlns:c16r2="http://schemas.microsoft.com/office/drawing/2015/06/chart">
   <c:date1904 val="0"/>
-  <c:lang val="it-IT"/>
+  <c:lang val="en-US"/>
   <c:roundedCorners val="1"/>
   <c:style val="2"/>
   <c:chart>
@@ -11939,105 +11939,126 @@
           <a:p>
             <a:r>
               <a:rPr dirty="0"/>
-              <a:t>Put the shuffle test together with the two-axis design from the architectures slide, and the</a:t>
-            </a:r>
-          </a:p>
-          <a:p>
+              <a:t>Let's start with </a:t>
+            </a:r>
+            <a:r>
+              <a:rPr dirty="0" err="1"/>
+              <a:t>CIDEr</a:t>
+            </a:r>
             <a:r>
               <a:rPr dirty="0"/>
-              <a:t>conclusion writes itself.</a:t>
+              <a:t>, the metric designed specifically for captioning. Unlike BLEU, which</a:t>
             </a:r>
           </a:p>
           <a:p>
             <a:r>
               <a:rPr dirty="0"/>
-              <a:t>Comparing m1 with m3, which isolates the encoder: m1 with </a:t>
+              <a:t>flattened the models onto close values, </a:t>
             </a:r>
             <a:r>
               <a:rPr dirty="0" err="1"/>
-              <a:t>ResNet</a:t>
+              <a:t>CIDEr</a:t>
             </a:r>
             <a:r>
               <a:rPr dirty="0"/>
-              <a:t> never conditions on the image, m3</a:t>
+              <a:t> weights rare terms with TF-IDF and so separates them.</a:t>
             </a:r>
           </a:p>
           <a:p>
             <a:r>
               <a:rPr dirty="0"/>
-              <a:t>with </a:t>
+              <a:t>Look at the ordering in the chart, on the seven-attribute means: random 0.23, then </a:t>
             </a:r>
             <a:r>
               <a:rPr dirty="0" err="1"/>
-              <a:t>ViT</a:t>
-            </a:r>
+              <a:t>freq_weighted</a:t>
+            </a:r>
+            <a:endParaRPr dirty="0"/>
+          </a:p>
+          <a:p>
             <a:r>
               <a:rPr dirty="0"/>
-              <a:t> does on most attributes. By changing only the encoder, image use switches on. The reading</a:t>
-            </a:r>
-          </a:p>
-          <a:p>
+              <a:t>0.37, then the trained models rising clearly: m1 at 0.59, m3 at 0.65, m6 at 0.70. </a:t>
+            </a:r>
+            <a:r>
+              <a:rPr dirty="0" err="1"/>
+              <a:t>CIDEr</a:t>
+            </a:r>
             <a:r>
               <a:rPr dirty="0"/>
-              <a:t>is that a frozen ResNet-50's features aren't informative enough at this data scale, while a frozen</a:t>
-            </a:r>
-          </a:p>
-          <a:p>
+              <a:t> orders the</a:t>
+            </a:r>
+          </a:p>
+          <a:p>
+            <a:r>
+              <a:rPr dirty="0"/>
+              <a:t>models correctly, and confirms m6 is the best. It's exactly the information BLEU couldn't give us: a</a:t>
+            </a:r>
+          </a:p>
+          <a:p>
+            <a:r>
+              <a:rPr dirty="0"/>
+              <a:t>clean ranking.</a:t>
+            </a:r>
+          </a:p>
+          <a:p>
+            <a:r>
+              <a:rPr dirty="0"/>
+              <a:t>There's one column taller than all, in gold: </a:t>
+            </a:r>
             <a:r>
               <a:rPr dirty="0" err="1"/>
-              <a:t>ViT</a:t>
+              <a:t>most_frequent</a:t>
             </a:r>
             <a:r>
               <a:rPr dirty="0"/>
-              <a:t>-B/16's are.</a:t>
+              <a:t>, at 0.79. Don't be fooled: the constant</a:t>
             </a:r>
           </a:p>
           <a:p>
             <a:r>
               <a:rPr dirty="0"/>
-              <a:t>Comparing m3 with m6, which isolates the decoder: they produce different outputs, they never give</a:t>
+              <a:t>baseline leads only because, on this dataset, the panel reference is often the frequent sentence</a:t>
             </a:r>
           </a:p>
           <a:p>
             <a:r>
               <a:rPr dirty="0"/>
-              <a:t>the same caption for the same image, yet they have exactly the same image-conditioning profile. The</a:t>
+              <a:t>itself. It's an artifact of the single reference, not real quality. On an extreme case like rind</a:t>
             </a:r>
           </a:p>
           <a:p>
             <a:r>
               <a:rPr dirty="0"/>
-              <a:t>same attributes succeed, the same fail. Changing the decoder changes the sentence's style, not</a:t>
-            </a:r>
-          </a:p>
-          <a:p>
+              <a:t>thickness, where BLEU gave 0.39 for everyone, </a:t>
+            </a:r>
+            <a:r>
+              <a:rPr dirty="0" err="1"/>
+              <a:t>CIDEr</a:t>
+            </a:r>
             <a:r>
               <a:rPr dirty="0"/>
-              <a:t>whether the image is used.</a:t>
+              <a:t> ranges from 1.04 to 2.29: a rich ordering BLEU</a:t>
             </a:r>
           </a:p>
           <a:p>
             <a:r>
               <a:rPr dirty="0"/>
-              <a:t>The synthesis is at the bottom: the binary gate of image-conditioning, on this dataset, is the</a:t>
+              <a:t>simply did not see.</a:t>
             </a:r>
           </a:p>
           <a:p>
             <a:r>
               <a:rPr dirty="0"/>
-              <a:t>visual encoder. Not the decoder, not the amount of data, not the hyperparameters. It's a clean</a:t>
-            </a:r>
-          </a:p>
-          <a:p>
+              <a:t>Conclusion: </a:t>
+            </a:r>
+            <a:r>
+              <a:rPr dirty="0" err="1"/>
+              <a:t>CIDEr</a:t>
+            </a:r>
             <a:r>
               <a:rPr dirty="0"/>
-              <a:t>result, and it also tells us where to act in future: on the encoder. Now let's reinforce this</a:t>
-            </a:r>
-          </a:p>
-          <a:p>
-            <a:r>
-              <a:rPr dirty="0"/>
-              <a:t>conclusion with the complementary metrics.</a:t>
+              <a:t> adds real information and separates the trained models from the noise.</a:t>
             </a:r>
           </a:p>
         </p:txBody>
@@ -12108,81 +12129,7 @@
           <a:p>
             <a:r>
               <a:rPr dirty="0"/>
-              <a:t>We've seen that BLEU, on its own, misleads: it rewards template repetition and never looks at the</a:t>
-            </a:r>
-          </a:p>
-          <a:p>
-            <a:r>
-              <a:rPr dirty="0"/>
-              <a:t>image. To read the models more honestly, we paired BLEU with six complementary metrics, groupable</a:t>
-            </a:r>
-          </a:p>
-          <a:p>
-            <a:r>
-              <a:rPr dirty="0"/>
-              <a:t>into three families.</a:t>
-            </a:r>
-          </a:p>
-          <a:p>
-            <a:r>
-              <a:rPr dirty="0"/>
-              <a:t>The text metrics compare the prediction with the textual reference: besides BLEU, METEOR, which is</a:t>
-            </a:r>
-          </a:p>
-          <a:p>
-            <a:r>
-              <a:rPr dirty="0"/>
-              <a:t>more lenient because it aligns with stemming and synonyms, ROUGE-L, which rewards word order, and</a:t>
-            </a:r>
-          </a:p>
-          <a:p>
-            <a:r>
-              <a:rPr dirty="0" err="1"/>
-              <a:t>CIDEr</a:t>
-            </a:r>
-            <a:r>
-              <a:rPr dirty="0"/>
-              <a:t>, designed specifically for captioning, which weights n-grams with TF-IDF and so rewards rare,</a:t>
-            </a:r>
-          </a:p>
-          <a:p>
-            <a:r>
-              <a:rPr dirty="0"/>
-              <a:t>informative sensory terms like "eyes" (</a:t>
-            </a:r>
-            <a:r>
-              <a:rPr dirty="0" err="1"/>
-              <a:t>occhiatura</a:t>
-            </a:r>
-            <a:r>
-              <a:rPr dirty="0"/>
-              <a:t>) over common words.</a:t>
-            </a:r>
-          </a:p>
-          <a:p>
-            <a:r>
-              <a:rPr dirty="0"/>
-              <a:t>Then a semantic metric, </a:t>
-            </a:r>
-            <a:r>
-              <a:rPr dirty="0" err="1"/>
-              <a:t>BERTScore</a:t>
-            </a:r>
-            <a:r>
-              <a:rPr dirty="0"/>
-              <a:t>, measuring meaning similarity via embeddings. A domain metric,</a:t>
-            </a:r>
-          </a:p>
-          <a:p>
-            <a:r>
-              <a:rPr dirty="0"/>
-              <a:t>vocabulary conformity, which asks: does the model "speak cheese" in the certified register?</a:t>
-            </a:r>
-          </a:p>
-          <a:p>
-            <a:r>
-              <a:rPr dirty="0"/>
-              <a:t>And finally, highlighted at the bottom, the most important for captioning: </a:t>
+              <a:t>Now </a:t>
             </a:r>
             <a:r>
               <a:rPr dirty="0" err="1"/>
@@ -12190,27 +12137,19 @@
             </a:r>
             <a:r>
               <a:rPr dirty="0"/>
-              <a:t>, the only one</a:t>
+              <a:t>, the only metric that looks at the image, and the independent confirmation of the</a:t>
             </a:r>
           </a:p>
           <a:p>
             <a:r>
               <a:rPr dirty="0"/>
-              <a:t>that truly looks at the image. It compares the caption with the slice in CLIP space, ignoring the</a:t>
+              <a:t>shuffle test. Two charts, two messages.</a:t>
             </a:r>
           </a:p>
           <a:p>
             <a:r>
               <a:rPr dirty="0"/>
-              <a:t>panel reference. The next two slides show what </a:t>
-            </a:r>
-            <a:r>
-              <a:rPr dirty="0" err="1"/>
-              <a:t>CIDEr</a:t>
-            </a:r>
-            <a:r>
-              <a:rPr dirty="0"/>
-              <a:t> and </a:t>
+              <a:t>On the left, mean </a:t>
             </a:r>
             <a:r>
               <a:rPr dirty="0" err="1"/>
@@ -12218,7 +12157,75 @@
             </a:r>
             <a:r>
               <a:rPr dirty="0"/>
-              <a:t> add.</a:t>
+              <a:t> by model. Note the axis: I deliberately zoomed in, and despite the zoom</a:t>
+            </a:r>
+          </a:p>
+          <a:p>
+            <a:r>
+              <a:rPr dirty="0"/>
+              <a:t>the bars are practically identical. The trained models m1, m3, m6 do not beat the constant baseline</a:t>
+            </a:r>
+          </a:p>
+          <a:p>
+            <a:r>
+              <a:rPr dirty="0" err="1"/>
+              <a:t>most_frequent</a:t>
+            </a:r>
+            <a:r>
+              <a:rPr dirty="0"/>
+              <a:t>, the one that always fires the same sentence ignoring the image. The gap is below</a:t>
+            </a:r>
+          </a:p>
+          <a:p>
+            <a:r>
+              <a:rPr dirty="0"/>
+              <a:t>0.004, within the noise. It's the quantitative, independent confirmation of what the shuffle test</a:t>
+            </a:r>
+          </a:p>
+          <a:p>
+            <a:r>
+              <a:rPr dirty="0"/>
+              <a:t>already told us: with a frozen encoder, the models don't anchor the caption to the visual content,</a:t>
+            </a:r>
+          </a:p>
+          <a:p>
+            <a:r>
+              <a:rPr dirty="0"/>
+              <a:t>they do language modeling on the caption distribution.</a:t>
+            </a:r>
+          </a:p>
+          <a:p>
+            <a:r>
+              <a:rPr dirty="0"/>
+              <a:t>On the right, the real variation: it's per attribute, not per model. CLIP "sees" that texture,</a:t>
+            </a:r>
+          </a:p>
+          <a:p>
+            <a:r>
+              <a:rPr dirty="0" err="1"/>
+              <a:t>colour</a:t>
+            </a:r>
+            <a:r>
+              <a:rPr dirty="0"/>
+              <a:t> and structure, the visual attributes, get higher scores, while aroma, taste and smell stay</a:t>
+            </a:r>
+          </a:p>
+          <a:p>
+            <a:r>
+              <a:rPr dirty="0"/>
+              <a:t>low for everyone, because no image can reveal a taste. It's a sanity check that validates the metric.</a:t>
+            </a:r>
+          </a:p>
+          <a:p>
+            <a:r>
+              <a:rPr dirty="0"/>
+              <a:t>And remember the exception: rind thickness is visible but low, because the rind is a small portion</a:t>
+            </a:r>
+          </a:p>
+          <a:p>
+            <a:r>
+              <a:rPr dirty="0"/>
+              <a:t>of the slice and CLIP weights it little. Everything fits.</a:t>
             </a:r>
           </a:p>
         </p:txBody>
@@ -12289,126 +12296,81 @@
           <a:p>
             <a:r>
               <a:rPr dirty="0"/>
-              <a:t>Let's start with </a:t>
+              <a:t>The numbers tell half the story; the generated captions tell the other half. Here you see real</a:t>
+            </a:r>
+          </a:p>
+          <a:p>
+            <a:r>
+              <a:rPr dirty="0"/>
+              <a:t>predictions from m6 alongside the panel reference, on test-set samples.</a:t>
+            </a:r>
+          </a:p>
+          <a:p>
+            <a:r>
+              <a:rPr dirty="0"/>
+              <a:t>Sometimes it's an exact match: on the aroma of cream, prediction and reference coincide word for</a:t>
+            </a:r>
+          </a:p>
+          <a:p>
+            <a:r>
+              <a:rPr dirty="0"/>
+              <a:t>word. On thickness, "the rind is medium-thick", again perfect. But look at the other cases: on taste</a:t>
+            </a:r>
+          </a:p>
+          <a:p>
+            <a:r>
+              <a:rPr dirty="0"/>
+              <a:t>the model says "slightly salty and spicy" where the panel said just "salty"; on structure it</a:t>
+            </a:r>
+          </a:p>
+          <a:p>
+            <a:r>
+              <a:rPr dirty="0"/>
+              <a:t>proposes "irregular fracture and fine grain" while the reference talks about stretched paste.</a:t>
+            </a:r>
+          </a:p>
+          <a:p>
+            <a:r>
+              <a:rPr dirty="0"/>
+              <a:t>From these examples four patterns emerge, </a:t>
             </a:r>
             <a:r>
               <a:rPr dirty="0" err="1"/>
-              <a:t>CIDEr</a:t>
+              <a:t>summarised</a:t>
             </a:r>
             <a:r>
               <a:rPr dirty="0"/>
-              <a:t>, the metric designed specifically for captioning. Unlike BLEU, which</a:t>
+              <a:t> at the bottom. First: the scaffolding, "the</a:t>
             </a:r>
           </a:p>
           <a:p>
             <a:r>
               <a:rPr dirty="0"/>
-              <a:t>flattened the models onto close values, </a:t>
-            </a:r>
-            <a:r>
-              <a:rPr dirty="0" err="1"/>
-              <a:t>CIDEr</a:t>
-            </a:r>
+              <a:t>cheese has a...", is always correct and alone worth about half the BLEU-4, which is why the numbers</a:t>
+            </a:r>
+          </a:p>
+          <a:p>
             <a:r>
               <a:rPr dirty="0"/>
-              <a:t> weights rare terms with TF-IDF and so separates them.</a:t>
+              <a:t>aren't tiny. Second: the language is fluent and grammatical, thanks to the pretrained model. Third,</a:t>
             </a:r>
           </a:p>
           <a:p>
             <a:r>
               <a:rPr dirty="0"/>
-              <a:t>Look at the ordering in the chart, on the seven-attribute means: random 0.23, then </a:t>
-            </a:r>
-            <a:r>
-              <a:rPr dirty="0" err="1"/>
-              <a:t>freq_weighted</a:t>
-            </a:r>
-            <a:endParaRPr dirty="0"/>
+              <a:t>and most telling: the descriptor is often plausible but refers to another cheese, exactly what we</a:t>
+            </a:r>
           </a:p>
           <a:p>
             <a:r>
               <a:rPr dirty="0"/>
-              <a:t>0.37, then the trained models rising clearly: m1 at 0.59, m3 at 0.65, m6 at 0.70. </a:t>
-            </a:r>
-            <a:r>
-              <a:rPr dirty="0" err="1"/>
-              <a:t>CIDEr</a:t>
-            </a:r>
+              <a:t>expect from a model only partially conditioned on the image. Fourth: the variability across tasters</a:t>
+            </a:r>
+          </a:p>
+          <a:p>
             <a:r>
               <a:rPr dirty="0"/>
-              <a:t> orders the</a:t>
-            </a:r>
-          </a:p>
-          <a:p>
-            <a:r>
-              <a:rPr dirty="0"/>
-              <a:t>models correctly, and confirms m6 is the best. It's exactly the information BLEU couldn't give us: a</a:t>
-            </a:r>
-          </a:p>
-          <a:p>
-            <a:r>
-              <a:rPr dirty="0"/>
-              <a:t>clean ranking.</a:t>
-            </a:r>
-          </a:p>
-          <a:p>
-            <a:r>
-              <a:rPr dirty="0"/>
-              <a:t>There's one column taller than all, in gold: </a:t>
-            </a:r>
-            <a:r>
-              <a:rPr dirty="0" err="1"/>
-              <a:t>most_frequent</a:t>
-            </a:r>
-            <a:r>
-              <a:rPr dirty="0"/>
-              <a:t>, at 0.79. Don't be fooled: the constant</a:t>
-            </a:r>
-          </a:p>
-          <a:p>
-            <a:r>
-              <a:rPr dirty="0"/>
-              <a:t>baseline leads only because, on this dataset, the panel reference is often the frequent sentence</a:t>
-            </a:r>
-          </a:p>
-          <a:p>
-            <a:r>
-              <a:rPr dirty="0"/>
-              <a:t>itself. It's an artifact of the single reference, not real quality. On an extreme case like rind</a:t>
-            </a:r>
-          </a:p>
-          <a:p>
-            <a:r>
-              <a:rPr dirty="0"/>
-              <a:t>thickness, where BLEU gave 0.39 for everyone, </a:t>
-            </a:r>
-            <a:r>
-              <a:rPr dirty="0" err="1"/>
-              <a:t>CIDEr</a:t>
-            </a:r>
-            <a:r>
-              <a:rPr dirty="0"/>
-              <a:t> ranges from 1.04 to 2.29: a rich ordering BLEU</a:t>
-            </a:r>
-          </a:p>
-          <a:p>
-            <a:r>
-              <a:rPr dirty="0"/>
-              <a:t>simply did not see.</a:t>
-            </a:r>
-          </a:p>
-          <a:p>
-            <a:r>
-              <a:rPr dirty="0"/>
-              <a:t>Conclusion: </a:t>
-            </a:r>
-            <a:r>
-              <a:rPr dirty="0" err="1"/>
-              <a:t>CIDEr</a:t>
-            </a:r>
-            <a:r>
-              <a:rPr dirty="0"/>
-              <a:t> adds real information and separates the trained models from the noise.</a:t>
+              <a:t>is enormous and puts a ceiling on what any model can achieve with a single-reference BLEU.</a:t>
             </a:r>
           </a:p>
         </p:txBody>
@@ -12479,7 +12441,47 @@
           <a:p>
             <a:r>
               <a:rPr dirty="0"/>
-              <a:t>Now </a:t>
+              <a:t>Let's wrap up. The project delivers two results and one promise for the future.</a:t>
+            </a:r>
+          </a:p>
+          <a:p>
+            <a:r>
+              <a:rPr dirty="0"/>
+              <a:t>The scientific result is the most solid: on this dataset, the determinant of image use is the visual</a:t>
+            </a:r>
+          </a:p>
+          <a:p>
+            <a:r>
+              <a:rPr dirty="0"/>
+              <a:t>encoder. </a:t>
+            </a:r>
+            <a:r>
+              <a:rPr dirty="0" err="1"/>
+              <a:t>ResNet</a:t>
+            </a:r>
+            <a:r>
+              <a:rPr dirty="0"/>
+              <a:t> ignores the image on all seven attributes, </a:t>
+            </a:r>
+            <a:r>
+              <a:rPr dirty="0" err="1"/>
+              <a:t>ViT</a:t>
+            </a:r>
+            <a:r>
+              <a:rPr dirty="0"/>
+              <a:t> uses it on four out of seven,</a:t>
+            </a:r>
+          </a:p>
+          <a:p>
+            <a:r>
+              <a:rPr dirty="0"/>
+              <a:t>independent of the decoder, the data scale and the hyperparameters. And it's not an isolated claim:</a:t>
+            </a:r>
+          </a:p>
+          <a:p>
+            <a:r>
+              <a:rPr dirty="0"/>
+              <a:t>two independent tools, the shuffle test and </a:t>
             </a:r>
             <a:r>
               <a:rPr dirty="0" err="1"/>
@@ -12487,19 +12489,53 @@
             </a:r>
             <a:r>
               <a:rPr dirty="0"/>
-              <a:t>, the only metric that looks at the image, and the independent confirmation of the</a:t>
+              <a:t>, converge on the same conclusion.</a:t>
             </a:r>
           </a:p>
           <a:p>
             <a:r>
               <a:rPr dirty="0"/>
-              <a:t>shuffle test. Two charts, two messages.</a:t>
+              <a:t>The practical result: the trained models beat the constant baseline on four attributes out of seven,</a:t>
             </a:r>
           </a:p>
           <a:p>
             <a:r>
               <a:rPr dirty="0"/>
-              <a:t>On the left, mean </a:t>
+              <a:t>with the maximum on structure. m6, the </a:t>
+            </a:r>
+            <a:r>
+              <a:rPr dirty="0" err="1"/>
+              <a:t>ViT</a:t>
+            </a:r>
+            <a:r>
+              <a:rPr dirty="0"/>
+              <a:t> with </a:t>
+            </a:r>
+            <a:r>
+              <a:rPr dirty="0" err="1"/>
+              <a:t>GePpeTto</a:t>
+            </a:r>
+            <a:r>
+              <a:rPr dirty="0"/>
+              <a:t>, wins narrowly almost everywhere. And all</a:t>
+            </a:r>
+          </a:p>
+          <a:p>
+            <a:r>
+              <a:rPr dirty="0"/>
+              <a:t>this rests on a 38-thousand-pair dataset built with just 5 dollars and 60 cents of LLM cost.</a:t>
+            </a:r>
+          </a:p>
+          <a:p>
+            <a:r>
+              <a:rPr dirty="0"/>
+              <a:t>Future work follows directly from the diagnosis: since the bottleneck is the frozen encoder, the</a:t>
+            </a:r>
+          </a:p>
+          <a:p>
+            <a:r>
+              <a:rPr dirty="0"/>
+              <a:t>natural next experiment is fine-tuning the encoder and re-measuring </a:t>
             </a:r>
             <a:r>
               <a:rPr dirty="0" err="1"/>
@@ -12507,75 +12543,49 @@
             </a:r>
             <a:r>
               <a:rPr dirty="0"/>
-              <a:t> by model. Note the axis: I deliberately zoomed in, and despite the zoom</a:t>
+              <a:t>. If the models start</a:t>
             </a:r>
           </a:p>
           <a:p>
             <a:r>
               <a:rPr dirty="0"/>
-              <a:t>the bars are practically identical. The trained models m1, m3, m6 do not beat the constant baseline</a:t>
-            </a:r>
-          </a:p>
-          <a:p>
-            <a:r>
-              <a:rPr dirty="0" err="1"/>
-              <a:t>most_frequent</a:t>
-            </a:r>
+              <a:t>pulling away from the constant baseline, we'll have direct proof that the image is finally being</a:t>
+            </a:r>
+          </a:p>
+          <a:p>
             <a:r>
               <a:rPr dirty="0"/>
-              <a:t>, the one that always fires the same sentence ignoring the image. The gap is below</a:t>
+              <a:t>exploited.</a:t>
             </a:r>
           </a:p>
           <a:p>
             <a:r>
               <a:rPr dirty="0"/>
-              <a:t>0.004, within the noise. It's the quantitative, independent confirmation of what the shuffle test</a:t>
+              <a:t>I'll close with an honest framing: none of these models would replace a taster today. They learned</a:t>
             </a:r>
           </a:p>
           <a:p>
             <a:r>
               <a:rPr dirty="0"/>
-              <a:t>already told us: with a frozen encoder, the models don't anchor the caption to the visual content,</a:t>
+              <a:t>the sensory vocabulary and a partial map from image to descriptor, a result consistent with the</a:t>
             </a:r>
           </a:p>
           <a:p>
             <a:r>
               <a:rPr dirty="0"/>
-              <a:t>they do language modeling on the caption distribution.</a:t>
+              <a:t>data scale and the intrinsic noise of multi-taster annotation. But the path is mapped, and we know</a:t>
             </a:r>
           </a:p>
           <a:p>
             <a:r>
               <a:rPr dirty="0"/>
-              <a:t>On the right, the real variation: it's per attribute, not per model. CLIP "sees" that texture,</a:t>
-            </a:r>
-          </a:p>
-          <a:p>
-            <a:r>
-              <a:rPr dirty="0" err="1"/>
-              <a:t>colour</a:t>
-            </a:r>
+              <a:t>exactly where to act.</a:t>
+            </a:r>
+          </a:p>
+          <a:p>
             <a:r>
               <a:rPr dirty="0"/>
-              <a:t> and structure, the visual attributes, get higher scores, while aroma, taste and smell stay</a:t>
-            </a:r>
-          </a:p>
-          <a:p>
-            <a:r>
-              <a:rPr dirty="0"/>
-              <a:t>low for everyone, because no image can reveal a taste. It's a sanity check that validates the metric.</a:t>
-            </a:r>
-          </a:p>
-          <a:p>
-            <a:r>
-              <a:rPr dirty="0"/>
-              <a:t>And remember the exception: rind thickness is visible but low, because the rind is a small portion</a:t>
-            </a:r>
-          </a:p>
-          <a:p>
-            <a:r>
-              <a:rPr dirty="0"/>
-              <a:t>of the slice and CLIP weights it little. Everything fits.</a:t>
+              <a:t>Thank you for your attention. I'm happy to take questions.</a:t>
             </a:r>
           </a:p>
         </p:txBody>
@@ -12646,81 +12656,117 @@
           <a:p>
             <a:r>
               <a:rPr dirty="0"/>
-              <a:t>The numbers tell half the story; the generated captions tell the other half. Here you see real</a:t>
+              <a:t>We've seen that BLEU, on its own, misleads: it rewards template repetition and never looks at the</a:t>
             </a:r>
           </a:p>
           <a:p>
             <a:r>
               <a:rPr dirty="0"/>
-              <a:t>predictions from m6 alongside the panel reference, on test-set samples.</a:t>
+              <a:t>image. To read the models more honestly, we paired BLEU with six complementary metrics, groupable</a:t>
             </a:r>
           </a:p>
           <a:p>
             <a:r>
               <a:rPr dirty="0"/>
-              <a:t>Sometimes it's an exact match: on the aroma of cream, prediction and reference coincide word for</a:t>
+              <a:t>into three families.</a:t>
             </a:r>
           </a:p>
           <a:p>
             <a:r>
               <a:rPr dirty="0"/>
-              <a:t>word. On thickness, "the rind is medium-thick", again perfect. But look at the other cases: on taste</a:t>
+              <a:t>The text metrics compare the prediction with the textual reference: besides BLEU, METEOR, which is</a:t>
             </a:r>
           </a:p>
           <a:p>
             <a:r>
               <a:rPr dirty="0"/>
-              <a:t>the model says "slightly salty and spicy" where the panel said just "salty"; on structure it</a:t>
-            </a:r>
-          </a:p>
-          <a:p>
+              <a:t>more lenient because it aligns with stemming and synonyms, ROUGE-L, which rewards word order, and</a:t>
+            </a:r>
+          </a:p>
+          <a:p>
+            <a:r>
+              <a:rPr dirty="0" err="1"/>
+              <a:t>CIDEr</a:t>
+            </a:r>
             <a:r>
               <a:rPr dirty="0"/>
-              <a:t>proposes "irregular fracture and fine grain" while the reference talks about stretched paste.</a:t>
+              <a:t>, designed specifically for captioning, which weights n-grams with TF-IDF and so rewards rare,</a:t>
             </a:r>
           </a:p>
           <a:p>
             <a:r>
               <a:rPr dirty="0"/>
-              <a:t>From these examples four patterns emerge, </a:t>
+              <a:t>informative sensory terms like "eyes" (</a:t>
             </a:r>
             <a:r>
               <a:rPr dirty="0" err="1"/>
-              <a:t>summarised</a:t>
+              <a:t>occhiatura</a:t>
             </a:r>
             <a:r>
               <a:rPr dirty="0"/>
-              <a:t> at the bottom. First: the scaffolding, "the</a:t>
+              <a:t>) over common words.</a:t>
             </a:r>
           </a:p>
           <a:p>
             <a:r>
               <a:rPr dirty="0"/>
-              <a:t>cheese has a...", is always correct and alone worth about half the BLEU-4, which is why the numbers</a:t>
-            </a:r>
-          </a:p>
-          <a:p>
+              <a:t>Then a semantic metric, </a:t>
+            </a:r>
+            <a:r>
+              <a:rPr dirty="0" err="1"/>
+              <a:t>BERTScore</a:t>
+            </a:r>
             <a:r>
               <a:rPr dirty="0"/>
-              <a:t>aren't tiny. Second: the language is fluent and grammatical, thanks to the pretrained model. Third,</a:t>
+              <a:t>, measuring meaning similarity via embeddings. A domain metric,</a:t>
             </a:r>
           </a:p>
           <a:p>
             <a:r>
               <a:rPr dirty="0"/>
-              <a:t>and most telling: the descriptor is often plausible but refers to another cheese, exactly what we</a:t>
+              <a:t>vocabulary conformity, which asks: does the model "speak cheese" in the certified register?</a:t>
             </a:r>
           </a:p>
           <a:p>
             <a:r>
               <a:rPr dirty="0"/>
-              <a:t>expect from a model only partially conditioned on the image. Fourth: the variability across tasters</a:t>
-            </a:r>
-          </a:p>
-          <a:p>
+              <a:t>And finally, highlighted at the bottom, the most important for captioning: </a:t>
+            </a:r>
+            <a:r>
+              <a:rPr dirty="0" err="1"/>
+              <a:t>CLIPScore</a:t>
+            </a:r>
             <a:r>
               <a:rPr dirty="0"/>
-              <a:t>is enormous and puts a ceiling on what any model can achieve with a single-reference BLEU.</a:t>
+              <a:t>, the only one</a:t>
+            </a:r>
+          </a:p>
+          <a:p>
+            <a:r>
+              <a:rPr dirty="0"/>
+              <a:t>that truly looks at the image. It compares the caption with the slice in CLIP space, ignoring the</a:t>
+            </a:r>
+          </a:p>
+          <a:p>
+            <a:r>
+              <a:rPr dirty="0"/>
+              <a:t>panel reference. The next two slides show what </a:t>
+            </a:r>
+            <a:r>
+              <a:rPr dirty="0" err="1"/>
+              <a:t>CIDEr</a:t>
+            </a:r>
+            <a:r>
+              <a:rPr dirty="0"/>
+              <a:t> and </a:t>
+            </a:r>
+            <a:r>
+              <a:rPr dirty="0" err="1"/>
+              <a:t>CLIPScore</a:t>
+            </a:r>
+            <a:r>
+              <a:rPr dirty="0"/>
+              <a:t> add.</a:t>
             </a:r>
           </a:p>
         </p:txBody>
@@ -14789,19 +14835,19 @@
           <a:p>
             <a:r>
               <a:rPr dirty="0"/>
-              <a:t>Let's wrap up. The project delivers two results and one promise for the future.</a:t>
+              <a:t>Put the shuffle test together with the two-axis design from the architectures slide, and the</a:t>
             </a:r>
           </a:p>
           <a:p>
             <a:r>
               <a:rPr dirty="0"/>
-              <a:t>The scientific result is the most solid: on this dataset, the determinant of image use is the visual</a:t>
+              <a:t>conclusion writes itself.</a:t>
             </a:r>
           </a:p>
           <a:p>
             <a:r>
               <a:rPr dirty="0"/>
-              <a:t>encoder. </a:t>
+              <a:t>Comparing m1 with m3, which isolates the encoder: m1 with </a:t>
             </a:r>
             <a:r>
               <a:rPr dirty="0" err="1"/>
@@ -14809,7 +14855,13 @@
             </a:r>
             <a:r>
               <a:rPr dirty="0"/>
-              <a:t> ignores the image on all seven attributes, </a:t>
+              <a:t> never conditions on the image, m3</a:t>
+            </a:r>
+          </a:p>
+          <a:p>
+            <a:r>
+              <a:rPr dirty="0"/>
+              <a:t>with </a:t>
             </a:r>
             <a:r>
               <a:rPr dirty="0" err="1"/>
@@ -14817,123 +14869,71 @@
             </a:r>
             <a:r>
               <a:rPr dirty="0"/>
-              <a:t> uses it on four out of seven,</a:t>
+              <a:t> does on most attributes. By changing only the encoder, image use switches on. The reading</a:t>
             </a:r>
           </a:p>
           <a:p>
             <a:r>
               <a:rPr dirty="0"/>
-              <a:t>independent of the decoder, the data scale and the hyperparameters. And it's not an isolated claim:</a:t>
-            </a:r>
-          </a:p>
-          <a:p>
-            <a:r>
-              <a:rPr dirty="0"/>
-              <a:t>two independent tools, the shuffle test and </a:t>
-            </a:r>
-            <a:r>
-              <a:rPr dirty="0" err="1"/>
-              <a:t>CLIPScore</a:t>
-            </a:r>
-            <a:r>
-              <a:rPr dirty="0"/>
-              <a:t>, converge on the same conclusion.</a:t>
-            </a:r>
-          </a:p>
-          <a:p>
-            <a:r>
-              <a:rPr dirty="0"/>
-              <a:t>The practical result: the trained models beat the constant baseline on four attributes out of seven,</a:t>
-            </a:r>
-          </a:p>
-          <a:p>
-            <a:r>
-              <a:rPr dirty="0"/>
-              <a:t>with the maximum on structure. m6, the </a:t>
-            </a:r>
+              <a:t>is that a frozen ResNet-50's features aren't informative enough at this data scale, while a frozen</a:t>
+            </a:r>
+          </a:p>
+          <a:p>
             <a:r>
               <a:rPr dirty="0" err="1"/>
               <a:t>ViT</a:t>
             </a:r>
             <a:r>
               <a:rPr dirty="0"/>
-              <a:t> with </a:t>
-            </a:r>
-            <a:r>
-              <a:rPr dirty="0" err="1"/>
-              <a:t>GePpeTto</a:t>
-            </a:r>
+              <a:t>-B/16's are.</a:t>
+            </a:r>
+          </a:p>
+          <a:p>
             <a:r>
               <a:rPr dirty="0"/>
-              <a:t>, wins narrowly almost everywhere. And all</a:t>
+              <a:t>Comparing m3 with m6, which isolates the decoder: they produce different outputs, they never give</a:t>
             </a:r>
           </a:p>
           <a:p>
             <a:r>
               <a:rPr dirty="0"/>
-              <a:t>this rests on a 38-thousand-pair dataset built with just 5 dollars and 60 cents of LLM cost.</a:t>
+              <a:t>the same caption for the same image, yet they have exactly the same image-conditioning profile. The</a:t>
             </a:r>
           </a:p>
           <a:p>
             <a:r>
               <a:rPr dirty="0"/>
-              <a:t>Future work follows directly from the diagnosis: since the bottleneck is the frozen encoder, the</a:t>
+              <a:t>same attributes succeed, the same fail. Changing the decoder changes the sentence's style, not</a:t>
             </a:r>
           </a:p>
           <a:p>
             <a:r>
               <a:rPr dirty="0"/>
-              <a:t>natural next experiment is fine-tuning the encoder and re-measuring </a:t>
-            </a:r>
-            <a:r>
-              <a:rPr dirty="0" err="1"/>
-              <a:t>CLIPScore</a:t>
-            </a:r>
+              <a:t>whether the image is used.</a:t>
+            </a:r>
+          </a:p>
+          <a:p>
             <a:r>
               <a:rPr dirty="0"/>
-              <a:t>. If the models start</a:t>
+              <a:t>The synthesis is at the bottom: the binary gate of image-conditioning, on this dataset, is the</a:t>
             </a:r>
           </a:p>
           <a:p>
             <a:r>
               <a:rPr dirty="0"/>
-              <a:t>pulling away from the constant baseline, we'll have direct proof that the image is finally being</a:t>
+              <a:t>visual encoder. Not the decoder, not the amount of data, not the hyperparameters. It's a clean</a:t>
             </a:r>
           </a:p>
           <a:p>
             <a:r>
               <a:rPr dirty="0"/>
-              <a:t>exploited.</a:t>
+              <a:t>result, and it also tells us where to act in future: on the encoder. Now let's reinforce this</a:t>
             </a:r>
           </a:p>
           <a:p>
             <a:r>
               <a:rPr dirty="0"/>
-              <a:t>I'll close with an honest framing: none of these models would replace a taster today. They learned</a:t>
-            </a:r>
-          </a:p>
-          <a:p>
-            <a:r>
-              <a:rPr dirty="0"/>
-              <a:t>the sensory vocabulary and a partial map from image to descriptor, a result consistent with the</a:t>
-            </a:r>
-          </a:p>
-          <a:p>
-            <a:r>
-              <a:rPr dirty="0"/>
-              <a:t>data scale and the intrinsic noise of multi-taster annotation. But the path is mapped, and we know</a:t>
-            </a:r>
-          </a:p>
-          <a:p>
-            <a:r>
-              <a:rPr dirty="0"/>
-              <a:t>exactly where to act.</a:t>
-            </a:r>
-          </a:p>
-          <a:p>
-            <a:r>
-              <a:rPr dirty="0"/>
-              <a:t>Thank you for your attention. I'm happy to take questions.</a:t>
+              <a:t>conclusion with the complementary metrics.</a:t>
             </a:r>
           </a:p>
         </p:txBody>
@@ -19331,7 +19331,7 @@
           <a:p>
             <a:fld id="{5BCAD085-E8A6-8845-BD4E-CB4CCA059FC4}" type="datetimeFigureOut">
               <a:rPr lang="en-US" smtClean="0"/>
-              <a:t>6/24/2026</a:t>
+              <a:t>6/25/26</a:t>
             </a:fld>
             <a:endParaRPr lang="en-US"/>
           </a:p>
@@ -19373,7 +19373,7 @@
           <a:p>
             <a:fld id="{C1FF6DA9-008F-8B48-92A6-B652298478BF}" type="slidenum">
               <a:rPr lang="en-US" smtClean="0"/>
-              <a:t>‹N›</a:t>
+              <a:t>‹#›</a:t>
             </a:fld>
             <a:endParaRPr lang="en-US"/>
           </a:p>
@@ -19499,7 +19499,7 @@
           <a:p>
             <a:fld id="{5BCAD085-E8A6-8845-BD4E-CB4CCA059FC4}" type="datetimeFigureOut">
               <a:rPr lang="en-US" smtClean="0"/>
-              <a:t>6/24/2026</a:t>
+              <a:t>6/25/26</a:t>
             </a:fld>
             <a:endParaRPr lang="en-US"/>
           </a:p>
@@ -19541,7 +19541,7 @@
           <a:p>
             <a:fld id="{C1FF6DA9-008F-8B48-92A6-B652298478BF}" type="slidenum">
               <a:rPr lang="en-US" smtClean="0"/>
-              <a:t>‹N›</a:t>
+              <a:t>‹#›</a:t>
             </a:fld>
             <a:endParaRPr lang="en-US"/>
           </a:p>
@@ -19677,7 +19677,7 @@
           <a:p>
             <a:fld id="{5BCAD085-E8A6-8845-BD4E-CB4CCA059FC4}" type="datetimeFigureOut">
               <a:rPr lang="en-US" smtClean="0"/>
-              <a:t>6/24/2026</a:t>
+              <a:t>6/25/26</a:t>
             </a:fld>
             <a:endParaRPr lang="en-US"/>
           </a:p>
@@ -19719,7 +19719,7 @@
           <a:p>
             <a:fld id="{C1FF6DA9-008F-8B48-92A6-B652298478BF}" type="slidenum">
               <a:rPr lang="en-US" smtClean="0"/>
-              <a:t>‹N›</a:t>
+              <a:t>‹#›</a:t>
             </a:fld>
             <a:endParaRPr lang="en-US"/>
           </a:p>
@@ -19845,7 +19845,7 @@
           <a:p>
             <a:fld id="{5BCAD085-E8A6-8845-BD4E-CB4CCA059FC4}" type="datetimeFigureOut">
               <a:rPr lang="en-US" smtClean="0"/>
-              <a:t>6/24/2026</a:t>
+              <a:t>6/25/26</a:t>
             </a:fld>
             <a:endParaRPr lang="en-US"/>
           </a:p>
@@ -19887,7 +19887,7 @@
           <a:p>
             <a:fld id="{C1FF6DA9-008F-8B48-92A6-B652298478BF}" type="slidenum">
               <a:rPr lang="en-US" smtClean="0"/>
-              <a:t>‹N›</a:t>
+              <a:t>‹#›</a:t>
             </a:fld>
             <a:endParaRPr lang="en-US"/>
           </a:p>
@@ -20090,7 +20090,7 @@
           <a:p>
             <a:fld id="{5BCAD085-E8A6-8845-BD4E-CB4CCA059FC4}" type="datetimeFigureOut">
               <a:rPr lang="en-US" smtClean="0"/>
-              <a:t>6/24/2026</a:t>
+              <a:t>6/25/26</a:t>
             </a:fld>
             <a:endParaRPr lang="en-US"/>
           </a:p>
@@ -20132,7 +20132,7 @@
           <a:p>
             <a:fld id="{C1FF6DA9-008F-8B48-92A6-B652298478BF}" type="slidenum">
               <a:rPr lang="en-US" smtClean="0"/>
-              <a:t>‹N›</a:t>
+              <a:t>‹#›</a:t>
             </a:fld>
             <a:endParaRPr lang="en-US"/>
           </a:p>
@@ -20375,7 +20375,7 @@
           <a:p>
             <a:fld id="{5BCAD085-E8A6-8845-BD4E-CB4CCA059FC4}" type="datetimeFigureOut">
               <a:rPr lang="en-US" smtClean="0"/>
-              <a:t>6/24/2026</a:t>
+              <a:t>6/25/26</a:t>
             </a:fld>
             <a:endParaRPr lang="en-US"/>
           </a:p>
@@ -20417,7 +20417,7 @@
           <a:p>
             <a:fld id="{C1FF6DA9-008F-8B48-92A6-B652298478BF}" type="slidenum">
               <a:rPr lang="en-US" smtClean="0"/>
-              <a:t>‹N›</a:t>
+              <a:t>‹#›</a:t>
             </a:fld>
             <a:endParaRPr lang="en-US"/>
           </a:p>
@@ -20794,7 +20794,7 @@
           <a:p>
             <a:fld id="{5BCAD085-E8A6-8845-BD4E-CB4CCA059FC4}" type="datetimeFigureOut">
               <a:rPr lang="en-US" smtClean="0"/>
-              <a:t>6/24/2026</a:t>
+              <a:t>6/25/26</a:t>
             </a:fld>
             <a:endParaRPr lang="en-US"/>
           </a:p>
@@ -20836,7 +20836,7 @@
           <a:p>
             <a:fld id="{C1FF6DA9-008F-8B48-92A6-B652298478BF}" type="slidenum">
               <a:rPr lang="en-US" smtClean="0"/>
-              <a:t>‹N›</a:t>
+              <a:t>‹#›</a:t>
             </a:fld>
             <a:endParaRPr lang="en-US"/>
           </a:p>
@@ -20911,7 +20911,7 @@
           <a:p>
             <a:fld id="{5BCAD085-E8A6-8845-BD4E-CB4CCA059FC4}" type="datetimeFigureOut">
               <a:rPr lang="en-US" smtClean="0"/>
-              <a:t>6/24/2026</a:t>
+              <a:t>6/25/26</a:t>
             </a:fld>
             <a:endParaRPr lang="en-US"/>
           </a:p>
@@ -20953,7 +20953,7 @@
           <a:p>
             <a:fld id="{C1FF6DA9-008F-8B48-92A6-B652298478BF}" type="slidenum">
               <a:rPr lang="en-US" smtClean="0"/>
-              <a:t>‹N›</a:t>
+              <a:t>‹#›</a:t>
             </a:fld>
             <a:endParaRPr lang="en-US"/>
           </a:p>
@@ -21006,7 +21006,7 @@
           <a:p>
             <a:fld id="{5BCAD085-E8A6-8845-BD4E-CB4CCA059FC4}" type="datetimeFigureOut">
               <a:rPr lang="en-US" smtClean="0"/>
-              <a:t>6/24/2026</a:t>
+              <a:t>6/25/26</a:t>
             </a:fld>
             <a:endParaRPr lang="en-US"/>
           </a:p>
@@ -21048,7 +21048,7 @@
           <a:p>
             <a:fld id="{C1FF6DA9-008F-8B48-92A6-B652298478BF}" type="slidenum">
               <a:rPr lang="en-US" smtClean="0"/>
-              <a:t>‹N›</a:t>
+              <a:t>‹#›</a:t>
             </a:fld>
             <a:endParaRPr lang="en-US"/>
           </a:p>
@@ -21281,7 +21281,7 @@
           <a:p>
             <a:fld id="{5BCAD085-E8A6-8845-BD4E-CB4CCA059FC4}" type="datetimeFigureOut">
               <a:rPr lang="en-US" smtClean="0"/>
-              <a:t>6/24/2026</a:t>
+              <a:t>6/25/26</a:t>
             </a:fld>
             <a:endParaRPr lang="en-US"/>
           </a:p>
@@ -21323,7 +21323,7 @@
           <a:p>
             <a:fld id="{C1FF6DA9-008F-8B48-92A6-B652298478BF}" type="slidenum">
               <a:rPr lang="en-US" smtClean="0"/>
-              <a:t>‹N›</a:t>
+              <a:t>‹#›</a:t>
             </a:fld>
             <a:endParaRPr lang="en-US"/>
           </a:p>
@@ -21533,7 +21533,7 @@
           <a:p>
             <a:fld id="{5BCAD085-E8A6-8845-BD4E-CB4CCA059FC4}" type="datetimeFigureOut">
               <a:rPr lang="en-US" smtClean="0"/>
-              <a:t>6/24/2026</a:t>
+              <a:t>6/25/26</a:t>
             </a:fld>
             <a:endParaRPr lang="en-US"/>
           </a:p>
@@ -21575,7 +21575,7 @@
           <a:p>
             <a:fld id="{C1FF6DA9-008F-8B48-92A6-B652298478BF}" type="slidenum">
               <a:rPr lang="en-US" smtClean="0"/>
-              <a:t>‹N›</a:t>
+              <a:t>‹#›</a:t>
             </a:fld>
             <a:endParaRPr lang="en-US"/>
           </a:p>
@@ -21744,7 +21744,7 @@
           <a:p>
             <a:fld id="{5BCAD085-E8A6-8845-BD4E-CB4CCA059FC4}" type="datetimeFigureOut">
               <a:rPr lang="en-US" smtClean="0"/>
-              <a:t>6/24/2026</a:t>
+              <a:t>6/25/26</a:t>
             </a:fld>
             <a:endParaRPr lang="en-US"/>
           </a:p>
@@ -21822,7 +21822,7 @@
           <a:p>
             <a:fld id="{C1FF6DA9-008F-8B48-92A6-B652298478BF}" type="slidenum">
               <a:rPr lang="en-US" smtClean="0"/>
-              <a:t>‹N›</a:t>
+              <a:t>‹#›</a:t>
             </a:fld>
             <a:endParaRPr lang="en-US"/>
           </a:p>
@@ -31789,14 +31789,14 @@
           <p:nvPr>
             <p:extLst>
               <p:ext uri="{D42A27DB-BD31-4B8C-83A1-F6EECF244321}">
-                <p14:modId xmlns:p14="http://schemas.microsoft.com/office/powerpoint/2010/main" val="3917654735"/>
+                <p14:modId xmlns:p14="http://schemas.microsoft.com/office/powerpoint/2010/main" val="919242234"/>
               </p:ext>
             </p:extLst>
           </p:nvPr>
         </p:nvGraphicFramePr>
         <p:xfrm>
           <a:off x="640080" y="1920240"/>
-          <a:ext cx="10327177" cy="1920240"/>
+          <a:ext cx="10881361" cy="3833448"/>
         </p:xfrm>
         <a:graphic>
           <a:graphicData uri="http://schemas.openxmlformats.org/drawingml/2006/table">
@@ -31805,42 +31805,42 @@
                 <a:tableStyleId>{5C22544A-7EE6-4342-B048-85BDC9FD1C3A}</a:tableStyleId>
               </a:tblPr>
               <a:tblGrid>
-                <a:gridCol w="3125330">
+                <a:gridCol w="3293043">
                   <a:extLst>
                     <a:ext uri="{9D8B030D-6E8A-4147-A177-3AD203B41FA5}">
                       <a16:colId xmlns:a16="http://schemas.microsoft.com/office/drawing/2014/main" val="20000"/>
                     </a:ext>
                   </a:extLst>
                 </a:gridCol>
-                <a:gridCol w="1358839">
+                <a:gridCol w="1431758">
                   <a:extLst>
                     <a:ext uri="{9D8B030D-6E8A-4147-A177-3AD203B41FA5}">
                       <a16:colId xmlns:a16="http://schemas.microsoft.com/office/drawing/2014/main" val="20001"/>
                     </a:ext>
                   </a:extLst>
                 </a:gridCol>
-                <a:gridCol w="1358839">
+                <a:gridCol w="1431758">
                   <a:extLst>
                     <a:ext uri="{9D8B030D-6E8A-4147-A177-3AD203B41FA5}">
                       <a16:colId xmlns:a16="http://schemas.microsoft.com/office/drawing/2014/main" val="20002"/>
                     </a:ext>
                   </a:extLst>
                 </a:gridCol>
-                <a:gridCol w="1494723">
+                <a:gridCol w="1574934">
                   <a:extLst>
                     <a:ext uri="{9D8B030D-6E8A-4147-A177-3AD203B41FA5}">
                       <a16:colId xmlns:a16="http://schemas.microsoft.com/office/drawing/2014/main" val="20003"/>
                     </a:ext>
                   </a:extLst>
                 </a:gridCol>
-                <a:gridCol w="1630607">
+                <a:gridCol w="1718110">
                   <a:extLst>
                     <a:ext uri="{9D8B030D-6E8A-4147-A177-3AD203B41FA5}">
                       <a16:colId xmlns:a16="http://schemas.microsoft.com/office/drawing/2014/main" val="20004"/>
                     </a:ext>
                   </a:extLst>
                 </a:gridCol>
-                <a:gridCol w="1358839">
+                <a:gridCol w="1431758">
                   <a:extLst>
                     <a:ext uri="{9D8B030D-6E8A-4147-A177-3AD203B41FA5}">
                       <a16:colId xmlns:a16="http://schemas.microsoft.com/office/drawing/2014/main" val="20005"/>
@@ -31848,7 +31848,7 @@
                   </a:extLst>
                 </a:gridCol>
               </a:tblGrid>
-              <a:tr h="480060">
+              <a:tr h="958362">
                 <a:tc>
                   <a:txBody>
                     <a:bodyPr/>
@@ -31992,7 +31992,7 @@
                   </a:ext>
                 </a:extLst>
               </a:tr>
-              <a:tr h="480060">
+              <a:tr h="958362">
                 <a:tc>
                   <a:txBody>
                     <a:bodyPr/>
@@ -32136,7 +32136,7 @@
                   </a:ext>
                 </a:extLst>
               </a:tr>
-              <a:tr h="480060">
+              <a:tr h="958362">
                 <a:tc>
                   <a:txBody>
                     <a:bodyPr/>
@@ -32280,7 +32280,7 @@
                   </a:ext>
                 </a:extLst>
               </a:tr>
-              <a:tr h="480060">
+              <a:tr h="958362">
                 <a:tc>
                   <a:txBody>
                     <a:bodyPr/>
@@ -32428,277 +32428,6 @@
           </a:graphicData>
         </a:graphic>
       </p:graphicFrame>
-      <p:sp>
-        <p:nvSpPr>
-          <p:cNvPr id="9" name="Rounded Rectangle 8"/>
-          <p:cNvSpPr/>
-          <p:nvPr/>
-        </p:nvSpPr>
-        <p:spPr>
-          <a:xfrm>
-            <a:off x="640079" y="4069080"/>
-            <a:ext cx="10327177" cy="1783080"/>
-          </a:xfrm>
-          <a:prstGeom prst="roundRect">
-            <a:avLst/>
-          </a:prstGeom>
-          <a:solidFill>
-            <a:srgbClr val="FBF7EE"/>
-          </a:solidFill>
-          <a:ln>
-            <a:noFill/>
-          </a:ln>
-          <a:effectLst/>
-        </p:spPr>
-        <p:style>
-          <a:lnRef idx="1">
-            <a:schemeClr val="accent1"/>
-          </a:lnRef>
-          <a:fillRef idx="3">
-            <a:schemeClr val="accent1"/>
-          </a:fillRef>
-          <a:effectRef idx="2">
-            <a:schemeClr val="accent1"/>
-          </a:effectRef>
-          <a:fontRef idx="minor">
-            <a:schemeClr val="lt1"/>
-          </a:fontRef>
-        </p:style>
-        <p:txBody>
-          <a:bodyPr rtlCol="0" anchor="ctr"/>
-          <a:lstStyle/>
-          <a:p>
-            <a:pPr algn="ctr"/>
-            <a:endParaRPr/>
-          </a:p>
-        </p:txBody>
-      </p:sp>
-      <p:sp>
-        <p:nvSpPr>
-          <p:cNvPr id="10" name="Rectangle 9"/>
-          <p:cNvSpPr/>
-          <p:nvPr/>
-        </p:nvSpPr>
-        <p:spPr>
-          <a:xfrm>
-            <a:off x="640080" y="4069080"/>
-            <a:ext cx="82296" cy="1783080"/>
-          </a:xfrm>
-          <a:prstGeom prst="rect">
-            <a:avLst/>
-          </a:prstGeom>
-          <a:solidFill>
-            <a:srgbClr val="2C5F8A"/>
-          </a:solidFill>
-          <a:ln>
-            <a:noFill/>
-          </a:ln>
-          <a:effectLst/>
-        </p:spPr>
-        <p:style>
-          <a:lnRef idx="1">
-            <a:schemeClr val="accent1"/>
-          </a:lnRef>
-          <a:fillRef idx="3">
-            <a:schemeClr val="accent1"/>
-          </a:fillRef>
-          <a:effectRef idx="2">
-            <a:schemeClr val="accent1"/>
-          </a:effectRef>
-          <a:fontRef idx="minor">
-            <a:schemeClr val="lt1"/>
-          </a:fontRef>
-        </p:style>
-        <p:txBody>
-          <a:bodyPr rtlCol="0" anchor="ctr"/>
-          <a:lstStyle/>
-          <a:p>
-            <a:pPr algn="ctr"/>
-            <a:endParaRPr/>
-          </a:p>
-        </p:txBody>
-      </p:sp>
-      <p:sp>
-        <p:nvSpPr>
-          <p:cNvPr id="11" name="TextBox 10"/>
-          <p:cNvSpPr txBox="1"/>
-          <p:nvPr/>
-        </p:nvSpPr>
-        <p:spPr>
-          <a:xfrm>
-            <a:off x="896112" y="4215384"/>
-            <a:ext cx="6528816" cy="1287532"/>
-          </a:xfrm>
-          <a:prstGeom prst="rect">
-            <a:avLst/>
-          </a:prstGeom>
-          <a:noFill/>
-        </p:spPr>
-        <p:txBody>
-          <a:bodyPr wrap="square" lIns="25400" tIns="12700" rIns="25400" bIns="12700" anchor="t">
-            <a:spAutoFit/>
-          </a:bodyPr>
-          <a:lstStyle/>
-          <a:p>
-            <a:r>
-              <a:rPr sz="2400" b="1" i="0" dirty="0">
-                <a:solidFill>
-                  <a:srgbClr val="1B334A"/>
-                </a:solidFill>
-                <a:latin typeface="Georgia"/>
-              </a:rPr>
-              <a:t>Fair-evaluation choices</a:t>
-            </a:r>
-          </a:p>
-          <a:p>
-            <a:pPr>
-              <a:spcBef>
-                <a:spcPts val="400"/>
-              </a:spcBef>
-            </a:pPr>
-            <a:r>
-              <a:rPr sz="1600" b="1" i="0" dirty="0">
-                <a:solidFill>
-                  <a:srgbClr val="2C5F8A"/>
-                </a:solidFill>
-                <a:latin typeface="Calibri"/>
-              </a:rPr>
-              <a:t>● </a:t>
-            </a:r>
-            <a:r>
-              <a:rPr sz="1600" b="1" i="0" dirty="0">
-                <a:solidFill>
-                  <a:srgbClr val="2B2A26"/>
-                </a:solidFill>
-                <a:latin typeface="Calibri"/>
-              </a:rPr>
-              <a:t>Sample-disjoint split:</a:t>
-            </a:r>
-            <a:r>
-              <a:rPr sz="1600" b="0" i="0" dirty="0">
-                <a:solidFill>
-                  <a:srgbClr val="2B2A26"/>
-                </a:solidFill>
-                <a:latin typeface="Calibri"/>
-              </a:rPr>
-              <a:t> 674 train / 143 </a:t>
-            </a:r>
-            <a:r>
-              <a:rPr sz="1600" b="0" i="0" dirty="0" err="1">
-                <a:solidFill>
-                  <a:srgbClr val="2B2A26"/>
-                </a:solidFill>
-                <a:latin typeface="Calibri"/>
-              </a:rPr>
-              <a:t>val</a:t>
-            </a:r>
-            <a:r>
-              <a:rPr sz="1600" b="0" i="0" dirty="0">
-                <a:solidFill>
-                  <a:srgbClr val="2B2A26"/>
-                </a:solidFill>
-                <a:latin typeface="Calibri"/>
-              </a:rPr>
-              <a:t> / 147 test</a:t>
-            </a:r>
-            <a:r>
-              <a:rPr lang="it-IT" sz="1600" b="0" i="0" dirty="0">
-                <a:solidFill>
-                  <a:srgbClr val="2B2A26"/>
-                </a:solidFill>
-                <a:latin typeface="Calibri"/>
-              </a:rPr>
-              <a:t>,</a:t>
-            </a:r>
-            <a:r>
-              <a:rPr sz="1600" b="0" i="0" dirty="0">
-                <a:solidFill>
-                  <a:srgbClr val="2B2A26"/>
-                </a:solidFill>
-                <a:latin typeface="Calibri"/>
-              </a:rPr>
-              <a:t> no leak</a:t>
-            </a:r>
-          </a:p>
-          <a:p>
-            <a:pPr>
-              <a:spcBef>
-                <a:spcPts val="400"/>
-              </a:spcBef>
-            </a:pPr>
-            <a:r>
-              <a:rPr sz="1600" b="1" i="0" dirty="0">
-                <a:solidFill>
-                  <a:srgbClr val="2C5F8A"/>
-                </a:solidFill>
-                <a:latin typeface="Calibri"/>
-              </a:rPr>
-              <a:t>● </a:t>
-            </a:r>
-            <a:r>
-              <a:rPr sz="1600" b="1" i="0" dirty="0">
-                <a:solidFill>
-                  <a:srgbClr val="2B2A26"/>
-                </a:solidFill>
-                <a:latin typeface="Calibri"/>
-              </a:rPr>
-              <a:t>Nucleus sampling</a:t>
-            </a:r>
-            <a:r>
-              <a:rPr sz="1600" b="0" i="0" dirty="0">
-                <a:solidFill>
-                  <a:srgbClr val="2B2A26"/>
-                </a:solidFill>
-                <a:latin typeface="Calibri"/>
-              </a:rPr>
-              <a:t> (top-p 0.9, T 0.7): beam collapses to the modal caption</a:t>
-            </a:r>
-          </a:p>
-          <a:p>
-            <a:pPr>
-              <a:spcBef>
-                <a:spcPts val="400"/>
-              </a:spcBef>
-            </a:pPr>
-            <a:r>
-              <a:rPr sz="1600" b="1" i="0" dirty="0">
-                <a:solidFill>
-                  <a:srgbClr val="2C5F8A"/>
-                </a:solidFill>
-                <a:latin typeface="Calibri"/>
-              </a:rPr>
-              <a:t>● </a:t>
-            </a:r>
-            <a:r>
-              <a:rPr sz="1600" b="0" i="0" dirty="0">
-                <a:solidFill>
-                  <a:srgbClr val="2B2A26"/>
-                </a:solidFill>
-                <a:latin typeface="Calibri"/>
-              </a:rPr>
-              <a:t>Healthy curves: no overfitting, </a:t>
-            </a:r>
-            <a:r>
-              <a:rPr sz="1600" b="0" i="0" dirty="0" err="1">
-                <a:solidFill>
-                  <a:srgbClr val="2B2A26"/>
-                </a:solidFill>
-                <a:latin typeface="Calibri"/>
-              </a:rPr>
-              <a:t>NaN</a:t>
-            </a:r>
-            <a:r>
-              <a:rPr sz="1600" b="0" i="0" dirty="0">
-                <a:solidFill>
-                  <a:srgbClr val="2B2A26"/>
-                </a:solidFill>
-                <a:latin typeface="Calibri"/>
-              </a:rPr>
-              <a:t> or collapse</a:t>
-            </a:r>
-          </a:p>
-        </p:txBody>
-      </p:sp>
     </p:spTree>
     <p:extLst>
       <p:ext uri="{BB962C8B-B14F-4D97-AF65-F5344CB8AC3E}">
@@ -35354,7 +35083,7 @@
                 </a:solidFill>
                 <a:latin typeface="Calibri"/>
               </a:rPr>
-              <a:t>26</a:t>
+              <a:t>28</a:t>
             </a:r>
           </a:p>
         </p:txBody>
@@ -35388,7 +35117,7 @@
                 </a:solidFill>
                 <a:latin typeface="Calibri"/>
               </a:rPr>
-              <a:t>THE INTERPRETATION</a:t>
+              <a:t>CIDER</a:t>
             </a:r>
           </a:p>
         </p:txBody>
@@ -35422,7 +35151,7 @@
                 </a:solidFill>
                 <a:latin typeface="Georgia"/>
               </a:rPr>
-              <a:t>The encoder matters, not the decoder</a:t>
+              <a:t>Discriminates where BLEU flattens</a:t>
             </a:r>
           </a:p>
         </p:txBody>
@@ -35472,16 +35201,34 @@
           </a:p>
         </p:txBody>
       </p:sp>
-      <p:sp>
-        <p:nvSpPr>
-          <p:cNvPr id="8" name="Rounded Rectangle 7"/>
+      <p:graphicFrame>
+        <p:nvGraphicFramePr>
+          <p:cNvPr id="8" name="Chart 7"/>
+          <p:cNvGraphicFramePr>
+            <a:graphicFrameLocks noGrp="1"/>
+          </p:cNvGraphicFramePr>
+          <p:nvPr/>
+        </p:nvGraphicFramePr>
+        <p:xfrm>
+          <a:off x="640080" y="1920240"/>
+          <a:ext cx="7040880" cy="3977639"/>
+        </p:xfrm>
+        <a:graphic>
+          <a:graphicData uri="http://schemas.openxmlformats.org/drawingml/2006/chart">
+            <c:chart xmlns:c="http://schemas.openxmlformats.org/drawingml/2006/chart" xmlns:r="http://schemas.openxmlformats.org/officeDocument/2006/relationships" r:id="rId3"/>
+          </a:graphicData>
+        </a:graphic>
+      </p:graphicFrame>
+      <p:sp>
+        <p:nvSpPr>
+          <p:cNvPr id="9" name="Rounded Rectangle 8"/>
           <p:cNvSpPr/>
           <p:nvPr/>
         </p:nvSpPr>
         <p:spPr>
           <a:xfrm>
-            <a:off x="640080" y="2011680"/>
-            <a:ext cx="5394960" cy="3200400"/>
+            <a:off x="7772400" y="2011680"/>
+            <a:ext cx="3794760" cy="3749039"/>
           </a:xfrm>
           <a:prstGeom prst="roundRect">
             <a:avLst/>
@@ -35519,20 +35266,20 @@
       </p:sp>
       <p:sp>
         <p:nvSpPr>
-          <p:cNvPr id="9" name="Rectangle 8"/>
+          <p:cNvPr id="10" name="Rectangle 9"/>
           <p:cNvSpPr/>
           <p:nvPr/>
         </p:nvSpPr>
         <p:spPr>
           <a:xfrm>
-            <a:off x="640080" y="2011680"/>
-            <a:ext cx="82296" cy="3200400"/>
+            <a:off x="7772400" y="2011680"/>
+            <a:ext cx="82296" cy="3749039"/>
           </a:xfrm>
           <a:prstGeom prst="rect">
             <a:avLst/>
           </a:prstGeom>
           <a:solidFill>
-            <a:srgbClr val="3D7068"/>
+            <a:srgbClr val="8A5082"/>
           </a:solidFill>
           <a:ln>
             <a:noFill/>
@@ -35564,14 +35311,14 @@
       </p:sp>
       <p:sp>
         <p:nvSpPr>
-          <p:cNvPr id="10" name="TextBox 9"/>
+          <p:cNvPr id="11" name="TextBox 10"/>
           <p:cNvSpPr txBox="1"/>
           <p:nvPr/>
         </p:nvSpPr>
         <p:spPr>
           <a:xfrm>
-            <a:off x="896112" y="2157984"/>
-            <a:ext cx="4974336" cy="1995418"/>
+            <a:off x="8028432" y="2157984"/>
+            <a:ext cx="3374136" cy="2569934"/>
           </a:xfrm>
           <a:prstGeom prst="rect">
             <a:avLst/>
@@ -35591,42 +35338,33 @@
                 </a:solidFill>
                 <a:latin typeface="Georgia"/>
               </a:rPr>
-              <a:t>m1 vs m3</a:t>
-            </a:r>
-            <a:r>
-              <a:rPr lang="it-IT" sz="2400" b="1" i="0" dirty="0">
-                <a:solidFill>
-                  <a:srgbClr val="1B334A"/>
-                </a:solidFill>
-                <a:latin typeface="Georgia"/>
-              </a:rPr>
-              <a:t>:</a:t>
-            </a:r>
-            <a:r>
-              <a:rPr sz="2400" b="1" i="0" dirty="0">
-                <a:solidFill>
-                  <a:srgbClr val="1B334A"/>
-                </a:solidFill>
-                <a:latin typeface="Georgia"/>
-              </a:rPr>
-              <a:t> isolates the encoder</a:t>
-            </a:r>
-            <a:endParaRPr lang="it-IT" sz="2400" b="1" i="0" dirty="0">
-              <a:solidFill>
-                <a:srgbClr val="1B334A"/>
-              </a:solidFill>
-              <a:latin typeface="Georgia"/>
-            </a:endParaRPr>
-          </a:p>
-          <a:p>
-            <a:endParaRPr sz="2400" b="1" i="0" dirty="0">
-              <a:solidFill>
-                <a:srgbClr val="1B334A"/>
-              </a:solidFill>
-              <a:latin typeface="Georgia"/>
-            </a:endParaRPr>
-          </a:p>
-          <a:p>
+              <a:t>Reading</a:t>
+            </a:r>
+          </a:p>
+          <a:p>
+            <a:pPr>
+              <a:spcBef>
+                <a:spcPts val="400"/>
+              </a:spcBef>
+            </a:pPr>
+            <a:r>
+              <a:rPr sz="1600" b="1" i="0" dirty="0">
+                <a:solidFill>
+                  <a:srgbClr val="8A5082"/>
+                </a:solidFill>
+                <a:latin typeface="Calibri"/>
+              </a:rPr>
+              <a:t>● </a:t>
+            </a:r>
+            <a:r>
+              <a:rPr sz="1600" b="1" i="0" dirty="0">
+                <a:solidFill>
+                  <a:srgbClr val="2B2A26"/>
+                </a:solidFill>
+                <a:latin typeface="Calibri"/>
+              </a:rPr>
+              <a:t>Orders the models:</a:t>
+            </a:r>
             <a:r>
               <a:rPr sz="1600" b="0" i="0" dirty="0">
                 <a:solidFill>
@@ -35634,7 +35372,7 @@
                 </a:solidFill>
                 <a:latin typeface="Calibri"/>
               </a:rPr>
-              <a:t>m1 (</a:t>
+              <a:t> random &lt; </a:t>
             </a:r>
             <a:r>
               <a:rPr sz="1600" b="0" i="0" dirty="0" err="1">
@@ -35643,7 +35381,7 @@
                 </a:solidFill>
                 <a:latin typeface="Calibri"/>
               </a:rPr>
-              <a:t>ResNet</a:t>
+              <a:t>freq</a:t>
             </a:r>
             <a:r>
               <a:rPr sz="1600" b="0" i="0" dirty="0">
@@ -35652,17 +35390,57 @@
                 </a:solidFill>
                 <a:latin typeface="Calibri"/>
               </a:rPr>
-              <a:t>) NEVER conditions on the image.
-m3 (</a:t>
-            </a:r>
-            <a:r>
-              <a:rPr sz="1600" b="0" i="0" dirty="0" err="1">
+              <a:t> &lt; m1 &lt; m3 &lt; m6</a:t>
+            </a:r>
+          </a:p>
+          <a:p>
+            <a:pPr>
+              <a:spcBef>
+                <a:spcPts val="400"/>
+              </a:spcBef>
+            </a:pPr>
+            <a:r>
+              <a:rPr sz="1600" b="1" i="0" dirty="0">
+                <a:solidFill>
+                  <a:srgbClr val="8A5082"/>
+                </a:solidFill>
+                <a:latin typeface="Calibri"/>
+              </a:rPr>
+              <a:t>● </a:t>
+            </a:r>
+            <a:r>
+              <a:rPr sz="1600" b="0" i="0" dirty="0">
                 <a:solidFill>
                   <a:srgbClr val="2B2A26"/>
                 </a:solidFill>
                 <a:latin typeface="Calibri"/>
               </a:rPr>
-              <a:t>ViT</a:t>
+              <a:t>Trained models clearly beat the random baselines</a:t>
+            </a:r>
+          </a:p>
+          <a:p>
+            <a:pPr>
+              <a:spcBef>
+                <a:spcPts val="400"/>
+              </a:spcBef>
+            </a:pPr>
+            <a:r>
+              <a:rPr sz="1600" b="1" i="0" dirty="0">
+                <a:solidFill>
+                  <a:srgbClr val="8A5082"/>
+                </a:solidFill>
+                <a:latin typeface="Calibri"/>
+              </a:rPr>
+              <a:t>● </a:t>
+            </a:r>
+            <a:r>
+              <a:rPr sz="1600" b="1" i="0" dirty="0">
+                <a:solidFill>
+                  <a:srgbClr val="2B2A26"/>
+                </a:solidFill>
+                <a:latin typeface="Calibri"/>
+              </a:rPr>
+              <a:t>m6</a:t>
             </a:r>
             <a:r>
               <a:rPr sz="1600" b="0" i="0" dirty="0">
@@ -35671,16 +35449,42 @@
                 </a:solidFill>
                 <a:latin typeface="Calibri"/>
               </a:rPr>
-              <a:t>) does on most attributes.</a:t>
-            </a:r>
-            <a:endParaRPr lang="it-IT" sz="1600" b="0" i="0" dirty="0">
-              <a:solidFill>
-                <a:srgbClr val="2B2A26"/>
-              </a:solidFill>
-              <a:latin typeface="Calibri"/>
-            </a:endParaRPr>
-          </a:p>
-          <a:p>
+              <a:t> is the best among the models</a:t>
+            </a:r>
+          </a:p>
+          <a:p>
+            <a:pPr>
+              <a:spcBef>
+                <a:spcPts val="400"/>
+              </a:spcBef>
+            </a:pPr>
+            <a:r>
+              <a:rPr sz="1600" b="1" i="0" dirty="0">
+                <a:solidFill>
+                  <a:srgbClr val="8A5082"/>
+                </a:solidFill>
+                <a:latin typeface="Calibri"/>
+              </a:rPr>
+              <a:t>● </a:t>
+            </a:r>
+            <a:r>
+              <a:rPr sz="1600" b="1" i="0" dirty="0" err="1">
+                <a:solidFill>
+                  <a:srgbClr val="2B2A26"/>
+                </a:solidFill>
+                <a:latin typeface="Calibri"/>
+              </a:rPr>
+              <a:t>most_frequent</a:t>
+            </a:r>
+            <a:r>
+              <a:rPr sz="1600" b="1" i="0" dirty="0">
+                <a:solidFill>
+                  <a:srgbClr val="2B2A26"/>
+                </a:solidFill>
+                <a:latin typeface="Calibri"/>
+              </a:rPr>
+              <a:t> (0.79)</a:t>
+            </a:r>
             <a:r>
               <a:rPr sz="1600" b="0" i="0" dirty="0">
                 <a:solidFill>
@@ -35688,40 +35492,736 @@
                 </a:solidFill>
                 <a:latin typeface="Calibri"/>
               </a:rPr>
-              <a:t>
-→ A frozen ResNet-50's features aren't enough at this data scale; a frozen </a:t>
-            </a:r>
-            <a:r>
-              <a:rPr sz="1600" b="0" i="0" dirty="0" err="1">
-                <a:solidFill>
-                  <a:srgbClr val="2B2A26"/>
-                </a:solidFill>
-                <a:latin typeface="Calibri"/>
-              </a:rPr>
-              <a:t>ViT</a:t>
-            </a:r>
-            <a:r>
-              <a:rPr sz="1600" b="0" i="0" dirty="0">
-                <a:solidFill>
-                  <a:srgbClr val="2B2A26"/>
-                </a:solidFill>
-                <a:latin typeface="Calibri"/>
-              </a:rPr>
-              <a:t>-B/16's are.</a:t>
-            </a:r>
-          </a:p>
-        </p:txBody>
-      </p:sp>
-      <p:sp>
-        <p:nvSpPr>
-          <p:cNvPr id="11" name="Rounded Rectangle 10"/>
+              <a:t> leads only because the reference IS often the frequent sentence: artifact, not quality</a:t>
+            </a:r>
+          </a:p>
+        </p:txBody>
+      </p:sp>
+    </p:spTree>
+    <p:extLst>
+      <p:ext uri="{BB962C8B-B14F-4D97-AF65-F5344CB8AC3E}">
+        <p14:creationId xmlns:p14="http://schemas.microsoft.com/office/powerpoint/2010/main" val="2917709729"/>
+      </p:ext>
+    </p:extLst>
+  </p:cSld>
+  <p:clrMapOvr>
+    <a:masterClrMapping/>
+  </p:clrMapOvr>
+</p:sld>
+</file>
+
+<file path=ppt/slides/slide26.xml><?xml version="1.0" encoding="utf-8"?>
+<p:sld xmlns:a="http://schemas.openxmlformats.org/drawingml/2006/main" xmlns:r="http://schemas.openxmlformats.org/officeDocument/2006/relationships" xmlns:p="http://schemas.openxmlformats.org/presentationml/2006/main">
+  <p:cSld>
+    <p:bg>
+      <p:bgPr>
+        <a:solidFill>
+          <a:srgbClr val="F7F1E3"/>
+        </a:solidFill>
+        <a:effectLst/>
+      </p:bgPr>
+    </p:bg>
+    <p:spTree>
+      <p:nvGrpSpPr>
+        <p:cNvPr id="1" name=""/>
+        <p:cNvGrpSpPr/>
+        <p:nvPr/>
+      </p:nvGrpSpPr>
+      <p:grpSpPr>
+        <a:xfrm>
+          <a:off x="0" y="0"/>
+          <a:ext cx="0" cy="0"/>
+          <a:chOff x="0" y="0"/>
+          <a:chExt cx="0" cy="0"/>
+        </a:xfrm>
+      </p:grpSpPr>
+      <p:sp>
+        <p:nvSpPr>
+          <p:cNvPr id="2" name="Rectangle 1"/>
           <p:cNvSpPr/>
           <p:nvPr/>
         </p:nvSpPr>
         <p:spPr>
           <a:xfrm>
-            <a:off x="6172200" y="2011680"/>
-            <a:ext cx="5394960" cy="3200400"/>
+            <a:off x="0" y="0"/>
+            <a:ext cx="146304" cy="6858000"/>
+          </a:xfrm>
+          <a:prstGeom prst="rect">
+            <a:avLst/>
+          </a:prstGeom>
+          <a:solidFill>
+            <a:srgbClr val="E0A458"/>
+          </a:solidFill>
+          <a:ln>
+            <a:noFill/>
+          </a:ln>
+          <a:effectLst/>
+        </p:spPr>
+        <p:style>
+          <a:lnRef idx="1">
+            <a:schemeClr val="accent1"/>
+          </a:lnRef>
+          <a:fillRef idx="3">
+            <a:schemeClr val="accent1"/>
+          </a:fillRef>
+          <a:effectRef idx="2">
+            <a:schemeClr val="accent1"/>
+          </a:effectRef>
+          <a:fontRef idx="minor">
+            <a:schemeClr val="lt1"/>
+          </a:fontRef>
+        </p:style>
+        <p:txBody>
+          <a:bodyPr rtlCol="0" anchor="ctr"/>
+          <a:lstStyle/>
+          <a:p>
+            <a:pPr algn="ctr"/>
+            <a:endParaRPr/>
+          </a:p>
+        </p:txBody>
+      </p:sp>
+      <p:sp>
+        <p:nvSpPr>
+          <p:cNvPr id="3" name="TextBox 2"/>
+          <p:cNvSpPr txBox="1"/>
+          <p:nvPr/>
+        </p:nvSpPr>
+        <p:spPr>
+          <a:xfrm>
+            <a:off x="411480" y="6473952"/>
+            <a:ext cx="8229600" cy="292608"/>
+          </a:xfrm>
+          <a:prstGeom prst="rect">
+            <a:avLst/>
+          </a:prstGeom>
+          <a:noFill/>
+        </p:spPr>
+        <p:txBody>
+          <a:bodyPr wrap="square" lIns="25400" tIns="12700" rIns="25400" bIns="12700" anchor="t">
+            <a:spAutoFit/>
+          </a:bodyPr>
+          <a:lstStyle/>
+          <a:p>
+            <a:r>
+              <a:rPr sz="950" b="0" i="1">
+                <a:solidFill>
+                  <a:srgbClr val="6B6860"/>
+                </a:solidFill>
+                <a:latin typeface="Calibri"/>
+              </a:rPr>
+              <a:t>AI4FQC · Project 07: GRANA Captioning</a:t>
+            </a:r>
+          </a:p>
+        </p:txBody>
+      </p:sp>
+      <p:sp>
+        <p:nvSpPr>
+          <p:cNvPr id="4" name="TextBox 3"/>
+          <p:cNvSpPr txBox="1"/>
+          <p:nvPr/>
+        </p:nvSpPr>
+        <p:spPr>
+          <a:xfrm>
+            <a:off x="10911535" y="6473952"/>
+            <a:ext cx="868680" cy="292608"/>
+          </a:xfrm>
+          <a:prstGeom prst="rect">
+            <a:avLst/>
+          </a:prstGeom>
+          <a:noFill/>
+        </p:spPr>
+        <p:txBody>
+          <a:bodyPr wrap="square" lIns="25400" tIns="12700" rIns="25400" bIns="12700" anchor="t">
+            <a:spAutoFit/>
+          </a:bodyPr>
+          <a:lstStyle/>
+          <a:p>
+            <a:pPr algn="r"/>
+            <a:r>
+              <a:rPr sz="1100" b="1" i="0">
+                <a:solidFill>
+                  <a:srgbClr val="E0A458"/>
+                </a:solidFill>
+                <a:latin typeface="Calibri"/>
+              </a:rPr>
+              <a:t>29</a:t>
+            </a:r>
+          </a:p>
+        </p:txBody>
+      </p:sp>
+      <p:sp>
+        <p:nvSpPr>
+          <p:cNvPr id="5" name="TextBox 4"/>
+          <p:cNvSpPr txBox="1"/>
+          <p:nvPr/>
+        </p:nvSpPr>
+        <p:spPr>
+          <a:xfrm>
+            <a:off x="640080" y="502920"/>
+            <a:ext cx="10881360" cy="365760"/>
+          </a:xfrm>
+          <a:prstGeom prst="rect">
+            <a:avLst/>
+          </a:prstGeom>
+          <a:noFill/>
+        </p:spPr>
+        <p:txBody>
+          <a:bodyPr wrap="square" lIns="25400" tIns="12700" rIns="25400" bIns="12700" anchor="t">
+            <a:spAutoFit/>
+          </a:bodyPr>
+          <a:lstStyle/>
+          <a:p>
+            <a:r>
+              <a:rPr sz="1250" b="1" i="0" spc="220">
+                <a:solidFill>
+                  <a:srgbClr val="C88836"/>
+                </a:solidFill>
+                <a:latin typeface="Calibri"/>
+              </a:rPr>
+              <a:t>CLIPSCORE</a:t>
+            </a:r>
+          </a:p>
+        </p:txBody>
+      </p:sp>
+      <p:sp>
+        <p:nvSpPr>
+          <p:cNvPr id="6" name="TextBox 5"/>
+          <p:cNvSpPr txBox="1"/>
+          <p:nvPr/>
+        </p:nvSpPr>
+        <p:spPr>
+          <a:xfrm>
+            <a:off x="640080" y="886968"/>
+            <a:ext cx="10881360" cy="914400"/>
+          </a:xfrm>
+          <a:prstGeom prst="rect">
+            <a:avLst/>
+          </a:prstGeom>
+          <a:noFill/>
+        </p:spPr>
+        <p:txBody>
+          <a:bodyPr wrap="square" lIns="25400" tIns="12700" rIns="25400" bIns="12700" anchor="t">
+            <a:spAutoFit/>
+          </a:bodyPr>
+          <a:lstStyle/>
+          <a:p>
+            <a:r>
+              <a:rPr sz="3100" b="1" i="0">
+                <a:solidFill>
+                  <a:srgbClr val="1B334A"/>
+                </a:solidFill>
+                <a:latin typeface="Georgia"/>
+              </a:rPr>
+              <a:t>Independent confirmation of the shuffle test</a:t>
+            </a:r>
+          </a:p>
+        </p:txBody>
+      </p:sp>
+      <p:sp>
+        <p:nvSpPr>
+          <p:cNvPr id="7" name="Rectangle 6"/>
+          <p:cNvSpPr/>
+          <p:nvPr/>
+        </p:nvSpPr>
+        <p:spPr>
+          <a:xfrm>
+            <a:off x="658368" y="1709928"/>
+            <a:ext cx="1371600" cy="38100"/>
+          </a:xfrm>
+          <a:prstGeom prst="rect">
+            <a:avLst/>
+          </a:prstGeom>
+          <a:solidFill>
+            <a:srgbClr val="E0A458"/>
+          </a:solidFill>
+          <a:ln>
+            <a:noFill/>
+          </a:ln>
+          <a:effectLst/>
+        </p:spPr>
+        <p:style>
+          <a:lnRef idx="1">
+            <a:schemeClr val="accent1"/>
+          </a:lnRef>
+          <a:fillRef idx="3">
+            <a:schemeClr val="accent1"/>
+          </a:fillRef>
+          <a:effectRef idx="2">
+            <a:schemeClr val="accent1"/>
+          </a:effectRef>
+          <a:fontRef idx="minor">
+            <a:schemeClr val="lt1"/>
+          </a:fontRef>
+        </p:style>
+        <p:txBody>
+          <a:bodyPr rtlCol="0" anchor="ctr"/>
+          <a:lstStyle/>
+          <a:p>
+            <a:pPr algn="ctr"/>
+            <a:endParaRPr/>
+          </a:p>
+        </p:txBody>
+      </p:sp>
+      <p:graphicFrame>
+        <p:nvGraphicFramePr>
+          <p:cNvPr id="8" name="Chart 7"/>
+          <p:cNvGraphicFramePr>
+            <a:graphicFrameLocks noGrp="1"/>
+          </p:cNvGraphicFramePr>
+          <p:nvPr/>
+        </p:nvGraphicFramePr>
+        <p:xfrm>
+          <a:off x="640080" y="2148840"/>
+          <a:ext cx="5394960" cy="3383280"/>
+        </p:xfrm>
+        <a:graphic>
+          <a:graphicData uri="http://schemas.openxmlformats.org/drawingml/2006/chart">
+            <c:chart xmlns:c="http://schemas.openxmlformats.org/drawingml/2006/chart" xmlns:r="http://schemas.openxmlformats.org/officeDocument/2006/relationships" r:id="rId3"/>
+          </a:graphicData>
+        </a:graphic>
+      </p:graphicFrame>
+      <p:sp>
+        <p:nvSpPr>
+          <p:cNvPr id="9" name="TextBox 8"/>
+          <p:cNvSpPr txBox="1"/>
+          <p:nvPr/>
+        </p:nvSpPr>
+        <p:spPr>
+          <a:xfrm>
+            <a:off x="640080" y="1874520"/>
+            <a:ext cx="5394960" cy="271869"/>
+          </a:xfrm>
+          <a:prstGeom prst="rect">
+            <a:avLst/>
+          </a:prstGeom>
+          <a:noFill/>
+        </p:spPr>
+        <p:txBody>
+          <a:bodyPr wrap="square" lIns="25400" tIns="12700" rIns="25400" bIns="12700" anchor="t">
+            <a:spAutoFit/>
+          </a:bodyPr>
+          <a:lstStyle/>
+          <a:p>
+            <a:pPr algn="ctr"/>
+            <a:r>
+              <a:rPr sz="1600" b="1" i="0">
+                <a:solidFill>
+                  <a:srgbClr val="1B334A"/>
+                </a:solidFill>
+                <a:latin typeface="Calibri"/>
+              </a:rPr>
+              <a:t>By MODEL → all equal (gap &lt; 0.004)</a:t>
+            </a:r>
+          </a:p>
+        </p:txBody>
+      </p:sp>
+      <p:graphicFrame>
+        <p:nvGraphicFramePr>
+          <p:cNvPr id="10" name="Chart 9"/>
+          <p:cNvGraphicFramePr>
+            <a:graphicFrameLocks noGrp="1"/>
+          </p:cNvGraphicFramePr>
+          <p:nvPr/>
+        </p:nvGraphicFramePr>
+        <p:xfrm>
+          <a:off x="6263640" y="2148840"/>
+          <a:ext cx="5303520" cy="3383280"/>
+        </p:xfrm>
+        <a:graphic>
+          <a:graphicData uri="http://schemas.openxmlformats.org/drawingml/2006/chart">
+            <c:chart xmlns:c="http://schemas.openxmlformats.org/drawingml/2006/chart" xmlns:r="http://schemas.openxmlformats.org/officeDocument/2006/relationships" r:id="rId4"/>
+          </a:graphicData>
+        </a:graphic>
+      </p:graphicFrame>
+      <p:sp>
+        <p:nvSpPr>
+          <p:cNvPr id="11" name="TextBox 10"/>
+          <p:cNvSpPr txBox="1"/>
+          <p:nvPr/>
+        </p:nvSpPr>
+        <p:spPr>
+          <a:xfrm>
+            <a:off x="6263640" y="1874520"/>
+            <a:ext cx="5303520" cy="271869"/>
+          </a:xfrm>
+          <a:prstGeom prst="rect">
+            <a:avLst/>
+          </a:prstGeom>
+          <a:noFill/>
+        </p:spPr>
+        <p:txBody>
+          <a:bodyPr wrap="square" lIns="25400" tIns="12700" rIns="25400" bIns="12700" anchor="t">
+            <a:spAutoFit/>
+          </a:bodyPr>
+          <a:lstStyle/>
+          <a:p>
+            <a:pPr algn="ctr"/>
+            <a:r>
+              <a:rPr sz="1600" b="1" i="0" dirty="0">
+                <a:solidFill>
+                  <a:srgbClr val="1B334A"/>
+                </a:solidFill>
+                <a:latin typeface="Calibri"/>
+              </a:rPr>
+              <a:t>By ATTRIBUTE → visual high, smell/taste low</a:t>
+            </a:r>
+          </a:p>
+        </p:txBody>
+      </p:sp>
+      <p:sp>
+        <p:nvSpPr>
+          <p:cNvPr id="12" name="Rounded Rectangle 11"/>
+          <p:cNvSpPr/>
+          <p:nvPr/>
+        </p:nvSpPr>
+        <p:spPr>
+          <a:xfrm>
+            <a:off x="640080" y="5623560"/>
+            <a:ext cx="10927080" cy="548640"/>
+          </a:xfrm>
+          <a:prstGeom prst="roundRect">
+            <a:avLst/>
+          </a:prstGeom>
+          <a:solidFill>
+            <a:srgbClr val="1B334A"/>
+          </a:solidFill>
+          <a:ln>
+            <a:noFill/>
+          </a:ln>
+          <a:effectLst/>
+        </p:spPr>
+        <p:style>
+          <a:lnRef idx="1">
+            <a:schemeClr val="accent1"/>
+          </a:lnRef>
+          <a:fillRef idx="3">
+            <a:schemeClr val="accent1"/>
+          </a:fillRef>
+          <a:effectRef idx="2">
+            <a:schemeClr val="accent1"/>
+          </a:effectRef>
+          <a:fontRef idx="minor">
+            <a:schemeClr val="lt1"/>
+          </a:fontRef>
+        </p:style>
+        <p:txBody>
+          <a:bodyPr rtlCol="0" anchor="ctr"/>
+          <a:lstStyle/>
+          <a:p>
+            <a:pPr algn="ctr"/>
+            <a:endParaRPr/>
+          </a:p>
+        </p:txBody>
+      </p:sp>
+      <p:sp>
+        <p:nvSpPr>
+          <p:cNvPr id="13" name="TextBox 12"/>
+          <p:cNvSpPr txBox="1"/>
+          <p:nvPr/>
+        </p:nvSpPr>
+        <p:spPr>
+          <a:xfrm>
+            <a:off x="914400" y="5761945"/>
+            <a:ext cx="10515600" cy="271869"/>
+          </a:xfrm>
+          <a:prstGeom prst="rect">
+            <a:avLst/>
+          </a:prstGeom>
+          <a:noFill/>
+        </p:spPr>
+        <p:txBody>
+          <a:bodyPr wrap="square" lIns="25400" tIns="12700" rIns="25400" bIns="12700" anchor="ctr">
+            <a:spAutoFit/>
+          </a:bodyPr>
+          <a:lstStyle/>
+          <a:p>
+            <a:r>
+              <a:rPr sz="1600" b="1" i="0" dirty="0">
+                <a:solidFill>
+                  <a:srgbClr val="E0A458"/>
+                </a:solidFill>
+                <a:latin typeface="Calibri"/>
+              </a:rPr>
+              <a:t>With a frozen encoder the image isn't exploited: the models do language modeling. The real variation is per attribute.</a:t>
+            </a:r>
+          </a:p>
+        </p:txBody>
+      </p:sp>
+    </p:spTree>
+    <p:extLst>
+      <p:ext uri="{BB962C8B-B14F-4D97-AF65-F5344CB8AC3E}">
+        <p14:creationId xmlns:p14="http://schemas.microsoft.com/office/powerpoint/2010/main" val="3390183108"/>
+      </p:ext>
+    </p:extLst>
+  </p:cSld>
+  <p:clrMapOvr>
+    <a:masterClrMapping/>
+  </p:clrMapOvr>
+</p:sld>
+</file>
+
+<file path=ppt/slides/slide27.xml><?xml version="1.0" encoding="utf-8"?>
+<p:sld xmlns:a="http://schemas.openxmlformats.org/drawingml/2006/main" xmlns:r="http://schemas.openxmlformats.org/officeDocument/2006/relationships" xmlns:p="http://schemas.openxmlformats.org/presentationml/2006/main">
+  <p:cSld>
+    <p:bg>
+      <p:bgPr>
+        <a:solidFill>
+          <a:srgbClr val="F7F1E3"/>
+        </a:solidFill>
+        <a:effectLst/>
+      </p:bgPr>
+    </p:bg>
+    <p:spTree>
+      <p:nvGrpSpPr>
+        <p:cNvPr id="1" name=""/>
+        <p:cNvGrpSpPr/>
+        <p:nvPr/>
+      </p:nvGrpSpPr>
+      <p:grpSpPr>
+        <a:xfrm>
+          <a:off x="0" y="0"/>
+          <a:ext cx="0" cy="0"/>
+          <a:chOff x="0" y="0"/>
+          <a:chExt cx="0" cy="0"/>
+        </a:xfrm>
+      </p:grpSpPr>
+      <p:sp>
+        <p:nvSpPr>
+          <p:cNvPr id="2" name="Rectangle 1"/>
+          <p:cNvSpPr/>
+          <p:nvPr/>
+        </p:nvSpPr>
+        <p:spPr>
+          <a:xfrm>
+            <a:off x="0" y="0"/>
+            <a:ext cx="146304" cy="6858000"/>
+          </a:xfrm>
+          <a:prstGeom prst="rect">
+            <a:avLst/>
+          </a:prstGeom>
+          <a:solidFill>
+            <a:srgbClr val="E0A458"/>
+          </a:solidFill>
+          <a:ln>
+            <a:noFill/>
+          </a:ln>
+          <a:effectLst/>
+        </p:spPr>
+        <p:style>
+          <a:lnRef idx="1">
+            <a:schemeClr val="accent1"/>
+          </a:lnRef>
+          <a:fillRef idx="3">
+            <a:schemeClr val="accent1"/>
+          </a:fillRef>
+          <a:effectRef idx="2">
+            <a:schemeClr val="accent1"/>
+          </a:effectRef>
+          <a:fontRef idx="minor">
+            <a:schemeClr val="lt1"/>
+          </a:fontRef>
+        </p:style>
+        <p:txBody>
+          <a:bodyPr rtlCol="0" anchor="ctr"/>
+          <a:lstStyle/>
+          <a:p>
+            <a:pPr algn="ctr"/>
+            <a:endParaRPr/>
+          </a:p>
+        </p:txBody>
+      </p:sp>
+      <p:sp>
+        <p:nvSpPr>
+          <p:cNvPr id="3" name="TextBox 2"/>
+          <p:cNvSpPr txBox="1"/>
+          <p:nvPr/>
+        </p:nvSpPr>
+        <p:spPr>
+          <a:xfrm>
+            <a:off x="411480" y="6473952"/>
+            <a:ext cx="8229600" cy="292608"/>
+          </a:xfrm>
+          <a:prstGeom prst="rect">
+            <a:avLst/>
+          </a:prstGeom>
+          <a:noFill/>
+        </p:spPr>
+        <p:txBody>
+          <a:bodyPr wrap="square" lIns="25400" tIns="12700" rIns="25400" bIns="12700" anchor="t">
+            <a:spAutoFit/>
+          </a:bodyPr>
+          <a:lstStyle/>
+          <a:p>
+            <a:r>
+              <a:rPr sz="950" b="0" i="1">
+                <a:solidFill>
+                  <a:srgbClr val="6B6860"/>
+                </a:solidFill>
+                <a:latin typeface="Calibri"/>
+              </a:rPr>
+              <a:t>AI4FQC · Project 07: GRANA Captioning</a:t>
+            </a:r>
+          </a:p>
+        </p:txBody>
+      </p:sp>
+      <p:sp>
+        <p:nvSpPr>
+          <p:cNvPr id="4" name="TextBox 3"/>
+          <p:cNvSpPr txBox="1"/>
+          <p:nvPr/>
+        </p:nvSpPr>
+        <p:spPr>
+          <a:xfrm>
+            <a:off x="10911535" y="6473952"/>
+            <a:ext cx="868680" cy="292608"/>
+          </a:xfrm>
+          <a:prstGeom prst="rect">
+            <a:avLst/>
+          </a:prstGeom>
+          <a:noFill/>
+        </p:spPr>
+        <p:txBody>
+          <a:bodyPr wrap="square" lIns="25400" tIns="12700" rIns="25400" bIns="12700" anchor="t">
+            <a:spAutoFit/>
+          </a:bodyPr>
+          <a:lstStyle/>
+          <a:p>
+            <a:pPr algn="r"/>
+            <a:r>
+              <a:rPr sz="1100" b="1" i="0">
+                <a:solidFill>
+                  <a:srgbClr val="E0A458"/>
+                </a:solidFill>
+                <a:latin typeface="Calibri"/>
+              </a:rPr>
+              <a:t>31</a:t>
+            </a:r>
+          </a:p>
+        </p:txBody>
+      </p:sp>
+      <p:sp>
+        <p:nvSpPr>
+          <p:cNvPr id="5" name="TextBox 4"/>
+          <p:cNvSpPr txBox="1"/>
+          <p:nvPr/>
+        </p:nvSpPr>
+        <p:spPr>
+          <a:xfrm>
+            <a:off x="640080" y="502920"/>
+            <a:ext cx="10881360" cy="365760"/>
+          </a:xfrm>
+          <a:prstGeom prst="rect">
+            <a:avLst/>
+          </a:prstGeom>
+          <a:noFill/>
+        </p:spPr>
+        <p:txBody>
+          <a:bodyPr wrap="square" lIns="25400" tIns="12700" rIns="25400" bIns="12700" anchor="t">
+            <a:spAutoFit/>
+          </a:bodyPr>
+          <a:lstStyle/>
+          <a:p>
+            <a:r>
+              <a:rPr sz="1250" b="1" i="0" spc="220">
+                <a:solidFill>
+                  <a:srgbClr val="C88836"/>
+                </a:solidFill>
+                <a:latin typeface="Calibri"/>
+              </a:rPr>
+              <a:t>QUALITATIVE EXAMPLES</a:t>
+            </a:r>
+          </a:p>
+        </p:txBody>
+      </p:sp>
+      <p:sp>
+        <p:nvSpPr>
+          <p:cNvPr id="6" name="TextBox 5"/>
+          <p:cNvSpPr txBox="1"/>
+          <p:nvPr/>
+        </p:nvSpPr>
+        <p:spPr>
+          <a:xfrm>
+            <a:off x="640080" y="886968"/>
+            <a:ext cx="10881360" cy="579646"/>
+          </a:xfrm>
+          <a:prstGeom prst="rect">
+            <a:avLst/>
+          </a:prstGeom>
+          <a:noFill/>
+        </p:spPr>
+        <p:txBody>
+          <a:bodyPr wrap="square" lIns="25400" tIns="12700" rIns="25400" bIns="12700" anchor="t">
+            <a:spAutoFit/>
+          </a:bodyPr>
+          <a:lstStyle/>
+          <a:p>
+            <a:r>
+              <a:rPr sz="3600" b="1" i="0" dirty="0">
+                <a:solidFill>
+                  <a:srgbClr val="1B334A"/>
+                </a:solidFill>
+                <a:latin typeface="Georgia"/>
+              </a:rPr>
+              <a:t>What m6 actually generates</a:t>
+            </a:r>
+          </a:p>
+        </p:txBody>
+      </p:sp>
+      <p:sp>
+        <p:nvSpPr>
+          <p:cNvPr id="7" name="Rectangle 6"/>
+          <p:cNvSpPr/>
+          <p:nvPr/>
+        </p:nvSpPr>
+        <p:spPr>
+          <a:xfrm>
+            <a:off x="658368" y="1709928"/>
+            <a:ext cx="1371600" cy="38100"/>
+          </a:xfrm>
+          <a:prstGeom prst="rect">
+            <a:avLst/>
+          </a:prstGeom>
+          <a:solidFill>
+            <a:srgbClr val="E0A458"/>
+          </a:solidFill>
+          <a:ln>
+            <a:noFill/>
+          </a:ln>
+          <a:effectLst/>
+        </p:spPr>
+        <p:style>
+          <a:lnRef idx="1">
+            <a:schemeClr val="accent1"/>
+          </a:lnRef>
+          <a:fillRef idx="3">
+            <a:schemeClr val="accent1"/>
+          </a:fillRef>
+          <a:effectRef idx="2">
+            <a:schemeClr val="accent1"/>
+          </a:effectRef>
+          <a:fontRef idx="minor">
+            <a:schemeClr val="lt1"/>
+          </a:fontRef>
+        </p:style>
+        <p:txBody>
+          <a:bodyPr rtlCol="0" anchor="ctr"/>
+          <a:lstStyle/>
+          <a:p>
+            <a:pPr algn="ctr"/>
+            <a:endParaRPr/>
+          </a:p>
+        </p:txBody>
+      </p:sp>
+      <p:sp>
+        <p:nvSpPr>
+          <p:cNvPr id="9" name="Rounded Rectangle 8"/>
+          <p:cNvSpPr/>
+          <p:nvPr/>
+        </p:nvSpPr>
+        <p:spPr>
+          <a:xfrm>
+            <a:off x="640080" y="5074920"/>
+            <a:ext cx="10927080" cy="822960"/>
           </a:xfrm>
           <a:prstGeom prst="roundRect">
             <a:avLst/>
@@ -35759,20 +36259,20 @@
       </p:sp>
       <p:sp>
         <p:nvSpPr>
-          <p:cNvPr id="12" name="Rectangle 11"/>
+          <p:cNvPr id="10" name="Rectangle 9"/>
           <p:cNvSpPr/>
           <p:nvPr/>
         </p:nvSpPr>
         <p:spPr>
           <a:xfrm>
-            <a:off x="6172200" y="2011680"/>
-            <a:ext cx="82296" cy="3200400"/>
+            <a:off x="640080" y="5074920"/>
+            <a:ext cx="82296" cy="822960"/>
           </a:xfrm>
           <a:prstGeom prst="rect">
             <a:avLst/>
           </a:prstGeom>
           <a:solidFill>
-            <a:srgbClr val="8A5082"/>
+            <a:srgbClr val="E0A458"/>
           </a:solidFill>
           <a:ln>
             <a:noFill/>
@@ -35804,14 +36304,14 @@
       </p:sp>
       <p:sp>
         <p:nvSpPr>
-          <p:cNvPr id="13" name="TextBox 12"/>
+          <p:cNvPr id="11" name="TextBox 10"/>
           <p:cNvSpPr txBox="1"/>
           <p:nvPr/>
         </p:nvSpPr>
         <p:spPr>
           <a:xfrm>
-            <a:off x="6428232" y="2157984"/>
-            <a:ext cx="4974336" cy="1841530"/>
+            <a:off x="896112" y="5221224"/>
+            <a:ext cx="10506456" cy="456535"/>
           </a:xfrm>
           <a:prstGeom prst="rect">
             <a:avLst/>
@@ -35825,144 +36325,564 @@
           <a:lstStyle/>
           <a:p>
             <a:r>
-              <a:rPr sz="2400" b="1" i="0" dirty="0">
-                <a:solidFill>
-                  <a:srgbClr val="1B334A"/>
-                </a:solidFill>
-                <a:latin typeface="Georgia"/>
-              </a:rPr>
-              <a:t>m3 vs m6</a:t>
-            </a:r>
-            <a:r>
-              <a:rPr lang="it-IT" sz="2400" b="1" i="0" dirty="0">
-                <a:solidFill>
-                  <a:srgbClr val="1B334A"/>
-                </a:solidFill>
-                <a:latin typeface="Georgia"/>
-              </a:rPr>
-              <a:t>:</a:t>
-            </a:r>
-            <a:r>
-              <a:rPr sz="2400" b="1" i="0" dirty="0">
-                <a:solidFill>
-                  <a:srgbClr val="1B334A"/>
-                </a:solidFill>
-                <a:latin typeface="Georgia"/>
-              </a:rPr>
-              <a:t> isolates the decoder</a:t>
-            </a:r>
-            <a:endParaRPr lang="it-IT" sz="2400" b="1" i="0" dirty="0">
-              <a:solidFill>
-                <a:srgbClr val="1B334A"/>
-              </a:solidFill>
-              <a:latin typeface="Georgia"/>
-            </a:endParaRPr>
-          </a:p>
-          <a:p>
-            <a:endParaRPr sz="2400" b="1" i="0" dirty="0">
-              <a:solidFill>
-                <a:srgbClr val="1B334A"/>
-              </a:solidFill>
-              <a:latin typeface="Georgia"/>
-            </a:endParaRPr>
-          </a:p>
-          <a:p>
-            <a:r>
               <a:rPr sz="1400" b="0" i="0" dirty="0">
                 <a:solidFill>
                   <a:srgbClr val="2B2A26"/>
                 </a:solidFill>
                 <a:latin typeface="Calibri"/>
               </a:rPr>
-              <a:t>They produce different outputs (never the same caption), but have the SAME image-conditioning profile: the same attributes succeed, the same fail.
-→ The decoder changes the style, not whether the image is used.</a:t>
-            </a:r>
-          </a:p>
-        </p:txBody>
-      </p:sp>
-      <p:sp>
-        <p:nvSpPr>
-          <p:cNvPr id="14" name="Rounded Rectangle 13"/>
-          <p:cNvSpPr/>
+              <a:t>Four recurring patterns: (1) the scaffolding is always correct and worth ~50% of BLEU-4; (2) the language is fluent thanks to the pretrained LM; (3) the descriptor is often valid but for another cheese; (4) references vary enormously across tasters → a ceiling on BLEU.</a:t>
+            </a:r>
+          </a:p>
+        </p:txBody>
+      </p:sp>
+      <p:graphicFrame>
+        <p:nvGraphicFramePr>
+          <p:cNvPr id="12" name="Table 11">
+            <a:extLst>
+              <a:ext uri="{FF2B5EF4-FFF2-40B4-BE49-F238E27FC236}">
+                <a16:creationId xmlns:a16="http://schemas.microsoft.com/office/drawing/2014/main" id="{8265D216-1B43-CE51-CC8E-8D22CEBEDB57}"/>
+              </a:ext>
+            </a:extLst>
+          </p:cNvPr>
+          <p:cNvGraphicFramePr>
+            <a:graphicFrameLocks noGrp="1"/>
+          </p:cNvGraphicFramePr>
           <p:nvPr/>
-        </p:nvSpPr>
-        <p:spPr>
-          <a:xfrm>
-            <a:off x="640080" y="5394960"/>
-            <a:ext cx="10927080" cy="685800"/>
-          </a:xfrm>
-          <a:prstGeom prst="roundRect">
-            <a:avLst/>
-          </a:prstGeom>
-          <a:solidFill>
-            <a:srgbClr val="1B334A"/>
-          </a:solidFill>
-          <a:ln>
-            <a:noFill/>
-          </a:ln>
-          <a:effectLst/>
-        </p:spPr>
-        <p:style>
-          <a:lnRef idx="1">
-            <a:schemeClr val="accent1"/>
-          </a:lnRef>
-          <a:fillRef idx="3">
-            <a:schemeClr val="accent1"/>
-          </a:fillRef>
-          <a:effectRef idx="2">
-            <a:schemeClr val="accent1"/>
-          </a:effectRef>
-          <a:fontRef idx="minor">
-            <a:schemeClr val="lt1"/>
-          </a:fontRef>
-        </p:style>
-        <p:txBody>
-          <a:bodyPr rtlCol="0" anchor="ctr"/>
-          <a:lstStyle/>
-          <a:p>
-            <a:pPr algn="ctr"/>
-            <a:endParaRPr/>
-          </a:p>
-        </p:txBody>
-      </p:sp>
-      <p:sp>
-        <p:nvSpPr>
-          <p:cNvPr id="15" name="TextBox 14"/>
-          <p:cNvSpPr txBox="1"/>
-          <p:nvPr/>
-        </p:nvSpPr>
-        <p:spPr>
-          <a:xfrm>
-            <a:off x="914400" y="5448038"/>
-            <a:ext cx="10515600" cy="579646"/>
-          </a:xfrm>
-          <a:prstGeom prst="rect">
-            <a:avLst/>
-          </a:prstGeom>
-          <a:noFill/>
-        </p:spPr>
-        <p:txBody>
-          <a:bodyPr wrap="square" lIns="25400" tIns="12700" rIns="25400" bIns="12700" anchor="ctr">
-            <a:spAutoFit/>
-          </a:bodyPr>
-          <a:lstStyle/>
-          <a:p>
-            <a:r>
-              <a:rPr b="1" i="0" dirty="0">
-                <a:solidFill>
-                  <a:srgbClr val="E0A458"/>
-                </a:solidFill>
-                <a:latin typeface="Calibri"/>
-              </a:rPr>
-              <a:t>The «binary gate» of image-conditioning is the visual encoder — not the decoder, not data scale, not hyperparameters.</a:t>
-            </a:r>
-          </a:p>
-        </p:txBody>
-      </p:sp>
+        </p:nvGraphicFramePr>
+        <p:xfrm>
+          <a:off x="640080" y="1920240"/>
+          <a:ext cx="10927080" cy="3017520"/>
+        </p:xfrm>
+        <a:graphic>
+          <a:graphicData uri="http://schemas.openxmlformats.org/drawingml/2006/table">
+            <a:tbl>
+              <a:tblPr firstRow="1" bandRow="1">
+                <a:tableStyleId>{5C22544A-7EE6-4342-B048-85BDC9FD1C3A}</a:tableStyleId>
+              </a:tblPr>
+              <a:tblGrid>
+                <a:gridCol w="1737360">
+                  <a:extLst>
+                    <a:ext uri="{9D8B030D-6E8A-4147-A177-3AD203B41FA5}">
+                      <a16:colId xmlns:a16="http://schemas.microsoft.com/office/drawing/2014/main" val="20000"/>
+                    </a:ext>
+                  </a:extLst>
+                </a:gridCol>
+                <a:gridCol w="4572000">
+                  <a:extLst>
+                    <a:ext uri="{9D8B030D-6E8A-4147-A177-3AD203B41FA5}">
+                      <a16:colId xmlns:a16="http://schemas.microsoft.com/office/drawing/2014/main" val="20001"/>
+                    </a:ext>
+                  </a:extLst>
+                </a:gridCol>
+                <a:gridCol w="4617720">
+                  <a:extLst>
+                    <a:ext uri="{9D8B030D-6E8A-4147-A177-3AD203B41FA5}">
+                      <a16:colId xmlns:a16="http://schemas.microsoft.com/office/drawing/2014/main" val="20002"/>
+                    </a:ext>
+                  </a:extLst>
+                </a:gridCol>
+              </a:tblGrid>
+              <a:tr h="502920">
+                <a:tc>
+                  <a:txBody>
+                    <a:bodyPr/>
+                    <a:lstStyle/>
+                    <a:p>
+                      <a:r>
+                        <a:rPr sz="1250" b="1" i="0">
+                          <a:solidFill>
+                            <a:srgbClr val="FFFFFF"/>
+                          </a:solidFill>
+                          <a:latin typeface="Calibri"/>
+                        </a:rPr>
+                        <a:t>Attributo</a:t>
+                      </a:r>
+                    </a:p>
+                  </a:txBody>
+                  <a:tcPr marL="101600" anchor="ctr">
+                    <a:solidFill>
+                      <a:srgbClr val="1B334A"/>
+                    </a:solidFill>
+                  </a:tcPr>
+                </a:tc>
+                <a:tc>
+                  <a:txBody>
+                    <a:bodyPr/>
+                    <a:lstStyle/>
+                    <a:p>
+                      <a:r>
+                        <a:rPr sz="1250" b="1" i="0">
+                          <a:solidFill>
+                            <a:srgbClr val="FFFFFF"/>
+                          </a:solidFill>
+                          <a:latin typeface="Calibri"/>
+                        </a:rPr>
+                        <a:t>Predizione (m6)</a:t>
+                      </a:r>
+                    </a:p>
+                  </a:txBody>
+                  <a:tcPr marL="101600" anchor="ctr">
+                    <a:solidFill>
+                      <a:srgbClr val="1B334A"/>
+                    </a:solidFill>
+                  </a:tcPr>
+                </a:tc>
+                <a:tc>
+                  <a:txBody>
+                    <a:bodyPr/>
+                    <a:lstStyle/>
+                    <a:p>
+                      <a:r>
+                        <a:rPr sz="1250" b="1" i="0">
+                          <a:solidFill>
+                            <a:srgbClr val="FFFFFF"/>
+                          </a:solidFill>
+                          <a:latin typeface="Calibri"/>
+                        </a:rPr>
+                        <a:t>Riferimento (panel)</a:t>
+                      </a:r>
+                    </a:p>
+                  </a:txBody>
+                  <a:tcPr marL="101600" anchor="ctr">
+                    <a:solidFill>
+                      <a:srgbClr val="1B334A"/>
+                    </a:solidFill>
+                  </a:tcPr>
+                </a:tc>
+                <a:extLst>
+                  <a:ext uri="{0D108BD9-81ED-4DB2-BD59-A6C34878D82A}">
+                    <a16:rowId xmlns:a16="http://schemas.microsoft.com/office/drawing/2014/main" val="10000"/>
+                  </a:ext>
+                </a:extLst>
+              </a:tr>
+              <a:tr h="502920">
+                <a:tc>
+                  <a:txBody>
+                    <a:bodyPr/>
+                    <a:lstStyle/>
+                    <a:p>
+                      <a:r>
+                        <a:rPr sz="1200" b="1" i="0">
+                          <a:solidFill>
+                            <a:srgbClr val="2B2A26"/>
+                          </a:solidFill>
+                          <a:latin typeface="Calibri"/>
+                        </a:rPr>
+                        <a:t>Aroma</a:t>
+                      </a:r>
+                    </a:p>
+                  </a:txBody>
+                  <a:tcPr marL="101600" anchor="ctr">
+                    <a:solidFill>
+                      <a:srgbClr val="FBF7EE"/>
+                    </a:solidFill>
+                  </a:tcPr>
+                </a:tc>
+                <a:tc>
+                  <a:txBody>
+                    <a:bodyPr/>
+                    <a:lstStyle/>
+                    <a:p>
+                      <a:r>
+                        <a:rPr sz="1200" b="0" i="0">
+                          <a:solidFill>
+                            <a:srgbClr val="2B2A26"/>
+                          </a:solidFill>
+                          <a:latin typeface="Calibri"/>
+                        </a:rPr>
+                        <a:t>Il formaggio ha un aroma di panna.</a:t>
+                      </a:r>
+                    </a:p>
+                  </a:txBody>
+                  <a:tcPr marL="101600" anchor="ctr">
+                    <a:solidFill>
+                      <a:srgbClr val="FBF7EE"/>
+                    </a:solidFill>
+                  </a:tcPr>
+                </a:tc>
+                <a:tc>
+                  <a:txBody>
+                    <a:bodyPr/>
+                    <a:lstStyle/>
+                    <a:p>
+                      <a:r>
+                        <a:rPr sz="1200" b="1" i="0">
+                          <a:solidFill>
+                            <a:srgbClr val="5B8C5A"/>
+                          </a:solidFill>
+                          <a:latin typeface="Calibri"/>
+                        </a:rPr>
+                        <a:t>Il formaggio ha un aroma di panna.  ✓</a:t>
+                      </a:r>
+                    </a:p>
+                  </a:txBody>
+                  <a:tcPr marL="101600" anchor="ctr">
+                    <a:solidFill>
+                      <a:srgbClr val="FBF7EE"/>
+                    </a:solidFill>
+                  </a:tcPr>
+                </a:tc>
+                <a:extLst>
+                  <a:ext uri="{0D108BD9-81ED-4DB2-BD59-A6C34878D82A}">
+                    <a16:rowId xmlns:a16="http://schemas.microsoft.com/office/drawing/2014/main" val="10001"/>
+                  </a:ext>
+                </a:extLst>
+              </a:tr>
+              <a:tr h="502920">
+                <a:tc>
+                  <a:txBody>
+                    <a:bodyPr/>
+                    <a:lstStyle/>
+                    <a:p>
+                      <a:r>
+                        <a:rPr sz="1200" b="1" i="0">
+                          <a:solidFill>
+                            <a:srgbClr val="2B2A26"/>
+                          </a:solidFill>
+                          <a:latin typeface="Calibri"/>
+                        </a:rPr>
+                        <a:t>Sapore</a:t>
+                      </a:r>
+                    </a:p>
+                  </a:txBody>
+                  <a:tcPr marL="101600" anchor="ctr">
+                    <a:solidFill>
+                      <a:srgbClr val="FFFFFF"/>
+                    </a:solidFill>
+                  </a:tcPr>
+                </a:tc>
+                <a:tc>
+                  <a:txBody>
+                    <a:bodyPr/>
+                    <a:lstStyle/>
+                    <a:p>
+                      <a:r>
+                        <a:rPr sz="1200" b="0" i="0">
+                          <a:solidFill>
+                            <a:srgbClr val="2B2A26"/>
+                          </a:solidFill>
+                          <a:latin typeface="Calibri"/>
+                        </a:rPr>
+                        <a:t>…sapore leggermente salato e piccante.</a:t>
+                      </a:r>
+                    </a:p>
+                  </a:txBody>
+                  <a:tcPr marL="101600" anchor="ctr">
+                    <a:solidFill>
+                      <a:srgbClr val="FFFFFF"/>
+                    </a:solidFill>
+                  </a:tcPr>
+                </a:tc>
+                <a:tc>
+                  <a:txBody>
+                    <a:bodyPr/>
+                    <a:lstStyle/>
+                    <a:p>
+                      <a:r>
+                        <a:rPr sz="1200" b="0" i="0">
+                          <a:solidFill>
+                            <a:srgbClr val="2B2A26"/>
+                          </a:solidFill>
+                          <a:latin typeface="Calibri"/>
+                        </a:rPr>
+                        <a:t>Il formaggio ha un sapore salato.</a:t>
+                      </a:r>
+                    </a:p>
+                  </a:txBody>
+                  <a:tcPr marL="101600" anchor="ctr">
+                    <a:solidFill>
+                      <a:srgbClr val="FFFFFF"/>
+                    </a:solidFill>
+                  </a:tcPr>
+                </a:tc>
+                <a:extLst>
+                  <a:ext uri="{0D108BD9-81ED-4DB2-BD59-A6C34878D82A}">
+                    <a16:rowId xmlns:a16="http://schemas.microsoft.com/office/drawing/2014/main" val="10002"/>
+                  </a:ext>
+                </a:extLst>
+              </a:tr>
+              <a:tr h="502920">
+                <a:tc>
+                  <a:txBody>
+                    <a:bodyPr/>
+                    <a:lstStyle/>
+                    <a:p>
+                      <a:r>
+                        <a:rPr sz="1200" b="1" i="0">
+                          <a:solidFill>
+                            <a:srgbClr val="2B2A26"/>
+                          </a:solidFill>
+                          <a:latin typeface="Calibri"/>
+                        </a:rPr>
+                        <a:t>Spessore</a:t>
+                      </a:r>
+                    </a:p>
+                  </a:txBody>
+                  <a:tcPr marL="101600" anchor="ctr">
+                    <a:solidFill>
+                      <a:srgbClr val="FBF7EE"/>
+                    </a:solidFill>
+                  </a:tcPr>
+                </a:tc>
+                <a:tc>
+                  <a:txBody>
+                    <a:bodyPr/>
+                    <a:lstStyle/>
+                    <a:p>
+                      <a:r>
+                        <a:rPr sz="1200" b="0" i="0">
+                          <a:solidFill>
+                            <a:srgbClr val="2B2A26"/>
+                          </a:solidFill>
+                          <a:latin typeface="Calibri"/>
+                        </a:rPr>
+                        <a:t>La crosta è mediamente spessa.</a:t>
+                      </a:r>
+                    </a:p>
+                  </a:txBody>
+                  <a:tcPr marL="101600" anchor="ctr">
+                    <a:solidFill>
+                      <a:srgbClr val="FBF7EE"/>
+                    </a:solidFill>
+                  </a:tcPr>
+                </a:tc>
+                <a:tc>
+                  <a:txBody>
+                    <a:bodyPr/>
+                    <a:lstStyle/>
+                    <a:p>
+                      <a:r>
+                        <a:rPr sz="1200" b="1" i="0">
+                          <a:solidFill>
+                            <a:srgbClr val="5B8C5A"/>
+                          </a:solidFill>
+                          <a:latin typeface="Calibri"/>
+                        </a:rPr>
+                        <a:t>La crosta è mediamente spessa.  ✓</a:t>
+                      </a:r>
+                    </a:p>
+                  </a:txBody>
+                  <a:tcPr marL="101600" anchor="ctr">
+                    <a:solidFill>
+                      <a:srgbClr val="FBF7EE"/>
+                    </a:solidFill>
+                  </a:tcPr>
+                </a:tc>
+                <a:extLst>
+                  <a:ext uri="{0D108BD9-81ED-4DB2-BD59-A6C34878D82A}">
+                    <a16:rowId xmlns:a16="http://schemas.microsoft.com/office/drawing/2014/main" val="10003"/>
+                  </a:ext>
+                </a:extLst>
+              </a:tr>
+              <a:tr h="502920">
+                <a:tc>
+                  <a:txBody>
+                    <a:bodyPr/>
+                    <a:lstStyle/>
+                    <a:p>
+                      <a:r>
+                        <a:rPr sz="1200" b="1" i="0">
+                          <a:solidFill>
+                            <a:srgbClr val="2B2A26"/>
+                          </a:solidFill>
+                          <a:latin typeface="Calibri"/>
+                        </a:rPr>
+                        <a:t>Colore</a:t>
+                      </a:r>
+                    </a:p>
+                  </a:txBody>
+                  <a:tcPr marL="101600" anchor="ctr">
+                    <a:solidFill>
+                      <a:srgbClr val="FFFFFF"/>
+                    </a:solidFill>
+                  </a:tcPr>
+                </a:tc>
+                <a:tc>
+                  <a:txBody>
+                    <a:bodyPr/>
+                    <a:lstStyle/>
+                    <a:p>
+                      <a:r>
+                        <a:rPr sz="1200" b="0" i="0">
+                          <a:solidFill>
+                            <a:srgbClr val="2B2A26"/>
+                          </a:solidFill>
+                          <a:latin typeface="Calibri"/>
+                        </a:rPr>
+                        <a:t>…colore giallo carico omogeneo.</a:t>
+                      </a:r>
+                    </a:p>
+                  </a:txBody>
+                  <a:tcPr marL="101600" anchor="ctr">
+                    <a:solidFill>
+                      <a:srgbClr val="FFFFFF"/>
+                    </a:solidFill>
+                  </a:tcPr>
+                </a:tc>
+                <a:tc>
+                  <a:txBody>
+                    <a:bodyPr/>
+                    <a:lstStyle/>
+                    <a:p>
+                      <a:r>
+                        <a:rPr sz="1200" b="0" i="0">
+                          <a:solidFill>
+                            <a:srgbClr val="2B2A26"/>
+                          </a:solidFill>
+                          <a:latin typeface="Calibri"/>
+                        </a:rPr>
+                        <a:t>…colore giallo troppo carico.</a:t>
+                      </a:r>
+                    </a:p>
+                  </a:txBody>
+                  <a:tcPr marL="101600" anchor="ctr">
+                    <a:solidFill>
+                      <a:srgbClr val="FFFFFF"/>
+                    </a:solidFill>
+                  </a:tcPr>
+                </a:tc>
+                <a:extLst>
+                  <a:ext uri="{0D108BD9-81ED-4DB2-BD59-A6C34878D82A}">
+                    <a16:rowId xmlns:a16="http://schemas.microsoft.com/office/drawing/2014/main" val="10004"/>
+                  </a:ext>
+                </a:extLst>
+              </a:tr>
+              <a:tr h="502920">
+                <a:tc>
+                  <a:txBody>
+                    <a:bodyPr/>
+                    <a:lstStyle/>
+                    <a:p>
+                      <a:r>
+                        <a:rPr sz="1200" b="1" i="0">
+                          <a:solidFill>
+                            <a:srgbClr val="2B2A26"/>
+                          </a:solidFill>
+                          <a:latin typeface="Calibri"/>
+                        </a:rPr>
+                        <a:t>Struttura</a:t>
+                      </a:r>
+                    </a:p>
+                  </a:txBody>
+                  <a:tcPr marL="101600" anchor="ctr">
+                    <a:solidFill>
+                      <a:srgbClr val="FBF7EE"/>
+                    </a:solidFill>
+                  </a:tcPr>
+                </a:tc>
+                <a:tc>
+                  <a:txBody>
+                    <a:bodyPr/>
+                    <a:lstStyle/>
+                    <a:p>
+                      <a:r>
+                        <a:rPr sz="1200" b="0" i="0">
+                          <a:solidFill>
+                            <a:srgbClr val="2B2A26"/>
+                          </a:solidFill>
+                          <a:latin typeface="Calibri"/>
+                        </a:rPr>
+                        <a:t>…frattura irregolare e grana fine.</a:t>
+                      </a:r>
+                    </a:p>
+                  </a:txBody>
+                  <a:tcPr marL="101600" anchor="ctr">
+                    <a:solidFill>
+                      <a:srgbClr val="FBF7EE"/>
+                    </a:solidFill>
+                  </a:tcPr>
+                </a:tc>
+                <a:tc>
+                  <a:txBody>
+                    <a:bodyPr/>
+                    <a:lstStyle/>
+                    <a:p>
+                      <a:r>
+                        <a:rPr sz="1200" b="0" i="0" dirty="0">
+                          <a:solidFill>
+                            <a:srgbClr val="2B2A26"/>
+                          </a:solidFill>
+                          <a:latin typeface="Calibri"/>
+                        </a:rPr>
+                        <a:t>…</a:t>
+                      </a:r>
+                      <a:r>
+                        <a:rPr sz="1200" b="0" i="0" dirty="0" err="1">
+                          <a:solidFill>
+                            <a:srgbClr val="2B2A26"/>
+                          </a:solidFill>
+                          <a:latin typeface="Calibri"/>
+                        </a:rPr>
+                        <a:t>stirata</a:t>
+                      </a:r>
+                      <a:r>
+                        <a:rPr sz="1200" b="0" i="0" dirty="0">
+                          <a:solidFill>
+                            <a:srgbClr val="2B2A26"/>
+                          </a:solidFill>
+                          <a:latin typeface="Calibri"/>
+                        </a:rPr>
+                        <a:t> e </a:t>
+                      </a:r>
+                      <a:r>
+                        <a:rPr sz="1200" b="0" i="0" dirty="0" err="1">
+                          <a:solidFill>
+                            <a:srgbClr val="2B2A26"/>
+                          </a:solidFill>
+                          <a:latin typeface="Calibri"/>
+                        </a:rPr>
+                        <a:t>poca</a:t>
+                      </a:r>
+                      <a:r>
+                        <a:rPr sz="1200" b="0" i="0" dirty="0">
+                          <a:solidFill>
+                            <a:srgbClr val="2B2A26"/>
+                          </a:solidFill>
+                          <a:latin typeface="Calibri"/>
+                        </a:rPr>
+                        <a:t> grana a </a:t>
+                      </a:r>
+                      <a:r>
+                        <a:rPr sz="1200" b="0" i="0" dirty="0" err="1">
+                          <a:solidFill>
+                            <a:srgbClr val="2B2A26"/>
+                          </a:solidFill>
+                          <a:latin typeface="Calibri"/>
+                        </a:rPr>
+                        <a:t>tratti</a:t>
+                      </a:r>
+                      <a:r>
+                        <a:rPr sz="1200" b="0" i="0" dirty="0">
+                          <a:solidFill>
+                            <a:srgbClr val="2B2A26"/>
+                          </a:solidFill>
+                          <a:latin typeface="Calibri"/>
+                        </a:rPr>
+                        <a:t>.</a:t>
+                      </a:r>
+                    </a:p>
+                  </a:txBody>
+                  <a:tcPr marL="101600" anchor="ctr">
+                    <a:solidFill>
+                      <a:srgbClr val="FBF7EE"/>
+                    </a:solidFill>
+                  </a:tcPr>
+                </a:tc>
+                <a:extLst>
+                  <a:ext uri="{0D108BD9-81ED-4DB2-BD59-A6C34878D82A}">
+                    <a16:rowId xmlns:a16="http://schemas.microsoft.com/office/drawing/2014/main" val="10005"/>
+                  </a:ext>
+                </a:extLst>
+              </a:tr>
+            </a:tbl>
+          </a:graphicData>
+        </a:graphic>
+      </p:graphicFrame>
     </p:spTree>
     <p:extLst>
       <p:ext uri="{BB962C8B-B14F-4D97-AF65-F5344CB8AC3E}">
-        <p14:creationId xmlns:p14="http://schemas.microsoft.com/office/powerpoint/2010/main" val="2564263934"/>
+        <p14:creationId xmlns:p14="http://schemas.microsoft.com/office/powerpoint/2010/main" val="4213987194"/>
       </p:ext>
     </p:extLst>
   </p:cSld>
@@ -35972,7 +36892,1237 @@
 </p:sld>
 </file>
 
-<file path=ppt/slides/slide26.xml><?xml version="1.0" encoding="utf-8"?>
+<file path=ppt/slides/slide28.xml><?xml version="1.0" encoding="utf-8"?>
+<p:sld xmlns:a="http://schemas.openxmlformats.org/drawingml/2006/main" xmlns:r="http://schemas.openxmlformats.org/officeDocument/2006/relationships" xmlns:p="http://schemas.openxmlformats.org/presentationml/2006/main">
+  <p:cSld>
+    <p:bg>
+      <p:bgPr>
+        <a:solidFill>
+          <a:srgbClr val="1B334A"/>
+        </a:solidFill>
+        <a:effectLst/>
+      </p:bgPr>
+    </p:bg>
+    <p:spTree>
+      <p:nvGrpSpPr>
+        <p:cNvPr id="1" name=""/>
+        <p:cNvGrpSpPr/>
+        <p:nvPr/>
+      </p:nvGrpSpPr>
+      <p:grpSpPr>
+        <a:xfrm>
+          <a:off x="0" y="0"/>
+          <a:ext cx="0" cy="0"/>
+          <a:chOff x="0" y="0"/>
+          <a:chExt cx="0" cy="0"/>
+        </a:xfrm>
+      </p:grpSpPr>
+      <p:sp>
+        <p:nvSpPr>
+          <p:cNvPr id="2" name="Rectangle 1"/>
+          <p:cNvSpPr/>
+          <p:nvPr/>
+        </p:nvSpPr>
+        <p:spPr>
+          <a:xfrm>
+            <a:off x="0" y="0"/>
+            <a:ext cx="201168" cy="6858000"/>
+          </a:xfrm>
+          <a:prstGeom prst="rect">
+            <a:avLst/>
+          </a:prstGeom>
+          <a:solidFill>
+            <a:srgbClr val="E0A458"/>
+          </a:solidFill>
+          <a:ln>
+            <a:noFill/>
+          </a:ln>
+          <a:effectLst/>
+        </p:spPr>
+        <p:style>
+          <a:lnRef idx="1">
+            <a:schemeClr val="accent1"/>
+          </a:lnRef>
+          <a:fillRef idx="3">
+            <a:schemeClr val="accent1"/>
+          </a:fillRef>
+          <a:effectRef idx="2">
+            <a:schemeClr val="accent1"/>
+          </a:effectRef>
+          <a:fontRef idx="minor">
+            <a:schemeClr val="lt1"/>
+          </a:fontRef>
+        </p:style>
+        <p:txBody>
+          <a:bodyPr rtlCol="0" anchor="ctr"/>
+          <a:lstStyle/>
+          <a:p>
+            <a:pPr algn="ctr"/>
+            <a:endParaRPr/>
+          </a:p>
+        </p:txBody>
+      </p:sp>
+      <p:sp>
+        <p:nvSpPr>
+          <p:cNvPr id="3" name="Oval 2"/>
+          <p:cNvSpPr/>
+          <p:nvPr/>
+        </p:nvSpPr>
+        <p:spPr>
+          <a:xfrm>
+            <a:off x="10355580" y="754380"/>
+            <a:ext cx="502920" cy="502920"/>
+          </a:xfrm>
+          <a:prstGeom prst="ellipse">
+            <a:avLst/>
+          </a:prstGeom>
+          <a:solidFill>
+            <a:srgbClr val="E0A458">
+              <a:alpha val="16000"/>
+            </a:srgbClr>
+          </a:solidFill>
+          <a:ln>
+            <a:noFill/>
+          </a:ln>
+          <a:effectLst/>
+        </p:spPr>
+        <p:style>
+          <a:lnRef idx="1">
+            <a:schemeClr val="accent1"/>
+          </a:lnRef>
+          <a:fillRef idx="3">
+            <a:schemeClr val="accent1"/>
+          </a:fillRef>
+          <a:effectRef idx="2">
+            <a:schemeClr val="accent1"/>
+          </a:effectRef>
+          <a:fontRef idx="minor">
+            <a:schemeClr val="lt1"/>
+          </a:fontRef>
+        </p:style>
+        <p:txBody>
+          <a:bodyPr rtlCol="0" anchor="ctr"/>
+          <a:lstStyle/>
+          <a:p>
+            <a:pPr algn="ctr"/>
+            <a:endParaRPr/>
+          </a:p>
+        </p:txBody>
+      </p:sp>
+      <p:sp>
+        <p:nvSpPr>
+          <p:cNvPr id="4" name="Oval 3"/>
+          <p:cNvSpPr/>
+          <p:nvPr/>
+        </p:nvSpPr>
+        <p:spPr>
+          <a:xfrm>
+            <a:off x="11127105" y="1233297"/>
+            <a:ext cx="276606" cy="276606"/>
+          </a:xfrm>
+          <a:prstGeom prst="ellipse">
+            <a:avLst/>
+          </a:prstGeom>
+          <a:solidFill>
+            <a:srgbClr val="E0A458">
+              <a:alpha val="16000"/>
+            </a:srgbClr>
+          </a:solidFill>
+          <a:ln>
+            <a:noFill/>
+          </a:ln>
+          <a:effectLst/>
+        </p:spPr>
+        <p:style>
+          <a:lnRef idx="1">
+            <a:schemeClr val="accent1"/>
+          </a:lnRef>
+          <a:fillRef idx="3">
+            <a:schemeClr val="accent1"/>
+          </a:fillRef>
+          <a:effectRef idx="2">
+            <a:schemeClr val="accent1"/>
+          </a:effectRef>
+          <a:fontRef idx="minor">
+            <a:schemeClr val="lt1"/>
+          </a:fontRef>
+        </p:style>
+        <p:txBody>
+          <a:bodyPr rtlCol="0" anchor="ctr"/>
+          <a:lstStyle/>
+          <a:p>
+            <a:pPr algn="ctr"/>
+            <a:endParaRPr/>
+          </a:p>
+        </p:txBody>
+      </p:sp>
+      <p:sp>
+        <p:nvSpPr>
+          <p:cNvPr id="5" name="Oval 4"/>
+          <p:cNvSpPr/>
+          <p:nvPr/>
+        </p:nvSpPr>
+        <p:spPr>
+          <a:xfrm>
+            <a:off x="9981820" y="1404746"/>
+            <a:ext cx="226314" cy="226314"/>
+          </a:xfrm>
+          <a:prstGeom prst="ellipse">
+            <a:avLst/>
+          </a:prstGeom>
+          <a:solidFill>
+            <a:srgbClr val="E0A458">
+              <a:alpha val="16000"/>
+            </a:srgbClr>
+          </a:solidFill>
+          <a:ln>
+            <a:noFill/>
+          </a:ln>
+          <a:effectLst/>
+        </p:spPr>
+        <p:style>
+          <a:lnRef idx="1">
+            <a:schemeClr val="accent1"/>
+          </a:lnRef>
+          <a:fillRef idx="3">
+            <a:schemeClr val="accent1"/>
+          </a:fillRef>
+          <a:effectRef idx="2">
+            <a:schemeClr val="accent1"/>
+          </a:effectRef>
+          <a:fontRef idx="minor">
+            <a:schemeClr val="lt1"/>
+          </a:fontRef>
+        </p:style>
+        <p:txBody>
+          <a:bodyPr rtlCol="0" anchor="ctr"/>
+          <a:lstStyle/>
+          <a:p>
+            <a:pPr algn="ctr"/>
+            <a:endParaRPr/>
+          </a:p>
+        </p:txBody>
+      </p:sp>
+      <p:sp>
+        <p:nvSpPr>
+          <p:cNvPr id="6" name="Oval 5"/>
+          <p:cNvSpPr/>
+          <p:nvPr/>
+        </p:nvSpPr>
+        <p:spPr>
+          <a:xfrm>
+            <a:off x="10847070" y="294894"/>
+            <a:ext cx="251460" cy="251460"/>
+          </a:xfrm>
+          <a:prstGeom prst="ellipse">
+            <a:avLst/>
+          </a:prstGeom>
+          <a:solidFill>
+            <a:srgbClr val="E0A458">
+              <a:alpha val="16000"/>
+            </a:srgbClr>
+          </a:solidFill>
+          <a:ln>
+            <a:noFill/>
+          </a:ln>
+          <a:effectLst/>
+        </p:spPr>
+        <p:style>
+          <a:lnRef idx="1">
+            <a:schemeClr val="accent1"/>
+          </a:lnRef>
+          <a:fillRef idx="3">
+            <a:schemeClr val="accent1"/>
+          </a:fillRef>
+          <a:effectRef idx="2">
+            <a:schemeClr val="accent1"/>
+          </a:effectRef>
+          <a:fontRef idx="minor">
+            <a:schemeClr val="lt1"/>
+          </a:fontRef>
+        </p:style>
+        <p:txBody>
+          <a:bodyPr rtlCol="0" anchor="ctr"/>
+          <a:lstStyle/>
+          <a:p>
+            <a:pPr algn="ctr"/>
+            <a:endParaRPr/>
+          </a:p>
+        </p:txBody>
+      </p:sp>
+      <p:sp>
+        <p:nvSpPr>
+          <p:cNvPr id="7" name="Oval 6"/>
+          <p:cNvSpPr/>
+          <p:nvPr/>
+        </p:nvSpPr>
+        <p:spPr>
+          <a:xfrm>
+            <a:off x="9848088" y="612648"/>
+            <a:ext cx="201168" cy="201168"/>
+          </a:xfrm>
+          <a:prstGeom prst="ellipse">
+            <a:avLst/>
+          </a:prstGeom>
+          <a:solidFill>
+            <a:srgbClr val="E0A458">
+              <a:alpha val="16000"/>
+            </a:srgbClr>
+          </a:solidFill>
+          <a:ln>
+            <a:noFill/>
+          </a:ln>
+          <a:effectLst/>
+        </p:spPr>
+        <p:style>
+          <a:lnRef idx="1">
+            <a:schemeClr val="accent1"/>
+          </a:lnRef>
+          <a:fillRef idx="3">
+            <a:schemeClr val="accent1"/>
+          </a:fillRef>
+          <a:effectRef idx="2">
+            <a:schemeClr val="accent1"/>
+          </a:effectRef>
+          <a:fontRef idx="minor">
+            <a:schemeClr val="lt1"/>
+          </a:fontRef>
+        </p:style>
+        <p:txBody>
+          <a:bodyPr rtlCol="0" anchor="ctr"/>
+          <a:lstStyle/>
+          <a:p>
+            <a:pPr algn="ctr"/>
+            <a:endParaRPr/>
+          </a:p>
+        </p:txBody>
+      </p:sp>
+      <p:sp>
+        <p:nvSpPr>
+          <p:cNvPr id="8" name="TextBox 7"/>
+          <p:cNvSpPr txBox="1"/>
+          <p:nvPr/>
+        </p:nvSpPr>
+        <p:spPr>
+          <a:xfrm>
+            <a:off x="777240" y="548640"/>
+            <a:ext cx="10058400" cy="579646"/>
+          </a:xfrm>
+          <a:prstGeom prst="rect">
+            <a:avLst/>
+          </a:prstGeom>
+          <a:noFill/>
+        </p:spPr>
+        <p:txBody>
+          <a:bodyPr wrap="square" lIns="25400" tIns="12700" rIns="25400" bIns="12700" anchor="t">
+            <a:spAutoFit/>
+          </a:bodyPr>
+          <a:lstStyle/>
+          <a:p>
+            <a:r>
+              <a:rPr sz="3600" b="1" i="0" dirty="0">
+                <a:solidFill>
+                  <a:srgbClr val="F7F1E3"/>
+                </a:solidFill>
+                <a:latin typeface="Georgia"/>
+              </a:rPr>
+              <a:t>Conclusions &amp; future work</a:t>
+            </a:r>
+          </a:p>
+        </p:txBody>
+      </p:sp>
+      <p:sp>
+        <p:nvSpPr>
+          <p:cNvPr id="9" name="Rectangle 8"/>
+          <p:cNvSpPr/>
+          <p:nvPr/>
+        </p:nvSpPr>
+        <p:spPr>
+          <a:xfrm>
+            <a:off x="804672" y="1371600"/>
+            <a:ext cx="1828800" cy="50800"/>
+          </a:xfrm>
+          <a:prstGeom prst="rect">
+            <a:avLst/>
+          </a:prstGeom>
+          <a:solidFill>
+            <a:srgbClr val="E0A458"/>
+          </a:solidFill>
+          <a:ln>
+            <a:noFill/>
+          </a:ln>
+          <a:effectLst/>
+        </p:spPr>
+        <p:style>
+          <a:lnRef idx="1">
+            <a:schemeClr val="accent1"/>
+          </a:lnRef>
+          <a:fillRef idx="3">
+            <a:schemeClr val="accent1"/>
+          </a:fillRef>
+          <a:effectRef idx="2">
+            <a:schemeClr val="accent1"/>
+          </a:effectRef>
+          <a:fontRef idx="minor">
+            <a:schemeClr val="lt1"/>
+          </a:fontRef>
+        </p:style>
+        <p:txBody>
+          <a:bodyPr rtlCol="0" anchor="ctr"/>
+          <a:lstStyle/>
+          <a:p>
+            <a:pPr algn="ctr"/>
+            <a:endParaRPr/>
+          </a:p>
+        </p:txBody>
+      </p:sp>
+      <p:sp>
+        <p:nvSpPr>
+          <p:cNvPr id="10" name="Rounded Rectangle 9"/>
+          <p:cNvSpPr/>
+          <p:nvPr/>
+        </p:nvSpPr>
+        <p:spPr>
+          <a:xfrm>
+            <a:off x="640080" y="1691640"/>
+            <a:ext cx="3520440" cy="3108960"/>
+          </a:xfrm>
+          <a:prstGeom prst="roundRect">
+            <a:avLst/>
+          </a:prstGeom>
+          <a:solidFill>
+            <a:srgbClr val="244059"/>
+          </a:solidFill>
+          <a:ln>
+            <a:noFill/>
+          </a:ln>
+          <a:effectLst/>
+        </p:spPr>
+        <p:style>
+          <a:lnRef idx="1">
+            <a:schemeClr val="accent1"/>
+          </a:lnRef>
+          <a:fillRef idx="3">
+            <a:schemeClr val="accent1"/>
+          </a:fillRef>
+          <a:effectRef idx="2">
+            <a:schemeClr val="accent1"/>
+          </a:effectRef>
+          <a:fontRef idx="minor">
+            <a:schemeClr val="lt1"/>
+          </a:fontRef>
+        </p:style>
+        <p:txBody>
+          <a:bodyPr rtlCol="0" anchor="ctr"/>
+          <a:lstStyle/>
+          <a:p>
+            <a:pPr algn="ctr"/>
+            <a:endParaRPr/>
+          </a:p>
+        </p:txBody>
+      </p:sp>
+      <p:sp>
+        <p:nvSpPr>
+          <p:cNvPr id="11" name="Rectangle 10"/>
+          <p:cNvSpPr/>
+          <p:nvPr/>
+        </p:nvSpPr>
+        <p:spPr>
+          <a:xfrm>
+            <a:off x="640080" y="1691640"/>
+            <a:ext cx="3520440" cy="91440"/>
+          </a:xfrm>
+          <a:prstGeom prst="rect">
+            <a:avLst/>
+          </a:prstGeom>
+          <a:solidFill>
+            <a:srgbClr val="5B8C5A"/>
+          </a:solidFill>
+          <a:ln>
+            <a:noFill/>
+          </a:ln>
+          <a:effectLst/>
+        </p:spPr>
+        <p:style>
+          <a:lnRef idx="1">
+            <a:schemeClr val="accent1"/>
+          </a:lnRef>
+          <a:fillRef idx="3">
+            <a:schemeClr val="accent1"/>
+          </a:fillRef>
+          <a:effectRef idx="2">
+            <a:schemeClr val="accent1"/>
+          </a:effectRef>
+          <a:fontRef idx="minor">
+            <a:schemeClr val="lt1"/>
+          </a:fontRef>
+        </p:style>
+        <p:txBody>
+          <a:bodyPr rtlCol="0" anchor="ctr"/>
+          <a:lstStyle/>
+          <a:p>
+            <a:pPr algn="ctr"/>
+            <a:endParaRPr/>
+          </a:p>
+        </p:txBody>
+      </p:sp>
+      <p:sp>
+        <p:nvSpPr>
+          <p:cNvPr id="12" name="TextBox 11"/>
+          <p:cNvSpPr txBox="1"/>
+          <p:nvPr/>
+        </p:nvSpPr>
+        <p:spPr>
+          <a:xfrm>
+            <a:off x="868680" y="1828800"/>
+            <a:ext cx="3108960" cy="1533753"/>
+          </a:xfrm>
+          <a:prstGeom prst="rect">
+            <a:avLst/>
+          </a:prstGeom>
+          <a:noFill/>
+        </p:spPr>
+        <p:txBody>
+          <a:bodyPr wrap="square" lIns="25400" tIns="12700" rIns="25400" bIns="12700" anchor="t">
+            <a:spAutoFit/>
+          </a:bodyPr>
+          <a:lstStyle/>
+          <a:p>
+            <a:r>
+              <a:rPr sz="2400" b="1" i="0" dirty="0">
+                <a:solidFill>
+                  <a:srgbClr val="5B8C5A"/>
+                </a:solidFill>
+                <a:latin typeface="Georgia"/>
+              </a:rPr>
+              <a:t>Scientific result</a:t>
+            </a:r>
+          </a:p>
+          <a:p>
+            <a:pPr>
+              <a:spcBef>
+                <a:spcPts val="600"/>
+              </a:spcBef>
+            </a:pPr>
+            <a:r>
+              <a:rPr sz="1600" b="1" i="0" dirty="0">
+                <a:solidFill>
+                  <a:srgbClr val="5B8C5A"/>
+                </a:solidFill>
+                <a:latin typeface="Calibri"/>
+              </a:rPr>
+              <a:t>● </a:t>
+            </a:r>
+            <a:r>
+              <a:rPr sz="1600" b="1" i="0" dirty="0">
+                <a:solidFill>
+                  <a:srgbClr val="F7F1E3"/>
+                </a:solidFill>
+                <a:latin typeface="Calibri"/>
+              </a:rPr>
+              <a:t>The encoder matters:</a:t>
+            </a:r>
+            <a:r>
+              <a:rPr sz="1600" b="0" i="0" dirty="0">
+                <a:solidFill>
+                  <a:srgbClr val="D9D2C2"/>
+                </a:solidFill>
+                <a:latin typeface="Calibri"/>
+              </a:rPr>
+              <a:t> </a:t>
+            </a:r>
+            <a:r>
+              <a:rPr sz="1600" b="0" i="0" dirty="0" err="1">
+                <a:solidFill>
+                  <a:srgbClr val="D9D2C2"/>
+                </a:solidFill>
+                <a:latin typeface="Calibri"/>
+              </a:rPr>
+              <a:t>ResNet</a:t>
+            </a:r>
+            <a:r>
+              <a:rPr sz="1600" b="0" i="0" dirty="0">
+                <a:solidFill>
+                  <a:srgbClr val="D9D2C2"/>
+                </a:solidFill>
+                <a:latin typeface="Calibri"/>
+              </a:rPr>
+              <a:t> ignores the image, </a:t>
+            </a:r>
+            <a:r>
+              <a:rPr sz="1600" b="0" i="0" dirty="0" err="1">
+                <a:solidFill>
+                  <a:srgbClr val="D9D2C2"/>
+                </a:solidFill>
+                <a:latin typeface="Calibri"/>
+              </a:rPr>
+              <a:t>ViT</a:t>
+            </a:r>
+            <a:r>
+              <a:rPr sz="1600" b="0" i="0" dirty="0">
+                <a:solidFill>
+                  <a:srgbClr val="D9D2C2"/>
+                </a:solidFill>
+                <a:latin typeface="Calibri"/>
+              </a:rPr>
+              <a:t> uses it on 4/7</a:t>
+            </a:r>
+          </a:p>
+          <a:p>
+            <a:pPr>
+              <a:spcBef>
+                <a:spcPts val="600"/>
+              </a:spcBef>
+            </a:pPr>
+            <a:r>
+              <a:rPr sz="1600" b="1" i="0" dirty="0">
+                <a:solidFill>
+                  <a:srgbClr val="5B8C5A"/>
+                </a:solidFill>
+                <a:latin typeface="Calibri"/>
+              </a:rPr>
+              <a:t>● </a:t>
+            </a:r>
+            <a:r>
+              <a:rPr sz="1600" b="0" i="0" dirty="0">
+                <a:solidFill>
+                  <a:srgbClr val="D9D2C2"/>
+                </a:solidFill>
+                <a:latin typeface="Calibri"/>
+              </a:rPr>
+              <a:t>Confirmed by shuffle test + </a:t>
+            </a:r>
+            <a:r>
+              <a:rPr sz="1600" b="0" i="0" dirty="0" err="1">
+                <a:solidFill>
+                  <a:srgbClr val="D9D2C2"/>
+                </a:solidFill>
+                <a:latin typeface="Calibri"/>
+              </a:rPr>
+              <a:t>CLIPScore</a:t>
+            </a:r>
+            <a:endParaRPr sz="1600" b="0" i="0" dirty="0">
+              <a:solidFill>
+                <a:srgbClr val="D9D2C2"/>
+              </a:solidFill>
+              <a:latin typeface="Calibri"/>
+            </a:endParaRPr>
+          </a:p>
+        </p:txBody>
+      </p:sp>
+      <p:sp>
+        <p:nvSpPr>
+          <p:cNvPr id="13" name="Rounded Rectangle 12"/>
+          <p:cNvSpPr/>
+          <p:nvPr/>
+        </p:nvSpPr>
+        <p:spPr>
+          <a:xfrm>
+            <a:off x="4334256" y="1691640"/>
+            <a:ext cx="3520440" cy="3108960"/>
+          </a:xfrm>
+          <a:prstGeom prst="roundRect">
+            <a:avLst/>
+          </a:prstGeom>
+          <a:solidFill>
+            <a:srgbClr val="244059"/>
+          </a:solidFill>
+          <a:ln>
+            <a:noFill/>
+          </a:ln>
+          <a:effectLst/>
+        </p:spPr>
+        <p:style>
+          <a:lnRef idx="1">
+            <a:schemeClr val="accent1"/>
+          </a:lnRef>
+          <a:fillRef idx="3">
+            <a:schemeClr val="accent1"/>
+          </a:fillRef>
+          <a:effectRef idx="2">
+            <a:schemeClr val="accent1"/>
+          </a:effectRef>
+          <a:fontRef idx="minor">
+            <a:schemeClr val="lt1"/>
+          </a:fontRef>
+        </p:style>
+        <p:txBody>
+          <a:bodyPr rtlCol="0" anchor="ctr"/>
+          <a:lstStyle/>
+          <a:p>
+            <a:pPr algn="ctr"/>
+            <a:endParaRPr/>
+          </a:p>
+        </p:txBody>
+      </p:sp>
+      <p:sp>
+        <p:nvSpPr>
+          <p:cNvPr id="14" name="Rectangle 13"/>
+          <p:cNvSpPr/>
+          <p:nvPr/>
+        </p:nvSpPr>
+        <p:spPr>
+          <a:xfrm>
+            <a:off x="4334256" y="1691640"/>
+            <a:ext cx="3520440" cy="91440"/>
+          </a:xfrm>
+          <a:prstGeom prst="rect">
+            <a:avLst/>
+          </a:prstGeom>
+          <a:solidFill>
+            <a:srgbClr val="E0A458"/>
+          </a:solidFill>
+          <a:ln>
+            <a:noFill/>
+          </a:ln>
+          <a:effectLst/>
+        </p:spPr>
+        <p:style>
+          <a:lnRef idx="1">
+            <a:schemeClr val="accent1"/>
+          </a:lnRef>
+          <a:fillRef idx="3">
+            <a:schemeClr val="accent1"/>
+          </a:fillRef>
+          <a:effectRef idx="2">
+            <a:schemeClr val="accent1"/>
+          </a:effectRef>
+          <a:fontRef idx="minor">
+            <a:schemeClr val="lt1"/>
+          </a:fontRef>
+        </p:style>
+        <p:txBody>
+          <a:bodyPr rtlCol="0" anchor="ctr"/>
+          <a:lstStyle/>
+          <a:p>
+            <a:pPr algn="ctr"/>
+            <a:endParaRPr/>
+          </a:p>
+        </p:txBody>
+      </p:sp>
+      <p:sp>
+        <p:nvSpPr>
+          <p:cNvPr id="15" name="TextBox 14"/>
+          <p:cNvSpPr txBox="1"/>
+          <p:nvPr/>
+        </p:nvSpPr>
+        <p:spPr>
+          <a:xfrm>
+            <a:off x="4562856" y="1828800"/>
+            <a:ext cx="3108960" cy="2103140"/>
+          </a:xfrm>
+          <a:prstGeom prst="rect">
+            <a:avLst/>
+          </a:prstGeom>
+          <a:noFill/>
+        </p:spPr>
+        <p:txBody>
+          <a:bodyPr wrap="square" lIns="25400" tIns="12700" rIns="25400" bIns="12700" anchor="t">
+            <a:spAutoFit/>
+          </a:bodyPr>
+          <a:lstStyle/>
+          <a:p>
+            <a:r>
+              <a:rPr sz="2400" b="1" i="0" dirty="0">
+                <a:solidFill>
+                  <a:srgbClr val="E0A458"/>
+                </a:solidFill>
+                <a:latin typeface="Georgia"/>
+              </a:rPr>
+              <a:t>Practical result</a:t>
+            </a:r>
+          </a:p>
+          <a:p>
+            <a:pPr>
+              <a:spcBef>
+                <a:spcPts val="600"/>
+              </a:spcBef>
+            </a:pPr>
+            <a:r>
+              <a:rPr sz="1600" b="1" i="0" dirty="0">
+                <a:solidFill>
+                  <a:srgbClr val="E0A458"/>
+                </a:solidFill>
+                <a:latin typeface="Calibri"/>
+              </a:rPr>
+              <a:t>● </a:t>
+            </a:r>
+            <a:r>
+              <a:rPr sz="1600" b="1" i="0" dirty="0">
+                <a:solidFill>
+                  <a:srgbClr val="F7F1E3"/>
+                </a:solidFill>
+                <a:latin typeface="Calibri"/>
+              </a:rPr>
+              <a:t>4/7</a:t>
+            </a:r>
+            <a:r>
+              <a:rPr sz="1600" b="0" i="0" dirty="0">
+                <a:solidFill>
+                  <a:srgbClr val="D9D2C2"/>
+                </a:solidFill>
+                <a:latin typeface="Calibri"/>
+              </a:rPr>
+              <a:t> attributes beat the baseline (max Structure +0.128)</a:t>
+            </a:r>
+          </a:p>
+          <a:p>
+            <a:pPr>
+              <a:spcBef>
+                <a:spcPts val="600"/>
+              </a:spcBef>
+            </a:pPr>
+            <a:r>
+              <a:rPr sz="1600" b="1" i="0" dirty="0">
+                <a:solidFill>
+                  <a:srgbClr val="E0A458"/>
+                </a:solidFill>
+                <a:latin typeface="Calibri"/>
+              </a:rPr>
+              <a:t>● </a:t>
+            </a:r>
+            <a:r>
+              <a:rPr sz="1600" b="1" i="0" dirty="0">
+                <a:solidFill>
+                  <a:srgbClr val="F7F1E3"/>
+                </a:solidFill>
+                <a:latin typeface="Calibri"/>
+              </a:rPr>
+              <a:t>m6 (</a:t>
+            </a:r>
+            <a:r>
+              <a:rPr sz="1600" b="1" i="0" dirty="0" err="1">
+                <a:solidFill>
+                  <a:srgbClr val="F7F1E3"/>
+                </a:solidFill>
+                <a:latin typeface="Calibri"/>
+              </a:rPr>
+              <a:t>ViT+GePpeTto</a:t>
+            </a:r>
+            <a:r>
+              <a:rPr sz="1600" b="1" i="0" dirty="0">
+                <a:solidFill>
+                  <a:srgbClr val="F7F1E3"/>
+                </a:solidFill>
+                <a:latin typeface="Calibri"/>
+              </a:rPr>
+              <a:t>)</a:t>
+            </a:r>
+            <a:r>
+              <a:rPr sz="1600" b="0" i="0" dirty="0">
+                <a:solidFill>
+                  <a:srgbClr val="D9D2C2"/>
+                </a:solidFill>
+                <a:latin typeface="Calibri"/>
+              </a:rPr>
+              <a:t> wins narrowly almost everywhere</a:t>
+            </a:r>
+          </a:p>
+          <a:p>
+            <a:pPr>
+              <a:spcBef>
+                <a:spcPts val="600"/>
+              </a:spcBef>
+            </a:pPr>
+            <a:r>
+              <a:rPr sz="1600" b="1" i="0" dirty="0">
+                <a:solidFill>
+                  <a:srgbClr val="E0A458"/>
+                </a:solidFill>
+                <a:latin typeface="Calibri"/>
+              </a:rPr>
+              <a:t>● </a:t>
+            </a:r>
+            <a:r>
+              <a:rPr sz="1600" b="1" i="0" dirty="0">
+                <a:solidFill>
+                  <a:srgbClr val="F7F1E3"/>
+                </a:solidFill>
+                <a:latin typeface="Calibri"/>
+              </a:rPr>
+              <a:t>$5.60</a:t>
+            </a:r>
+            <a:r>
+              <a:rPr sz="1600" b="0" i="0" dirty="0">
+                <a:solidFill>
+                  <a:srgbClr val="D9D2C2"/>
+                </a:solidFill>
+                <a:latin typeface="Calibri"/>
+              </a:rPr>
+              <a:t> data cost · 38,437 pairs delivered</a:t>
+            </a:r>
+          </a:p>
+        </p:txBody>
+      </p:sp>
+      <p:sp>
+        <p:nvSpPr>
+          <p:cNvPr id="16" name="Rounded Rectangle 15"/>
+          <p:cNvSpPr/>
+          <p:nvPr/>
+        </p:nvSpPr>
+        <p:spPr>
+          <a:xfrm>
+            <a:off x="8028431" y="1691640"/>
+            <a:ext cx="3538728" cy="3108960"/>
+          </a:xfrm>
+          <a:prstGeom prst="roundRect">
+            <a:avLst/>
+          </a:prstGeom>
+          <a:solidFill>
+            <a:srgbClr val="244059"/>
+          </a:solidFill>
+          <a:ln>
+            <a:noFill/>
+          </a:ln>
+          <a:effectLst/>
+        </p:spPr>
+        <p:style>
+          <a:lnRef idx="1">
+            <a:schemeClr val="accent1"/>
+          </a:lnRef>
+          <a:fillRef idx="3">
+            <a:schemeClr val="accent1"/>
+          </a:fillRef>
+          <a:effectRef idx="2">
+            <a:schemeClr val="accent1"/>
+          </a:effectRef>
+          <a:fontRef idx="minor">
+            <a:schemeClr val="lt1"/>
+          </a:fontRef>
+        </p:style>
+        <p:txBody>
+          <a:bodyPr rtlCol="0" anchor="ctr"/>
+          <a:lstStyle/>
+          <a:p>
+            <a:pPr algn="ctr"/>
+            <a:endParaRPr/>
+          </a:p>
+        </p:txBody>
+      </p:sp>
+      <p:sp>
+        <p:nvSpPr>
+          <p:cNvPr id="17" name="Rectangle 16"/>
+          <p:cNvSpPr/>
+          <p:nvPr/>
+        </p:nvSpPr>
+        <p:spPr>
+          <a:xfrm>
+            <a:off x="8028431" y="1691640"/>
+            <a:ext cx="3538728" cy="91440"/>
+          </a:xfrm>
+          <a:prstGeom prst="rect">
+            <a:avLst/>
+          </a:prstGeom>
+          <a:solidFill>
+            <a:srgbClr val="2C5F8A"/>
+          </a:solidFill>
+          <a:ln>
+            <a:noFill/>
+          </a:ln>
+          <a:effectLst/>
+        </p:spPr>
+        <p:style>
+          <a:lnRef idx="1">
+            <a:schemeClr val="accent1"/>
+          </a:lnRef>
+          <a:fillRef idx="3">
+            <a:schemeClr val="accent1"/>
+          </a:fillRef>
+          <a:effectRef idx="2">
+            <a:schemeClr val="accent1"/>
+          </a:effectRef>
+          <a:fontRef idx="minor">
+            <a:schemeClr val="lt1"/>
+          </a:fontRef>
+        </p:style>
+        <p:txBody>
+          <a:bodyPr rtlCol="0" anchor="ctr"/>
+          <a:lstStyle/>
+          <a:p>
+            <a:pPr algn="ctr"/>
+            <a:endParaRPr/>
+          </a:p>
+        </p:txBody>
+      </p:sp>
+      <p:sp>
+        <p:nvSpPr>
+          <p:cNvPr id="18" name="TextBox 17"/>
+          <p:cNvSpPr txBox="1"/>
+          <p:nvPr/>
+        </p:nvSpPr>
+        <p:spPr>
+          <a:xfrm>
+            <a:off x="8257031" y="1828800"/>
+            <a:ext cx="3127248" cy="2103140"/>
+          </a:xfrm>
+          <a:prstGeom prst="rect">
+            <a:avLst/>
+          </a:prstGeom>
+          <a:noFill/>
+        </p:spPr>
+        <p:txBody>
+          <a:bodyPr wrap="square" lIns="25400" tIns="12700" rIns="25400" bIns="12700" anchor="t">
+            <a:spAutoFit/>
+          </a:bodyPr>
+          <a:lstStyle/>
+          <a:p>
+            <a:r>
+              <a:rPr sz="2400" b="1" i="0" dirty="0">
+                <a:solidFill>
+                  <a:srgbClr val="2C5F8A"/>
+                </a:solidFill>
+                <a:latin typeface="Georgia"/>
+              </a:rPr>
+              <a:t>Future work</a:t>
+            </a:r>
+          </a:p>
+          <a:p>
+            <a:pPr>
+              <a:spcBef>
+                <a:spcPts val="600"/>
+              </a:spcBef>
+            </a:pPr>
+            <a:r>
+              <a:rPr sz="1600" b="1" i="0" dirty="0">
+                <a:solidFill>
+                  <a:srgbClr val="2C5F8A"/>
+                </a:solidFill>
+                <a:latin typeface="Calibri"/>
+              </a:rPr>
+              <a:t>● </a:t>
+            </a:r>
+            <a:r>
+              <a:rPr sz="1600" b="1" i="0" dirty="0">
+                <a:solidFill>
+                  <a:srgbClr val="F7F1E3"/>
+                </a:solidFill>
+                <a:latin typeface="Calibri"/>
+              </a:rPr>
+              <a:t>Fine-tune the encoder</a:t>
+            </a:r>
+            <a:r>
+              <a:rPr sz="1600" b="0" i="0" dirty="0">
+                <a:solidFill>
+                  <a:srgbClr val="D9D2C2"/>
+                </a:solidFill>
+                <a:latin typeface="Calibri"/>
+              </a:rPr>
+              <a:t> and re-measure </a:t>
+            </a:r>
+            <a:r>
+              <a:rPr sz="1600" b="0" i="0" dirty="0" err="1">
+                <a:solidFill>
+                  <a:srgbClr val="D9D2C2"/>
+                </a:solidFill>
+                <a:latin typeface="Calibri"/>
+              </a:rPr>
+              <a:t>CLIPScore</a:t>
+            </a:r>
+            <a:endParaRPr sz="1600" b="0" i="0" dirty="0">
+              <a:solidFill>
+                <a:srgbClr val="D9D2C2"/>
+              </a:solidFill>
+              <a:latin typeface="Calibri"/>
+            </a:endParaRPr>
+          </a:p>
+          <a:p>
+            <a:pPr>
+              <a:spcBef>
+                <a:spcPts val="600"/>
+              </a:spcBef>
+            </a:pPr>
+            <a:r>
+              <a:rPr sz="1600" b="1" i="0" dirty="0">
+                <a:solidFill>
+                  <a:srgbClr val="2C5F8A"/>
+                </a:solidFill>
+                <a:latin typeface="Calibri"/>
+              </a:rPr>
+              <a:t>● </a:t>
+            </a:r>
+            <a:r>
+              <a:rPr sz="1600" b="0" i="0" dirty="0">
+                <a:solidFill>
+                  <a:srgbClr val="D9D2C2"/>
+                </a:solidFill>
+                <a:latin typeface="Calibri"/>
+              </a:rPr>
+              <a:t>k-NN retrieval baseline as an image-aware «floor»</a:t>
+            </a:r>
+          </a:p>
+          <a:p>
+            <a:pPr>
+              <a:spcBef>
+                <a:spcPts val="600"/>
+              </a:spcBef>
+            </a:pPr>
+            <a:r>
+              <a:rPr sz="1600" b="1" i="0" dirty="0">
+                <a:solidFill>
+                  <a:srgbClr val="2C5F8A"/>
+                </a:solidFill>
+                <a:latin typeface="Calibri"/>
+              </a:rPr>
+              <a:t>● </a:t>
+            </a:r>
+            <a:r>
+              <a:rPr sz="1600" b="0" i="0" dirty="0">
+                <a:solidFill>
+                  <a:srgbClr val="D9D2C2"/>
+                </a:solidFill>
+                <a:latin typeface="Calibri"/>
+              </a:rPr>
+              <a:t>If models pull away from the baseline → image exploited</a:t>
+            </a:r>
+          </a:p>
+        </p:txBody>
+      </p:sp>
+      <p:sp>
+        <p:nvSpPr>
+          <p:cNvPr id="19" name="TextBox 18"/>
+          <p:cNvSpPr txBox="1"/>
+          <p:nvPr/>
+        </p:nvSpPr>
+        <p:spPr>
+          <a:xfrm>
+            <a:off x="640080" y="4983480"/>
+            <a:ext cx="10881360" cy="518091"/>
+          </a:xfrm>
+          <a:prstGeom prst="rect">
+            <a:avLst/>
+          </a:prstGeom>
+          <a:noFill/>
+        </p:spPr>
+        <p:txBody>
+          <a:bodyPr wrap="square" lIns="25400" tIns="12700" rIns="25400" bIns="12700" anchor="t">
+            <a:spAutoFit/>
+          </a:bodyPr>
+          <a:lstStyle/>
+          <a:p>
+            <a:r>
+              <a:rPr sz="1600" b="1" i="0" dirty="0">
+                <a:solidFill>
+                  <a:srgbClr val="E0A458"/>
+                </a:solidFill>
+                <a:latin typeface="Calibri"/>
+              </a:rPr>
+              <a:t>Honest framing:  </a:t>
+            </a:r>
+            <a:r>
+              <a:rPr sz="1600" b="0" i="0" dirty="0">
+                <a:solidFill>
+                  <a:srgbClr val="F7F1E3"/>
+                </a:solidFill>
+                <a:latin typeface="Calibri"/>
+              </a:rPr>
+              <a:t>no model would replace a taster. They learned the vocabulary and a partial image</a:t>
+            </a:r>
+            <a:r>
+              <a:rPr lang="it-IT" sz="1600" b="0" i="0" dirty="0">
+                <a:solidFill>
+                  <a:srgbClr val="F7F1E3"/>
+                </a:solidFill>
+                <a:latin typeface="Calibri"/>
+              </a:rPr>
+              <a:t> </a:t>
+            </a:r>
+            <a:r>
+              <a:rPr sz="1600" b="0" i="0" dirty="0">
+                <a:solidFill>
+                  <a:srgbClr val="F7F1E3"/>
+                </a:solidFill>
+                <a:latin typeface="Calibri"/>
+              </a:rPr>
+              <a:t>→</a:t>
+            </a:r>
+            <a:r>
+              <a:rPr lang="it-IT" sz="1600" b="0" i="0" dirty="0">
+                <a:solidFill>
+                  <a:srgbClr val="F7F1E3"/>
+                </a:solidFill>
+                <a:latin typeface="Calibri"/>
+              </a:rPr>
+              <a:t> </a:t>
+            </a:r>
+            <a:r>
+              <a:rPr sz="1600" b="0" i="0" dirty="0">
+                <a:solidFill>
+                  <a:srgbClr val="F7F1E3"/>
+                </a:solidFill>
+                <a:latin typeface="Calibri"/>
+              </a:rPr>
+              <a:t>descriptor map</a:t>
+            </a:r>
+            <a:r>
+              <a:rPr lang="it-IT" sz="1600" b="0" i="0" dirty="0">
+                <a:solidFill>
+                  <a:srgbClr val="F7F1E3"/>
+                </a:solidFill>
+                <a:latin typeface="Calibri"/>
+              </a:rPr>
+              <a:t>,</a:t>
+            </a:r>
+            <a:r>
+              <a:rPr sz="1600" b="0" i="0" dirty="0">
+                <a:solidFill>
+                  <a:srgbClr val="F7F1E3"/>
+                </a:solidFill>
+                <a:latin typeface="Calibri"/>
+              </a:rPr>
+              <a:t> consistent with the data scale and the noise of multi-taster annotation.</a:t>
+            </a:r>
+          </a:p>
+        </p:txBody>
+      </p:sp>
+      <p:sp>
+        <p:nvSpPr>
+          <p:cNvPr id="20" name="TextBox 19"/>
+          <p:cNvSpPr txBox="1"/>
+          <p:nvPr/>
+        </p:nvSpPr>
+        <p:spPr>
+          <a:xfrm>
+            <a:off x="640080" y="5989320"/>
+            <a:ext cx="10881360" cy="456535"/>
+          </a:xfrm>
+          <a:prstGeom prst="rect">
+            <a:avLst/>
+          </a:prstGeom>
+          <a:noFill/>
+        </p:spPr>
+        <p:txBody>
+          <a:bodyPr wrap="square" lIns="25400" tIns="12700" rIns="25400" bIns="12700" anchor="t">
+            <a:spAutoFit/>
+          </a:bodyPr>
+          <a:lstStyle/>
+          <a:p>
+            <a:pPr algn="ctr"/>
+            <a:r>
+              <a:rPr sz="2800" b="1" i="0">
+                <a:solidFill>
+                  <a:srgbClr val="E0A458"/>
+                </a:solidFill>
+                <a:latin typeface="Georgia"/>
+              </a:rPr>
+              <a:t>Thank you. Questions?</a:t>
+            </a:r>
+          </a:p>
+        </p:txBody>
+      </p:sp>
+    </p:spTree>
+    <p:extLst>
+      <p:ext uri="{BB962C8B-B14F-4D97-AF65-F5344CB8AC3E}">
+        <p14:creationId xmlns:p14="http://schemas.microsoft.com/office/powerpoint/2010/main" val="1968846971"/>
+      </p:ext>
+    </p:extLst>
+  </p:cSld>
+  <p:clrMapOvr>
+    <a:masterClrMapping/>
+  </p:clrMapOvr>
+</p:sld>
+</file>
+
+<file path=ppt/slides/slide29.xml><?xml version="1.0" encoding="utf-8"?>
 <p:sld xmlns:a="http://schemas.openxmlformats.org/drawingml/2006/main" xmlns:r="http://schemas.openxmlformats.org/officeDocument/2006/relationships" xmlns:p="http://schemas.openxmlformats.org/presentationml/2006/main">
   <p:cSld>
     <p:bg>
@@ -36874,1889 +39024,6 @@
 </p:sld>
 </file>
 
-<file path=ppt/slides/slide27.xml><?xml version="1.0" encoding="utf-8"?>
-<p:sld xmlns:a="http://schemas.openxmlformats.org/drawingml/2006/main" xmlns:r="http://schemas.openxmlformats.org/officeDocument/2006/relationships" xmlns:p="http://schemas.openxmlformats.org/presentationml/2006/main">
-  <p:cSld>
-    <p:bg>
-      <p:bgPr>
-        <a:solidFill>
-          <a:srgbClr val="F7F1E3"/>
-        </a:solidFill>
-        <a:effectLst/>
-      </p:bgPr>
-    </p:bg>
-    <p:spTree>
-      <p:nvGrpSpPr>
-        <p:cNvPr id="1" name=""/>
-        <p:cNvGrpSpPr/>
-        <p:nvPr/>
-      </p:nvGrpSpPr>
-      <p:grpSpPr>
-        <a:xfrm>
-          <a:off x="0" y="0"/>
-          <a:ext cx="0" cy="0"/>
-          <a:chOff x="0" y="0"/>
-          <a:chExt cx="0" cy="0"/>
-        </a:xfrm>
-      </p:grpSpPr>
-      <p:sp>
-        <p:nvSpPr>
-          <p:cNvPr id="2" name="Rectangle 1"/>
-          <p:cNvSpPr/>
-          <p:nvPr/>
-        </p:nvSpPr>
-        <p:spPr>
-          <a:xfrm>
-            <a:off x="0" y="0"/>
-            <a:ext cx="146304" cy="6858000"/>
-          </a:xfrm>
-          <a:prstGeom prst="rect">
-            <a:avLst/>
-          </a:prstGeom>
-          <a:solidFill>
-            <a:srgbClr val="E0A458"/>
-          </a:solidFill>
-          <a:ln>
-            <a:noFill/>
-          </a:ln>
-          <a:effectLst/>
-        </p:spPr>
-        <p:style>
-          <a:lnRef idx="1">
-            <a:schemeClr val="accent1"/>
-          </a:lnRef>
-          <a:fillRef idx="3">
-            <a:schemeClr val="accent1"/>
-          </a:fillRef>
-          <a:effectRef idx="2">
-            <a:schemeClr val="accent1"/>
-          </a:effectRef>
-          <a:fontRef idx="minor">
-            <a:schemeClr val="lt1"/>
-          </a:fontRef>
-        </p:style>
-        <p:txBody>
-          <a:bodyPr rtlCol="0" anchor="ctr"/>
-          <a:lstStyle/>
-          <a:p>
-            <a:pPr algn="ctr"/>
-            <a:endParaRPr/>
-          </a:p>
-        </p:txBody>
-      </p:sp>
-      <p:sp>
-        <p:nvSpPr>
-          <p:cNvPr id="3" name="TextBox 2"/>
-          <p:cNvSpPr txBox="1"/>
-          <p:nvPr/>
-        </p:nvSpPr>
-        <p:spPr>
-          <a:xfrm>
-            <a:off x="411480" y="6473952"/>
-            <a:ext cx="8229600" cy="292608"/>
-          </a:xfrm>
-          <a:prstGeom prst="rect">
-            <a:avLst/>
-          </a:prstGeom>
-          <a:noFill/>
-        </p:spPr>
-        <p:txBody>
-          <a:bodyPr wrap="square" lIns="25400" tIns="12700" rIns="25400" bIns="12700" anchor="t">
-            <a:spAutoFit/>
-          </a:bodyPr>
-          <a:lstStyle/>
-          <a:p>
-            <a:r>
-              <a:rPr sz="950" b="0" i="1">
-                <a:solidFill>
-                  <a:srgbClr val="6B6860"/>
-                </a:solidFill>
-                <a:latin typeface="Calibri"/>
-              </a:rPr>
-              <a:t>AI4FQC · Project 07: GRANA Captioning</a:t>
-            </a:r>
-          </a:p>
-        </p:txBody>
-      </p:sp>
-      <p:sp>
-        <p:nvSpPr>
-          <p:cNvPr id="4" name="TextBox 3"/>
-          <p:cNvSpPr txBox="1"/>
-          <p:nvPr/>
-        </p:nvSpPr>
-        <p:spPr>
-          <a:xfrm>
-            <a:off x="10911535" y="6473952"/>
-            <a:ext cx="868680" cy="292608"/>
-          </a:xfrm>
-          <a:prstGeom prst="rect">
-            <a:avLst/>
-          </a:prstGeom>
-          <a:noFill/>
-        </p:spPr>
-        <p:txBody>
-          <a:bodyPr wrap="square" lIns="25400" tIns="12700" rIns="25400" bIns="12700" anchor="t">
-            <a:spAutoFit/>
-          </a:bodyPr>
-          <a:lstStyle/>
-          <a:p>
-            <a:pPr algn="r"/>
-            <a:r>
-              <a:rPr sz="1100" b="1" i="0">
-                <a:solidFill>
-                  <a:srgbClr val="E0A458"/>
-                </a:solidFill>
-                <a:latin typeface="Calibri"/>
-              </a:rPr>
-              <a:t>28</a:t>
-            </a:r>
-          </a:p>
-        </p:txBody>
-      </p:sp>
-      <p:sp>
-        <p:nvSpPr>
-          <p:cNvPr id="5" name="TextBox 4"/>
-          <p:cNvSpPr txBox="1"/>
-          <p:nvPr/>
-        </p:nvSpPr>
-        <p:spPr>
-          <a:xfrm>
-            <a:off x="640080" y="502920"/>
-            <a:ext cx="10881360" cy="365760"/>
-          </a:xfrm>
-          <a:prstGeom prst="rect">
-            <a:avLst/>
-          </a:prstGeom>
-          <a:noFill/>
-        </p:spPr>
-        <p:txBody>
-          <a:bodyPr wrap="square" lIns="25400" tIns="12700" rIns="25400" bIns="12700" anchor="t">
-            <a:spAutoFit/>
-          </a:bodyPr>
-          <a:lstStyle/>
-          <a:p>
-            <a:r>
-              <a:rPr sz="1250" b="1" i="0" spc="220">
-                <a:solidFill>
-                  <a:srgbClr val="C88836"/>
-                </a:solidFill>
-                <a:latin typeface="Calibri"/>
-              </a:rPr>
-              <a:t>CIDER</a:t>
-            </a:r>
-          </a:p>
-        </p:txBody>
-      </p:sp>
-      <p:sp>
-        <p:nvSpPr>
-          <p:cNvPr id="6" name="TextBox 5"/>
-          <p:cNvSpPr txBox="1"/>
-          <p:nvPr/>
-        </p:nvSpPr>
-        <p:spPr>
-          <a:xfrm>
-            <a:off x="640080" y="886968"/>
-            <a:ext cx="10881360" cy="579646"/>
-          </a:xfrm>
-          <a:prstGeom prst="rect">
-            <a:avLst/>
-          </a:prstGeom>
-          <a:noFill/>
-        </p:spPr>
-        <p:txBody>
-          <a:bodyPr wrap="square" lIns="25400" tIns="12700" rIns="25400" bIns="12700" anchor="t">
-            <a:spAutoFit/>
-          </a:bodyPr>
-          <a:lstStyle/>
-          <a:p>
-            <a:r>
-              <a:rPr sz="3600" b="1" i="0" dirty="0">
-                <a:solidFill>
-                  <a:srgbClr val="1B334A"/>
-                </a:solidFill>
-                <a:latin typeface="Georgia"/>
-              </a:rPr>
-              <a:t>Discriminates where BLEU flattens</a:t>
-            </a:r>
-          </a:p>
-        </p:txBody>
-      </p:sp>
-      <p:sp>
-        <p:nvSpPr>
-          <p:cNvPr id="7" name="Rectangle 6"/>
-          <p:cNvSpPr/>
-          <p:nvPr/>
-        </p:nvSpPr>
-        <p:spPr>
-          <a:xfrm>
-            <a:off x="658368" y="1709928"/>
-            <a:ext cx="1371600" cy="38100"/>
-          </a:xfrm>
-          <a:prstGeom prst="rect">
-            <a:avLst/>
-          </a:prstGeom>
-          <a:solidFill>
-            <a:srgbClr val="E0A458"/>
-          </a:solidFill>
-          <a:ln>
-            <a:noFill/>
-          </a:ln>
-          <a:effectLst/>
-        </p:spPr>
-        <p:style>
-          <a:lnRef idx="1">
-            <a:schemeClr val="accent1"/>
-          </a:lnRef>
-          <a:fillRef idx="3">
-            <a:schemeClr val="accent1"/>
-          </a:fillRef>
-          <a:effectRef idx="2">
-            <a:schemeClr val="accent1"/>
-          </a:effectRef>
-          <a:fontRef idx="minor">
-            <a:schemeClr val="lt1"/>
-          </a:fontRef>
-        </p:style>
-        <p:txBody>
-          <a:bodyPr rtlCol="0" anchor="ctr"/>
-          <a:lstStyle/>
-          <a:p>
-            <a:pPr algn="ctr"/>
-            <a:endParaRPr/>
-          </a:p>
-        </p:txBody>
-      </p:sp>
-      <p:graphicFrame>
-        <p:nvGraphicFramePr>
-          <p:cNvPr id="8" name="Chart 7"/>
-          <p:cNvGraphicFramePr>
-            <a:graphicFrameLocks noGrp="1"/>
-          </p:cNvGraphicFramePr>
-          <p:nvPr/>
-        </p:nvGraphicFramePr>
-        <p:xfrm>
-          <a:off x="640080" y="1920240"/>
-          <a:ext cx="7040880" cy="3977639"/>
-        </p:xfrm>
-        <a:graphic>
-          <a:graphicData uri="http://schemas.openxmlformats.org/drawingml/2006/chart">
-            <c:chart xmlns:c="http://schemas.openxmlformats.org/drawingml/2006/chart" xmlns:r="http://schemas.openxmlformats.org/officeDocument/2006/relationships" r:id="rId3"/>
-          </a:graphicData>
-        </a:graphic>
-      </p:graphicFrame>
-      <p:sp>
-        <p:nvSpPr>
-          <p:cNvPr id="9" name="Rounded Rectangle 8"/>
-          <p:cNvSpPr/>
-          <p:nvPr/>
-        </p:nvSpPr>
-        <p:spPr>
-          <a:xfrm>
-            <a:off x="7772400" y="2011680"/>
-            <a:ext cx="3794760" cy="3749039"/>
-          </a:xfrm>
-          <a:prstGeom prst="roundRect">
-            <a:avLst/>
-          </a:prstGeom>
-          <a:solidFill>
-            <a:srgbClr val="FBF7EE"/>
-          </a:solidFill>
-          <a:ln>
-            <a:noFill/>
-          </a:ln>
-          <a:effectLst/>
-        </p:spPr>
-        <p:style>
-          <a:lnRef idx="1">
-            <a:schemeClr val="accent1"/>
-          </a:lnRef>
-          <a:fillRef idx="3">
-            <a:schemeClr val="accent1"/>
-          </a:fillRef>
-          <a:effectRef idx="2">
-            <a:schemeClr val="accent1"/>
-          </a:effectRef>
-          <a:fontRef idx="minor">
-            <a:schemeClr val="lt1"/>
-          </a:fontRef>
-        </p:style>
-        <p:txBody>
-          <a:bodyPr rtlCol="0" anchor="ctr"/>
-          <a:lstStyle/>
-          <a:p>
-            <a:pPr algn="ctr"/>
-            <a:endParaRPr/>
-          </a:p>
-        </p:txBody>
-      </p:sp>
-      <p:sp>
-        <p:nvSpPr>
-          <p:cNvPr id="10" name="Rectangle 9"/>
-          <p:cNvSpPr/>
-          <p:nvPr/>
-        </p:nvSpPr>
-        <p:spPr>
-          <a:xfrm>
-            <a:off x="7772400" y="2011680"/>
-            <a:ext cx="82296" cy="3749039"/>
-          </a:xfrm>
-          <a:prstGeom prst="rect">
-            <a:avLst/>
-          </a:prstGeom>
-          <a:solidFill>
-            <a:srgbClr val="8A5082"/>
-          </a:solidFill>
-          <a:ln>
-            <a:noFill/>
-          </a:ln>
-          <a:effectLst/>
-        </p:spPr>
-        <p:style>
-          <a:lnRef idx="1">
-            <a:schemeClr val="accent1"/>
-          </a:lnRef>
-          <a:fillRef idx="3">
-            <a:schemeClr val="accent1"/>
-          </a:fillRef>
-          <a:effectRef idx="2">
-            <a:schemeClr val="accent1"/>
-          </a:effectRef>
-          <a:fontRef idx="minor">
-            <a:schemeClr val="lt1"/>
-          </a:fontRef>
-        </p:style>
-        <p:txBody>
-          <a:bodyPr rtlCol="0" anchor="ctr"/>
-          <a:lstStyle/>
-          <a:p>
-            <a:pPr algn="ctr"/>
-            <a:endParaRPr/>
-          </a:p>
-        </p:txBody>
-      </p:sp>
-      <p:sp>
-        <p:nvSpPr>
-          <p:cNvPr id="11" name="TextBox 10"/>
-          <p:cNvSpPr txBox="1"/>
-          <p:nvPr/>
-        </p:nvSpPr>
-        <p:spPr>
-          <a:xfrm>
-            <a:off x="8028432" y="2157984"/>
-            <a:ext cx="3374136" cy="2569934"/>
-          </a:xfrm>
-          <a:prstGeom prst="rect">
-            <a:avLst/>
-          </a:prstGeom>
-          <a:noFill/>
-        </p:spPr>
-        <p:txBody>
-          <a:bodyPr wrap="square" lIns="25400" tIns="12700" rIns="25400" bIns="12700" anchor="t">
-            <a:spAutoFit/>
-          </a:bodyPr>
-          <a:lstStyle/>
-          <a:p>
-            <a:r>
-              <a:rPr sz="2400" b="1" i="0" dirty="0">
-                <a:solidFill>
-                  <a:srgbClr val="1B334A"/>
-                </a:solidFill>
-                <a:latin typeface="Georgia"/>
-              </a:rPr>
-              <a:t>Reading</a:t>
-            </a:r>
-          </a:p>
-          <a:p>
-            <a:pPr>
-              <a:spcBef>
-                <a:spcPts val="400"/>
-              </a:spcBef>
-            </a:pPr>
-            <a:r>
-              <a:rPr sz="1600" b="1" i="0" dirty="0">
-                <a:solidFill>
-                  <a:srgbClr val="8A5082"/>
-                </a:solidFill>
-                <a:latin typeface="Calibri"/>
-              </a:rPr>
-              <a:t>● </a:t>
-            </a:r>
-            <a:r>
-              <a:rPr sz="1600" b="1" i="0" dirty="0">
-                <a:solidFill>
-                  <a:srgbClr val="2B2A26"/>
-                </a:solidFill>
-                <a:latin typeface="Calibri"/>
-              </a:rPr>
-              <a:t>Orders the models:</a:t>
-            </a:r>
-            <a:r>
-              <a:rPr sz="1600" b="0" i="0" dirty="0">
-                <a:solidFill>
-                  <a:srgbClr val="2B2A26"/>
-                </a:solidFill>
-                <a:latin typeface="Calibri"/>
-              </a:rPr>
-              <a:t> random &lt; </a:t>
-            </a:r>
-            <a:r>
-              <a:rPr sz="1600" b="0" i="0" dirty="0" err="1">
-                <a:solidFill>
-                  <a:srgbClr val="2B2A26"/>
-                </a:solidFill>
-                <a:latin typeface="Calibri"/>
-              </a:rPr>
-              <a:t>freq</a:t>
-            </a:r>
-            <a:r>
-              <a:rPr sz="1600" b="0" i="0" dirty="0">
-                <a:solidFill>
-                  <a:srgbClr val="2B2A26"/>
-                </a:solidFill>
-                <a:latin typeface="Calibri"/>
-              </a:rPr>
-              <a:t> &lt; m1 &lt; m3 &lt; m6</a:t>
-            </a:r>
-          </a:p>
-          <a:p>
-            <a:pPr>
-              <a:spcBef>
-                <a:spcPts val="400"/>
-              </a:spcBef>
-            </a:pPr>
-            <a:r>
-              <a:rPr sz="1600" b="1" i="0" dirty="0">
-                <a:solidFill>
-                  <a:srgbClr val="8A5082"/>
-                </a:solidFill>
-                <a:latin typeface="Calibri"/>
-              </a:rPr>
-              <a:t>● </a:t>
-            </a:r>
-            <a:r>
-              <a:rPr sz="1600" b="0" i="0" dirty="0">
-                <a:solidFill>
-                  <a:srgbClr val="2B2A26"/>
-                </a:solidFill>
-                <a:latin typeface="Calibri"/>
-              </a:rPr>
-              <a:t>Trained models clearly beat the random baselines</a:t>
-            </a:r>
-          </a:p>
-          <a:p>
-            <a:pPr>
-              <a:spcBef>
-                <a:spcPts val="400"/>
-              </a:spcBef>
-            </a:pPr>
-            <a:r>
-              <a:rPr sz="1600" b="1" i="0" dirty="0">
-                <a:solidFill>
-                  <a:srgbClr val="8A5082"/>
-                </a:solidFill>
-                <a:latin typeface="Calibri"/>
-              </a:rPr>
-              <a:t>● </a:t>
-            </a:r>
-            <a:r>
-              <a:rPr sz="1600" b="1" i="0" dirty="0">
-                <a:solidFill>
-                  <a:srgbClr val="2B2A26"/>
-                </a:solidFill>
-                <a:latin typeface="Calibri"/>
-              </a:rPr>
-              <a:t>m6</a:t>
-            </a:r>
-            <a:r>
-              <a:rPr sz="1600" b="0" i="0" dirty="0">
-                <a:solidFill>
-                  <a:srgbClr val="2B2A26"/>
-                </a:solidFill>
-                <a:latin typeface="Calibri"/>
-              </a:rPr>
-              <a:t> is the best among the models</a:t>
-            </a:r>
-          </a:p>
-          <a:p>
-            <a:pPr>
-              <a:spcBef>
-                <a:spcPts val="400"/>
-              </a:spcBef>
-            </a:pPr>
-            <a:r>
-              <a:rPr sz="1600" b="1" i="0" dirty="0">
-                <a:solidFill>
-                  <a:srgbClr val="8A5082"/>
-                </a:solidFill>
-                <a:latin typeface="Calibri"/>
-              </a:rPr>
-              <a:t>● </a:t>
-            </a:r>
-            <a:r>
-              <a:rPr sz="1600" b="1" i="0" dirty="0" err="1">
-                <a:solidFill>
-                  <a:srgbClr val="2B2A26"/>
-                </a:solidFill>
-                <a:latin typeface="Calibri"/>
-              </a:rPr>
-              <a:t>most_frequent</a:t>
-            </a:r>
-            <a:r>
-              <a:rPr sz="1600" b="1" i="0" dirty="0">
-                <a:solidFill>
-                  <a:srgbClr val="2B2A26"/>
-                </a:solidFill>
-                <a:latin typeface="Calibri"/>
-              </a:rPr>
-              <a:t> (0.79)</a:t>
-            </a:r>
-            <a:r>
-              <a:rPr sz="1600" b="0" i="0" dirty="0">
-                <a:solidFill>
-                  <a:srgbClr val="2B2A26"/>
-                </a:solidFill>
-                <a:latin typeface="Calibri"/>
-              </a:rPr>
-              <a:t> leads only because the reference IS often the frequent sentence: artifact, not quality</a:t>
-            </a:r>
-          </a:p>
-        </p:txBody>
-      </p:sp>
-    </p:spTree>
-    <p:extLst>
-      <p:ext uri="{BB962C8B-B14F-4D97-AF65-F5344CB8AC3E}">
-        <p14:creationId xmlns:p14="http://schemas.microsoft.com/office/powerpoint/2010/main" val="2917709729"/>
-      </p:ext>
-    </p:extLst>
-  </p:cSld>
-  <p:clrMapOvr>
-    <a:masterClrMapping/>
-  </p:clrMapOvr>
-</p:sld>
-</file>
-
-<file path=ppt/slides/slide28.xml><?xml version="1.0" encoding="utf-8"?>
-<p:sld xmlns:a="http://schemas.openxmlformats.org/drawingml/2006/main" xmlns:r="http://schemas.openxmlformats.org/officeDocument/2006/relationships" xmlns:p="http://schemas.openxmlformats.org/presentationml/2006/main">
-  <p:cSld>
-    <p:bg>
-      <p:bgPr>
-        <a:solidFill>
-          <a:srgbClr val="F7F1E3"/>
-        </a:solidFill>
-        <a:effectLst/>
-      </p:bgPr>
-    </p:bg>
-    <p:spTree>
-      <p:nvGrpSpPr>
-        <p:cNvPr id="1" name=""/>
-        <p:cNvGrpSpPr/>
-        <p:nvPr/>
-      </p:nvGrpSpPr>
-      <p:grpSpPr>
-        <a:xfrm>
-          <a:off x="0" y="0"/>
-          <a:ext cx="0" cy="0"/>
-          <a:chOff x="0" y="0"/>
-          <a:chExt cx="0" cy="0"/>
-        </a:xfrm>
-      </p:grpSpPr>
-      <p:sp>
-        <p:nvSpPr>
-          <p:cNvPr id="2" name="Rectangle 1"/>
-          <p:cNvSpPr/>
-          <p:nvPr/>
-        </p:nvSpPr>
-        <p:spPr>
-          <a:xfrm>
-            <a:off x="0" y="0"/>
-            <a:ext cx="146304" cy="6858000"/>
-          </a:xfrm>
-          <a:prstGeom prst="rect">
-            <a:avLst/>
-          </a:prstGeom>
-          <a:solidFill>
-            <a:srgbClr val="E0A458"/>
-          </a:solidFill>
-          <a:ln>
-            <a:noFill/>
-          </a:ln>
-          <a:effectLst/>
-        </p:spPr>
-        <p:style>
-          <a:lnRef idx="1">
-            <a:schemeClr val="accent1"/>
-          </a:lnRef>
-          <a:fillRef idx="3">
-            <a:schemeClr val="accent1"/>
-          </a:fillRef>
-          <a:effectRef idx="2">
-            <a:schemeClr val="accent1"/>
-          </a:effectRef>
-          <a:fontRef idx="minor">
-            <a:schemeClr val="lt1"/>
-          </a:fontRef>
-        </p:style>
-        <p:txBody>
-          <a:bodyPr rtlCol="0" anchor="ctr"/>
-          <a:lstStyle/>
-          <a:p>
-            <a:pPr algn="ctr"/>
-            <a:endParaRPr/>
-          </a:p>
-        </p:txBody>
-      </p:sp>
-      <p:sp>
-        <p:nvSpPr>
-          <p:cNvPr id="3" name="TextBox 2"/>
-          <p:cNvSpPr txBox="1"/>
-          <p:nvPr/>
-        </p:nvSpPr>
-        <p:spPr>
-          <a:xfrm>
-            <a:off x="411480" y="6473952"/>
-            <a:ext cx="8229600" cy="292608"/>
-          </a:xfrm>
-          <a:prstGeom prst="rect">
-            <a:avLst/>
-          </a:prstGeom>
-          <a:noFill/>
-        </p:spPr>
-        <p:txBody>
-          <a:bodyPr wrap="square" lIns="25400" tIns="12700" rIns="25400" bIns="12700" anchor="t">
-            <a:spAutoFit/>
-          </a:bodyPr>
-          <a:lstStyle/>
-          <a:p>
-            <a:r>
-              <a:rPr sz="950" b="0" i="1">
-                <a:solidFill>
-                  <a:srgbClr val="6B6860"/>
-                </a:solidFill>
-                <a:latin typeface="Calibri"/>
-              </a:rPr>
-              <a:t>AI4FQC · Project 07: GRANA Captioning</a:t>
-            </a:r>
-          </a:p>
-        </p:txBody>
-      </p:sp>
-      <p:sp>
-        <p:nvSpPr>
-          <p:cNvPr id="4" name="TextBox 3"/>
-          <p:cNvSpPr txBox="1"/>
-          <p:nvPr/>
-        </p:nvSpPr>
-        <p:spPr>
-          <a:xfrm>
-            <a:off x="10911535" y="6473952"/>
-            <a:ext cx="868680" cy="292608"/>
-          </a:xfrm>
-          <a:prstGeom prst="rect">
-            <a:avLst/>
-          </a:prstGeom>
-          <a:noFill/>
-        </p:spPr>
-        <p:txBody>
-          <a:bodyPr wrap="square" lIns="25400" tIns="12700" rIns="25400" bIns="12700" anchor="t">
-            <a:spAutoFit/>
-          </a:bodyPr>
-          <a:lstStyle/>
-          <a:p>
-            <a:pPr algn="r"/>
-            <a:r>
-              <a:rPr sz="1100" b="1" i="0">
-                <a:solidFill>
-                  <a:srgbClr val="E0A458"/>
-                </a:solidFill>
-                <a:latin typeface="Calibri"/>
-              </a:rPr>
-              <a:t>29</a:t>
-            </a:r>
-          </a:p>
-        </p:txBody>
-      </p:sp>
-      <p:sp>
-        <p:nvSpPr>
-          <p:cNvPr id="5" name="TextBox 4"/>
-          <p:cNvSpPr txBox="1"/>
-          <p:nvPr/>
-        </p:nvSpPr>
-        <p:spPr>
-          <a:xfrm>
-            <a:off x="640080" y="502920"/>
-            <a:ext cx="10881360" cy="365760"/>
-          </a:xfrm>
-          <a:prstGeom prst="rect">
-            <a:avLst/>
-          </a:prstGeom>
-          <a:noFill/>
-        </p:spPr>
-        <p:txBody>
-          <a:bodyPr wrap="square" lIns="25400" tIns="12700" rIns="25400" bIns="12700" anchor="t">
-            <a:spAutoFit/>
-          </a:bodyPr>
-          <a:lstStyle/>
-          <a:p>
-            <a:r>
-              <a:rPr sz="1250" b="1" i="0" spc="220">
-                <a:solidFill>
-                  <a:srgbClr val="C88836"/>
-                </a:solidFill>
-                <a:latin typeface="Calibri"/>
-              </a:rPr>
-              <a:t>CLIPSCORE</a:t>
-            </a:r>
-          </a:p>
-        </p:txBody>
-      </p:sp>
-      <p:sp>
-        <p:nvSpPr>
-          <p:cNvPr id="6" name="TextBox 5"/>
-          <p:cNvSpPr txBox="1"/>
-          <p:nvPr/>
-        </p:nvSpPr>
-        <p:spPr>
-          <a:xfrm>
-            <a:off x="640080" y="886968"/>
-            <a:ext cx="10881360" cy="914400"/>
-          </a:xfrm>
-          <a:prstGeom prst="rect">
-            <a:avLst/>
-          </a:prstGeom>
-          <a:noFill/>
-        </p:spPr>
-        <p:txBody>
-          <a:bodyPr wrap="square" lIns="25400" tIns="12700" rIns="25400" bIns="12700" anchor="t">
-            <a:spAutoFit/>
-          </a:bodyPr>
-          <a:lstStyle/>
-          <a:p>
-            <a:r>
-              <a:rPr sz="3100" b="1" i="0">
-                <a:solidFill>
-                  <a:srgbClr val="1B334A"/>
-                </a:solidFill>
-                <a:latin typeface="Georgia"/>
-              </a:rPr>
-              <a:t>Independent confirmation of the shuffle test</a:t>
-            </a:r>
-          </a:p>
-        </p:txBody>
-      </p:sp>
-      <p:sp>
-        <p:nvSpPr>
-          <p:cNvPr id="7" name="Rectangle 6"/>
-          <p:cNvSpPr/>
-          <p:nvPr/>
-        </p:nvSpPr>
-        <p:spPr>
-          <a:xfrm>
-            <a:off x="658368" y="1709928"/>
-            <a:ext cx="1371600" cy="38100"/>
-          </a:xfrm>
-          <a:prstGeom prst="rect">
-            <a:avLst/>
-          </a:prstGeom>
-          <a:solidFill>
-            <a:srgbClr val="E0A458"/>
-          </a:solidFill>
-          <a:ln>
-            <a:noFill/>
-          </a:ln>
-          <a:effectLst/>
-        </p:spPr>
-        <p:style>
-          <a:lnRef idx="1">
-            <a:schemeClr val="accent1"/>
-          </a:lnRef>
-          <a:fillRef idx="3">
-            <a:schemeClr val="accent1"/>
-          </a:fillRef>
-          <a:effectRef idx="2">
-            <a:schemeClr val="accent1"/>
-          </a:effectRef>
-          <a:fontRef idx="minor">
-            <a:schemeClr val="lt1"/>
-          </a:fontRef>
-        </p:style>
-        <p:txBody>
-          <a:bodyPr rtlCol="0" anchor="ctr"/>
-          <a:lstStyle/>
-          <a:p>
-            <a:pPr algn="ctr"/>
-            <a:endParaRPr/>
-          </a:p>
-        </p:txBody>
-      </p:sp>
-      <p:graphicFrame>
-        <p:nvGraphicFramePr>
-          <p:cNvPr id="8" name="Chart 7"/>
-          <p:cNvGraphicFramePr>
-            <a:graphicFrameLocks noGrp="1"/>
-          </p:cNvGraphicFramePr>
-          <p:nvPr/>
-        </p:nvGraphicFramePr>
-        <p:xfrm>
-          <a:off x="640080" y="2148840"/>
-          <a:ext cx="5394960" cy="3383280"/>
-        </p:xfrm>
-        <a:graphic>
-          <a:graphicData uri="http://schemas.openxmlformats.org/drawingml/2006/chart">
-            <c:chart xmlns:c="http://schemas.openxmlformats.org/drawingml/2006/chart" xmlns:r="http://schemas.openxmlformats.org/officeDocument/2006/relationships" r:id="rId3"/>
-          </a:graphicData>
-        </a:graphic>
-      </p:graphicFrame>
-      <p:sp>
-        <p:nvSpPr>
-          <p:cNvPr id="9" name="TextBox 8"/>
-          <p:cNvSpPr txBox="1"/>
-          <p:nvPr/>
-        </p:nvSpPr>
-        <p:spPr>
-          <a:xfrm>
-            <a:off x="640080" y="1874520"/>
-            <a:ext cx="5394960" cy="271869"/>
-          </a:xfrm>
-          <a:prstGeom prst="rect">
-            <a:avLst/>
-          </a:prstGeom>
-          <a:noFill/>
-        </p:spPr>
-        <p:txBody>
-          <a:bodyPr wrap="square" lIns="25400" tIns="12700" rIns="25400" bIns="12700" anchor="t">
-            <a:spAutoFit/>
-          </a:bodyPr>
-          <a:lstStyle/>
-          <a:p>
-            <a:pPr algn="ctr"/>
-            <a:r>
-              <a:rPr sz="1600" b="1" i="0">
-                <a:solidFill>
-                  <a:srgbClr val="1B334A"/>
-                </a:solidFill>
-                <a:latin typeface="Calibri"/>
-              </a:rPr>
-              <a:t>By MODEL → all equal (gap &lt; 0.004)</a:t>
-            </a:r>
-          </a:p>
-        </p:txBody>
-      </p:sp>
-      <p:graphicFrame>
-        <p:nvGraphicFramePr>
-          <p:cNvPr id="10" name="Chart 9"/>
-          <p:cNvGraphicFramePr>
-            <a:graphicFrameLocks noGrp="1"/>
-          </p:cNvGraphicFramePr>
-          <p:nvPr/>
-        </p:nvGraphicFramePr>
-        <p:xfrm>
-          <a:off x="6263640" y="2148840"/>
-          <a:ext cx="5303520" cy="3383280"/>
-        </p:xfrm>
-        <a:graphic>
-          <a:graphicData uri="http://schemas.openxmlformats.org/drawingml/2006/chart">
-            <c:chart xmlns:c="http://schemas.openxmlformats.org/drawingml/2006/chart" xmlns:r="http://schemas.openxmlformats.org/officeDocument/2006/relationships" r:id="rId4"/>
-          </a:graphicData>
-        </a:graphic>
-      </p:graphicFrame>
-      <p:sp>
-        <p:nvSpPr>
-          <p:cNvPr id="11" name="TextBox 10"/>
-          <p:cNvSpPr txBox="1"/>
-          <p:nvPr/>
-        </p:nvSpPr>
-        <p:spPr>
-          <a:xfrm>
-            <a:off x="6263640" y="1874520"/>
-            <a:ext cx="5303520" cy="271869"/>
-          </a:xfrm>
-          <a:prstGeom prst="rect">
-            <a:avLst/>
-          </a:prstGeom>
-          <a:noFill/>
-        </p:spPr>
-        <p:txBody>
-          <a:bodyPr wrap="square" lIns="25400" tIns="12700" rIns="25400" bIns="12700" anchor="t">
-            <a:spAutoFit/>
-          </a:bodyPr>
-          <a:lstStyle/>
-          <a:p>
-            <a:pPr algn="ctr"/>
-            <a:r>
-              <a:rPr sz="1600" b="1" i="0" dirty="0">
-                <a:solidFill>
-                  <a:srgbClr val="1B334A"/>
-                </a:solidFill>
-                <a:latin typeface="Calibri"/>
-              </a:rPr>
-              <a:t>By ATTRIBUTE → visual high, smell/taste low</a:t>
-            </a:r>
-          </a:p>
-        </p:txBody>
-      </p:sp>
-      <p:sp>
-        <p:nvSpPr>
-          <p:cNvPr id="12" name="Rounded Rectangle 11"/>
-          <p:cNvSpPr/>
-          <p:nvPr/>
-        </p:nvSpPr>
-        <p:spPr>
-          <a:xfrm>
-            <a:off x="640080" y="5623560"/>
-            <a:ext cx="10927080" cy="548640"/>
-          </a:xfrm>
-          <a:prstGeom prst="roundRect">
-            <a:avLst/>
-          </a:prstGeom>
-          <a:solidFill>
-            <a:srgbClr val="1B334A"/>
-          </a:solidFill>
-          <a:ln>
-            <a:noFill/>
-          </a:ln>
-          <a:effectLst/>
-        </p:spPr>
-        <p:style>
-          <a:lnRef idx="1">
-            <a:schemeClr val="accent1"/>
-          </a:lnRef>
-          <a:fillRef idx="3">
-            <a:schemeClr val="accent1"/>
-          </a:fillRef>
-          <a:effectRef idx="2">
-            <a:schemeClr val="accent1"/>
-          </a:effectRef>
-          <a:fontRef idx="minor">
-            <a:schemeClr val="lt1"/>
-          </a:fontRef>
-        </p:style>
-        <p:txBody>
-          <a:bodyPr rtlCol="0" anchor="ctr"/>
-          <a:lstStyle/>
-          <a:p>
-            <a:pPr algn="ctr"/>
-            <a:endParaRPr/>
-          </a:p>
-        </p:txBody>
-      </p:sp>
-      <p:sp>
-        <p:nvSpPr>
-          <p:cNvPr id="13" name="TextBox 12"/>
-          <p:cNvSpPr txBox="1"/>
-          <p:nvPr/>
-        </p:nvSpPr>
-        <p:spPr>
-          <a:xfrm>
-            <a:off x="914400" y="5761945"/>
-            <a:ext cx="10515600" cy="271869"/>
-          </a:xfrm>
-          <a:prstGeom prst="rect">
-            <a:avLst/>
-          </a:prstGeom>
-          <a:noFill/>
-        </p:spPr>
-        <p:txBody>
-          <a:bodyPr wrap="square" lIns="25400" tIns="12700" rIns="25400" bIns="12700" anchor="ctr">
-            <a:spAutoFit/>
-          </a:bodyPr>
-          <a:lstStyle/>
-          <a:p>
-            <a:r>
-              <a:rPr sz="1600" b="1" i="0" dirty="0">
-                <a:solidFill>
-                  <a:srgbClr val="E0A458"/>
-                </a:solidFill>
-                <a:latin typeface="Calibri"/>
-              </a:rPr>
-              <a:t>With a frozen encoder the image isn't exploited: the models do language modeling. The real variation is per attribute.</a:t>
-            </a:r>
-          </a:p>
-        </p:txBody>
-      </p:sp>
-    </p:spTree>
-    <p:extLst>
-      <p:ext uri="{BB962C8B-B14F-4D97-AF65-F5344CB8AC3E}">
-        <p14:creationId xmlns:p14="http://schemas.microsoft.com/office/powerpoint/2010/main" val="3390183108"/>
-      </p:ext>
-    </p:extLst>
-  </p:cSld>
-  <p:clrMapOvr>
-    <a:masterClrMapping/>
-  </p:clrMapOvr>
-</p:sld>
-</file>
-
-<file path=ppt/slides/slide29.xml><?xml version="1.0" encoding="utf-8"?>
-<p:sld xmlns:a="http://schemas.openxmlformats.org/drawingml/2006/main" xmlns:r="http://schemas.openxmlformats.org/officeDocument/2006/relationships" xmlns:p="http://schemas.openxmlformats.org/presentationml/2006/main">
-  <p:cSld>
-    <p:bg>
-      <p:bgPr>
-        <a:solidFill>
-          <a:srgbClr val="F7F1E3"/>
-        </a:solidFill>
-        <a:effectLst/>
-      </p:bgPr>
-    </p:bg>
-    <p:spTree>
-      <p:nvGrpSpPr>
-        <p:cNvPr id="1" name=""/>
-        <p:cNvGrpSpPr/>
-        <p:nvPr/>
-      </p:nvGrpSpPr>
-      <p:grpSpPr>
-        <a:xfrm>
-          <a:off x="0" y="0"/>
-          <a:ext cx="0" cy="0"/>
-          <a:chOff x="0" y="0"/>
-          <a:chExt cx="0" cy="0"/>
-        </a:xfrm>
-      </p:grpSpPr>
-      <p:sp>
-        <p:nvSpPr>
-          <p:cNvPr id="2" name="Rectangle 1"/>
-          <p:cNvSpPr/>
-          <p:nvPr/>
-        </p:nvSpPr>
-        <p:spPr>
-          <a:xfrm>
-            <a:off x="0" y="0"/>
-            <a:ext cx="146304" cy="6858000"/>
-          </a:xfrm>
-          <a:prstGeom prst="rect">
-            <a:avLst/>
-          </a:prstGeom>
-          <a:solidFill>
-            <a:srgbClr val="E0A458"/>
-          </a:solidFill>
-          <a:ln>
-            <a:noFill/>
-          </a:ln>
-          <a:effectLst/>
-        </p:spPr>
-        <p:style>
-          <a:lnRef idx="1">
-            <a:schemeClr val="accent1"/>
-          </a:lnRef>
-          <a:fillRef idx="3">
-            <a:schemeClr val="accent1"/>
-          </a:fillRef>
-          <a:effectRef idx="2">
-            <a:schemeClr val="accent1"/>
-          </a:effectRef>
-          <a:fontRef idx="minor">
-            <a:schemeClr val="lt1"/>
-          </a:fontRef>
-        </p:style>
-        <p:txBody>
-          <a:bodyPr rtlCol="0" anchor="ctr"/>
-          <a:lstStyle/>
-          <a:p>
-            <a:pPr algn="ctr"/>
-            <a:endParaRPr/>
-          </a:p>
-        </p:txBody>
-      </p:sp>
-      <p:sp>
-        <p:nvSpPr>
-          <p:cNvPr id="3" name="TextBox 2"/>
-          <p:cNvSpPr txBox="1"/>
-          <p:nvPr/>
-        </p:nvSpPr>
-        <p:spPr>
-          <a:xfrm>
-            <a:off x="411480" y="6473952"/>
-            <a:ext cx="8229600" cy="292608"/>
-          </a:xfrm>
-          <a:prstGeom prst="rect">
-            <a:avLst/>
-          </a:prstGeom>
-          <a:noFill/>
-        </p:spPr>
-        <p:txBody>
-          <a:bodyPr wrap="square" lIns="25400" tIns="12700" rIns="25400" bIns="12700" anchor="t">
-            <a:spAutoFit/>
-          </a:bodyPr>
-          <a:lstStyle/>
-          <a:p>
-            <a:r>
-              <a:rPr sz="950" b="0" i="1">
-                <a:solidFill>
-                  <a:srgbClr val="6B6860"/>
-                </a:solidFill>
-                <a:latin typeface="Calibri"/>
-              </a:rPr>
-              <a:t>AI4FQC · Project 07: GRANA Captioning</a:t>
-            </a:r>
-          </a:p>
-        </p:txBody>
-      </p:sp>
-      <p:sp>
-        <p:nvSpPr>
-          <p:cNvPr id="4" name="TextBox 3"/>
-          <p:cNvSpPr txBox="1"/>
-          <p:nvPr/>
-        </p:nvSpPr>
-        <p:spPr>
-          <a:xfrm>
-            <a:off x="10911535" y="6473952"/>
-            <a:ext cx="868680" cy="292608"/>
-          </a:xfrm>
-          <a:prstGeom prst="rect">
-            <a:avLst/>
-          </a:prstGeom>
-          <a:noFill/>
-        </p:spPr>
-        <p:txBody>
-          <a:bodyPr wrap="square" lIns="25400" tIns="12700" rIns="25400" bIns="12700" anchor="t">
-            <a:spAutoFit/>
-          </a:bodyPr>
-          <a:lstStyle/>
-          <a:p>
-            <a:pPr algn="r"/>
-            <a:r>
-              <a:rPr sz="1100" b="1" i="0">
-                <a:solidFill>
-                  <a:srgbClr val="E0A458"/>
-                </a:solidFill>
-                <a:latin typeface="Calibri"/>
-              </a:rPr>
-              <a:t>31</a:t>
-            </a:r>
-          </a:p>
-        </p:txBody>
-      </p:sp>
-      <p:sp>
-        <p:nvSpPr>
-          <p:cNvPr id="5" name="TextBox 4"/>
-          <p:cNvSpPr txBox="1"/>
-          <p:nvPr/>
-        </p:nvSpPr>
-        <p:spPr>
-          <a:xfrm>
-            <a:off x="640080" y="502920"/>
-            <a:ext cx="10881360" cy="365760"/>
-          </a:xfrm>
-          <a:prstGeom prst="rect">
-            <a:avLst/>
-          </a:prstGeom>
-          <a:noFill/>
-        </p:spPr>
-        <p:txBody>
-          <a:bodyPr wrap="square" lIns="25400" tIns="12700" rIns="25400" bIns="12700" anchor="t">
-            <a:spAutoFit/>
-          </a:bodyPr>
-          <a:lstStyle/>
-          <a:p>
-            <a:r>
-              <a:rPr sz="1250" b="1" i="0" spc="220">
-                <a:solidFill>
-                  <a:srgbClr val="C88836"/>
-                </a:solidFill>
-                <a:latin typeface="Calibri"/>
-              </a:rPr>
-              <a:t>QUALITATIVE EXAMPLES</a:t>
-            </a:r>
-          </a:p>
-        </p:txBody>
-      </p:sp>
-      <p:sp>
-        <p:nvSpPr>
-          <p:cNvPr id="6" name="TextBox 5"/>
-          <p:cNvSpPr txBox="1"/>
-          <p:nvPr/>
-        </p:nvSpPr>
-        <p:spPr>
-          <a:xfrm>
-            <a:off x="640080" y="886968"/>
-            <a:ext cx="10881360" cy="579646"/>
-          </a:xfrm>
-          <a:prstGeom prst="rect">
-            <a:avLst/>
-          </a:prstGeom>
-          <a:noFill/>
-        </p:spPr>
-        <p:txBody>
-          <a:bodyPr wrap="square" lIns="25400" tIns="12700" rIns="25400" bIns="12700" anchor="t">
-            <a:spAutoFit/>
-          </a:bodyPr>
-          <a:lstStyle/>
-          <a:p>
-            <a:r>
-              <a:rPr sz="3600" b="1" i="0" dirty="0">
-                <a:solidFill>
-                  <a:srgbClr val="1B334A"/>
-                </a:solidFill>
-                <a:latin typeface="Georgia"/>
-              </a:rPr>
-              <a:t>What m6 actually generates</a:t>
-            </a:r>
-          </a:p>
-        </p:txBody>
-      </p:sp>
-      <p:sp>
-        <p:nvSpPr>
-          <p:cNvPr id="7" name="Rectangle 6"/>
-          <p:cNvSpPr/>
-          <p:nvPr/>
-        </p:nvSpPr>
-        <p:spPr>
-          <a:xfrm>
-            <a:off x="658368" y="1709928"/>
-            <a:ext cx="1371600" cy="38100"/>
-          </a:xfrm>
-          <a:prstGeom prst="rect">
-            <a:avLst/>
-          </a:prstGeom>
-          <a:solidFill>
-            <a:srgbClr val="E0A458"/>
-          </a:solidFill>
-          <a:ln>
-            <a:noFill/>
-          </a:ln>
-          <a:effectLst/>
-        </p:spPr>
-        <p:style>
-          <a:lnRef idx="1">
-            <a:schemeClr val="accent1"/>
-          </a:lnRef>
-          <a:fillRef idx="3">
-            <a:schemeClr val="accent1"/>
-          </a:fillRef>
-          <a:effectRef idx="2">
-            <a:schemeClr val="accent1"/>
-          </a:effectRef>
-          <a:fontRef idx="minor">
-            <a:schemeClr val="lt1"/>
-          </a:fontRef>
-        </p:style>
-        <p:txBody>
-          <a:bodyPr rtlCol="0" anchor="ctr"/>
-          <a:lstStyle/>
-          <a:p>
-            <a:pPr algn="ctr"/>
-            <a:endParaRPr/>
-          </a:p>
-        </p:txBody>
-      </p:sp>
-      <p:graphicFrame>
-        <p:nvGraphicFramePr>
-          <p:cNvPr id="8" name="Table 7"/>
-          <p:cNvGraphicFramePr>
-            <a:graphicFrameLocks noGrp="1"/>
-          </p:cNvGraphicFramePr>
-          <p:nvPr/>
-        </p:nvGraphicFramePr>
-        <p:xfrm>
-          <a:off x="640080" y="1920240"/>
-          <a:ext cx="10927080" cy="3017520"/>
-        </p:xfrm>
-        <a:graphic>
-          <a:graphicData uri="http://schemas.openxmlformats.org/drawingml/2006/table">
-            <a:tbl>
-              <a:tblPr firstRow="1" bandRow="1">
-                <a:tableStyleId>{5C22544A-7EE6-4342-B048-85BDC9FD1C3A}</a:tableStyleId>
-              </a:tblPr>
-              <a:tblGrid>
-                <a:gridCol w="1737360">
-                  <a:extLst>
-                    <a:ext uri="{9D8B030D-6E8A-4147-A177-3AD203B41FA5}">
-                      <a16:colId xmlns:a16="http://schemas.microsoft.com/office/drawing/2014/main" val="20000"/>
-                    </a:ext>
-                  </a:extLst>
-                </a:gridCol>
-                <a:gridCol w="4572000">
-                  <a:extLst>
-                    <a:ext uri="{9D8B030D-6E8A-4147-A177-3AD203B41FA5}">
-                      <a16:colId xmlns:a16="http://schemas.microsoft.com/office/drawing/2014/main" val="20001"/>
-                    </a:ext>
-                  </a:extLst>
-                </a:gridCol>
-                <a:gridCol w="4617720">
-                  <a:extLst>
-                    <a:ext uri="{9D8B030D-6E8A-4147-A177-3AD203B41FA5}">
-                      <a16:colId xmlns:a16="http://schemas.microsoft.com/office/drawing/2014/main" val="20002"/>
-                    </a:ext>
-                  </a:extLst>
-                </a:gridCol>
-              </a:tblGrid>
-              <a:tr h="502920">
-                <a:tc>
-                  <a:txBody>
-                    <a:bodyPr/>
-                    <a:lstStyle/>
-                    <a:p>
-                      <a:r>
-                        <a:rPr sz="1600" b="1" i="0">
-                          <a:solidFill>
-                            <a:srgbClr val="FFFFFF"/>
-                          </a:solidFill>
-                          <a:latin typeface="Calibri"/>
-                        </a:rPr>
-                        <a:t>Attributo</a:t>
-                      </a:r>
-                    </a:p>
-                  </a:txBody>
-                  <a:tcPr marL="101600" anchor="ctr">
-                    <a:solidFill>
-                      <a:srgbClr val="1B334A"/>
-                    </a:solidFill>
-                  </a:tcPr>
-                </a:tc>
-                <a:tc>
-                  <a:txBody>
-                    <a:bodyPr/>
-                    <a:lstStyle/>
-                    <a:p>
-                      <a:r>
-                        <a:rPr sz="1600" b="1" i="0">
-                          <a:solidFill>
-                            <a:srgbClr val="FFFFFF"/>
-                          </a:solidFill>
-                          <a:latin typeface="Calibri"/>
-                        </a:rPr>
-                        <a:t>Prediction (m6)</a:t>
-                      </a:r>
-                    </a:p>
-                  </a:txBody>
-                  <a:tcPr marL="101600" anchor="ctr">
-                    <a:solidFill>
-                      <a:srgbClr val="1B334A"/>
-                    </a:solidFill>
-                  </a:tcPr>
-                </a:tc>
-                <a:tc>
-                  <a:txBody>
-                    <a:bodyPr/>
-                    <a:lstStyle/>
-                    <a:p>
-                      <a:r>
-                        <a:rPr sz="1600" b="1" i="0">
-                          <a:solidFill>
-                            <a:srgbClr val="FFFFFF"/>
-                          </a:solidFill>
-                          <a:latin typeface="Calibri"/>
-                        </a:rPr>
-                        <a:t>Reference (panel)</a:t>
-                      </a:r>
-                    </a:p>
-                  </a:txBody>
-                  <a:tcPr marL="101600" anchor="ctr">
-                    <a:solidFill>
-                      <a:srgbClr val="1B334A"/>
-                    </a:solidFill>
-                  </a:tcPr>
-                </a:tc>
-                <a:extLst>
-                  <a:ext uri="{0D108BD9-81ED-4DB2-BD59-A6C34878D82A}">
-                    <a16:rowId xmlns:a16="http://schemas.microsoft.com/office/drawing/2014/main" val="10000"/>
-                  </a:ext>
-                </a:extLst>
-              </a:tr>
-              <a:tr h="502920">
-                <a:tc>
-                  <a:txBody>
-                    <a:bodyPr/>
-                    <a:lstStyle/>
-                    <a:p>
-                      <a:r>
-                        <a:rPr sz="1600" b="1" i="0">
-                          <a:solidFill>
-                            <a:srgbClr val="2B2A26"/>
-                          </a:solidFill>
-                          <a:latin typeface="Calibri"/>
-                        </a:rPr>
-                        <a:t>Aroma</a:t>
-                      </a:r>
-                    </a:p>
-                  </a:txBody>
-                  <a:tcPr marL="101600" anchor="ctr">
-                    <a:solidFill>
-                      <a:srgbClr val="FBF7EE"/>
-                    </a:solidFill>
-                  </a:tcPr>
-                </a:tc>
-                <a:tc>
-                  <a:txBody>
-                    <a:bodyPr/>
-                    <a:lstStyle/>
-                    <a:p>
-                      <a:r>
-                        <a:rPr sz="1600" b="0" i="0">
-                          <a:solidFill>
-                            <a:srgbClr val="2B2A26"/>
-                          </a:solidFill>
-                          <a:latin typeface="Calibri"/>
-                        </a:rPr>
-                        <a:t>The cheese has an aroma of cream.</a:t>
-                      </a:r>
-                    </a:p>
-                  </a:txBody>
-                  <a:tcPr marL="101600" anchor="ctr">
-                    <a:solidFill>
-                      <a:srgbClr val="FBF7EE"/>
-                    </a:solidFill>
-                  </a:tcPr>
-                </a:tc>
-                <a:tc>
-                  <a:txBody>
-                    <a:bodyPr/>
-                    <a:lstStyle/>
-                    <a:p>
-                      <a:r>
-                        <a:rPr sz="1600" b="1" i="0">
-                          <a:solidFill>
-                            <a:srgbClr val="5B8C5A"/>
-                          </a:solidFill>
-                          <a:latin typeface="Calibri"/>
-                        </a:rPr>
-                        <a:t>The cheese has an aroma of cream.  ✓</a:t>
-                      </a:r>
-                    </a:p>
-                  </a:txBody>
-                  <a:tcPr marL="101600" anchor="ctr">
-                    <a:solidFill>
-                      <a:srgbClr val="FBF7EE"/>
-                    </a:solidFill>
-                  </a:tcPr>
-                </a:tc>
-                <a:extLst>
-                  <a:ext uri="{0D108BD9-81ED-4DB2-BD59-A6C34878D82A}">
-                    <a16:rowId xmlns:a16="http://schemas.microsoft.com/office/drawing/2014/main" val="10001"/>
-                  </a:ext>
-                </a:extLst>
-              </a:tr>
-              <a:tr h="502920">
-                <a:tc>
-                  <a:txBody>
-                    <a:bodyPr/>
-                    <a:lstStyle/>
-                    <a:p>
-                      <a:r>
-                        <a:rPr sz="1600" b="1" i="0">
-                          <a:solidFill>
-                            <a:srgbClr val="2B2A26"/>
-                          </a:solidFill>
-                          <a:latin typeface="Calibri"/>
-                        </a:rPr>
-                        <a:t>Gusto</a:t>
-                      </a:r>
-                    </a:p>
-                  </a:txBody>
-                  <a:tcPr marL="101600" anchor="ctr">
-                    <a:solidFill>
-                      <a:srgbClr val="FFFFFF"/>
-                    </a:solidFill>
-                  </a:tcPr>
-                </a:tc>
-                <a:tc>
-                  <a:txBody>
-                    <a:bodyPr/>
-                    <a:lstStyle/>
-                    <a:p>
-                      <a:r>
-                        <a:rPr sz="1600" b="0" i="0">
-                          <a:solidFill>
-                            <a:srgbClr val="2B2A26"/>
-                          </a:solidFill>
-                          <a:latin typeface="Calibri"/>
-                        </a:rPr>
-                        <a:t>…taste slightly salty and spicy.</a:t>
-                      </a:r>
-                    </a:p>
-                  </a:txBody>
-                  <a:tcPr marL="101600" anchor="ctr">
-                    <a:solidFill>
-                      <a:srgbClr val="FFFFFF"/>
-                    </a:solidFill>
-                  </a:tcPr>
-                </a:tc>
-                <a:tc>
-                  <a:txBody>
-                    <a:bodyPr/>
-                    <a:lstStyle/>
-                    <a:p>
-                      <a:r>
-                        <a:rPr sz="1600" b="0" i="0">
-                          <a:solidFill>
-                            <a:srgbClr val="2B2A26"/>
-                          </a:solidFill>
-                          <a:latin typeface="Calibri"/>
-                        </a:rPr>
-                        <a:t>The cheese has a salty taste.</a:t>
-                      </a:r>
-                    </a:p>
-                  </a:txBody>
-                  <a:tcPr marL="101600" anchor="ctr">
-                    <a:solidFill>
-                      <a:srgbClr val="FFFFFF"/>
-                    </a:solidFill>
-                  </a:tcPr>
-                </a:tc>
-                <a:extLst>
-                  <a:ext uri="{0D108BD9-81ED-4DB2-BD59-A6C34878D82A}">
-                    <a16:rowId xmlns:a16="http://schemas.microsoft.com/office/drawing/2014/main" val="10002"/>
-                  </a:ext>
-                </a:extLst>
-              </a:tr>
-              <a:tr h="502920">
-                <a:tc>
-                  <a:txBody>
-                    <a:bodyPr/>
-                    <a:lstStyle/>
-                    <a:p>
-                      <a:r>
-                        <a:rPr sz="1600" b="1" i="0">
-                          <a:solidFill>
-                            <a:srgbClr val="2B2A26"/>
-                          </a:solidFill>
-                          <a:latin typeface="Calibri"/>
-                        </a:rPr>
-                        <a:t>Spessore</a:t>
-                      </a:r>
-                    </a:p>
-                  </a:txBody>
-                  <a:tcPr marL="101600" anchor="ctr">
-                    <a:solidFill>
-                      <a:srgbClr val="FBF7EE"/>
-                    </a:solidFill>
-                  </a:tcPr>
-                </a:tc>
-                <a:tc>
-                  <a:txBody>
-                    <a:bodyPr/>
-                    <a:lstStyle/>
-                    <a:p>
-                      <a:r>
-                        <a:rPr sz="1600" b="0" i="0">
-                          <a:solidFill>
-                            <a:srgbClr val="2B2A26"/>
-                          </a:solidFill>
-                          <a:latin typeface="Calibri"/>
-                        </a:rPr>
-                        <a:t>The rind is medium-thick.</a:t>
-                      </a:r>
-                    </a:p>
-                  </a:txBody>
-                  <a:tcPr marL="101600" anchor="ctr">
-                    <a:solidFill>
-                      <a:srgbClr val="FBF7EE"/>
-                    </a:solidFill>
-                  </a:tcPr>
-                </a:tc>
-                <a:tc>
-                  <a:txBody>
-                    <a:bodyPr/>
-                    <a:lstStyle/>
-                    <a:p>
-                      <a:r>
-                        <a:rPr sz="1600" b="1" i="0">
-                          <a:solidFill>
-                            <a:srgbClr val="5B8C5A"/>
-                          </a:solidFill>
-                          <a:latin typeface="Calibri"/>
-                        </a:rPr>
-                        <a:t>The rind is medium-thick.  ✓</a:t>
-                      </a:r>
-                    </a:p>
-                  </a:txBody>
-                  <a:tcPr marL="101600" anchor="ctr">
-                    <a:solidFill>
-                      <a:srgbClr val="FBF7EE"/>
-                    </a:solidFill>
-                  </a:tcPr>
-                </a:tc>
-                <a:extLst>
-                  <a:ext uri="{0D108BD9-81ED-4DB2-BD59-A6C34878D82A}">
-                    <a16:rowId xmlns:a16="http://schemas.microsoft.com/office/drawing/2014/main" val="10003"/>
-                  </a:ext>
-                </a:extLst>
-              </a:tr>
-              <a:tr h="502920">
-                <a:tc>
-                  <a:txBody>
-                    <a:bodyPr/>
-                    <a:lstStyle/>
-                    <a:p>
-                      <a:r>
-                        <a:rPr sz="1600" b="1" i="0">
-                          <a:solidFill>
-                            <a:srgbClr val="2B2A26"/>
-                          </a:solidFill>
-                          <a:latin typeface="Calibri"/>
-                        </a:rPr>
-                        <a:t>Colore</a:t>
-                      </a:r>
-                    </a:p>
-                  </a:txBody>
-                  <a:tcPr marL="101600" anchor="ctr">
-                    <a:solidFill>
-                      <a:srgbClr val="FFFFFF"/>
-                    </a:solidFill>
-                  </a:tcPr>
-                </a:tc>
-                <a:tc>
-                  <a:txBody>
-                    <a:bodyPr/>
-                    <a:lstStyle/>
-                    <a:p>
-                      <a:r>
-                        <a:rPr sz="1600" b="0" i="0">
-                          <a:solidFill>
-                            <a:srgbClr val="2B2A26"/>
-                          </a:solidFill>
-                          <a:latin typeface="Calibri"/>
-                        </a:rPr>
-                        <a:t>…deep, even yellow colour.</a:t>
-                      </a:r>
-                    </a:p>
-                  </a:txBody>
-                  <a:tcPr marL="101600" anchor="ctr">
-                    <a:solidFill>
-                      <a:srgbClr val="FFFFFF"/>
-                    </a:solidFill>
-                  </a:tcPr>
-                </a:tc>
-                <a:tc>
-                  <a:txBody>
-                    <a:bodyPr/>
-                    <a:lstStyle/>
-                    <a:p>
-                      <a:r>
-                        <a:rPr sz="1600" b="0" i="0">
-                          <a:solidFill>
-                            <a:srgbClr val="2B2A26"/>
-                          </a:solidFill>
-                          <a:latin typeface="Calibri"/>
-                        </a:rPr>
-                        <a:t>…overly deep yellow colour.</a:t>
-                      </a:r>
-                    </a:p>
-                  </a:txBody>
-                  <a:tcPr marL="101600" anchor="ctr">
-                    <a:solidFill>
-                      <a:srgbClr val="FFFFFF"/>
-                    </a:solidFill>
-                  </a:tcPr>
-                </a:tc>
-                <a:extLst>
-                  <a:ext uri="{0D108BD9-81ED-4DB2-BD59-A6C34878D82A}">
-                    <a16:rowId xmlns:a16="http://schemas.microsoft.com/office/drawing/2014/main" val="10004"/>
-                  </a:ext>
-                </a:extLst>
-              </a:tr>
-              <a:tr h="502920">
-                <a:tc>
-                  <a:txBody>
-                    <a:bodyPr/>
-                    <a:lstStyle/>
-                    <a:p>
-                      <a:r>
-                        <a:rPr sz="1600" b="1" i="0">
-                          <a:solidFill>
-                            <a:srgbClr val="2B2A26"/>
-                          </a:solidFill>
-                          <a:latin typeface="Calibri"/>
-                        </a:rPr>
-                        <a:t>Struttura</a:t>
-                      </a:r>
-                    </a:p>
-                  </a:txBody>
-                  <a:tcPr marL="101600" anchor="ctr">
-                    <a:solidFill>
-                      <a:srgbClr val="FBF7EE"/>
-                    </a:solidFill>
-                  </a:tcPr>
-                </a:tc>
-                <a:tc>
-                  <a:txBody>
-                    <a:bodyPr/>
-                    <a:lstStyle/>
-                    <a:p>
-                      <a:r>
-                        <a:rPr sz="1600" b="0" i="0">
-                          <a:solidFill>
-                            <a:srgbClr val="2B2A26"/>
-                          </a:solidFill>
-                          <a:latin typeface="Calibri"/>
-                        </a:rPr>
-                        <a:t>…irregular fracture and fine grain.</a:t>
-                      </a:r>
-                    </a:p>
-                  </a:txBody>
-                  <a:tcPr marL="101600" anchor="ctr">
-                    <a:solidFill>
-                      <a:srgbClr val="FBF7EE"/>
-                    </a:solidFill>
-                  </a:tcPr>
-                </a:tc>
-                <a:tc>
-                  <a:txBody>
-                    <a:bodyPr/>
-                    <a:lstStyle/>
-                    <a:p>
-                      <a:r>
-                        <a:rPr sz="1600" b="0" i="0" dirty="0">
-                          <a:solidFill>
-                            <a:srgbClr val="2B2A26"/>
-                          </a:solidFill>
-                          <a:latin typeface="Calibri"/>
-                        </a:rPr>
-                        <a:t>…stretched, with sparse grain in places.</a:t>
-                      </a:r>
-                    </a:p>
-                  </a:txBody>
-                  <a:tcPr marL="101600" anchor="ctr">
-                    <a:solidFill>
-                      <a:srgbClr val="FBF7EE"/>
-                    </a:solidFill>
-                  </a:tcPr>
-                </a:tc>
-                <a:extLst>
-                  <a:ext uri="{0D108BD9-81ED-4DB2-BD59-A6C34878D82A}">
-                    <a16:rowId xmlns:a16="http://schemas.microsoft.com/office/drawing/2014/main" val="10005"/>
-                  </a:ext>
-                </a:extLst>
-              </a:tr>
-            </a:tbl>
-          </a:graphicData>
-        </a:graphic>
-      </p:graphicFrame>
-      <p:sp>
-        <p:nvSpPr>
-          <p:cNvPr id="9" name="Rounded Rectangle 8"/>
-          <p:cNvSpPr/>
-          <p:nvPr/>
-        </p:nvSpPr>
-        <p:spPr>
-          <a:xfrm>
-            <a:off x="640080" y="5074920"/>
-            <a:ext cx="10927080" cy="822960"/>
-          </a:xfrm>
-          <a:prstGeom prst="roundRect">
-            <a:avLst/>
-          </a:prstGeom>
-          <a:solidFill>
-            <a:srgbClr val="FBF7EE"/>
-          </a:solidFill>
-          <a:ln>
-            <a:noFill/>
-          </a:ln>
-          <a:effectLst/>
-        </p:spPr>
-        <p:style>
-          <a:lnRef idx="1">
-            <a:schemeClr val="accent1"/>
-          </a:lnRef>
-          <a:fillRef idx="3">
-            <a:schemeClr val="accent1"/>
-          </a:fillRef>
-          <a:effectRef idx="2">
-            <a:schemeClr val="accent1"/>
-          </a:effectRef>
-          <a:fontRef idx="minor">
-            <a:schemeClr val="lt1"/>
-          </a:fontRef>
-        </p:style>
-        <p:txBody>
-          <a:bodyPr rtlCol="0" anchor="ctr"/>
-          <a:lstStyle/>
-          <a:p>
-            <a:pPr algn="ctr"/>
-            <a:endParaRPr/>
-          </a:p>
-        </p:txBody>
-      </p:sp>
-      <p:sp>
-        <p:nvSpPr>
-          <p:cNvPr id="10" name="Rectangle 9"/>
-          <p:cNvSpPr/>
-          <p:nvPr/>
-        </p:nvSpPr>
-        <p:spPr>
-          <a:xfrm>
-            <a:off x="640080" y="5074920"/>
-            <a:ext cx="82296" cy="822960"/>
-          </a:xfrm>
-          <a:prstGeom prst="rect">
-            <a:avLst/>
-          </a:prstGeom>
-          <a:solidFill>
-            <a:srgbClr val="E0A458"/>
-          </a:solidFill>
-          <a:ln>
-            <a:noFill/>
-          </a:ln>
-          <a:effectLst/>
-        </p:spPr>
-        <p:style>
-          <a:lnRef idx="1">
-            <a:schemeClr val="accent1"/>
-          </a:lnRef>
-          <a:fillRef idx="3">
-            <a:schemeClr val="accent1"/>
-          </a:fillRef>
-          <a:effectRef idx="2">
-            <a:schemeClr val="accent1"/>
-          </a:effectRef>
-          <a:fontRef idx="minor">
-            <a:schemeClr val="lt1"/>
-          </a:fontRef>
-        </p:style>
-        <p:txBody>
-          <a:bodyPr rtlCol="0" anchor="ctr"/>
-          <a:lstStyle/>
-          <a:p>
-            <a:pPr algn="ctr"/>
-            <a:endParaRPr/>
-          </a:p>
-        </p:txBody>
-      </p:sp>
-      <p:sp>
-        <p:nvSpPr>
-          <p:cNvPr id="11" name="TextBox 10"/>
-          <p:cNvSpPr txBox="1"/>
-          <p:nvPr/>
-        </p:nvSpPr>
-        <p:spPr>
-          <a:xfrm>
-            <a:off x="896112" y="5221224"/>
-            <a:ext cx="10506456" cy="456535"/>
-          </a:xfrm>
-          <a:prstGeom prst="rect">
-            <a:avLst/>
-          </a:prstGeom>
-          <a:noFill/>
-        </p:spPr>
-        <p:txBody>
-          <a:bodyPr wrap="square" lIns="25400" tIns="12700" rIns="25400" bIns="12700" anchor="t">
-            <a:spAutoFit/>
-          </a:bodyPr>
-          <a:lstStyle/>
-          <a:p>
-            <a:r>
-              <a:rPr sz="1400" b="0" i="0" dirty="0">
-                <a:solidFill>
-                  <a:srgbClr val="2B2A26"/>
-                </a:solidFill>
-                <a:latin typeface="Calibri"/>
-              </a:rPr>
-              <a:t>Four recurring patterns: (1) the scaffolding is always correct and worth ~50% of BLEU-4; (2) the language is fluent thanks to the pretrained LM; (3) the descriptor is often valid but for another cheese; (4) references vary enormously across tasters → a ceiling on BLEU.</a:t>
-            </a:r>
-          </a:p>
-        </p:txBody>
-      </p:sp>
-    </p:spTree>
-    <p:extLst>
-      <p:ext uri="{BB962C8B-B14F-4D97-AF65-F5344CB8AC3E}">
-        <p14:creationId xmlns:p14="http://schemas.microsoft.com/office/powerpoint/2010/main" val="4213987194"/>
-      </p:ext>
-    </p:extLst>
-  </p:cSld>
-  <p:clrMapOvr>
-    <a:masterClrMapping/>
-  </p:clrMapOvr>
-</p:sld>
-</file>
-
 <file path=ppt/slides/slide3.xml><?xml version="1.0" encoding="utf-8"?>
 <p:sld xmlns:a="http://schemas.openxmlformats.org/drawingml/2006/main" xmlns:r="http://schemas.openxmlformats.org/officeDocument/2006/relationships" xmlns:p="http://schemas.openxmlformats.org/presentationml/2006/main">
   <p:cSld>
@@ -40565,7 +40832,7 @@
     <p:bg>
       <p:bgPr>
         <a:solidFill>
-          <a:srgbClr val="1B334A"/>
+          <a:srgbClr val="F7F1E3"/>
         </a:solidFill>
         <a:effectLst/>
       </p:bgPr>
@@ -40593,7 +40860,7 @@
         <p:spPr>
           <a:xfrm>
             <a:off x="0" y="0"/>
-            <a:ext cx="201168" cy="6858000"/>
+            <a:ext cx="146304" cy="6858000"/>
           </a:xfrm>
           <a:prstGeom prst="rect">
             <a:avLst/>
@@ -40631,249 +40898,14 @@
       </p:sp>
       <p:sp>
         <p:nvSpPr>
-          <p:cNvPr id="3" name="Oval 2"/>
-          <p:cNvSpPr/>
+          <p:cNvPr id="3" name="TextBox 2"/>
+          <p:cNvSpPr txBox="1"/>
           <p:nvPr/>
         </p:nvSpPr>
         <p:spPr>
           <a:xfrm>
-            <a:off x="10355580" y="754380"/>
-            <a:ext cx="502920" cy="502920"/>
-          </a:xfrm>
-          <a:prstGeom prst="ellipse">
-            <a:avLst/>
-          </a:prstGeom>
-          <a:solidFill>
-            <a:srgbClr val="E0A458">
-              <a:alpha val="16000"/>
-            </a:srgbClr>
-          </a:solidFill>
-          <a:ln>
-            <a:noFill/>
-          </a:ln>
-          <a:effectLst/>
-        </p:spPr>
-        <p:style>
-          <a:lnRef idx="1">
-            <a:schemeClr val="accent1"/>
-          </a:lnRef>
-          <a:fillRef idx="3">
-            <a:schemeClr val="accent1"/>
-          </a:fillRef>
-          <a:effectRef idx="2">
-            <a:schemeClr val="accent1"/>
-          </a:effectRef>
-          <a:fontRef idx="minor">
-            <a:schemeClr val="lt1"/>
-          </a:fontRef>
-        </p:style>
-        <p:txBody>
-          <a:bodyPr rtlCol="0" anchor="ctr"/>
-          <a:lstStyle/>
-          <a:p>
-            <a:pPr algn="ctr"/>
-            <a:endParaRPr/>
-          </a:p>
-        </p:txBody>
-      </p:sp>
-      <p:sp>
-        <p:nvSpPr>
-          <p:cNvPr id="4" name="Oval 3"/>
-          <p:cNvSpPr/>
-          <p:nvPr/>
-        </p:nvSpPr>
-        <p:spPr>
-          <a:xfrm>
-            <a:off x="11127105" y="1233297"/>
-            <a:ext cx="276606" cy="276606"/>
-          </a:xfrm>
-          <a:prstGeom prst="ellipse">
-            <a:avLst/>
-          </a:prstGeom>
-          <a:solidFill>
-            <a:srgbClr val="E0A458">
-              <a:alpha val="16000"/>
-            </a:srgbClr>
-          </a:solidFill>
-          <a:ln>
-            <a:noFill/>
-          </a:ln>
-          <a:effectLst/>
-        </p:spPr>
-        <p:style>
-          <a:lnRef idx="1">
-            <a:schemeClr val="accent1"/>
-          </a:lnRef>
-          <a:fillRef idx="3">
-            <a:schemeClr val="accent1"/>
-          </a:fillRef>
-          <a:effectRef idx="2">
-            <a:schemeClr val="accent1"/>
-          </a:effectRef>
-          <a:fontRef idx="minor">
-            <a:schemeClr val="lt1"/>
-          </a:fontRef>
-        </p:style>
-        <p:txBody>
-          <a:bodyPr rtlCol="0" anchor="ctr"/>
-          <a:lstStyle/>
-          <a:p>
-            <a:pPr algn="ctr"/>
-            <a:endParaRPr/>
-          </a:p>
-        </p:txBody>
-      </p:sp>
-      <p:sp>
-        <p:nvSpPr>
-          <p:cNvPr id="5" name="Oval 4"/>
-          <p:cNvSpPr/>
-          <p:nvPr/>
-        </p:nvSpPr>
-        <p:spPr>
-          <a:xfrm>
-            <a:off x="9981820" y="1404746"/>
-            <a:ext cx="226314" cy="226314"/>
-          </a:xfrm>
-          <a:prstGeom prst="ellipse">
-            <a:avLst/>
-          </a:prstGeom>
-          <a:solidFill>
-            <a:srgbClr val="E0A458">
-              <a:alpha val="16000"/>
-            </a:srgbClr>
-          </a:solidFill>
-          <a:ln>
-            <a:noFill/>
-          </a:ln>
-          <a:effectLst/>
-        </p:spPr>
-        <p:style>
-          <a:lnRef idx="1">
-            <a:schemeClr val="accent1"/>
-          </a:lnRef>
-          <a:fillRef idx="3">
-            <a:schemeClr val="accent1"/>
-          </a:fillRef>
-          <a:effectRef idx="2">
-            <a:schemeClr val="accent1"/>
-          </a:effectRef>
-          <a:fontRef idx="minor">
-            <a:schemeClr val="lt1"/>
-          </a:fontRef>
-        </p:style>
-        <p:txBody>
-          <a:bodyPr rtlCol="0" anchor="ctr"/>
-          <a:lstStyle/>
-          <a:p>
-            <a:pPr algn="ctr"/>
-            <a:endParaRPr/>
-          </a:p>
-        </p:txBody>
-      </p:sp>
-      <p:sp>
-        <p:nvSpPr>
-          <p:cNvPr id="6" name="Oval 5"/>
-          <p:cNvSpPr/>
-          <p:nvPr/>
-        </p:nvSpPr>
-        <p:spPr>
-          <a:xfrm>
-            <a:off x="10847070" y="294894"/>
-            <a:ext cx="251460" cy="251460"/>
-          </a:xfrm>
-          <a:prstGeom prst="ellipse">
-            <a:avLst/>
-          </a:prstGeom>
-          <a:solidFill>
-            <a:srgbClr val="E0A458">
-              <a:alpha val="16000"/>
-            </a:srgbClr>
-          </a:solidFill>
-          <a:ln>
-            <a:noFill/>
-          </a:ln>
-          <a:effectLst/>
-        </p:spPr>
-        <p:style>
-          <a:lnRef idx="1">
-            <a:schemeClr val="accent1"/>
-          </a:lnRef>
-          <a:fillRef idx="3">
-            <a:schemeClr val="accent1"/>
-          </a:fillRef>
-          <a:effectRef idx="2">
-            <a:schemeClr val="accent1"/>
-          </a:effectRef>
-          <a:fontRef idx="minor">
-            <a:schemeClr val="lt1"/>
-          </a:fontRef>
-        </p:style>
-        <p:txBody>
-          <a:bodyPr rtlCol="0" anchor="ctr"/>
-          <a:lstStyle/>
-          <a:p>
-            <a:pPr algn="ctr"/>
-            <a:endParaRPr/>
-          </a:p>
-        </p:txBody>
-      </p:sp>
-      <p:sp>
-        <p:nvSpPr>
-          <p:cNvPr id="7" name="Oval 6"/>
-          <p:cNvSpPr/>
-          <p:nvPr/>
-        </p:nvSpPr>
-        <p:spPr>
-          <a:xfrm>
-            <a:off x="9848088" y="612648"/>
-            <a:ext cx="201168" cy="201168"/>
-          </a:xfrm>
-          <a:prstGeom prst="ellipse">
-            <a:avLst/>
-          </a:prstGeom>
-          <a:solidFill>
-            <a:srgbClr val="E0A458">
-              <a:alpha val="16000"/>
-            </a:srgbClr>
-          </a:solidFill>
-          <a:ln>
-            <a:noFill/>
-          </a:ln>
-          <a:effectLst/>
-        </p:spPr>
-        <p:style>
-          <a:lnRef idx="1">
-            <a:schemeClr val="accent1"/>
-          </a:lnRef>
-          <a:fillRef idx="3">
-            <a:schemeClr val="accent1"/>
-          </a:fillRef>
-          <a:effectRef idx="2">
-            <a:schemeClr val="accent1"/>
-          </a:effectRef>
-          <a:fontRef idx="minor">
-            <a:schemeClr val="lt1"/>
-          </a:fontRef>
-        </p:style>
-        <p:txBody>
-          <a:bodyPr rtlCol="0" anchor="ctr"/>
-          <a:lstStyle/>
-          <a:p>
-            <a:pPr algn="ctr"/>
-            <a:endParaRPr/>
-          </a:p>
-        </p:txBody>
-      </p:sp>
-      <p:sp>
-        <p:nvSpPr>
-          <p:cNvPr id="8" name="TextBox 7"/>
-          <p:cNvSpPr txBox="1"/>
-          <p:nvPr/>
-        </p:nvSpPr>
-        <p:spPr>
-          <a:xfrm>
-            <a:off x="777240" y="548640"/>
-            <a:ext cx="10058400" cy="579646"/>
+            <a:off x="411480" y="6473952"/>
+            <a:ext cx="8229600" cy="292608"/>
           </a:xfrm>
           <a:prstGeom prst="rect">
             <a:avLst/>
@@ -40887,27 +40919,130 @@
           <a:lstStyle/>
           <a:p>
             <a:r>
+              <a:rPr sz="950" b="0" i="1">
+                <a:solidFill>
+                  <a:srgbClr val="6B6860"/>
+                </a:solidFill>
+                <a:latin typeface="Calibri"/>
+              </a:rPr>
+              <a:t>AI4FQC · Project 07: GRANA Captioning</a:t>
+            </a:r>
+          </a:p>
+        </p:txBody>
+      </p:sp>
+      <p:sp>
+        <p:nvSpPr>
+          <p:cNvPr id="4" name="TextBox 3"/>
+          <p:cNvSpPr txBox="1"/>
+          <p:nvPr/>
+        </p:nvSpPr>
+        <p:spPr>
+          <a:xfrm>
+            <a:off x="10911535" y="6473952"/>
+            <a:ext cx="868680" cy="292608"/>
+          </a:xfrm>
+          <a:prstGeom prst="rect">
+            <a:avLst/>
+          </a:prstGeom>
+          <a:noFill/>
+        </p:spPr>
+        <p:txBody>
+          <a:bodyPr wrap="square" lIns="25400" tIns="12700" rIns="25400" bIns="12700" anchor="t">
+            <a:spAutoFit/>
+          </a:bodyPr>
+          <a:lstStyle/>
+          <a:p>
+            <a:pPr algn="r"/>
+            <a:r>
+              <a:rPr sz="1100" b="1" i="0">
+                <a:solidFill>
+                  <a:srgbClr val="E0A458"/>
+                </a:solidFill>
+                <a:latin typeface="Calibri"/>
+              </a:rPr>
+              <a:t>26</a:t>
+            </a:r>
+          </a:p>
+        </p:txBody>
+      </p:sp>
+      <p:sp>
+        <p:nvSpPr>
+          <p:cNvPr id="5" name="TextBox 4"/>
+          <p:cNvSpPr txBox="1"/>
+          <p:nvPr/>
+        </p:nvSpPr>
+        <p:spPr>
+          <a:xfrm>
+            <a:off x="640080" y="502920"/>
+            <a:ext cx="10881360" cy="365760"/>
+          </a:xfrm>
+          <a:prstGeom prst="rect">
+            <a:avLst/>
+          </a:prstGeom>
+          <a:noFill/>
+        </p:spPr>
+        <p:txBody>
+          <a:bodyPr wrap="square" lIns="25400" tIns="12700" rIns="25400" bIns="12700" anchor="t">
+            <a:spAutoFit/>
+          </a:bodyPr>
+          <a:lstStyle/>
+          <a:p>
+            <a:r>
+              <a:rPr sz="1250" b="1" i="0" spc="220">
+                <a:solidFill>
+                  <a:srgbClr val="C88836"/>
+                </a:solidFill>
+                <a:latin typeface="Calibri"/>
+              </a:rPr>
+              <a:t>THE INTERPRETATION</a:t>
+            </a:r>
+          </a:p>
+        </p:txBody>
+      </p:sp>
+      <p:sp>
+        <p:nvSpPr>
+          <p:cNvPr id="6" name="TextBox 5"/>
+          <p:cNvSpPr txBox="1"/>
+          <p:nvPr/>
+        </p:nvSpPr>
+        <p:spPr>
+          <a:xfrm>
+            <a:off x="640080" y="886968"/>
+            <a:ext cx="10881360" cy="579646"/>
+          </a:xfrm>
+          <a:prstGeom prst="rect">
+            <a:avLst/>
+          </a:prstGeom>
+          <a:noFill/>
+        </p:spPr>
+        <p:txBody>
+          <a:bodyPr wrap="square" lIns="25400" tIns="12700" rIns="25400" bIns="12700" anchor="t">
+            <a:spAutoFit/>
+          </a:bodyPr>
+          <a:lstStyle/>
+          <a:p>
+            <a:r>
               <a:rPr sz="3600" b="1" i="0" dirty="0">
                 <a:solidFill>
-                  <a:srgbClr val="F7F1E3"/>
+                  <a:srgbClr val="1B334A"/>
                 </a:solidFill>
                 <a:latin typeface="Georgia"/>
               </a:rPr>
-              <a:t>Conclusions &amp; future work</a:t>
-            </a:r>
-          </a:p>
-        </p:txBody>
-      </p:sp>
-      <p:sp>
-        <p:nvSpPr>
-          <p:cNvPr id="9" name="Rectangle 8"/>
+              <a:t>The encoder matters, not the decoder</a:t>
+            </a:r>
+          </a:p>
+        </p:txBody>
+      </p:sp>
+      <p:sp>
+        <p:nvSpPr>
+          <p:cNvPr id="7" name="Rectangle 6"/>
           <p:cNvSpPr/>
           <p:nvPr/>
         </p:nvSpPr>
         <p:spPr>
           <a:xfrm>
-            <a:off x="804672" y="1371600"/>
-            <a:ext cx="1828800" cy="50800"/>
+            <a:off x="658368" y="1709928"/>
+            <a:ext cx="1371600" cy="38100"/>
           </a:xfrm>
           <a:prstGeom prst="rect">
             <a:avLst/>
@@ -40945,20 +41080,20 @@
       </p:sp>
       <p:sp>
         <p:nvSpPr>
-          <p:cNvPr id="10" name="Rounded Rectangle 9"/>
+          <p:cNvPr id="8" name="Rounded Rectangle 7"/>
           <p:cNvSpPr/>
           <p:nvPr/>
         </p:nvSpPr>
         <p:spPr>
           <a:xfrm>
-            <a:off x="640080" y="1691640"/>
-            <a:ext cx="3520440" cy="3108960"/>
+            <a:off x="640080" y="2011680"/>
+            <a:ext cx="5394960" cy="3200400"/>
           </a:xfrm>
           <a:prstGeom prst="roundRect">
             <a:avLst/>
           </a:prstGeom>
           <a:solidFill>
-            <a:srgbClr val="244059"/>
+            <a:srgbClr val="FBF7EE"/>
           </a:solidFill>
           <a:ln>
             <a:noFill/>
@@ -40990,20 +41125,20 @@
       </p:sp>
       <p:sp>
         <p:nvSpPr>
-          <p:cNvPr id="11" name="Rectangle 10"/>
+          <p:cNvPr id="9" name="Rectangle 8"/>
           <p:cNvSpPr/>
           <p:nvPr/>
         </p:nvSpPr>
         <p:spPr>
           <a:xfrm>
-            <a:off x="640080" y="1691640"/>
-            <a:ext cx="3520440" cy="91440"/>
+            <a:off x="640080" y="2011680"/>
+            <a:ext cx="82296" cy="3200400"/>
           </a:xfrm>
           <a:prstGeom prst="rect">
             <a:avLst/>
           </a:prstGeom>
           <a:solidFill>
-            <a:srgbClr val="5B8C5A"/>
+            <a:srgbClr val="3D7068"/>
           </a:solidFill>
           <a:ln>
             <a:noFill/>
@@ -41035,14 +41170,14 @@
       </p:sp>
       <p:sp>
         <p:nvSpPr>
-          <p:cNvPr id="12" name="TextBox 11"/>
+          <p:cNvPr id="10" name="TextBox 9"/>
           <p:cNvSpPr txBox="1"/>
           <p:nvPr/>
         </p:nvSpPr>
         <p:spPr>
           <a:xfrm>
-            <a:off x="868680" y="1828800"/>
-            <a:ext cx="3108960" cy="2103140"/>
+            <a:off x="896112" y="2157984"/>
+            <a:ext cx="4974336" cy="1995418"/>
           </a:xfrm>
           <a:prstGeom prst="rect">
             <a:avLst/>
@@ -41058,50 +41193,59 @@
             <a:r>
               <a:rPr sz="2400" b="1" i="0" dirty="0">
                 <a:solidFill>
-                  <a:srgbClr val="5B8C5A"/>
+                  <a:srgbClr val="1B334A"/>
                 </a:solidFill>
                 <a:latin typeface="Georgia"/>
               </a:rPr>
-              <a:t>Scientific result</a:t>
-            </a:r>
-          </a:p>
-          <a:p>
-            <a:pPr>
-              <a:spcBef>
-                <a:spcPts val="600"/>
-              </a:spcBef>
-            </a:pPr>
-            <a:r>
-              <a:rPr sz="1600" b="1" i="0" dirty="0">
-                <a:solidFill>
-                  <a:srgbClr val="5B8C5A"/>
-                </a:solidFill>
-                <a:latin typeface="Calibri"/>
-              </a:rPr>
-              <a:t>● </a:t>
-            </a:r>
-            <a:r>
-              <a:rPr sz="1600" b="1" i="0" dirty="0">
-                <a:solidFill>
-                  <a:srgbClr val="F7F1E3"/>
-                </a:solidFill>
-                <a:latin typeface="Calibri"/>
-              </a:rPr>
-              <a:t>The encoder matters:</a:t>
-            </a:r>
+              <a:t>m1 vs m3</a:t>
+            </a:r>
+            <a:r>
+              <a:rPr lang="it-IT" sz="2400" b="1" i="0" dirty="0">
+                <a:solidFill>
+                  <a:srgbClr val="1B334A"/>
+                </a:solidFill>
+                <a:latin typeface="Georgia"/>
+              </a:rPr>
+              <a:t>:</a:t>
+            </a:r>
+            <a:r>
+              <a:rPr sz="2400" b="1" i="0" dirty="0">
+                <a:solidFill>
+                  <a:srgbClr val="1B334A"/>
+                </a:solidFill>
+                <a:latin typeface="Georgia"/>
+              </a:rPr>
+              <a:t> isolates the encoder</a:t>
+            </a:r>
+            <a:endParaRPr lang="it-IT" sz="2400" b="1" i="0" dirty="0">
+              <a:solidFill>
+                <a:srgbClr val="1B334A"/>
+              </a:solidFill>
+              <a:latin typeface="Georgia"/>
+            </a:endParaRPr>
+          </a:p>
+          <a:p>
+            <a:endParaRPr sz="2400" b="1" i="0" dirty="0">
+              <a:solidFill>
+                <a:srgbClr val="1B334A"/>
+              </a:solidFill>
+              <a:latin typeface="Georgia"/>
+            </a:endParaRPr>
+          </a:p>
+          <a:p>
             <a:r>
               <a:rPr sz="1600" b="0" i="0" dirty="0">
                 <a:solidFill>
-                  <a:srgbClr val="D9D2C2"/>
-                </a:solidFill>
-                <a:latin typeface="Calibri"/>
-              </a:rPr>
-              <a:t> </a:t>
+                  <a:srgbClr val="2B2A26"/>
+                </a:solidFill>
+                <a:latin typeface="Calibri"/>
+              </a:rPr>
+              <a:t>m1 (</a:t>
             </a:r>
             <a:r>
               <a:rPr sz="1600" b="0" i="0" dirty="0" err="1">
                 <a:solidFill>
-                  <a:srgbClr val="D9D2C2"/>
+                  <a:srgbClr val="2B2A26"/>
                 </a:solidFill>
                 <a:latin typeface="Calibri"/>
               </a:rPr>
@@ -41110,16 +41254,17 @@
             <a:r>
               <a:rPr sz="1600" b="0" i="0" dirty="0">
                 <a:solidFill>
-                  <a:srgbClr val="D9D2C2"/>
-                </a:solidFill>
-                <a:latin typeface="Calibri"/>
-              </a:rPr>
-              <a:t> ignores the image, </a:t>
+                  <a:srgbClr val="2B2A26"/>
+                </a:solidFill>
+                <a:latin typeface="Calibri"/>
+              </a:rPr>
+              <a:t>) NEVER conditions on the image.
+m3 (</a:t>
             </a:r>
             <a:r>
               <a:rPr sz="1600" b="0" i="0" dirty="0" err="1">
                 <a:solidFill>
-                  <a:srgbClr val="D9D2C2"/>
+                  <a:srgbClr val="2B2A26"/>
                 </a:solidFill>
                 <a:latin typeface="Calibri"/>
               </a:rPr>
@@ -41128,96 +41273,67 @@
             <a:r>
               <a:rPr sz="1600" b="0" i="0" dirty="0">
                 <a:solidFill>
-                  <a:srgbClr val="D9D2C2"/>
-                </a:solidFill>
-                <a:latin typeface="Calibri"/>
-              </a:rPr>
-              <a:t> uses it on 4/7</a:t>
-            </a:r>
-          </a:p>
-          <a:p>
-            <a:pPr>
-              <a:spcBef>
-                <a:spcPts val="600"/>
-              </a:spcBef>
-            </a:pPr>
-            <a:r>
-              <a:rPr sz="1600" b="1" i="0" dirty="0">
-                <a:solidFill>
-                  <a:srgbClr val="5B8C5A"/>
-                </a:solidFill>
-                <a:latin typeface="Calibri"/>
-              </a:rPr>
-              <a:t>● </a:t>
-            </a:r>
-            <a:r>
-              <a:rPr sz="1600" b="0" i="0" dirty="0">
-                <a:solidFill>
-                  <a:srgbClr val="D9D2C2"/>
-                </a:solidFill>
-                <a:latin typeface="Calibri"/>
-              </a:rPr>
-              <a:t>Independent of decoder, data scale, hyperparameters</a:t>
-            </a:r>
-          </a:p>
-          <a:p>
-            <a:pPr>
-              <a:spcBef>
-                <a:spcPts val="600"/>
-              </a:spcBef>
-            </a:pPr>
-            <a:r>
-              <a:rPr sz="1600" b="1" i="0" dirty="0">
-                <a:solidFill>
-                  <a:srgbClr val="5B8C5A"/>
-                </a:solidFill>
-                <a:latin typeface="Calibri"/>
-              </a:rPr>
-              <a:t>● </a:t>
-            </a:r>
-            <a:r>
-              <a:rPr sz="1600" b="0" i="0" dirty="0">
-                <a:solidFill>
-                  <a:srgbClr val="D9D2C2"/>
-                </a:solidFill>
-                <a:latin typeface="Calibri"/>
-              </a:rPr>
-              <a:t>Confirmed by shuffle test + </a:t>
-            </a:r>
-            <a:r>
-              <a:rPr sz="1600" b="0" i="0" dirty="0" err="1">
-                <a:solidFill>
-                  <a:srgbClr val="D9D2C2"/>
-                </a:solidFill>
-                <a:latin typeface="Calibri"/>
-              </a:rPr>
-              <a:t>CLIPScore</a:t>
-            </a:r>
-            <a:endParaRPr sz="1600" b="0" i="0" dirty="0">
+                  <a:srgbClr val="2B2A26"/>
+                </a:solidFill>
+                <a:latin typeface="Calibri"/>
+              </a:rPr>
+              <a:t>) does on most attributes.</a:t>
+            </a:r>
+            <a:endParaRPr lang="it-IT" sz="1600" b="0" i="0" dirty="0">
               <a:solidFill>
-                <a:srgbClr val="D9D2C2"/>
+                <a:srgbClr val="2B2A26"/>
               </a:solidFill>
               <a:latin typeface="Calibri"/>
             </a:endParaRPr>
           </a:p>
-        </p:txBody>
-      </p:sp>
-      <p:sp>
-        <p:nvSpPr>
-          <p:cNvPr id="13" name="Rounded Rectangle 12"/>
+          <a:p>
+            <a:r>
+              <a:rPr sz="1600" b="0" i="0" dirty="0">
+                <a:solidFill>
+                  <a:srgbClr val="2B2A26"/>
+                </a:solidFill>
+                <a:latin typeface="Calibri"/>
+              </a:rPr>
+              <a:t>
+→ A frozen ResNet-50's features aren't enough at this data scale; a frozen </a:t>
+            </a:r>
+            <a:r>
+              <a:rPr sz="1600" b="0" i="0" dirty="0" err="1">
+                <a:solidFill>
+                  <a:srgbClr val="2B2A26"/>
+                </a:solidFill>
+                <a:latin typeface="Calibri"/>
+              </a:rPr>
+              <a:t>ViT</a:t>
+            </a:r>
+            <a:r>
+              <a:rPr sz="1600" b="0" i="0" dirty="0">
+                <a:solidFill>
+                  <a:srgbClr val="2B2A26"/>
+                </a:solidFill>
+                <a:latin typeface="Calibri"/>
+              </a:rPr>
+              <a:t>-B/16's are.</a:t>
+            </a:r>
+          </a:p>
+        </p:txBody>
+      </p:sp>
+      <p:sp>
+        <p:nvSpPr>
+          <p:cNvPr id="11" name="Rounded Rectangle 10"/>
           <p:cNvSpPr/>
           <p:nvPr/>
         </p:nvSpPr>
         <p:spPr>
           <a:xfrm>
-            <a:off x="4334256" y="1691640"/>
-            <a:ext cx="3520440" cy="3108960"/>
+            <a:off x="6172200" y="2011680"/>
+            <a:ext cx="5394960" cy="3200400"/>
           </a:xfrm>
           <a:prstGeom prst="roundRect">
             <a:avLst/>
           </a:prstGeom>
           <a:solidFill>
-            <a:srgbClr val="244059"/>
+            <a:srgbClr val="FBF7EE"/>
           </a:solidFill>
           <a:ln>
             <a:noFill/>
@@ -41249,20 +41365,20 @@
       </p:sp>
       <p:sp>
         <p:nvSpPr>
-          <p:cNvPr id="14" name="Rectangle 13"/>
+          <p:cNvPr id="12" name="Rectangle 11"/>
           <p:cNvSpPr/>
           <p:nvPr/>
         </p:nvSpPr>
         <p:spPr>
           <a:xfrm>
-            <a:off x="4334256" y="1691640"/>
-            <a:ext cx="3520440" cy="91440"/>
+            <a:off x="6172200" y="2011680"/>
+            <a:ext cx="82296" cy="3200400"/>
           </a:xfrm>
           <a:prstGeom prst="rect">
             <a:avLst/>
           </a:prstGeom>
           <a:solidFill>
-            <a:srgbClr val="E0A458"/>
+            <a:srgbClr val="8A5082"/>
           </a:solidFill>
           <a:ln>
             <a:noFill/>
@@ -41294,14 +41410,14 @@
       </p:sp>
       <p:sp>
         <p:nvSpPr>
-          <p:cNvPr id="15" name="TextBox 14"/>
+          <p:cNvPr id="13" name="TextBox 12"/>
           <p:cNvSpPr txBox="1"/>
           <p:nvPr/>
         </p:nvSpPr>
         <p:spPr>
           <a:xfrm>
-            <a:off x="4562856" y="1828800"/>
-            <a:ext cx="3108960" cy="2103140"/>
+            <a:off x="6428232" y="2157984"/>
+            <a:ext cx="4974336" cy="1841530"/>
           </a:xfrm>
           <a:prstGeom prst="rect">
             <a:avLst/>
@@ -41317,151 +41433,75 @@
             <a:r>
               <a:rPr sz="2400" b="1" i="0" dirty="0">
                 <a:solidFill>
-                  <a:srgbClr val="E0A458"/>
+                  <a:srgbClr val="1B334A"/>
                 </a:solidFill>
                 <a:latin typeface="Georgia"/>
               </a:rPr>
-              <a:t>Practical result</a:t>
-            </a:r>
-          </a:p>
-          <a:p>
-            <a:pPr>
-              <a:spcBef>
-                <a:spcPts val="600"/>
-              </a:spcBef>
-            </a:pPr>
-            <a:r>
-              <a:rPr sz="1600" b="1" i="0" dirty="0">
-                <a:solidFill>
-                  <a:srgbClr val="E0A458"/>
-                </a:solidFill>
-                <a:latin typeface="Calibri"/>
-              </a:rPr>
-              <a:t>● </a:t>
-            </a:r>
-            <a:r>
-              <a:rPr sz="1600" b="1" i="0" dirty="0">
-                <a:solidFill>
-                  <a:srgbClr val="F7F1E3"/>
-                </a:solidFill>
-                <a:latin typeface="Calibri"/>
-              </a:rPr>
-              <a:t>4/7</a:t>
-            </a:r>
-            <a:r>
-              <a:rPr sz="1600" b="0" i="0" dirty="0">
-                <a:solidFill>
-                  <a:srgbClr val="D9D2C2"/>
-                </a:solidFill>
-                <a:latin typeface="Calibri"/>
-              </a:rPr>
-              <a:t> attributes beat the baseline (max Structure +0.128)</a:t>
-            </a:r>
-          </a:p>
-          <a:p>
-            <a:pPr>
-              <a:spcBef>
-                <a:spcPts val="600"/>
-              </a:spcBef>
-            </a:pPr>
-            <a:r>
-              <a:rPr sz="1600" b="1" i="0" dirty="0">
-                <a:solidFill>
-                  <a:srgbClr val="E0A458"/>
-                </a:solidFill>
-                <a:latin typeface="Calibri"/>
-              </a:rPr>
-              <a:t>● </a:t>
-            </a:r>
-            <a:r>
-              <a:rPr sz="1600" b="1" i="0" dirty="0">
-                <a:solidFill>
-                  <a:srgbClr val="F7F1E3"/>
-                </a:solidFill>
-                <a:latin typeface="Calibri"/>
-              </a:rPr>
-              <a:t>m6 (</a:t>
-            </a:r>
-            <a:r>
-              <a:rPr sz="1600" b="1" i="0" dirty="0" err="1">
-                <a:solidFill>
-                  <a:srgbClr val="F7F1E3"/>
-                </a:solidFill>
-                <a:latin typeface="Calibri"/>
-              </a:rPr>
-              <a:t>ViT+GePpeTto</a:t>
-            </a:r>
-            <a:r>
-              <a:rPr sz="1600" b="1" i="0" dirty="0">
-                <a:solidFill>
-                  <a:srgbClr val="F7F1E3"/>
-                </a:solidFill>
-                <a:latin typeface="Calibri"/>
-              </a:rPr>
-              <a:t>)</a:t>
-            </a:r>
-            <a:r>
-              <a:rPr sz="1600" b="0" i="0" dirty="0">
-                <a:solidFill>
-                  <a:srgbClr val="D9D2C2"/>
-                </a:solidFill>
-                <a:latin typeface="Calibri"/>
-              </a:rPr>
-              <a:t> wins narrowly almost everywhere</a:t>
-            </a:r>
-          </a:p>
-          <a:p>
-            <a:pPr>
-              <a:spcBef>
-                <a:spcPts val="600"/>
-              </a:spcBef>
-            </a:pPr>
-            <a:r>
-              <a:rPr sz="1600" b="1" i="0" dirty="0">
-                <a:solidFill>
-                  <a:srgbClr val="E0A458"/>
-                </a:solidFill>
-                <a:latin typeface="Calibri"/>
-              </a:rPr>
-              <a:t>● </a:t>
-            </a:r>
-            <a:r>
-              <a:rPr sz="1600" b="1" i="0" dirty="0">
-                <a:solidFill>
-                  <a:srgbClr val="F7F1E3"/>
-                </a:solidFill>
-                <a:latin typeface="Calibri"/>
-              </a:rPr>
-              <a:t>$5.60</a:t>
-            </a:r>
-            <a:r>
-              <a:rPr sz="1600" b="0" i="0" dirty="0">
-                <a:solidFill>
-                  <a:srgbClr val="D9D2C2"/>
-                </a:solidFill>
-                <a:latin typeface="Calibri"/>
-              </a:rPr>
-              <a:t> data cost · 38,437 pairs delivered</a:t>
-            </a:r>
-          </a:p>
-        </p:txBody>
-      </p:sp>
-      <p:sp>
-        <p:nvSpPr>
-          <p:cNvPr id="16" name="Rounded Rectangle 15"/>
+              <a:t>m3 vs m6</a:t>
+            </a:r>
+            <a:r>
+              <a:rPr lang="it-IT" sz="2400" b="1" i="0" dirty="0">
+                <a:solidFill>
+                  <a:srgbClr val="1B334A"/>
+                </a:solidFill>
+                <a:latin typeface="Georgia"/>
+              </a:rPr>
+              <a:t>:</a:t>
+            </a:r>
+            <a:r>
+              <a:rPr sz="2400" b="1" i="0" dirty="0">
+                <a:solidFill>
+                  <a:srgbClr val="1B334A"/>
+                </a:solidFill>
+                <a:latin typeface="Georgia"/>
+              </a:rPr>
+              <a:t> isolates the decoder</a:t>
+            </a:r>
+            <a:endParaRPr lang="it-IT" sz="2400" b="1" i="0" dirty="0">
+              <a:solidFill>
+                <a:srgbClr val="1B334A"/>
+              </a:solidFill>
+              <a:latin typeface="Georgia"/>
+            </a:endParaRPr>
+          </a:p>
+          <a:p>
+            <a:endParaRPr sz="2400" b="1" i="0" dirty="0">
+              <a:solidFill>
+                <a:srgbClr val="1B334A"/>
+              </a:solidFill>
+              <a:latin typeface="Georgia"/>
+            </a:endParaRPr>
+          </a:p>
+          <a:p>
+            <a:r>
+              <a:rPr sz="1400" b="0" i="0" dirty="0">
+                <a:solidFill>
+                  <a:srgbClr val="2B2A26"/>
+                </a:solidFill>
+                <a:latin typeface="Calibri"/>
+              </a:rPr>
+              <a:t>They produce different outputs (never the same caption), but have the SAME image-conditioning profile: the same attributes succeed, the same fail.
+→ The decoder changes the style, not whether the image is used.</a:t>
+            </a:r>
+          </a:p>
+        </p:txBody>
+      </p:sp>
+      <p:sp>
+        <p:nvSpPr>
+          <p:cNvPr id="14" name="Rounded Rectangle 13"/>
           <p:cNvSpPr/>
           <p:nvPr/>
         </p:nvSpPr>
         <p:spPr>
           <a:xfrm>
-            <a:off x="8028431" y="1691640"/>
-            <a:ext cx="3538728" cy="3108960"/>
+            <a:off x="640080" y="5394960"/>
+            <a:ext cx="10927080" cy="685800"/>
           </a:xfrm>
           <a:prstGeom prst="roundRect">
             <a:avLst/>
           </a:prstGeom>
           <a:solidFill>
-            <a:srgbClr val="244059"/>
+            <a:srgbClr val="1B334A"/>
           </a:solidFill>
           <a:ln>
             <a:noFill/>
@@ -41493,59 +41533,14 @@
       </p:sp>
       <p:sp>
         <p:nvSpPr>
-          <p:cNvPr id="17" name="Rectangle 16"/>
-          <p:cNvSpPr/>
+          <p:cNvPr id="15" name="TextBox 14"/>
+          <p:cNvSpPr txBox="1"/>
           <p:nvPr/>
         </p:nvSpPr>
         <p:spPr>
           <a:xfrm>
-            <a:off x="8028431" y="1691640"/>
-            <a:ext cx="3538728" cy="91440"/>
-          </a:xfrm>
-          <a:prstGeom prst="rect">
-            <a:avLst/>
-          </a:prstGeom>
-          <a:solidFill>
-            <a:srgbClr val="2C5F8A"/>
-          </a:solidFill>
-          <a:ln>
-            <a:noFill/>
-          </a:ln>
-          <a:effectLst/>
-        </p:spPr>
-        <p:style>
-          <a:lnRef idx="1">
-            <a:schemeClr val="accent1"/>
-          </a:lnRef>
-          <a:fillRef idx="3">
-            <a:schemeClr val="accent1"/>
-          </a:fillRef>
-          <a:effectRef idx="2">
-            <a:schemeClr val="accent1"/>
-          </a:effectRef>
-          <a:fontRef idx="minor">
-            <a:schemeClr val="lt1"/>
-          </a:fontRef>
-        </p:style>
-        <p:txBody>
-          <a:bodyPr rtlCol="0" anchor="ctr"/>
-          <a:lstStyle/>
-          <a:p>
-            <a:pPr algn="ctr"/>
-            <a:endParaRPr/>
-          </a:p>
-        </p:txBody>
-      </p:sp>
-      <p:sp>
-        <p:nvSpPr>
-          <p:cNvPr id="18" name="TextBox 17"/>
-          <p:cNvSpPr txBox="1"/>
-          <p:nvPr/>
-        </p:nvSpPr>
-        <p:spPr>
-          <a:xfrm>
-            <a:off x="8257031" y="1828800"/>
-            <a:ext cx="3127248" cy="2103140"/>
+            <a:off x="914400" y="5448038"/>
+            <a:ext cx="10515600" cy="579646"/>
           </a:xfrm>
           <a:prstGeom prst="rect">
             <a:avLst/>
@@ -41553,250 +41548,19 @@
           <a:noFill/>
         </p:spPr>
         <p:txBody>
-          <a:bodyPr wrap="square" lIns="25400" tIns="12700" rIns="25400" bIns="12700" anchor="t">
+          <a:bodyPr wrap="square" lIns="25400" tIns="12700" rIns="25400" bIns="12700" anchor="ctr">
             <a:spAutoFit/>
           </a:bodyPr>
           <a:lstStyle/>
           <a:p>
             <a:r>
-              <a:rPr sz="2400" b="1" i="0" dirty="0">
-                <a:solidFill>
-                  <a:srgbClr val="2C5F8A"/>
-                </a:solidFill>
-                <a:latin typeface="Georgia"/>
-              </a:rPr>
-              <a:t>Future work</a:t>
-            </a:r>
-          </a:p>
-          <a:p>
-            <a:pPr>
-              <a:spcBef>
-                <a:spcPts val="600"/>
-              </a:spcBef>
-            </a:pPr>
-            <a:r>
-              <a:rPr sz="1600" b="1" i="0" dirty="0">
-                <a:solidFill>
-                  <a:srgbClr val="2C5F8A"/>
-                </a:solidFill>
-                <a:latin typeface="Calibri"/>
-              </a:rPr>
-              <a:t>● </a:t>
-            </a:r>
-            <a:r>
-              <a:rPr sz="1600" b="1" i="0" dirty="0">
-                <a:solidFill>
-                  <a:srgbClr val="F7F1E3"/>
-                </a:solidFill>
-                <a:latin typeface="Calibri"/>
-              </a:rPr>
-              <a:t>Fine-tune the encoder</a:t>
-            </a:r>
-            <a:r>
-              <a:rPr sz="1600" b="0" i="0" dirty="0">
-                <a:solidFill>
-                  <a:srgbClr val="D9D2C2"/>
-                </a:solidFill>
-                <a:latin typeface="Calibri"/>
-              </a:rPr>
-              <a:t> and re-measure </a:t>
-            </a:r>
-            <a:r>
-              <a:rPr sz="1600" b="0" i="0" dirty="0" err="1">
-                <a:solidFill>
-                  <a:srgbClr val="D9D2C2"/>
-                </a:solidFill>
-                <a:latin typeface="Calibri"/>
-              </a:rPr>
-              <a:t>CLIPScore</a:t>
-            </a:r>
-            <a:endParaRPr sz="1600" b="0" i="0" dirty="0">
-              <a:solidFill>
-                <a:srgbClr val="D9D2C2"/>
-              </a:solidFill>
-              <a:latin typeface="Calibri"/>
-            </a:endParaRPr>
-          </a:p>
-          <a:p>
-            <a:pPr>
-              <a:spcBef>
-                <a:spcPts val="600"/>
-              </a:spcBef>
-            </a:pPr>
-            <a:r>
-              <a:rPr sz="1600" b="1" i="0" dirty="0">
-                <a:solidFill>
-                  <a:srgbClr val="2C5F8A"/>
-                </a:solidFill>
-                <a:latin typeface="Calibri"/>
-              </a:rPr>
-              <a:t>● </a:t>
-            </a:r>
-            <a:r>
-              <a:rPr sz="1600" b="0" i="0" dirty="0">
-                <a:solidFill>
-                  <a:srgbClr val="D9D2C2"/>
-                </a:solidFill>
-                <a:latin typeface="Calibri"/>
-              </a:rPr>
-              <a:t>k-NN retrieval baseline as an image-aware «floor»</a:t>
-            </a:r>
-          </a:p>
-          <a:p>
-            <a:pPr>
-              <a:spcBef>
-                <a:spcPts val="600"/>
-              </a:spcBef>
-            </a:pPr>
-            <a:r>
-              <a:rPr sz="1600" b="1" i="0" dirty="0">
-                <a:solidFill>
-                  <a:srgbClr val="2C5F8A"/>
-                </a:solidFill>
-                <a:latin typeface="Calibri"/>
-              </a:rPr>
-              <a:t>● </a:t>
-            </a:r>
-            <a:r>
-              <a:rPr sz="1600" b="0" i="0" dirty="0">
-                <a:solidFill>
-                  <a:srgbClr val="D9D2C2"/>
-                </a:solidFill>
-                <a:latin typeface="Calibri"/>
-              </a:rPr>
-              <a:t>If models pull away from the baseline → image exploited</a:t>
-            </a:r>
-          </a:p>
-        </p:txBody>
-      </p:sp>
-      <p:sp>
-        <p:nvSpPr>
-          <p:cNvPr id="19" name="TextBox 18"/>
-          <p:cNvSpPr txBox="1"/>
-          <p:nvPr/>
-        </p:nvSpPr>
-        <p:spPr>
-          <a:xfrm>
-            <a:off x="640080" y="4983480"/>
-            <a:ext cx="10881360" cy="518091"/>
-          </a:xfrm>
-          <a:prstGeom prst="rect">
-            <a:avLst/>
-          </a:prstGeom>
-          <a:noFill/>
-        </p:spPr>
-        <p:txBody>
-          <a:bodyPr wrap="square" lIns="25400" tIns="12700" rIns="25400" bIns="12700" anchor="t">
-            <a:spAutoFit/>
-          </a:bodyPr>
-          <a:lstStyle/>
-          <a:p>
-            <a:r>
-              <a:rPr sz="1600" b="1" i="0" dirty="0">
+              <a:rPr b="1" i="0" dirty="0">
                 <a:solidFill>
                   <a:srgbClr val="E0A458"/>
                 </a:solidFill>
                 <a:latin typeface="Calibri"/>
               </a:rPr>
-              <a:t>Honest framing:  </a:t>
-            </a:r>
-            <a:r>
-              <a:rPr sz="1600" b="0" i="0" dirty="0">
-                <a:solidFill>
-                  <a:srgbClr val="F7F1E3"/>
-                </a:solidFill>
-                <a:latin typeface="Calibri"/>
-              </a:rPr>
-              <a:t>no model would replace a taster. They learned the vocabulary and a partial image</a:t>
-            </a:r>
-            <a:r>
-              <a:rPr lang="it-IT" sz="1600" b="0" i="0" dirty="0">
-                <a:solidFill>
-                  <a:srgbClr val="F7F1E3"/>
-                </a:solidFill>
-                <a:latin typeface="Calibri"/>
-              </a:rPr>
-              <a:t> </a:t>
-            </a:r>
-            <a:r>
-              <a:rPr sz="1600" b="0" i="0" dirty="0">
-                <a:solidFill>
-                  <a:srgbClr val="F7F1E3"/>
-                </a:solidFill>
-                <a:latin typeface="Calibri"/>
-              </a:rPr>
-              <a:t>→</a:t>
-            </a:r>
-            <a:r>
-              <a:rPr lang="it-IT" sz="1600" b="0" i="0" dirty="0">
-                <a:solidFill>
-                  <a:srgbClr val="F7F1E3"/>
-                </a:solidFill>
-                <a:latin typeface="Calibri"/>
-              </a:rPr>
-              <a:t> </a:t>
-            </a:r>
-            <a:r>
-              <a:rPr sz="1600" b="0" i="0" dirty="0">
-                <a:solidFill>
-                  <a:srgbClr val="F7F1E3"/>
-                </a:solidFill>
-                <a:latin typeface="Calibri"/>
-              </a:rPr>
-              <a:t>descriptor map</a:t>
-            </a:r>
-            <a:r>
-              <a:rPr lang="it-IT" sz="1600" b="0" i="0" dirty="0">
-                <a:solidFill>
-                  <a:srgbClr val="F7F1E3"/>
-                </a:solidFill>
-                <a:latin typeface="Calibri"/>
-              </a:rPr>
-              <a:t>,</a:t>
-            </a:r>
-            <a:r>
-              <a:rPr sz="1600" b="0" i="0" dirty="0">
-                <a:solidFill>
-                  <a:srgbClr val="F7F1E3"/>
-                </a:solidFill>
-                <a:latin typeface="Calibri"/>
-              </a:rPr>
-              <a:t> consistent with the data scale and the noise of multi-taster annotation.</a:t>
-            </a:r>
-          </a:p>
-        </p:txBody>
-      </p:sp>
-      <p:sp>
-        <p:nvSpPr>
-          <p:cNvPr id="20" name="TextBox 19"/>
-          <p:cNvSpPr txBox="1"/>
-          <p:nvPr/>
-        </p:nvSpPr>
-        <p:spPr>
-          <a:xfrm>
-            <a:off x="640080" y="5989320"/>
-            <a:ext cx="10881360" cy="456535"/>
-          </a:xfrm>
-          <a:prstGeom prst="rect">
-            <a:avLst/>
-          </a:prstGeom>
-          <a:noFill/>
-        </p:spPr>
-        <p:txBody>
-          <a:bodyPr wrap="square" lIns="25400" tIns="12700" rIns="25400" bIns="12700" anchor="t">
-            <a:spAutoFit/>
-          </a:bodyPr>
-          <a:lstStyle/>
-          <a:p>
-            <a:pPr algn="ctr"/>
-            <a:r>
-              <a:rPr sz="2800" b="1" i="0">
-                <a:solidFill>
-                  <a:srgbClr val="E0A458"/>
-                </a:solidFill>
-                <a:latin typeface="Georgia"/>
-              </a:rPr>
-              <a:t>Thank you. Questions?</a:t>
+              <a:t>The «binary gate» of image-conditioning is the visual encoder — not the decoder, not data scale, not hyperparameters.</a:t>
             </a:r>
           </a:p>
         </p:txBody>
@@ -41804,7 +41568,7 @@
     </p:spTree>
     <p:extLst>
       <p:ext uri="{BB962C8B-B14F-4D97-AF65-F5344CB8AC3E}">
-        <p14:creationId xmlns:p14="http://schemas.microsoft.com/office/powerpoint/2010/main" val="1968846971"/>
+        <p14:creationId xmlns:p14="http://schemas.microsoft.com/office/powerpoint/2010/main" val="2564263934"/>
       </p:ext>
     </p:extLst>
   </p:cSld>
